--- a/public/downloads/praesentation/M18.pptx
+++ b/public/downloads/praesentation/M18.pptx
@@ -21,6 +21,13 @@
     <p:sldId id="269" r:id="rId20"/>
     <p:sldId id="270" r:id="rId21"/>
     <p:sldId id="271" r:id="rId22"/>
+    <p:sldId id="272" r:id="rId23"/>
+    <p:sldId id="273" r:id="rId24"/>
+    <p:sldId id="274" r:id="rId25"/>
+    <p:sldId id="275" r:id="rId26"/>
+    <p:sldId id="276" r:id="rId27"/>
+    <p:sldId id="277" r:id="rId28"/>
+    <p:sldId id="278" r:id="rId29"/>
   </p:sldIdLst>
   <p:sldSz cx="12188952" cy="6858000" type="screen4x3"/>
   <p:notesSz cx="6858000" cy="9144000"/>
@@ -3162,8 +3169,8 @@
         </p:nvSpPr>
         <p:spPr>
           <a:xfrm>
-            <a:off x="365760" y="365760"/>
-            <a:ext cx="11430000" cy="457200"/>
+            <a:off x="365760" y="320040"/>
+            <a:ext cx="11430000" cy="411480"/>
           </a:xfrm>
           <a:prstGeom prst="rect">
             <a:avLst/>
@@ -3178,13 +3185,13 @@
           <a:p>
             <a:pPr algn="l"/>
             <a:r>
-              <a:rPr sz="1100" b="0">
-                <a:solidFill>
-                  <a:srgbClr val="FFFFFF"/>
+              <a:rPr sz="1100" b="0" i="0">
+                <a:solidFill>
+                  <a:srgbClr val="BBCCEE"/>
                 </a:solidFill>
                 <a:latin typeface="Arial"/>
               </a:rPr>
-              <a:t>M18  ·  K-05 Digital &amp; Daten  ·  Sparringspartner  ·  90 Min.</a:t>
+              <a:t>M18  ·  K-05 Digital &amp; Daten  ·  Zielstufe: Sparringspartner  ·  90 Min.</a:t>
             </a:r>
           </a:p>
         </p:txBody>
@@ -3197,14 +3204,14 @@
         </p:nvSpPr>
         <p:spPr>
           <a:xfrm>
-            <a:off x="365760" y="868680"/>
-            <a:ext cx="7315200" cy="27432"/>
+            <a:off x="365760" y="804672"/>
+            <a:ext cx="8229600" cy="22860"/>
           </a:xfrm>
           <a:prstGeom prst="rect">
             <a:avLst/>
           </a:prstGeom>
           <a:solidFill>
-            <a:srgbClr val="FFFFFF"/>
+            <a:srgbClr val="335CC0"/>
           </a:solidFill>
           <a:ln>
             <a:noFill/>
@@ -3240,8 +3247,8 @@
         </p:nvSpPr>
         <p:spPr>
           <a:xfrm>
-            <a:off x="365760" y="1097280"/>
-            <a:ext cx="11430000" cy="2286000"/>
+            <a:off x="365760" y="1005840"/>
+            <a:ext cx="11430000" cy="2560320"/>
           </a:xfrm>
           <a:prstGeom prst="rect">
             <a:avLst/>
@@ -3256,7 +3263,7 @@
           <a:p>
             <a:pPr algn="l"/>
             <a:r>
-              <a:rPr sz="4000" b="1">
+              <a:rPr sz="4200" b="1" i="0">
                 <a:solidFill>
                   <a:srgbClr val="FFFFFF"/>
                 </a:solidFill>
@@ -3275,8 +3282,8 @@
         </p:nvSpPr>
         <p:spPr>
           <a:xfrm>
-            <a:off x="365760" y="3200400"/>
-            <a:ext cx="9144000" cy="914400"/>
+            <a:off x="365760" y="3383280"/>
+            <a:ext cx="10058400" cy="822960"/>
           </a:xfrm>
           <a:prstGeom prst="rect">
             <a:avLst/>
@@ -3291,7 +3298,7 @@
           <a:p>
             <a:pPr algn="l"/>
             <a:r>
-              <a:rPr sz="2000" b="0">
+              <a:rPr sz="2000" b="0" i="1">
                 <a:solidFill>
                   <a:srgbClr val="CCD6F0"/>
                 </a:solidFill>
@@ -3310,8 +3317,8 @@
         </p:nvSpPr>
         <p:spPr>
           <a:xfrm>
-            <a:off x="365760" y="6217920"/>
-            <a:ext cx="11430000" cy="457200"/>
+            <a:off x="365760" y="6309360"/>
+            <a:ext cx="11430000" cy="365760"/>
           </a:xfrm>
           <a:prstGeom prst="rect">
             <a:avLst/>
@@ -3326,9 +3333,9 @@
           <a:p>
             <a:pPr algn="l"/>
             <a:r>
-              <a:rPr sz="1000" b="0">
-                <a:solidFill>
-                  <a:srgbClr val="99AACC"/>
+              <a:rPr sz="900" b="0" i="0">
+                <a:solidFill>
+                  <a:srgbClr val="889ACC"/>
                 </a:solidFill>
                 <a:latin typeface="Arial"/>
               </a:rPr>
@@ -3351,7 +3358,7 @@
     <p:bg>
       <p:bgPr>
         <a:solidFill>
-          <a:srgbClr val="1A1A1A"/>
+          <a:srgbClr val="FFFFFF"/>
         </a:solidFill>
         <a:effectLst/>
       </p:bgPr>
@@ -3378,7 +3385,7 @@
             <a:avLst/>
           </a:prstGeom>
           <a:solidFill>
-            <a:srgbClr val="E05B00"/>
+            <a:srgbClr val="003DA5"/>
           </a:solidFill>
           <a:ln>
             <a:noFill/>
@@ -3414,8 +3421,8 @@
         </p:nvSpPr>
         <p:spPr>
           <a:xfrm>
-            <a:off x="365760" y="2286000"/>
-            <a:ext cx="11430000" cy="1828800"/>
+            <a:off x="228600" y="182880"/>
+            <a:ext cx="11430000" cy="320040"/>
           </a:xfrm>
           <a:prstGeom prst="rect">
             <a:avLst/>
@@ -3430,17 +3437,462 @@
           <a:p>
             <a:pPr algn="l"/>
             <a:r>
-              <a:rPr sz="3600" b="1">
-                <a:solidFill>
-                  <a:srgbClr val="FFFFFF"/>
+              <a:rPr sz="900" b="0" i="0">
+                <a:solidFill>
+                  <a:srgbClr val="556575"/>
                 </a:solidFill>
                 <a:latin typeface="Arial"/>
               </a:rPr>
-              <a:t>Verbundpartner-Einwilligung: Pflichtcheck vor jeder Übergabe</a:t>
-            </a:r>
-          </a:p>
-        </p:txBody>
-      </p:sp>
+              <a:t>M18 · 4.2 Trigger-Ereignisse: Drei Typen mit unterschiedlicher Logik</a:t>
+            </a:r>
+          </a:p>
+        </p:txBody>
+      </p:sp>
+      <p:sp>
+        <p:nvSpPr>
+          <p:cNvPr id="4" name="TextBox 3"/>
+          <p:cNvSpPr txBox="1"/>
+          <p:nvPr/>
+        </p:nvSpPr>
+        <p:spPr>
+          <a:xfrm>
+            <a:off x="365760" y="274320"/>
+            <a:ext cx="11430000" cy="777240"/>
+          </a:xfrm>
+          <a:prstGeom prst="rect">
+            <a:avLst/>
+          </a:prstGeom>
+          <a:noFill/>
+        </p:spPr>
+        <p:txBody>
+          <a:bodyPr wrap="square">
+            <a:spAutoFit/>
+          </a:bodyPr>
+          <a:lstStyle/>
+          <a:p>
+            <a:pPr algn="l"/>
+            <a:r>
+              <a:rPr sz="2200" b="1" i="0">
+                <a:solidFill>
+                  <a:srgbClr val="003DA5"/>
+                </a:solidFill>
+                <a:latin typeface="Arial"/>
+              </a:rPr>
+              <a:t>Typ 2: Ratingbasierte Trigger (aus Kreditakte / Frühwarnsystem)</a:t>
+            </a:r>
+          </a:p>
+        </p:txBody>
+      </p:sp>
+      <p:sp>
+        <p:nvSpPr>
+          <p:cNvPr id="5" name="Rectangle 4"/>
+          <p:cNvSpPr/>
+          <p:nvPr/>
+        </p:nvSpPr>
+        <p:spPr>
+          <a:xfrm>
+            <a:off x="365760" y="1005840"/>
+            <a:ext cx="11430000" cy="27432"/>
+          </a:xfrm>
+          <a:prstGeom prst="rect">
+            <a:avLst/>
+          </a:prstGeom>
+          <a:solidFill>
+            <a:srgbClr val="D1D5DB"/>
+          </a:solidFill>
+          <a:ln>
+            <a:noFill/>
+          </a:ln>
+        </p:spPr>
+        <p:style>
+          <a:lnRef idx="1">
+            <a:schemeClr val="accent1"/>
+          </a:lnRef>
+          <a:fillRef idx="3">
+            <a:schemeClr val="accent1"/>
+          </a:fillRef>
+          <a:effectRef idx="2">
+            <a:schemeClr val="accent1"/>
+          </a:effectRef>
+          <a:fontRef idx="minor">
+            <a:schemeClr val="lt1"/>
+          </a:fontRef>
+        </p:style>
+        <p:txBody>
+          <a:bodyPr rtlCol="0" anchor="ctr"/>
+          <a:lstStyle/>
+          <a:p>
+            <a:pPr algn="ctr"/>
+          </a:p>
+        </p:txBody>
+      </p:sp>
+      <p:graphicFrame>
+        <p:nvGraphicFramePr>
+          <p:cNvPr id="6" name="Table 5"/>
+          <p:cNvGraphicFramePr>
+            <a:graphicFrameLocks noGrp="1"/>
+          </p:cNvGraphicFramePr>
+          <p:nvPr/>
+        </p:nvGraphicFramePr>
+        <p:xfrm>
+          <a:off x="365760" y="1143000"/>
+          <a:ext cx="11430000" cy="2377440"/>
+        </p:xfrm>
+        <a:graphic>
+          <a:graphicData uri="http://schemas.openxmlformats.org/drawingml/2006/table">
+            <a:tbl>
+              <a:tblPr firstRow="1" bandRow="1">
+                <a:tableStyleId>{5C22544A-7EE6-4342-B048-85BDC9FD1C3A}</a:tableStyleId>
+              </a:tblPr>
+              <a:tblGrid>
+                <a:gridCol w="3810000"/>
+                <a:gridCol w="3810000"/>
+                <a:gridCol w="3810000"/>
+              </a:tblGrid>
+              <a:tr h="475488">
+                <a:tc>
+                  <a:txBody>
+                    <a:bodyPr wrap="square"/>
+                    <a:lstStyle/>
+                    <a:p>
+                      <a:r>
+                        <a:rPr sz="1100" b="1">
+                          <a:solidFill>
+                            <a:srgbClr val="FFFFFF"/>
+                          </a:solidFill>
+                          <a:latin typeface="Arial"/>
+                        </a:rPr>
+                        <a:t>Signal</a:t>
+                      </a:r>
+                    </a:p>
+                  </a:txBody>
+                  <a:tcPr>
+                    <a:solidFill>
+                      <a:srgbClr val="003DA5"/>
+                    </a:solidFill>
+                  </a:tcPr>
+                </a:tc>
+                <a:tc>
+                  <a:txBody>
+                    <a:bodyPr wrap="square"/>
+                    <a:lstStyle/>
+                    <a:p>
+                      <a:r>
+                        <a:rPr sz="1100" b="1">
+                          <a:solidFill>
+                            <a:srgbClr val="FFFFFF"/>
+                          </a:solidFill>
+                          <a:latin typeface="Arial"/>
+                        </a:rPr>
+                        <a:t>Möglicher Bedarf</a:t>
+                      </a:r>
+                    </a:p>
+                  </a:txBody>
+                  <a:tcPr>
+                    <a:solidFill>
+                      <a:srgbClr val="003DA5"/>
+                    </a:solidFill>
+                  </a:tcPr>
+                </a:tc>
+                <a:tc>
+                  <a:txBody>
+                    <a:bodyPr wrap="square"/>
+                    <a:lstStyle/>
+                    <a:p>
+                      <a:r>
+                        <a:rPr sz="1100" b="1">
+                          <a:solidFill>
+                            <a:srgbClr val="FFFFFF"/>
+                          </a:solidFill>
+                          <a:latin typeface="Arial"/>
+                        </a:rPr>
+                        <a:t>Vorlaufzeit</a:t>
+                      </a:r>
+                    </a:p>
+                  </a:txBody>
+                  <a:tcPr>
+                    <a:solidFill>
+                      <a:srgbClr val="003DA5"/>
+                    </a:solidFill>
+                  </a:tcPr>
+                </a:tc>
+              </a:tr>
+              <a:tr h="475488">
+                <a:tc>
+                  <a:txBody>
+                    <a:bodyPr wrap="square"/>
+                    <a:lstStyle/>
+                    <a:p>
+                      <a:r>
+                        <a:rPr sz="1100" b="0">
+                          <a:solidFill>
+                            <a:srgbClr val="1A1A1A"/>
+                          </a:solidFill>
+                          <a:latin typeface="Arial"/>
+                        </a:rPr>
+                        <a:t>Ratingverschlechterung um ≥ 1 Stufe</a:t>
+                      </a:r>
+                    </a:p>
+                  </a:txBody>
+                  <a:tcPr>
+                    <a:solidFill>
+                      <a:srgbClr val="FFFFFF"/>
+                    </a:solidFill>
+                  </a:tcPr>
+                </a:tc>
+                <a:tc>
+                  <a:txBody>
+                    <a:bodyPr wrap="square"/>
+                    <a:lstStyle/>
+                    <a:p>
+                      <a:r>
+                        <a:rPr sz="1100" b="0">
+                          <a:solidFill>
+                            <a:srgbClr val="1A1A1A"/>
+                          </a:solidFill>
+                          <a:latin typeface="Arial"/>
+                        </a:rPr>
+                        <a:t>Konditionenanpassung, Sicherheitengespräch, Sanierungsbedarf</a:t>
+                      </a:r>
+                    </a:p>
+                  </a:txBody>
+                  <a:tcPr>
+                    <a:solidFill>
+                      <a:srgbClr val="FFFFFF"/>
+                    </a:solidFill>
+                  </a:tcPr>
+                </a:tc>
+                <a:tc>
+                  <a:txBody>
+                    <a:bodyPr wrap="square"/>
+                    <a:lstStyle/>
+                    <a:p>
+                      <a:r>
+                        <a:rPr sz="1100" b="0">
+                          <a:solidFill>
+                            <a:srgbClr val="1A1A1A"/>
+                          </a:solidFill>
+                          <a:latin typeface="Arial"/>
+                        </a:rPr>
+                        <a:t>Sofort</a:t>
+                      </a:r>
+                    </a:p>
+                  </a:txBody>
+                  <a:tcPr>
+                    <a:solidFill>
+                      <a:srgbClr val="FFFFFF"/>
+                    </a:solidFill>
+                  </a:tcPr>
+                </a:tc>
+              </a:tr>
+              <a:tr h="475488">
+                <a:tc>
+                  <a:txBody>
+                    <a:bodyPr wrap="square"/>
+                    <a:lstStyle/>
+                    <a:p>
+                      <a:r>
+                        <a:rPr sz="1100" b="0">
+                          <a:solidFill>
+                            <a:srgbClr val="1A1A1A"/>
+                          </a:solidFill>
+                          <a:latin typeface="Arial"/>
+                        </a:rPr>
+                        <a:t>Jahresabschluss überfällig (&gt; 3 Monate)</a:t>
+                      </a:r>
+                    </a:p>
+                  </a:txBody>
+                  <a:tcPr>
+                    <a:solidFill>
+                      <a:srgbClr val="F4F6FA"/>
+                    </a:solidFill>
+                  </a:tcPr>
+                </a:tc>
+                <a:tc>
+                  <a:txBody>
+                    <a:bodyPr wrap="square"/>
+                    <a:lstStyle/>
+                    <a:p>
+                      <a:r>
+                        <a:rPr sz="1100" b="0">
+                          <a:solidFill>
+                            <a:srgbClr val="1A1A1A"/>
+                          </a:solidFill>
+                          <a:latin typeface="Arial"/>
+                        </a:rPr>
+                        <a:t>§18 KWG-Gespräch, Bonitätssignal</a:t>
+                      </a:r>
+                    </a:p>
+                  </a:txBody>
+                  <a:tcPr>
+                    <a:solidFill>
+                      <a:srgbClr val="F4F6FA"/>
+                    </a:solidFill>
+                  </a:tcPr>
+                </a:tc>
+                <a:tc>
+                  <a:txBody>
+                    <a:bodyPr wrap="square"/>
+                    <a:lstStyle/>
+                    <a:p>
+                      <a:r>
+                        <a:rPr sz="1100" b="0">
+                          <a:solidFill>
+                            <a:srgbClr val="1A1A1A"/>
+                          </a:solidFill>
+                          <a:latin typeface="Arial"/>
+                        </a:rPr>
+                        <a:t>Kurzfristig</a:t>
+                      </a:r>
+                    </a:p>
+                  </a:txBody>
+                  <a:tcPr>
+                    <a:solidFill>
+                      <a:srgbClr val="F4F6FA"/>
+                    </a:solidFill>
+                  </a:tcPr>
+                </a:tc>
+              </a:tr>
+              <a:tr h="475488">
+                <a:tc>
+                  <a:txBody>
+                    <a:bodyPr wrap="square"/>
+                    <a:lstStyle/>
+                    <a:p>
+                      <a:r>
+                        <a:rPr sz="1100" b="0">
+                          <a:solidFill>
+                            <a:srgbClr val="1A1A1A"/>
+                          </a:solidFill>
+                          <a:latin typeface="Arial"/>
+                        </a:rPr>
+                        <a:t>Kreditverlängerung in 6 Monaten fällig</a:t>
+                      </a:r>
+                    </a:p>
+                  </a:txBody>
+                  <a:tcPr>
+                    <a:solidFill>
+                      <a:srgbClr val="FFFFFF"/>
+                    </a:solidFill>
+                  </a:tcPr>
+                </a:tc>
+                <a:tc>
+                  <a:txBody>
+                    <a:bodyPr wrap="square"/>
+                    <a:lstStyle/>
+                    <a:p>
+                      <a:r>
+                        <a:rPr sz="1100" b="0">
+                          <a:solidFill>
+                            <a:srgbClr val="1A1A1A"/>
+                          </a:solidFill>
+                          <a:latin typeface="Arial"/>
+                        </a:rPr>
+                        <a:t>Prolongationsgespräch, ggf. Volumenerhöhung</a:t>
+                      </a:r>
+                    </a:p>
+                  </a:txBody>
+                  <a:tcPr>
+                    <a:solidFill>
+                      <a:srgbClr val="FFFFFF"/>
+                    </a:solidFill>
+                  </a:tcPr>
+                </a:tc>
+                <a:tc>
+                  <a:txBody>
+                    <a:bodyPr wrap="square"/>
+                    <a:lstStyle/>
+                    <a:p>
+                      <a:r>
+                        <a:rPr sz="1100" b="0">
+                          <a:solidFill>
+                            <a:srgbClr val="1A1A1A"/>
+                          </a:solidFill>
+                          <a:latin typeface="Arial"/>
+                        </a:rPr>
+                        <a:t>Mittelfristig</a:t>
+                      </a:r>
+                    </a:p>
+                  </a:txBody>
+                  <a:tcPr>
+                    <a:solidFill>
+                      <a:srgbClr val="FFFFFF"/>
+                    </a:solidFill>
+                  </a:tcPr>
+                </a:tc>
+              </a:tr>
+              <a:tr h="475488">
+                <a:tc>
+                  <a:txBody>
+                    <a:bodyPr wrap="square"/>
+                    <a:lstStyle/>
+                    <a:p>
+                      <a:r>
+                        <a:rPr sz="1100" b="0">
+                          <a:solidFill>
+                            <a:srgbClr val="1A1A1A"/>
+                          </a:solidFill>
+                          <a:latin typeface="Arial"/>
+                        </a:rPr>
+                        <a:t>Neue Gesellschafterstruktur (Handelsregister)</a:t>
+                      </a:r>
+                    </a:p>
+                  </a:txBody>
+                  <a:tcPr>
+                    <a:solidFill>
+                      <a:srgbClr val="F4F6FA"/>
+                    </a:solidFill>
+                  </a:tcPr>
+                </a:tc>
+                <a:tc>
+                  <a:txBody>
+                    <a:bodyPr wrap="square"/>
+                    <a:lstStyle/>
+                    <a:p>
+                      <a:r>
+                        <a:rPr sz="1100" b="0">
+                          <a:solidFill>
+                            <a:srgbClr val="1A1A1A"/>
+                          </a:solidFill>
+                          <a:latin typeface="Arial"/>
+                        </a:rPr>
+                        <a:t>Nachfolge, Absicherung neue GF, D&amp;O</a:t>
+                      </a:r>
+                    </a:p>
+                  </a:txBody>
+                  <a:tcPr>
+                    <a:solidFill>
+                      <a:srgbClr val="F4F6FA"/>
+                    </a:solidFill>
+                  </a:tcPr>
+                </a:tc>
+                <a:tc>
+                  <a:txBody>
+                    <a:bodyPr wrap="square"/>
+                    <a:lstStyle/>
+                    <a:p>
+                      <a:r>
+                        <a:rPr sz="1100" b="0">
+                          <a:solidFill>
+                            <a:srgbClr val="1A1A1A"/>
+                          </a:solidFill>
+                          <a:latin typeface="Arial"/>
+                        </a:rPr>
+                        <a:t>Kurzfristig</a:t>
+                      </a:r>
+                    </a:p>
+                  </a:txBody>
+                  <a:tcPr>
+                    <a:solidFill>
+                      <a:srgbClr val="F4F6FA"/>
+                    </a:solidFill>
+                  </a:tcPr>
+                </a:tc>
+              </a:tr>
+            </a:tbl>
+          </a:graphicData>
+        </a:graphic>
+      </p:graphicFrame>
     </p:spTree>
   </p:cSld>
   <p:clrMapOvr>
@@ -3518,8 +3970,8 @@
         </p:nvSpPr>
         <p:spPr>
           <a:xfrm>
-            <a:off x="365760" y="2286000"/>
-            <a:ext cx="11430000" cy="1828800"/>
+            <a:off x="365760" y="2011680"/>
+            <a:ext cx="11430000" cy="2011680"/>
           </a:xfrm>
           <a:prstGeom prst="rect">
             <a:avLst/>
@@ -3534,13 +3986,13 @@
           <a:p>
             <a:pPr algn="l"/>
             <a:r>
-              <a:rPr sz="3600" b="1">
+              <a:rPr sz="3600" b="1" i="0">
                 <a:solidFill>
                   <a:srgbClr val="FFFFFF"/>
                 </a:solidFill>
                 <a:latin typeface="Arial"/>
               </a:rPr>
-              <a:t>Transparenz als Vertrauensmoment</a:t>
+              <a:t>Datenqualitäts-Audit im eigenen Bestand</a:t>
             </a:r>
           </a:p>
         </p:txBody>
@@ -3559,7 +4011,7 @@
     <p:bg>
       <p:bgPr>
         <a:solidFill>
-          <a:srgbClr val="1A1A1A"/>
+          <a:srgbClr val="FFFFFF"/>
         </a:solidFill>
         <a:effectLst/>
       </p:bgPr>
@@ -3586,7 +4038,7 @@
             <a:avLst/>
           </a:prstGeom>
           <a:solidFill>
-            <a:srgbClr val="E05B00"/>
+            <a:srgbClr val="003DA5"/>
           </a:solidFill>
           <a:ln>
             <a:noFill/>
@@ -3622,8 +4074,8 @@
         </p:nvSpPr>
         <p:spPr>
           <a:xfrm>
-            <a:off x="365760" y="2286000"/>
-            <a:ext cx="11430000" cy="1828800"/>
+            <a:off x="228600" y="182880"/>
+            <a:ext cx="11430000" cy="320040"/>
           </a:xfrm>
           <a:prstGeom prst="rect">
             <a:avLst/>
@@ -3638,13 +4090,189 @@
           <a:p>
             <a:pPr algn="l"/>
             <a:r>
-              <a:rPr sz="3600" b="1">
-                <a:solidFill>
-                  <a:srgbClr val="FFFFFF"/>
+              <a:rPr sz="900" b="0" i="0">
+                <a:solidFill>
+                  <a:srgbClr val="556575"/>
                 </a:solidFill>
                 <a:latin typeface="Arial"/>
               </a:rPr>
-              <a:t>Arbeitsblatt A: Meine Trigger-Bibliothek</a:t>
+              <a:t>M18 · 4.3 Datenqualität: Die Voraussetzung für alles</a:t>
+            </a:r>
+          </a:p>
+        </p:txBody>
+      </p:sp>
+      <p:sp>
+        <p:nvSpPr>
+          <p:cNvPr id="4" name="TextBox 3"/>
+          <p:cNvSpPr txBox="1"/>
+          <p:nvPr/>
+        </p:nvSpPr>
+        <p:spPr>
+          <a:xfrm>
+            <a:off x="365760" y="274320"/>
+            <a:ext cx="11430000" cy="777240"/>
+          </a:xfrm>
+          <a:prstGeom prst="rect">
+            <a:avLst/>
+          </a:prstGeom>
+          <a:noFill/>
+        </p:spPr>
+        <p:txBody>
+          <a:bodyPr wrap="square">
+            <a:spAutoFit/>
+          </a:bodyPr>
+          <a:lstStyle/>
+          <a:p>
+            <a:pPr algn="l"/>
+            <a:r>
+              <a:rPr sz="2200" b="1" i="0">
+                <a:solidFill>
+                  <a:srgbClr val="003DA5"/>
+                </a:solidFill>
+                <a:latin typeface="Arial"/>
+              </a:rPr>
+              <a:t>Datenqualitäts-Audit im eigenen Bestand</a:t>
+            </a:r>
+          </a:p>
+        </p:txBody>
+      </p:sp>
+      <p:sp>
+        <p:nvSpPr>
+          <p:cNvPr id="5" name="Rectangle 4"/>
+          <p:cNvSpPr/>
+          <p:nvPr/>
+        </p:nvSpPr>
+        <p:spPr>
+          <a:xfrm>
+            <a:off x="365760" y="1005840"/>
+            <a:ext cx="11430000" cy="27432"/>
+          </a:xfrm>
+          <a:prstGeom prst="rect">
+            <a:avLst/>
+          </a:prstGeom>
+          <a:solidFill>
+            <a:srgbClr val="D1D5DB"/>
+          </a:solidFill>
+          <a:ln>
+            <a:noFill/>
+          </a:ln>
+        </p:spPr>
+        <p:style>
+          <a:lnRef idx="1">
+            <a:schemeClr val="accent1"/>
+          </a:lnRef>
+          <a:fillRef idx="3">
+            <a:schemeClr val="accent1"/>
+          </a:fillRef>
+          <a:effectRef idx="2">
+            <a:schemeClr val="accent1"/>
+          </a:effectRef>
+          <a:fontRef idx="minor">
+            <a:schemeClr val="lt1"/>
+          </a:fontRef>
+        </p:style>
+        <p:txBody>
+          <a:bodyPr rtlCol="0" anchor="ctr"/>
+          <a:lstStyle/>
+          <a:p>
+            <a:pPr algn="ctr"/>
+          </a:p>
+        </p:txBody>
+      </p:sp>
+      <p:sp>
+        <p:nvSpPr>
+          <p:cNvPr id="6" name="TextBox 5"/>
+          <p:cNvSpPr txBox="1"/>
+          <p:nvPr/>
+        </p:nvSpPr>
+        <p:spPr>
+          <a:xfrm>
+            <a:off x="365760" y="1143000"/>
+            <a:ext cx="11430000" cy="5212080"/>
+          </a:xfrm>
+          <a:prstGeom prst="rect">
+            <a:avLst/>
+          </a:prstGeom>
+          <a:noFill/>
+        </p:spPr>
+        <p:txBody>
+          <a:bodyPr wrap="square">
+            <a:spAutoFit/>
+          </a:bodyPr>
+          <a:lstStyle/>
+          <a:p>
+            <a:pPr>
+              <a:spcBef>
+                <a:spcPts val="500"/>
+              </a:spcBef>
+            </a:pPr>
+            <a:r>
+              <a:rPr sz="1500">
+                <a:solidFill>
+                  <a:srgbClr val="003DA5"/>
+                </a:solidFill>
+                <a:latin typeface="Arial"/>
+              </a:rPr>
+              <a:t>▪  </a:t>
+            </a:r>
+            <a:r>
+              <a:rPr sz="1700">
+                <a:solidFill>
+                  <a:srgbClr val="1A1A1A"/>
+                </a:solidFill>
+                <a:latin typeface="Arial"/>
+              </a:rPr>
+              <a:t>In agree eine Bestandsliste Ihrer Firmenkunden aufrufen (Weg je nach Bankinstallation: Bestandsbetreuer-Cockpit oder Listenabfrage über agree-Auswertungskomponente – lassen Sie sich das einmalig von Ihrem IT-Koordinator zeigen, da ein standardisierter „Lückenanalyse"-Menüpunkt nicht in jeder Installation verfügbar ist). Alternativ: Export als Excel aus dem Bestandscockpit und manuelle Filterung.</a:t>
+            </a:r>
+          </a:p>
+          <a:p>
+            <a:pPr>
+              <a:spcBef>
+                <a:spcPts val="500"/>
+              </a:spcBef>
+            </a:pPr>
+            <a:r>
+              <a:rPr sz="1500">
+                <a:solidFill>
+                  <a:srgbClr val="003DA5"/>
+                </a:solidFill>
+                <a:latin typeface="Arial"/>
+              </a:rPr>
+              <a:t>▪  </a:t>
+            </a:r>
+            <a:r>
+              <a:rPr sz="1700">
+                <a:solidFill>
+                  <a:srgbClr val="1A1A1A"/>
+                </a:solidFill>
+                <a:latin typeface="Arial"/>
+              </a:rPr>
+              <a:t>Für alle Kunden mit &gt; 500k Kreditvolumen prüfen: Geburtsdatum, Branche, Gesellschafterstruktur, Jahresabschluss-Datum (Arbeitsblatt B als Checkliste nutzen)</a:t>
+            </a:r>
+          </a:p>
+          <a:p>
+            <a:pPr>
+              <a:spcBef>
+                <a:spcPts val="500"/>
+              </a:spcBef>
+            </a:pPr>
+            <a:r>
+              <a:rPr sz="1500">
+                <a:solidFill>
+                  <a:srgbClr val="003DA5"/>
+                </a:solidFill>
+                <a:latin typeface="Arial"/>
+              </a:rPr>
+              <a:t>▪  </a:t>
+            </a:r>
+            <a:r>
+              <a:rPr sz="1700">
+                <a:solidFill>
+                  <a:srgbClr val="1A1A1A"/>
+                </a:solidFill>
+                <a:latin typeface="Arial"/>
+              </a:rPr>
+              <a:t>Fehler in den nächsten drei Kundengesprächen schließen (gezielt im Gespräch erfragen)</a:t>
             </a:r>
           </a:p>
         </p:txBody>
@@ -3726,8 +4354,8 @@
         </p:nvSpPr>
         <p:spPr>
           <a:xfrm>
-            <a:off x="365760" y="2286000"/>
-            <a:ext cx="11430000" cy="1828800"/>
+            <a:off x="365760" y="2011680"/>
+            <a:ext cx="11430000" cy="2011680"/>
           </a:xfrm>
           <a:prstGeom prst="rect">
             <a:avLst/>
@@ -3742,13 +4370,13 @@
           <a:p>
             <a:pPr algn="l"/>
             <a:r>
-              <a:rPr sz="3600" b="1">
+              <a:rPr sz="3600" b="1" i="0">
                 <a:solidFill>
                   <a:srgbClr val="FFFFFF"/>
                 </a:solidFill>
                 <a:latin typeface="Arial"/>
               </a:rPr>
-              <a:t>Arbeitsblatt B: Datenqualitäts-Audit (Top-10-Kunden)</a:t>
+              <a:t>Was ist erlaubt – was nicht?</a:t>
             </a:r>
           </a:p>
         </p:txBody>
@@ -3767,7 +4395,7 @@
     <p:bg>
       <p:bgPr>
         <a:solidFill>
-          <a:srgbClr val="1A1A1A"/>
+          <a:srgbClr val="FFFFFF"/>
         </a:solidFill>
         <a:effectLst/>
       </p:bgPr>
@@ -3794,7 +4422,7 @@
             <a:avLst/>
           </a:prstGeom>
           <a:solidFill>
-            <a:srgbClr val="E05B00"/>
+            <a:srgbClr val="003DA5"/>
           </a:solidFill>
           <a:ln>
             <a:noFill/>
@@ -3830,8 +4458,8 @@
         </p:nvSpPr>
         <p:spPr>
           <a:xfrm>
-            <a:off x="365760" y="2286000"/>
-            <a:ext cx="11430000" cy="1828800"/>
+            <a:off x="228600" y="182880"/>
+            <a:ext cx="11430000" cy="320040"/>
           </a:xfrm>
           <a:prstGeom prst="rect">
             <a:avLst/>
@@ -3846,17 +4474,530 @@
           <a:p>
             <a:pPr algn="l"/>
             <a:r>
-              <a:rPr sz="3600" b="1">
-                <a:solidFill>
-                  <a:srgbClr val="FFFFFF"/>
+              <a:rPr sz="900" b="0" i="0">
+                <a:solidFill>
+                  <a:srgbClr val="556575"/>
                 </a:solidFill>
                 <a:latin typeface="Arial"/>
               </a:rPr>
-              <a:t>Fachlich</a:t>
-            </a:r>
-          </a:p>
-        </p:txBody>
-      </p:sp>
+              <a:t>M18 · 4.4 DSGVO-konforme Datennutzung im Vertrieb</a:t>
+            </a:r>
+          </a:p>
+        </p:txBody>
+      </p:sp>
+      <p:sp>
+        <p:nvSpPr>
+          <p:cNvPr id="4" name="TextBox 3"/>
+          <p:cNvSpPr txBox="1"/>
+          <p:nvPr/>
+        </p:nvSpPr>
+        <p:spPr>
+          <a:xfrm>
+            <a:off x="365760" y="274320"/>
+            <a:ext cx="11430000" cy="777240"/>
+          </a:xfrm>
+          <a:prstGeom prst="rect">
+            <a:avLst/>
+          </a:prstGeom>
+          <a:noFill/>
+        </p:spPr>
+        <p:txBody>
+          <a:bodyPr wrap="square">
+            <a:spAutoFit/>
+          </a:bodyPr>
+          <a:lstStyle/>
+          <a:p>
+            <a:pPr algn="l"/>
+            <a:r>
+              <a:rPr sz="2200" b="1" i="0">
+                <a:solidFill>
+                  <a:srgbClr val="003DA5"/>
+                </a:solidFill>
+                <a:latin typeface="Arial"/>
+              </a:rPr>
+              <a:t>Was ist erlaubt – was nicht?</a:t>
+            </a:r>
+          </a:p>
+        </p:txBody>
+      </p:sp>
+      <p:sp>
+        <p:nvSpPr>
+          <p:cNvPr id="5" name="Rectangle 4"/>
+          <p:cNvSpPr/>
+          <p:nvPr/>
+        </p:nvSpPr>
+        <p:spPr>
+          <a:xfrm>
+            <a:off x="365760" y="1005840"/>
+            <a:ext cx="11430000" cy="27432"/>
+          </a:xfrm>
+          <a:prstGeom prst="rect">
+            <a:avLst/>
+          </a:prstGeom>
+          <a:solidFill>
+            <a:srgbClr val="D1D5DB"/>
+          </a:solidFill>
+          <a:ln>
+            <a:noFill/>
+          </a:ln>
+        </p:spPr>
+        <p:style>
+          <a:lnRef idx="1">
+            <a:schemeClr val="accent1"/>
+          </a:lnRef>
+          <a:fillRef idx="3">
+            <a:schemeClr val="accent1"/>
+          </a:fillRef>
+          <a:effectRef idx="2">
+            <a:schemeClr val="accent1"/>
+          </a:effectRef>
+          <a:fontRef idx="minor">
+            <a:schemeClr val="lt1"/>
+          </a:fontRef>
+        </p:style>
+        <p:txBody>
+          <a:bodyPr rtlCol="0" anchor="ctr"/>
+          <a:lstStyle/>
+          <a:p>
+            <a:pPr algn="ctr"/>
+          </a:p>
+        </p:txBody>
+      </p:sp>
+      <p:graphicFrame>
+        <p:nvGraphicFramePr>
+          <p:cNvPr id="6" name="Table 5"/>
+          <p:cNvGraphicFramePr>
+            <a:graphicFrameLocks noGrp="1"/>
+          </p:cNvGraphicFramePr>
+          <p:nvPr/>
+        </p:nvGraphicFramePr>
+        <p:xfrm>
+          <a:off x="365760" y="1143000"/>
+          <a:ext cx="11430000" cy="2852928"/>
+        </p:xfrm>
+        <a:graphic>
+          <a:graphicData uri="http://schemas.openxmlformats.org/drawingml/2006/table">
+            <a:tbl>
+              <a:tblPr firstRow="1" bandRow="1">
+                <a:tableStyleId>{5C22544A-7EE6-4342-B048-85BDC9FD1C3A}</a:tableStyleId>
+              </a:tblPr>
+              <a:tblGrid>
+                <a:gridCol w="3810000"/>
+                <a:gridCol w="3810000"/>
+                <a:gridCol w="3810000"/>
+              </a:tblGrid>
+              <a:tr h="475488">
+                <a:tc>
+                  <a:txBody>
+                    <a:bodyPr wrap="square"/>
+                    <a:lstStyle/>
+                    <a:p>
+                      <a:r>
+                        <a:rPr sz="1100" b="1">
+                          <a:solidFill>
+                            <a:srgbClr val="FFFFFF"/>
+                          </a:solidFill>
+                          <a:latin typeface="Arial"/>
+                        </a:rPr>
+                        <a:t>Nutzung</a:t>
+                      </a:r>
+                    </a:p>
+                  </a:txBody>
+                  <a:tcPr>
+                    <a:solidFill>
+                      <a:srgbClr val="003DA5"/>
+                    </a:solidFill>
+                  </a:tcPr>
+                </a:tc>
+                <a:tc>
+                  <a:txBody>
+                    <a:bodyPr wrap="square"/>
+                    <a:lstStyle/>
+                    <a:p>
+                      <a:r>
+                        <a:rPr sz="1100" b="1">
+                          <a:solidFill>
+                            <a:srgbClr val="FFFFFF"/>
+                          </a:solidFill>
+                          <a:latin typeface="Arial"/>
+                        </a:rPr>
+                        <a:t>Zulässig?</a:t>
+                      </a:r>
+                    </a:p>
+                  </a:txBody>
+                  <a:tcPr>
+                    <a:solidFill>
+                      <a:srgbClr val="003DA5"/>
+                    </a:solidFill>
+                  </a:tcPr>
+                </a:tc>
+                <a:tc>
+                  <a:txBody>
+                    <a:bodyPr wrap="square"/>
+                    <a:lstStyle/>
+                    <a:p>
+                      <a:r>
+                        <a:rPr sz="1100" b="1">
+                          <a:solidFill>
+                            <a:srgbClr val="FFFFFF"/>
+                          </a:solidFill>
+                          <a:latin typeface="Arial"/>
+                        </a:rPr>
+                        <a:t>Begründung</a:t>
+                      </a:r>
+                    </a:p>
+                  </a:txBody>
+                  <a:tcPr>
+                    <a:solidFill>
+                      <a:srgbClr val="003DA5"/>
+                    </a:solidFill>
+                  </a:tcPr>
+                </a:tc>
+              </a:tr>
+              <a:tr h="475488">
+                <a:tc>
+                  <a:txBody>
+                    <a:bodyPr wrap="square"/>
+                    <a:lstStyle/>
+                    <a:p>
+                      <a:r>
+                        <a:rPr sz="1100" b="0">
+                          <a:solidFill>
+                            <a:srgbClr val="1A1A1A"/>
+                          </a:solidFill>
+                          <a:latin typeface="Arial"/>
+                        </a:rPr>
+                        <a:t>Kontoauswertung für Gesprächsvorbereitung</a:t>
+                      </a:r>
+                    </a:p>
+                  </a:txBody>
+                  <a:tcPr>
+                    <a:solidFill>
+                      <a:srgbClr val="FFFFFF"/>
+                    </a:solidFill>
+                  </a:tcPr>
+                </a:tc>
+                <a:tc>
+                  <a:txBody>
+                    <a:bodyPr wrap="square"/>
+                    <a:lstStyle/>
+                    <a:p>
+                      <a:r>
+                        <a:rPr sz="1100" b="0">
+                          <a:solidFill>
+                            <a:srgbClr val="1A1A1A"/>
+                          </a:solidFill>
+                          <a:latin typeface="Arial"/>
+                        </a:rPr>
+                        <a:t>✓</a:t>
+                      </a:r>
+                    </a:p>
+                  </a:txBody>
+                  <a:tcPr>
+                    <a:solidFill>
+                      <a:srgbClr val="FFFFFF"/>
+                    </a:solidFill>
+                  </a:tcPr>
+                </a:tc>
+                <a:tc>
+                  <a:txBody>
+                    <a:bodyPr wrap="square"/>
+                    <a:lstStyle/>
+                    <a:p>
+                      <a:r>
+                        <a:rPr sz="1100" b="0">
+                          <a:solidFill>
+                            <a:srgbClr val="1A1A1A"/>
+                          </a:solidFill>
+                          <a:latin typeface="Arial"/>
+                        </a:rPr>
+                        <a:t>Vertragserfüllung + berechtigtes Interesse</a:t>
+                      </a:r>
+                    </a:p>
+                  </a:txBody>
+                  <a:tcPr>
+                    <a:solidFill>
+                      <a:srgbClr val="FFFFFF"/>
+                    </a:solidFill>
+                  </a:tcPr>
+                </a:tc>
+              </a:tr>
+              <a:tr h="475488">
+                <a:tc>
+                  <a:txBody>
+                    <a:bodyPr wrap="square"/>
+                    <a:lstStyle/>
+                    <a:p>
+                      <a:r>
+                        <a:rPr sz="1100" b="0">
+                          <a:solidFill>
+                            <a:srgbClr val="1A1A1A"/>
+                          </a:solidFill>
+                          <a:latin typeface="Arial"/>
+                        </a:rPr>
+                        <a:t>Trigger-Alerts auf Basis von Kontobewegungen</a:t>
+                      </a:r>
+                    </a:p>
+                  </a:txBody>
+                  <a:tcPr>
+                    <a:solidFill>
+                      <a:srgbClr val="F4F6FA"/>
+                    </a:solidFill>
+                  </a:tcPr>
+                </a:tc>
+                <a:tc>
+                  <a:txBody>
+                    <a:bodyPr wrap="square"/>
+                    <a:lstStyle/>
+                    <a:p>
+                      <a:r>
+                        <a:rPr sz="1100" b="0">
+                          <a:solidFill>
+                            <a:srgbClr val="1A1A1A"/>
+                          </a:solidFill>
+                          <a:latin typeface="Arial"/>
+                        </a:rPr>
+                        <a:t>✓</a:t>
+                      </a:r>
+                    </a:p>
+                  </a:txBody>
+                  <a:tcPr>
+                    <a:solidFill>
+                      <a:srgbClr val="F4F6FA"/>
+                    </a:solidFill>
+                  </a:tcPr>
+                </a:tc>
+                <a:tc>
+                  <a:txBody>
+                    <a:bodyPr wrap="square"/>
+                    <a:lstStyle/>
+                    <a:p>
+                      <a:r>
+                        <a:rPr sz="1100" b="0">
+                          <a:solidFill>
+                            <a:srgbClr val="1A1A1A"/>
+                          </a:solidFill>
+                          <a:latin typeface="Arial"/>
+                        </a:rPr>
+                        <a:t>Berechtigtes Interesse der Bank (Art. 6 Abs. 1 lit. f DSGVO) – sofern im internen Datenschutzkonzept dokumentiert; Klärung mit Datenschutzbeauftragtem empfohlen</a:t>
+                      </a:r>
+                    </a:p>
+                  </a:txBody>
+                  <a:tcPr>
+                    <a:solidFill>
+                      <a:srgbClr val="F4F6FA"/>
+                    </a:solidFill>
+                  </a:tcPr>
+                </a:tc>
+              </a:tr>
+              <a:tr h="475488">
+                <a:tc>
+                  <a:txBody>
+                    <a:bodyPr wrap="square"/>
+                    <a:lstStyle/>
+                    <a:p>
+                      <a:r>
+                        <a:rPr sz="1100" b="0">
+                          <a:solidFill>
+                            <a:srgbClr val="1A1A1A"/>
+                          </a:solidFill>
+                          <a:latin typeface="Arial"/>
+                        </a:rPr>
+                        <a:t>Weitergabe von Kundendaten an Verbundpartner ohne Einwilligung</a:t>
+                      </a:r>
+                    </a:p>
+                  </a:txBody>
+                  <a:tcPr>
+                    <a:solidFill>
+                      <a:srgbClr val="FFFFFF"/>
+                    </a:solidFill>
+                  </a:tcPr>
+                </a:tc>
+                <a:tc>
+                  <a:txBody>
+                    <a:bodyPr wrap="square"/>
+                    <a:lstStyle/>
+                    <a:p>
+                      <a:r>
+                        <a:rPr sz="1100" b="0">
+                          <a:solidFill>
+                            <a:srgbClr val="1A1A1A"/>
+                          </a:solidFill>
+                          <a:latin typeface="Arial"/>
+                        </a:rPr>
+                        <a:t>✗</a:t>
+                      </a:r>
+                    </a:p>
+                  </a:txBody>
+                  <a:tcPr>
+                    <a:solidFill>
+                      <a:srgbClr val="FFFFFF"/>
+                    </a:solidFill>
+                  </a:tcPr>
+                </a:tc>
+                <a:tc>
+                  <a:txBody>
+                    <a:bodyPr wrap="square"/>
+                    <a:lstStyle/>
+                    <a:p>
+                      <a:r>
+                        <a:rPr sz="1100" b="0">
+                          <a:solidFill>
+                            <a:srgbClr val="1A1A1A"/>
+                          </a:solidFill>
+                          <a:latin typeface="Arial"/>
+                        </a:rPr>
+                        <a:t>Keine Rechtsgrundlage ohne Einwilligung oder Vertrag</a:t>
+                      </a:r>
+                    </a:p>
+                  </a:txBody>
+                  <a:tcPr>
+                    <a:solidFill>
+                      <a:srgbClr val="FFFFFF"/>
+                    </a:solidFill>
+                  </a:tcPr>
+                </a:tc>
+              </a:tr>
+              <a:tr h="475488">
+                <a:tc>
+                  <a:txBody>
+                    <a:bodyPr wrap="square"/>
+                    <a:lstStyle/>
+                    <a:p>
+                      <a:r>
+                        <a:rPr sz="1100" b="0">
+                          <a:solidFill>
+                            <a:srgbClr val="1A1A1A"/>
+                          </a:solidFill>
+                          <a:latin typeface="Arial"/>
+                        </a:rPr>
+                        <a:t>Nutzung privater Informationen (Scheidung, Krankheit) für Vertrieb</a:t>
+                      </a:r>
+                    </a:p>
+                  </a:txBody>
+                  <a:tcPr>
+                    <a:solidFill>
+                      <a:srgbClr val="F4F6FA"/>
+                    </a:solidFill>
+                  </a:tcPr>
+                </a:tc>
+                <a:tc>
+                  <a:txBody>
+                    <a:bodyPr wrap="square"/>
+                    <a:lstStyle/>
+                    <a:p>
+                      <a:r>
+                        <a:rPr sz="1100" b="0">
+                          <a:solidFill>
+                            <a:srgbClr val="1A1A1A"/>
+                          </a:solidFill>
+                          <a:latin typeface="Arial"/>
+                        </a:rPr>
+                        <a:t>✗</a:t>
+                      </a:r>
+                    </a:p>
+                  </a:txBody>
+                  <a:tcPr>
+                    <a:solidFill>
+                      <a:srgbClr val="F4F6FA"/>
+                    </a:solidFill>
+                  </a:tcPr>
+                </a:tc>
+                <a:tc>
+                  <a:txBody>
+                    <a:bodyPr wrap="square"/>
+                    <a:lstStyle/>
+                    <a:p>
+                      <a:r>
+                        <a:rPr sz="1100" b="0">
+                          <a:solidFill>
+                            <a:srgbClr val="1A1A1A"/>
+                          </a:solidFill>
+                          <a:latin typeface="Arial"/>
+                        </a:rPr>
+                        <a:t>Verletzt Vertrauensverhältnis, rechtlich riskant</a:t>
+                      </a:r>
+                    </a:p>
+                  </a:txBody>
+                  <a:tcPr>
+                    <a:solidFill>
+                      <a:srgbClr val="F4F6FA"/>
+                    </a:solidFill>
+                  </a:tcPr>
+                </a:tc>
+              </a:tr>
+              <a:tr h="475488">
+                <a:tc>
+                  <a:txBody>
+                    <a:bodyPr wrap="square"/>
+                    <a:lstStyle/>
+                    <a:p>
+                      <a:r>
+                        <a:rPr sz="1100" b="0">
+                          <a:solidFill>
+                            <a:srgbClr val="1A1A1A"/>
+                          </a:solidFill>
+                          <a:latin typeface="Arial"/>
+                        </a:rPr>
+                        <a:t>Scoring-Modelle mit externen Daten (Social Media)</a:t>
+                      </a:r>
+                    </a:p>
+                  </a:txBody>
+                  <a:tcPr>
+                    <a:solidFill>
+                      <a:srgbClr val="FFFFFF"/>
+                    </a:solidFill>
+                  </a:tcPr>
+                </a:tc>
+                <a:tc>
+                  <a:txBody>
+                    <a:bodyPr wrap="square"/>
+                    <a:lstStyle/>
+                    <a:p>
+                      <a:r>
+                        <a:rPr sz="1100" b="0">
+                          <a:solidFill>
+                            <a:srgbClr val="1A1A1A"/>
+                          </a:solidFill>
+                          <a:latin typeface="Arial"/>
+                        </a:rPr>
+                        <a:t>✗</a:t>
+                      </a:r>
+                    </a:p>
+                  </a:txBody>
+                  <a:tcPr>
+                    <a:solidFill>
+                      <a:srgbClr val="FFFFFF"/>
+                    </a:solidFill>
+                  </a:tcPr>
+                </a:tc>
+                <a:tc>
+                  <a:txBody>
+                    <a:bodyPr wrap="square"/>
+                    <a:lstStyle/>
+                    <a:p>
+                      <a:r>
+                        <a:rPr sz="1100" b="0">
+                          <a:solidFill>
+                            <a:srgbClr val="1A1A1A"/>
+                          </a:solidFill>
+                          <a:latin typeface="Arial"/>
+                        </a:rPr>
+                        <a:t>Zulässigkeit sehr eingeschränkt, AGB-Konformität prüfen</a:t>
+                      </a:r>
+                    </a:p>
+                  </a:txBody>
+                  <a:tcPr>
+                    <a:solidFill>
+                      <a:srgbClr val="FFFFFF"/>
+                    </a:solidFill>
+                  </a:tcPr>
+                </a:tc>
+              </a:tr>
+            </a:tbl>
+          </a:graphicData>
+        </a:graphic>
+      </p:graphicFrame>
     </p:spTree>
   </p:cSld>
   <p:clrMapOvr>
@@ -3934,8 +5075,8 @@
         </p:nvSpPr>
         <p:spPr>
           <a:xfrm>
-            <a:off x="365760" y="2286000"/>
-            <a:ext cx="11430000" cy="1828800"/>
+            <a:off x="365760" y="2011680"/>
+            <a:ext cx="11430000" cy="2011680"/>
           </a:xfrm>
           <a:prstGeom prst="rect">
             <a:avLst/>
@@ -3950,13 +5091,13 @@
           <a:p>
             <a:pPr algn="l"/>
             <a:r>
-              <a:rPr sz="3600" b="1">
+              <a:rPr sz="3600" b="1" i="0">
                 <a:solidFill>
                   <a:srgbClr val="FFFFFF"/>
                 </a:solidFill>
                 <a:latin typeface="Arial"/>
               </a:rPr>
-              <a:t>Praxismaterialien</a:t>
+              <a:t>Verbundpartner-Einwilligung: Pflichtcheck vor jeder Übergabe</a:t>
             </a:r>
           </a:p>
         </p:txBody>
@@ -3970,6 +5111,2255 @@
 </file>
 
 <file path=ppt/slides/slide16.xml><?xml version="1.0" encoding="utf-8"?>
+<p:sld xmlns:a="http://schemas.openxmlformats.org/drawingml/2006/main" xmlns:p="http://schemas.openxmlformats.org/presentationml/2006/main" xmlns:r="http://schemas.openxmlformats.org/officeDocument/2006/relationships">
+  <p:cSld>
+    <p:bg>
+      <p:bgPr>
+        <a:solidFill>
+          <a:srgbClr val="FFFFFF"/>
+        </a:solidFill>
+        <a:effectLst/>
+      </p:bgPr>
+    </p:bg>
+    <p:spTree>
+      <p:nvGrpSpPr>
+        <p:cNvPr id="1" name=""/>
+        <p:cNvGrpSpPr/>
+        <p:nvPr/>
+      </p:nvGrpSpPr>
+      <p:grpSpPr/>
+      <p:sp>
+        <p:nvSpPr>
+          <p:cNvPr id="2" name="Rectangle 1"/>
+          <p:cNvSpPr/>
+          <p:nvPr/>
+        </p:nvSpPr>
+        <p:spPr>
+          <a:xfrm>
+            <a:off x="0" y="0"/>
+            <a:ext cx="73152" cy="6858000"/>
+          </a:xfrm>
+          <a:prstGeom prst="rect">
+            <a:avLst/>
+          </a:prstGeom>
+          <a:solidFill>
+            <a:srgbClr val="003DA5"/>
+          </a:solidFill>
+          <a:ln>
+            <a:noFill/>
+          </a:ln>
+        </p:spPr>
+        <p:style>
+          <a:lnRef idx="1">
+            <a:schemeClr val="accent1"/>
+          </a:lnRef>
+          <a:fillRef idx="3">
+            <a:schemeClr val="accent1"/>
+          </a:fillRef>
+          <a:effectRef idx="2">
+            <a:schemeClr val="accent1"/>
+          </a:effectRef>
+          <a:fontRef idx="minor">
+            <a:schemeClr val="lt1"/>
+          </a:fontRef>
+        </p:style>
+        <p:txBody>
+          <a:bodyPr rtlCol="0" anchor="ctr"/>
+          <a:lstStyle/>
+          <a:p>
+            <a:pPr algn="ctr"/>
+          </a:p>
+        </p:txBody>
+      </p:sp>
+      <p:sp>
+        <p:nvSpPr>
+          <p:cNvPr id="3" name="TextBox 2"/>
+          <p:cNvSpPr txBox="1"/>
+          <p:nvPr/>
+        </p:nvSpPr>
+        <p:spPr>
+          <a:xfrm>
+            <a:off x="228600" y="182880"/>
+            <a:ext cx="11430000" cy="320040"/>
+          </a:xfrm>
+          <a:prstGeom prst="rect">
+            <a:avLst/>
+          </a:prstGeom>
+          <a:noFill/>
+        </p:spPr>
+        <p:txBody>
+          <a:bodyPr wrap="square">
+            <a:spAutoFit/>
+          </a:bodyPr>
+          <a:lstStyle/>
+          <a:p>
+            <a:pPr algn="l"/>
+            <a:r>
+              <a:rPr sz="900" b="0" i="0">
+                <a:solidFill>
+                  <a:srgbClr val="556575"/>
+                </a:solidFill>
+                <a:latin typeface="Arial"/>
+              </a:rPr>
+              <a:t>M18 · 4.4 DSGVO-konforme Datennutzung im Vertrieb</a:t>
+            </a:r>
+          </a:p>
+        </p:txBody>
+      </p:sp>
+      <p:sp>
+        <p:nvSpPr>
+          <p:cNvPr id="4" name="TextBox 3"/>
+          <p:cNvSpPr txBox="1"/>
+          <p:nvPr/>
+        </p:nvSpPr>
+        <p:spPr>
+          <a:xfrm>
+            <a:off x="365760" y="274320"/>
+            <a:ext cx="11430000" cy="777240"/>
+          </a:xfrm>
+          <a:prstGeom prst="rect">
+            <a:avLst/>
+          </a:prstGeom>
+          <a:noFill/>
+        </p:spPr>
+        <p:txBody>
+          <a:bodyPr wrap="square">
+            <a:spAutoFit/>
+          </a:bodyPr>
+          <a:lstStyle/>
+          <a:p>
+            <a:pPr algn="l"/>
+            <a:r>
+              <a:rPr sz="2200" b="1" i="0">
+                <a:solidFill>
+                  <a:srgbClr val="003DA5"/>
+                </a:solidFill>
+                <a:latin typeface="Arial"/>
+              </a:rPr>
+              <a:t>Verbundpartner-Einwilligung: Pflichtcheck vor jeder Übergabe</a:t>
+            </a:r>
+          </a:p>
+        </p:txBody>
+      </p:sp>
+      <p:sp>
+        <p:nvSpPr>
+          <p:cNvPr id="5" name="Rectangle 4"/>
+          <p:cNvSpPr/>
+          <p:nvPr/>
+        </p:nvSpPr>
+        <p:spPr>
+          <a:xfrm>
+            <a:off x="365760" y="1005840"/>
+            <a:ext cx="11430000" cy="27432"/>
+          </a:xfrm>
+          <a:prstGeom prst="rect">
+            <a:avLst/>
+          </a:prstGeom>
+          <a:solidFill>
+            <a:srgbClr val="D1D5DB"/>
+          </a:solidFill>
+          <a:ln>
+            <a:noFill/>
+          </a:ln>
+        </p:spPr>
+        <p:style>
+          <a:lnRef idx="1">
+            <a:schemeClr val="accent1"/>
+          </a:lnRef>
+          <a:fillRef idx="3">
+            <a:schemeClr val="accent1"/>
+          </a:fillRef>
+          <a:effectRef idx="2">
+            <a:schemeClr val="accent1"/>
+          </a:effectRef>
+          <a:fontRef idx="minor">
+            <a:schemeClr val="lt1"/>
+          </a:fontRef>
+        </p:style>
+        <p:txBody>
+          <a:bodyPr rtlCol="0" anchor="ctr"/>
+          <a:lstStyle/>
+          <a:p>
+            <a:pPr algn="ctr"/>
+          </a:p>
+        </p:txBody>
+      </p:sp>
+      <p:sp>
+        <p:nvSpPr>
+          <p:cNvPr id="6" name="TextBox 5"/>
+          <p:cNvSpPr txBox="1"/>
+          <p:nvPr/>
+        </p:nvSpPr>
+        <p:spPr>
+          <a:xfrm>
+            <a:off x="365760" y="1143000"/>
+            <a:ext cx="11430000" cy="5212080"/>
+          </a:xfrm>
+          <a:prstGeom prst="rect">
+            <a:avLst/>
+          </a:prstGeom>
+          <a:noFill/>
+        </p:spPr>
+        <p:txBody>
+          <a:bodyPr wrap="square">
+            <a:spAutoFit/>
+          </a:bodyPr>
+          <a:lstStyle/>
+          <a:p>
+            <a:pPr>
+              <a:spcBef>
+                <a:spcPts val="500"/>
+              </a:spcBef>
+            </a:pPr>
+            <a:r>
+              <a:rPr sz="1500">
+                <a:solidFill>
+                  <a:srgbClr val="003DA5"/>
+                </a:solidFill>
+                <a:latin typeface="Arial"/>
+              </a:rPr>
+              <a:t>▪  </a:t>
+            </a:r>
+            <a:r>
+              <a:rPr sz="1700" b="1">
+                <a:solidFill>
+                  <a:srgbClr val="003DA5"/>
+                </a:solidFill>
+                <a:latin typeface="Arial"/>
+              </a:rPr>
+              <a:t>Ohne dokumentierte Einwilligung des Kunden darf der Verbundpartner nicht kontaktiert werden.: </a:t>
+            </a:r>
+            <a:r>
+              <a:rPr sz="1700">
+                <a:solidFill>
+                  <a:srgbClr val="1A1A1A"/>
+                </a:solidFill>
+                <a:latin typeface="Arial"/>
+              </a:rPr>
+              <a:t>In der Praxis der VR-Banken ist die Einwilligung zur Verbundpartner-Datenübermittlung standardmäßig Teil der Kontoeröffnungsunterlagen (VR-Smart-Finanzplan-Einwilligungsformular…</a:t>
+            </a:r>
+          </a:p>
+          <a:p>
+            <a:pPr>
+              <a:spcBef>
+                <a:spcPts val="500"/>
+              </a:spcBef>
+            </a:pPr>
+            <a:r>
+              <a:rPr sz="1500">
+                <a:solidFill>
+                  <a:srgbClr val="003DA5"/>
+                </a:solidFill>
+                <a:latin typeface="Arial"/>
+              </a:rPr>
+              <a:t>▪  </a:t>
+            </a:r>
+            <a:r>
+              <a:rPr sz="1700" b="1">
+                <a:solidFill>
+                  <a:srgbClr val="003DA5"/>
+                </a:solidFill>
+                <a:latin typeface="Arial"/>
+              </a:rPr>
+              <a:t>Handlungsregel: </a:t>
+            </a:r>
+            <a:r>
+              <a:rPr sz="1700">
+                <a:solidFill>
+                  <a:srgbClr val="1A1A1A"/>
+                </a:solidFill>
+                <a:latin typeface="Arial"/>
+              </a:rPr>
+              <a:t>Vor jeder Verbund-Übergabe prüfen: Liegt die Einwilligung vor? In agree ist diese typischerweise im Kundenstamm / Kundenblatt unter DSGVO-Einwilligungen sichtbar. Im Zweifel:…</a:t>
+            </a:r>
+          </a:p>
+          <a:p>
+            <a:pPr>
+              <a:spcBef>
+                <a:spcPts val="500"/>
+              </a:spcBef>
+            </a:pPr>
+            <a:r>
+              <a:rPr sz="1500">
+                <a:solidFill>
+                  <a:srgbClr val="003DA5"/>
+                </a:solidFill>
+                <a:latin typeface="Arial"/>
+              </a:rPr>
+              <a:t>▪  </a:t>
+            </a:r>
+            <a:r>
+              <a:rPr sz="1700" b="1">
+                <a:solidFill>
+                  <a:srgbClr val="003DA5"/>
+                </a:solidFill>
+                <a:latin typeface="Arial"/>
+              </a:rPr>
+              <a:t>Pflichthinweis Verbundpartner-Einwilligung: </a:t>
+            </a:r>
+            <a:r>
+              <a:rPr sz="1700">
+                <a:solidFill>
+                  <a:srgbClr val="1A1A1A"/>
+                </a:solidFill>
+                <a:latin typeface="Arial"/>
+              </a:rPr>
+              <a:t>Für die Weitergabe von Kundendaten an Verbundpartner (R+V, Union Investment etc.) ist eine separate Einwilligung erforderlich – niemals davon ausgehen, dass die allgemeine…</a:t>
+            </a:r>
+          </a:p>
+        </p:txBody>
+      </p:sp>
+    </p:spTree>
+  </p:cSld>
+  <p:clrMapOvr>
+    <a:masterClrMapping/>
+  </p:clrMapOvr>
+</p:sld>
+</file>
+
+<file path=ppt/slides/slide17.xml><?xml version="1.0" encoding="utf-8"?>
+<p:sld xmlns:a="http://schemas.openxmlformats.org/drawingml/2006/main" xmlns:p="http://schemas.openxmlformats.org/presentationml/2006/main" xmlns:r="http://schemas.openxmlformats.org/officeDocument/2006/relationships">
+  <p:cSld>
+    <p:bg>
+      <p:bgPr>
+        <a:solidFill>
+          <a:srgbClr val="1A1A1A"/>
+        </a:solidFill>
+        <a:effectLst/>
+      </p:bgPr>
+    </p:bg>
+    <p:spTree>
+      <p:nvGrpSpPr>
+        <p:cNvPr id="1" name=""/>
+        <p:cNvGrpSpPr/>
+        <p:nvPr/>
+      </p:nvGrpSpPr>
+      <p:grpSpPr/>
+      <p:sp>
+        <p:nvSpPr>
+          <p:cNvPr id="2" name="Rectangle 1"/>
+          <p:cNvSpPr/>
+          <p:nvPr/>
+        </p:nvSpPr>
+        <p:spPr>
+          <a:xfrm>
+            <a:off x="0" y="0"/>
+            <a:ext cx="73152" cy="6858000"/>
+          </a:xfrm>
+          <a:prstGeom prst="rect">
+            <a:avLst/>
+          </a:prstGeom>
+          <a:solidFill>
+            <a:srgbClr val="E05B00"/>
+          </a:solidFill>
+          <a:ln>
+            <a:noFill/>
+          </a:ln>
+        </p:spPr>
+        <p:style>
+          <a:lnRef idx="1">
+            <a:schemeClr val="accent1"/>
+          </a:lnRef>
+          <a:fillRef idx="3">
+            <a:schemeClr val="accent1"/>
+          </a:fillRef>
+          <a:effectRef idx="2">
+            <a:schemeClr val="accent1"/>
+          </a:effectRef>
+          <a:fontRef idx="minor">
+            <a:schemeClr val="lt1"/>
+          </a:fontRef>
+        </p:style>
+        <p:txBody>
+          <a:bodyPr rtlCol="0" anchor="ctr"/>
+          <a:lstStyle/>
+          <a:p>
+            <a:pPr algn="ctr"/>
+          </a:p>
+        </p:txBody>
+      </p:sp>
+      <p:sp>
+        <p:nvSpPr>
+          <p:cNvPr id="3" name="TextBox 2"/>
+          <p:cNvSpPr txBox="1"/>
+          <p:nvPr/>
+        </p:nvSpPr>
+        <p:spPr>
+          <a:xfrm>
+            <a:off x="365760" y="2011680"/>
+            <a:ext cx="11430000" cy="2011680"/>
+          </a:xfrm>
+          <a:prstGeom prst="rect">
+            <a:avLst/>
+          </a:prstGeom>
+          <a:noFill/>
+        </p:spPr>
+        <p:txBody>
+          <a:bodyPr wrap="square">
+            <a:spAutoFit/>
+          </a:bodyPr>
+          <a:lstStyle/>
+          <a:p>
+            <a:pPr algn="l"/>
+            <a:r>
+              <a:rPr sz="3600" b="1" i="0">
+                <a:solidFill>
+                  <a:srgbClr val="FFFFFF"/>
+                </a:solidFill>
+                <a:latin typeface="Arial"/>
+              </a:rPr>
+              <a:t>Transparenz als Vertrauensmoment</a:t>
+            </a:r>
+          </a:p>
+        </p:txBody>
+      </p:sp>
+    </p:spTree>
+  </p:cSld>
+  <p:clrMapOvr>
+    <a:masterClrMapping/>
+  </p:clrMapOvr>
+</p:sld>
+</file>
+
+<file path=ppt/slides/slide18.xml><?xml version="1.0" encoding="utf-8"?>
+<p:sld xmlns:a="http://schemas.openxmlformats.org/drawingml/2006/main" xmlns:p="http://schemas.openxmlformats.org/presentationml/2006/main" xmlns:r="http://schemas.openxmlformats.org/officeDocument/2006/relationships">
+  <p:cSld>
+    <p:bg>
+      <p:bgPr>
+        <a:solidFill>
+          <a:srgbClr val="FFFFFF"/>
+        </a:solidFill>
+        <a:effectLst/>
+      </p:bgPr>
+    </p:bg>
+    <p:spTree>
+      <p:nvGrpSpPr>
+        <p:cNvPr id="1" name=""/>
+        <p:cNvGrpSpPr/>
+        <p:nvPr/>
+      </p:nvGrpSpPr>
+      <p:grpSpPr/>
+      <p:sp>
+        <p:nvSpPr>
+          <p:cNvPr id="2" name="Rectangle 1"/>
+          <p:cNvSpPr/>
+          <p:nvPr/>
+        </p:nvSpPr>
+        <p:spPr>
+          <a:xfrm>
+            <a:off x="0" y="0"/>
+            <a:ext cx="73152" cy="6858000"/>
+          </a:xfrm>
+          <a:prstGeom prst="rect">
+            <a:avLst/>
+          </a:prstGeom>
+          <a:solidFill>
+            <a:srgbClr val="003DA5"/>
+          </a:solidFill>
+          <a:ln>
+            <a:noFill/>
+          </a:ln>
+        </p:spPr>
+        <p:style>
+          <a:lnRef idx="1">
+            <a:schemeClr val="accent1"/>
+          </a:lnRef>
+          <a:fillRef idx="3">
+            <a:schemeClr val="accent1"/>
+          </a:fillRef>
+          <a:effectRef idx="2">
+            <a:schemeClr val="accent1"/>
+          </a:effectRef>
+          <a:fontRef idx="minor">
+            <a:schemeClr val="lt1"/>
+          </a:fontRef>
+        </p:style>
+        <p:txBody>
+          <a:bodyPr rtlCol="0" anchor="ctr"/>
+          <a:lstStyle/>
+          <a:p>
+            <a:pPr algn="ctr"/>
+          </a:p>
+        </p:txBody>
+      </p:sp>
+      <p:sp>
+        <p:nvSpPr>
+          <p:cNvPr id="3" name="TextBox 2"/>
+          <p:cNvSpPr txBox="1"/>
+          <p:nvPr/>
+        </p:nvSpPr>
+        <p:spPr>
+          <a:xfrm>
+            <a:off x="228600" y="182880"/>
+            <a:ext cx="11430000" cy="320040"/>
+          </a:xfrm>
+          <a:prstGeom prst="rect">
+            <a:avLst/>
+          </a:prstGeom>
+          <a:noFill/>
+        </p:spPr>
+        <p:txBody>
+          <a:bodyPr wrap="square">
+            <a:spAutoFit/>
+          </a:bodyPr>
+          <a:lstStyle/>
+          <a:p>
+            <a:pPr algn="l"/>
+            <a:r>
+              <a:rPr sz="900" b="0" i="0">
+                <a:solidFill>
+                  <a:srgbClr val="556575"/>
+                </a:solidFill>
+                <a:latin typeface="Arial"/>
+              </a:rPr>
+              <a:t>M18 · 4.4 DSGVO-konforme Datennutzung im Vertrieb</a:t>
+            </a:r>
+          </a:p>
+        </p:txBody>
+      </p:sp>
+      <p:sp>
+        <p:nvSpPr>
+          <p:cNvPr id="4" name="TextBox 3"/>
+          <p:cNvSpPr txBox="1"/>
+          <p:nvPr/>
+        </p:nvSpPr>
+        <p:spPr>
+          <a:xfrm>
+            <a:off x="365760" y="274320"/>
+            <a:ext cx="11430000" cy="777240"/>
+          </a:xfrm>
+          <a:prstGeom prst="rect">
+            <a:avLst/>
+          </a:prstGeom>
+          <a:noFill/>
+        </p:spPr>
+        <p:txBody>
+          <a:bodyPr wrap="square">
+            <a:spAutoFit/>
+          </a:bodyPr>
+          <a:lstStyle/>
+          <a:p>
+            <a:pPr algn="l"/>
+            <a:r>
+              <a:rPr sz="2200" b="1" i="0">
+                <a:solidFill>
+                  <a:srgbClr val="003DA5"/>
+                </a:solidFill>
+                <a:latin typeface="Arial"/>
+              </a:rPr>
+              <a:t>Transparenz als Vertrauensmoment</a:t>
+            </a:r>
+          </a:p>
+        </p:txBody>
+      </p:sp>
+      <p:sp>
+        <p:nvSpPr>
+          <p:cNvPr id="5" name="Rectangle 4"/>
+          <p:cNvSpPr/>
+          <p:nvPr/>
+        </p:nvSpPr>
+        <p:spPr>
+          <a:xfrm>
+            <a:off x="365760" y="1005840"/>
+            <a:ext cx="11430000" cy="27432"/>
+          </a:xfrm>
+          <a:prstGeom prst="rect">
+            <a:avLst/>
+          </a:prstGeom>
+          <a:solidFill>
+            <a:srgbClr val="D1D5DB"/>
+          </a:solidFill>
+          <a:ln>
+            <a:noFill/>
+          </a:ln>
+        </p:spPr>
+        <p:style>
+          <a:lnRef idx="1">
+            <a:schemeClr val="accent1"/>
+          </a:lnRef>
+          <a:fillRef idx="3">
+            <a:schemeClr val="accent1"/>
+          </a:fillRef>
+          <a:effectRef idx="2">
+            <a:schemeClr val="accent1"/>
+          </a:effectRef>
+          <a:fontRef idx="minor">
+            <a:schemeClr val="lt1"/>
+          </a:fontRef>
+        </p:style>
+        <p:txBody>
+          <a:bodyPr rtlCol="0" anchor="ctr"/>
+          <a:lstStyle/>
+          <a:p>
+            <a:pPr algn="ctr"/>
+          </a:p>
+        </p:txBody>
+      </p:sp>
+      <p:sp>
+        <p:nvSpPr>
+          <p:cNvPr id="6" name="TextBox 5"/>
+          <p:cNvSpPr txBox="1"/>
+          <p:nvPr/>
+        </p:nvSpPr>
+        <p:spPr>
+          <a:xfrm>
+            <a:off x="365760" y="1143000"/>
+            <a:ext cx="11430000" cy="5212080"/>
+          </a:xfrm>
+          <a:prstGeom prst="rect">
+            <a:avLst/>
+          </a:prstGeom>
+          <a:noFill/>
+        </p:spPr>
+        <p:txBody>
+          <a:bodyPr wrap="square">
+            <a:spAutoFit/>
+          </a:bodyPr>
+          <a:lstStyle/>
+          <a:p>
+            <a:pPr>
+              <a:spcBef>
+                <a:spcPts val="500"/>
+              </a:spcBef>
+            </a:pPr>
+            <a:r>
+              <a:rPr sz="1500">
+                <a:solidFill>
+                  <a:srgbClr val="003DA5"/>
+                </a:solidFill>
+                <a:latin typeface="Arial"/>
+              </a:rPr>
+              <a:t>▪  </a:t>
+            </a:r>
+            <a:r>
+              <a:rPr sz="1700">
+                <a:solidFill>
+                  <a:srgbClr val="1A1A1A"/>
+                </a:solidFill>
+                <a:latin typeface="Arial"/>
+              </a:rPr>
+              <a:t>Wenn Sie einem Kunden erklären: „Ich habe gesehen, dass Ihre Kreditlinie in den letzten Wochen stark ausgelastet war – deshalb wollte ich proaktiv auf Sie…</a:t>
+            </a:r>
+          </a:p>
+        </p:txBody>
+      </p:sp>
+    </p:spTree>
+  </p:cSld>
+  <p:clrMapOvr>
+    <a:masterClrMapping/>
+  </p:clrMapOvr>
+</p:sld>
+</file>
+
+<file path=ppt/slides/slide19.xml><?xml version="1.0" encoding="utf-8"?>
+<p:sld xmlns:a="http://schemas.openxmlformats.org/drawingml/2006/main" xmlns:p="http://schemas.openxmlformats.org/presentationml/2006/main" xmlns:r="http://schemas.openxmlformats.org/officeDocument/2006/relationships">
+  <p:cSld>
+    <p:bg>
+      <p:bgPr>
+        <a:solidFill>
+          <a:srgbClr val="1A1A1A"/>
+        </a:solidFill>
+        <a:effectLst/>
+      </p:bgPr>
+    </p:bg>
+    <p:spTree>
+      <p:nvGrpSpPr>
+        <p:cNvPr id="1" name=""/>
+        <p:cNvGrpSpPr/>
+        <p:nvPr/>
+      </p:nvGrpSpPr>
+      <p:grpSpPr/>
+      <p:sp>
+        <p:nvSpPr>
+          <p:cNvPr id="2" name="Rectangle 1"/>
+          <p:cNvSpPr/>
+          <p:nvPr/>
+        </p:nvSpPr>
+        <p:spPr>
+          <a:xfrm>
+            <a:off x="0" y="0"/>
+            <a:ext cx="73152" cy="6858000"/>
+          </a:xfrm>
+          <a:prstGeom prst="rect">
+            <a:avLst/>
+          </a:prstGeom>
+          <a:solidFill>
+            <a:srgbClr val="E05B00"/>
+          </a:solidFill>
+          <a:ln>
+            <a:noFill/>
+          </a:ln>
+        </p:spPr>
+        <p:style>
+          <a:lnRef idx="1">
+            <a:schemeClr val="accent1"/>
+          </a:lnRef>
+          <a:fillRef idx="3">
+            <a:schemeClr val="accent1"/>
+          </a:fillRef>
+          <a:effectRef idx="2">
+            <a:schemeClr val="accent1"/>
+          </a:effectRef>
+          <a:fontRef idx="minor">
+            <a:schemeClr val="lt1"/>
+          </a:fontRef>
+        </p:style>
+        <p:txBody>
+          <a:bodyPr rtlCol="0" anchor="ctr"/>
+          <a:lstStyle/>
+          <a:p>
+            <a:pPr algn="ctr"/>
+          </a:p>
+        </p:txBody>
+      </p:sp>
+      <p:sp>
+        <p:nvSpPr>
+          <p:cNvPr id="3" name="TextBox 2"/>
+          <p:cNvSpPr txBox="1"/>
+          <p:nvPr/>
+        </p:nvSpPr>
+        <p:spPr>
+          <a:xfrm>
+            <a:off x="365760" y="2011680"/>
+            <a:ext cx="11430000" cy="2011680"/>
+          </a:xfrm>
+          <a:prstGeom prst="rect">
+            <a:avLst/>
+          </a:prstGeom>
+          <a:noFill/>
+        </p:spPr>
+        <p:txBody>
+          <a:bodyPr wrap="square">
+            <a:spAutoFit/>
+          </a:bodyPr>
+          <a:lstStyle/>
+          <a:p>
+            <a:pPr algn="l"/>
+            <a:r>
+              <a:rPr sz="3600" b="1" i="0">
+                <a:solidFill>
+                  <a:srgbClr val="FFFFFF"/>
+                </a:solidFill>
+                <a:latin typeface="Arial"/>
+              </a:rPr>
+              <a:t>Arbeitsblatt A: Meine Trigger-Bibliothek</a:t>
+            </a:r>
+          </a:p>
+        </p:txBody>
+      </p:sp>
+    </p:spTree>
+  </p:cSld>
+  <p:clrMapOvr>
+    <a:masterClrMapping/>
+  </p:clrMapOvr>
+</p:sld>
+</file>
+
+<file path=ppt/slides/slide2.xml><?xml version="1.0" encoding="utf-8"?>
+<p:sld xmlns:a="http://schemas.openxmlformats.org/drawingml/2006/main" xmlns:p="http://schemas.openxmlformats.org/presentationml/2006/main" xmlns:r="http://schemas.openxmlformats.org/officeDocument/2006/relationships">
+  <p:cSld>
+    <p:bg>
+      <p:bgPr>
+        <a:solidFill>
+          <a:srgbClr val="F4F6FA"/>
+        </a:solidFill>
+        <a:effectLst/>
+      </p:bgPr>
+    </p:bg>
+    <p:spTree>
+      <p:nvGrpSpPr>
+        <p:cNvPr id="1" name=""/>
+        <p:cNvGrpSpPr/>
+        <p:nvPr/>
+      </p:nvGrpSpPr>
+      <p:grpSpPr/>
+      <p:sp>
+        <p:nvSpPr>
+          <p:cNvPr id="2" name="Rectangle 1"/>
+          <p:cNvSpPr/>
+          <p:nvPr/>
+        </p:nvSpPr>
+        <p:spPr>
+          <a:xfrm>
+            <a:off x="0" y="0"/>
+            <a:ext cx="73152" cy="6858000"/>
+          </a:xfrm>
+          <a:prstGeom prst="rect">
+            <a:avLst/>
+          </a:prstGeom>
+          <a:solidFill>
+            <a:srgbClr val="003DA5"/>
+          </a:solidFill>
+          <a:ln>
+            <a:noFill/>
+          </a:ln>
+        </p:spPr>
+        <p:style>
+          <a:lnRef idx="1">
+            <a:schemeClr val="accent1"/>
+          </a:lnRef>
+          <a:fillRef idx="3">
+            <a:schemeClr val="accent1"/>
+          </a:fillRef>
+          <a:effectRef idx="2">
+            <a:schemeClr val="accent1"/>
+          </a:effectRef>
+          <a:fontRef idx="minor">
+            <a:schemeClr val="lt1"/>
+          </a:fontRef>
+        </p:style>
+        <p:txBody>
+          <a:bodyPr rtlCol="0" anchor="ctr"/>
+          <a:lstStyle/>
+          <a:p>
+            <a:pPr algn="ctr"/>
+          </a:p>
+        </p:txBody>
+      </p:sp>
+      <p:sp>
+        <p:nvSpPr>
+          <p:cNvPr id="3" name="Rectangle 2"/>
+          <p:cNvSpPr/>
+          <p:nvPr/>
+        </p:nvSpPr>
+        <p:spPr>
+          <a:xfrm>
+            <a:off x="228600" y="804672"/>
+            <a:ext cx="11612880" cy="22860"/>
+          </a:xfrm>
+          <a:prstGeom prst="rect">
+            <a:avLst/>
+          </a:prstGeom>
+          <a:solidFill>
+            <a:srgbClr val="D1D5DB"/>
+          </a:solidFill>
+          <a:ln>
+            <a:noFill/>
+          </a:ln>
+        </p:spPr>
+        <p:style>
+          <a:lnRef idx="1">
+            <a:schemeClr val="accent1"/>
+          </a:lnRef>
+          <a:fillRef idx="3">
+            <a:schemeClr val="accent1"/>
+          </a:fillRef>
+          <a:effectRef idx="2">
+            <a:schemeClr val="accent1"/>
+          </a:effectRef>
+          <a:fontRef idx="minor">
+            <a:schemeClr val="lt1"/>
+          </a:fontRef>
+        </p:style>
+        <p:txBody>
+          <a:bodyPr rtlCol="0" anchor="ctr"/>
+          <a:lstStyle/>
+          <a:p>
+            <a:pPr algn="ctr"/>
+          </a:p>
+        </p:txBody>
+      </p:sp>
+      <p:sp>
+        <p:nvSpPr>
+          <p:cNvPr id="4" name="TextBox 3"/>
+          <p:cNvSpPr txBox="1"/>
+          <p:nvPr/>
+        </p:nvSpPr>
+        <p:spPr>
+          <a:xfrm>
+            <a:off x="365760" y="320040"/>
+            <a:ext cx="4572000" cy="347472"/>
+          </a:xfrm>
+          <a:prstGeom prst="rect">
+            <a:avLst/>
+          </a:prstGeom>
+          <a:noFill/>
+        </p:spPr>
+        <p:txBody>
+          <a:bodyPr wrap="square">
+            <a:spAutoFit/>
+          </a:bodyPr>
+          <a:lstStyle/>
+          <a:p>
+            <a:pPr algn="l"/>
+            <a:r>
+              <a:rPr sz="900" b="1" i="0">
+                <a:solidFill>
+                  <a:srgbClr val="003DA5"/>
+                </a:solidFill>
+                <a:latin typeface="Arial"/>
+              </a:rPr>
+              <a:t>LERNZIELE</a:t>
+            </a:r>
+          </a:p>
+        </p:txBody>
+      </p:sp>
+      <p:sp>
+        <p:nvSpPr>
+          <p:cNvPr id="5" name="TextBox 4"/>
+          <p:cNvSpPr txBox="1"/>
+          <p:nvPr/>
+        </p:nvSpPr>
+        <p:spPr>
+          <a:xfrm>
+            <a:off x="365760" y="502920"/>
+            <a:ext cx="10058400" cy="640080"/>
+          </a:xfrm>
+          <a:prstGeom prst="rect">
+            <a:avLst/>
+          </a:prstGeom>
+          <a:noFill/>
+        </p:spPr>
+        <p:txBody>
+          <a:bodyPr wrap="square">
+            <a:spAutoFit/>
+          </a:bodyPr>
+          <a:lstStyle/>
+          <a:p>
+            <a:pPr algn="l"/>
+            <a:r>
+              <a:rPr sz="2400" b="1" i="0">
+                <a:solidFill>
+                  <a:srgbClr val="1A1A1A"/>
+                </a:solidFill>
+                <a:latin typeface="Arial"/>
+              </a:rPr>
+              <a:t>Was Sie nach diesem Modul können.</a:t>
+            </a:r>
+          </a:p>
+        </p:txBody>
+      </p:sp>
+      <p:sp>
+        <p:nvSpPr>
+          <p:cNvPr id="6" name="TextBox 5"/>
+          <p:cNvSpPr txBox="1"/>
+          <p:nvPr/>
+        </p:nvSpPr>
+        <p:spPr>
+          <a:xfrm>
+            <a:off x="365760" y="1234440"/>
+            <a:ext cx="11430000" cy="5303520"/>
+          </a:xfrm>
+          <a:prstGeom prst="rect">
+            <a:avLst/>
+          </a:prstGeom>
+          <a:noFill/>
+        </p:spPr>
+        <p:txBody>
+          <a:bodyPr wrap="square">
+            <a:spAutoFit/>
+          </a:bodyPr>
+          <a:lstStyle/>
+          <a:p>
+            <a:pPr>
+              <a:spcBef>
+                <a:spcPts val="500"/>
+              </a:spcBef>
+            </a:pPr>
+            <a:r>
+              <a:rPr sz="1500">
+                <a:solidFill>
+                  <a:srgbClr val="003DA5"/>
+                </a:solidFill>
+                <a:latin typeface="Arial"/>
+              </a:rPr>
+              <a:t>▪  </a:t>
+            </a:r>
+            <a:r>
+              <a:rPr sz="1700">
+                <a:solidFill>
+                  <a:srgbClr val="1A1A1A"/>
+                </a:solidFill>
+                <a:latin typeface="Arial"/>
+              </a:rPr>
+              <a:t>Mindestens fünf Trigger-Ereignisse aus agree-Daten identifizieren und priorisieren</a:t>
+            </a:r>
+          </a:p>
+          <a:p>
+            <a:pPr>
+              <a:spcBef>
+                <a:spcPts val="500"/>
+              </a:spcBef>
+            </a:pPr>
+            <a:r>
+              <a:rPr sz="1500">
+                <a:solidFill>
+                  <a:srgbClr val="003DA5"/>
+                </a:solidFill>
+                <a:latin typeface="Arial"/>
+              </a:rPr>
+              <a:t>▪  </a:t>
+            </a:r>
+            <a:r>
+              <a:rPr sz="1700">
+                <a:solidFill>
+                  <a:srgbClr val="1A1A1A"/>
+                </a:solidFill>
+                <a:latin typeface="Arial"/>
+              </a:rPr>
+              <a:t>Datenqualität des CRM-Bestands analysieren und Lücken benennen</a:t>
+            </a:r>
+          </a:p>
+          <a:p>
+            <a:pPr>
+              <a:spcBef>
+                <a:spcPts val="500"/>
+              </a:spcBef>
+            </a:pPr>
+            <a:r>
+              <a:rPr sz="1500">
+                <a:solidFill>
+                  <a:srgbClr val="003DA5"/>
+                </a:solidFill>
+                <a:latin typeface="Arial"/>
+              </a:rPr>
+              <a:t>▪  </a:t>
+            </a:r>
+            <a:r>
+              <a:rPr sz="1700">
+                <a:solidFill>
+                  <a:srgbClr val="1A1A1A"/>
+                </a:solidFill>
+                <a:latin typeface="Arial"/>
+              </a:rPr>
+              <a:t>Reaktiven und trigger-basierten Vertrieb unterscheiden und erläutern</a:t>
+            </a:r>
+          </a:p>
+          <a:p>
+            <a:pPr>
+              <a:spcBef>
+                <a:spcPts val="500"/>
+              </a:spcBef>
+            </a:pPr>
+            <a:r>
+              <a:rPr sz="1500">
+                <a:solidFill>
+                  <a:srgbClr val="003DA5"/>
+                </a:solidFill>
+                <a:latin typeface="Arial"/>
+              </a:rPr>
+              <a:t>▪  </a:t>
+            </a:r>
+            <a:r>
+              <a:rPr sz="1700">
+                <a:solidFill>
+                  <a:srgbClr val="1A1A1A"/>
+                </a:solidFill>
+                <a:latin typeface="Arial"/>
+              </a:rPr>
+              <a:t>Drei Trigger-Typen hinsichtlich Vorlaufzeit und Wirksamkeit bewerten</a:t>
+            </a:r>
+          </a:p>
+          <a:p>
+            <a:pPr>
+              <a:spcBef>
+                <a:spcPts val="500"/>
+              </a:spcBef>
+            </a:pPr>
+            <a:r>
+              <a:rPr sz="1500">
+                <a:solidFill>
+                  <a:srgbClr val="003DA5"/>
+                </a:solidFill>
+                <a:latin typeface="Arial"/>
+              </a:rPr>
+              <a:t>▪  </a:t>
+            </a:r>
+            <a:r>
+              <a:rPr sz="1700">
+                <a:solidFill>
+                  <a:srgbClr val="1A1A1A"/>
+                </a:solidFill>
+                <a:latin typeface="Arial"/>
+              </a:rPr>
+              <a:t>Grundsätze der DSGVO-konformen Datennutzung im Vertriebskontext anwenden</a:t>
+            </a:r>
+          </a:p>
+        </p:txBody>
+      </p:sp>
+    </p:spTree>
+  </p:cSld>
+  <p:clrMapOvr>
+    <a:masterClrMapping/>
+  </p:clrMapOvr>
+</p:sld>
+</file>
+
+<file path=ppt/slides/slide20.xml><?xml version="1.0" encoding="utf-8"?>
+<p:sld xmlns:a="http://schemas.openxmlformats.org/drawingml/2006/main" xmlns:p="http://schemas.openxmlformats.org/presentationml/2006/main" xmlns:r="http://schemas.openxmlformats.org/officeDocument/2006/relationships">
+  <p:cSld>
+    <p:bg>
+      <p:bgPr>
+        <a:solidFill>
+          <a:srgbClr val="FFFFFF"/>
+        </a:solidFill>
+        <a:effectLst/>
+      </p:bgPr>
+    </p:bg>
+    <p:spTree>
+      <p:nvGrpSpPr>
+        <p:cNvPr id="1" name=""/>
+        <p:cNvGrpSpPr/>
+        <p:nvPr/>
+      </p:nvGrpSpPr>
+      <p:grpSpPr/>
+      <p:sp>
+        <p:nvSpPr>
+          <p:cNvPr id="2" name="Rectangle 1"/>
+          <p:cNvSpPr/>
+          <p:nvPr/>
+        </p:nvSpPr>
+        <p:spPr>
+          <a:xfrm>
+            <a:off x="0" y="0"/>
+            <a:ext cx="73152" cy="6858000"/>
+          </a:xfrm>
+          <a:prstGeom prst="rect">
+            <a:avLst/>
+          </a:prstGeom>
+          <a:solidFill>
+            <a:srgbClr val="003DA5"/>
+          </a:solidFill>
+          <a:ln>
+            <a:noFill/>
+          </a:ln>
+        </p:spPr>
+        <p:style>
+          <a:lnRef idx="1">
+            <a:schemeClr val="accent1"/>
+          </a:lnRef>
+          <a:fillRef idx="3">
+            <a:schemeClr val="accent1"/>
+          </a:fillRef>
+          <a:effectRef idx="2">
+            <a:schemeClr val="accent1"/>
+          </a:effectRef>
+          <a:fontRef idx="minor">
+            <a:schemeClr val="lt1"/>
+          </a:fontRef>
+        </p:style>
+        <p:txBody>
+          <a:bodyPr rtlCol="0" anchor="ctr"/>
+          <a:lstStyle/>
+          <a:p>
+            <a:pPr algn="ctr"/>
+          </a:p>
+        </p:txBody>
+      </p:sp>
+      <p:sp>
+        <p:nvSpPr>
+          <p:cNvPr id="3" name="TextBox 2"/>
+          <p:cNvSpPr txBox="1"/>
+          <p:nvPr/>
+        </p:nvSpPr>
+        <p:spPr>
+          <a:xfrm>
+            <a:off x="228600" y="182880"/>
+            <a:ext cx="11430000" cy="320040"/>
+          </a:xfrm>
+          <a:prstGeom prst="rect">
+            <a:avLst/>
+          </a:prstGeom>
+          <a:noFill/>
+        </p:spPr>
+        <p:txBody>
+          <a:bodyPr wrap="square">
+            <a:spAutoFit/>
+          </a:bodyPr>
+          <a:lstStyle/>
+          <a:p>
+            <a:pPr algn="l"/>
+            <a:r>
+              <a:rPr sz="900" b="0" i="0">
+                <a:solidFill>
+                  <a:srgbClr val="556575"/>
+                </a:solidFill>
+                <a:latin typeface="Arial"/>
+              </a:rPr>
+              <a:t>M18 · 4.7 Arbeitsblätter</a:t>
+            </a:r>
+          </a:p>
+        </p:txBody>
+      </p:sp>
+      <p:sp>
+        <p:nvSpPr>
+          <p:cNvPr id="4" name="TextBox 3"/>
+          <p:cNvSpPr txBox="1"/>
+          <p:nvPr/>
+        </p:nvSpPr>
+        <p:spPr>
+          <a:xfrm>
+            <a:off x="365760" y="274320"/>
+            <a:ext cx="11430000" cy="777240"/>
+          </a:xfrm>
+          <a:prstGeom prst="rect">
+            <a:avLst/>
+          </a:prstGeom>
+          <a:noFill/>
+        </p:spPr>
+        <p:txBody>
+          <a:bodyPr wrap="square">
+            <a:spAutoFit/>
+          </a:bodyPr>
+          <a:lstStyle/>
+          <a:p>
+            <a:pPr algn="l"/>
+            <a:r>
+              <a:rPr sz="2200" b="1" i="0">
+                <a:solidFill>
+                  <a:srgbClr val="003DA5"/>
+                </a:solidFill>
+                <a:latin typeface="Arial"/>
+              </a:rPr>
+              <a:t>Arbeitsblatt A: Meine Trigger-Bibliothek</a:t>
+            </a:r>
+          </a:p>
+        </p:txBody>
+      </p:sp>
+      <p:sp>
+        <p:nvSpPr>
+          <p:cNvPr id="5" name="Rectangle 4"/>
+          <p:cNvSpPr/>
+          <p:nvPr/>
+        </p:nvSpPr>
+        <p:spPr>
+          <a:xfrm>
+            <a:off x="365760" y="1005840"/>
+            <a:ext cx="11430000" cy="27432"/>
+          </a:xfrm>
+          <a:prstGeom prst="rect">
+            <a:avLst/>
+          </a:prstGeom>
+          <a:solidFill>
+            <a:srgbClr val="D1D5DB"/>
+          </a:solidFill>
+          <a:ln>
+            <a:noFill/>
+          </a:ln>
+        </p:spPr>
+        <p:style>
+          <a:lnRef idx="1">
+            <a:schemeClr val="accent1"/>
+          </a:lnRef>
+          <a:fillRef idx="3">
+            <a:schemeClr val="accent1"/>
+          </a:fillRef>
+          <a:effectRef idx="2">
+            <a:schemeClr val="accent1"/>
+          </a:effectRef>
+          <a:fontRef idx="minor">
+            <a:schemeClr val="lt1"/>
+          </a:fontRef>
+        </p:style>
+        <p:txBody>
+          <a:bodyPr rtlCol="0" anchor="ctr"/>
+          <a:lstStyle/>
+          <a:p>
+            <a:pPr algn="ctr"/>
+          </a:p>
+        </p:txBody>
+      </p:sp>
+      <p:graphicFrame>
+        <p:nvGraphicFramePr>
+          <p:cNvPr id="6" name="Table 5"/>
+          <p:cNvGraphicFramePr>
+            <a:graphicFrameLocks noGrp="1"/>
+          </p:cNvGraphicFramePr>
+          <p:nvPr/>
+        </p:nvGraphicFramePr>
+        <p:xfrm>
+          <a:off x="365760" y="1143000"/>
+          <a:ext cx="11430000" cy="3328416"/>
+        </p:xfrm>
+        <a:graphic>
+          <a:graphicData uri="http://schemas.openxmlformats.org/drawingml/2006/table">
+            <a:tbl>
+              <a:tblPr firstRow="1" bandRow="1">
+                <a:tableStyleId>{5C22544A-7EE6-4342-B048-85BDC9FD1C3A}</a:tableStyleId>
+              </a:tblPr>
+              <a:tblGrid>
+                <a:gridCol w="2857500"/>
+                <a:gridCol w="2857500"/>
+                <a:gridCol w="2857500"/>
+                <a:gridCol w="2857500"/>
+              </a:tblGrid>
+              <a:tr h="475488">
+                <a:tc>
+                  <a:txBody>
+                    <a:bodyPr wrap="square"/>
+                    <a:lstStyle/>
+                    <a:p>
+                      <a:r>
+                        <a:rPr sz="1100" b="1">
+                          <a:solidFill>
+                            <a:srgbClr val="FFFFFF"/>
+                          </a:solidFill>
+                          <a:latin typeface="Arial"/>
+                        </a:rPr>
+                        <a:t>Trigger-Typ</a:t>
+                      </a:r>
+                    </a:p>
+                  </a:txBody>
+                  <a:tcPr>
+                    <a:solidFill>
+                      <a:srgbClr val="003DA5"/>
+                    </a:solidFill>
+                  </a:tcPr>
+                </a:tc>
+                <a:tc>
+                  <a:txBody>
+                    <a:bodyPr wrap="square"/>
+                    <a:lstStyle/>
+                    <a:p>
+                      <a:r>
+                        <a:rPr sz="1100" b="1">
+                          <a:solidFill>
+                            <a:srgbClr val="FFFFFF"/>
+                          </a:solidFill>
+                          <a:latin typeface="Arial"/>
+                        </a:rPr>
+                        <a:t>Datensignal</a:t>
+                      </a:r>
+                    </a:p>
+                  </a:txBody>
+                  <a:tcPr>
+                    <a:solidFill>
+                      <a:srgbClr val="003DA5"/>
+                    </a:solidFill>
+                  </a:tcPr>
+                </a:tc>
+                <a:tc>
+                  <a:txBody>
+                    <a:bodyPr wrap="square"/>
+                    <a:lstStyle/>
+                    <a:p>
+                      <a:r>
+                        <a:rPr sz="1100" b="1">
+                          <a:solidFill>
+                            <a:srgbClr val="FFFFFF"/>
+                          </a:solidFill>
+                          <a:latin typeface="Arial"/>
+                        </a:rPr>
+                        <a:t>agree-Quelle</a:t>
+                      </a:r>
+                    </a:p>
+                  </a:txBody>
+                  <a:tcPr>
+                    <a:solidFill>
+                      <a:srgbClr val="003DA5"/>
+                    </a:solidFill>
+                  </a:tcPr>
+                </a:tc>
+                <a:tc>
+                  <a:txBody>
+                    <a:bodyPr wrap="square"/>
+                    <a:lstStyle/>
+                    <a:p>
+                      <a:r>
+                        <a:rPr sz="1100" b="1">
+                          <a:solidFill>
+                            <a:srgbClr val="FFFFFF"/>
+                          </a:solidFill>
+                          <a:latin typeface="Arial"/>
+                        </a:rPr>
+                        <a:t>Möglicher Bedarf</a:t>
+                      </a:r>
+                    </a:p>
+                  </a:txBody>
+                  <a:tcPr>
+                    <a:solidFill>
+                      <a:srgbClr val="003DA5"/>
+                    </a:solidFill>
+                  </a:tcPr>
+                </a:tc>
+              </a:tr>
+              <a:tr h="475488">
+                <a:tc>
+                  <a:txBody>
+                    <a:bodyPr wrap="square"/>
+                    <a:lstStyle/>
+                    <a:p>
+                      <a:r>
+                        <a:rPr sz="1100" b="0">
+                          <a:solidFill>
+                            <a:srgbClr val="1A1A1A"/>
+                          </a:solidFill>
+                          <a:latin typeface="Arial"/>
+                        </a:rPr>
+                        <a:t>Transaktional</a:t>
+                      </a:r>
+                    </a:p>
+                  </a:txBody>
+                  <a:tcPr>
+                    <a:solidFill>
+                      <a:srgbClr val="FFFFFF"/>
+                    </a:solidFill>
+                  </a:tcPr>
+                </a:tc>
+                <a:tc>
+                  <a:txBody>
+                    <a:bodyPr wrap="square"/>
+                    <a:lstStyle/>
+                    <a:p>
+                      <a:r>
+                        <a:rPr sz="1100" b="0">
+                          <a:solidFill>
+                            <a:srgbClr val="1A1A1A"/>
+                          </a:solidFill>
+                          <a:latin typeface="Arial"/>
+                        </a:rPr>
+                        <a:t/>
+                      </a:r>
+                    </a:p>
+                  </a:txBody>
+                  <a:tcPr>
+                    <a:solidFill>
+                      <a:srgbClr val="FFFFFF"/>
+                    </a:solidFill>
+                  </a:tcPr>
+                </a:tc>
+                <a:tc>
+                  <a:txBody>
+                    <a:bodyPr wrap="square"/>
+                    <a:lstStyle/>
+                    <a:p>
+                      <a:r>
+                        <a:rPr sz="1100" b="0">
+                          <a:solidFill>
+                            <a:srgbClr val="1A1A1A"/>
+                          </a:solidFill>
+                          <a:latin typeface="Arial"/>
+                        </a:rPr>
+                        <a:t/>
+                      </a:r>
+                    </a:p>
+                  </a:txBody>
+                  <a:tcPr>
+                    <a:solidFill>
+                      <a:srgbClr val="FFFFFF"/>
+                    </a:solidFill>
+                  </a:tcPr>
+                </a:tc>
+                <a:tc>
+                  <a:txBody>
+                    <a:bodyPr wrap="square"/>
+                    <a:lstStyle/>
+                    <a:p>
+                      <a:r>
+                        <a:rPr sz="1100" b="0">
+                          <a:solidFill>
+                            <a:srgbClr val="1A1A1A"/>
+                          </a:solidFill>
+                          <a:latin typeface="Arial"/>
+                        </a:rPr>
+                        <a:t/>
+                      </a:r>
+                    </a:p>
+                  </a:txBody>
+                  <a:tcPr>
+                    <a:solidFill>
+                      <a:srgbClr val="FFFFFF"/>
+                    </a:solidFill>
+                  </a:tcPr>
+                </a:tc>
+              </a:tr>
+              <a:tr h="475488">
+                <a:tc>
+                  <a:txBody>
+                    <a:bodyPr wrap="square"/>
+                    <a:lstStyle/>
+                    <a:p>
+                      <a:r>
+                        <a:rPr sz="1100" b="0">
+                          <a:solidFill>
+                            <a:srgbClr val="1A1A1A"/>
+                          </a:solidFill>
+                          <a:latin typeface="Arial"/>
+                        </a:rPr>
+                        <a:t>Transaktional</a:t>
+                      </a:r>
+                    </a:p>
+                  </a:txBody>
+                  <a:tcPr>
+                    <a:solidFill>
+                      <a:srgbClr val="F4F6FA"/>
+                    </a:solidFill>
+                  </a:tcPr>
+                </a:tc>
+                <a:tc>
+                  <a:txBody>
+                    <a:bodyPr wrap="square"/>
+                    <a:lstStyle/>
+                    <a:p>
+                      <a:r>
+                        <a:rPr sz="1100" b="0">
+                          <a:solidFill>
+                            <a:srgbClr val="1A1A1A"/>
+                          </a:solidFill>
+                          <a:latin typeface="Arial"/>
+                        </a:rPr>
+                        <a:t/>
+                      </a:r>
+                    </a:p>
+                  </a:txBody>
+                  <a:tcPr>
+                    <a:solidFill>
+                      <a:srgbClr val="F4F6FA"/>
+                    </a:solidFill>
+                  </a:tcPr>
+                </a:tc>
+                <a:tc>
+                  <a:txBody>
+                    <a:bodyPr wrap="square"/>
+                    <a:lstStyle/>
+                    <a:p>
+                      <a:r>
+                        <a:rPr sz="1100" b="0">
+                          <a:solidFill>
+                            <a:srgbClr val="1A1A1A"/>
+                          </a:solidFill>
+                          <a:latin typeface="Arial"/>
+                        </a:rPr>
+                        <a:t/>
+                      </a:r>
+                    </a:p>
+                  </a:txBody>
+                  <a:tcPr>
+                    <a:solidFill>
+                      <a:srgbClr val="F4F6FA"/>
+                    </a:solidFill>
+                  </a:tcPr>
+                </a:tc>
+                <a:tc>
+                  <a:txBody>
+                    <a:bodyPr wrap="square"/>
+                    <a:lstStyle/>
+                    <a:p>
+                      <a:r>
+                        <a:rPr sz="1100" b="0">
+                          <a:solidFill>
+                            <a:srgbClr val="1A1A1A"/>
+                          </a:solidFill>
+                          <a:latin typeface="Arial"/>
+                        </a:rPr>
+                        <a:t/>
+                      </a:r>
+                    </a:p>
+                  </a:txBody>
+                  <a:tcPr>
+                    <a:solidFill>
+                      <a:srgbClr val="F4F6FA"/>
+                    </a:solidFill>
+                  </a:tcPr>
+                </a:tc>
+              </a:tr>
+              <a:tr h="475488">
+                <a:tc>
+                  <a:txBody>
+                    <a:bodyPr wrap="square"/>
+                    <a:lstStyle/>
+                    <a:p>
+                      <a:r>
+                        <a:rPr sz="1100" b="0">
+                          <a:solidFill>
+                            <a:srgbClr val="1A1A1A"/>
+                          </a:solidFill>
+                          <a:latin typeface="Arial"/>
+                        </a:rPr>
+                        <a:t>Ratingbasiert</a:t>
+                      </a:r>
+                    </a:p>
+                  </a:txBody>
+                  <a:tcPr>
+                    <a:solidFill>
+                      <a:srgbClr val="FFFFFF"/>
+                    </a:solidFill>
+                  </a:tcPr>
+                </a:tc>
+                <a:tc>
+                  <a:txBody>
+                    <a:bodyPr wrap="square"/>
+                    <a:lstStyle/>
+                    <a:p>
+                      <a:r>
+                        <a:rPr sz="1100" b="0">
+                          <a:solidFill>
+                            <a:srgbClr val="1A1A1A"/>
+                          </a:solidFill>
+                          <a:latin typeface="Arial"/>
+                        </a:rPr>
+                        <a:t/>
+                      </a:r>
+                    </a:p>
+                  </a:txBody>
+                  <a:tcPr>
+                    <a:solidFill>
+                      <a:srgbClr val="FFFFFF"/>
+                    </a:solidFill>
+                  </a:tcPr>
+                </a:tc>
+                <a:tc>
+                  <a:txBody>
+                    <a:bodyPr wrap="square"/>
+                    <a:lstStyle/>
+                    <a:p>
+                      <a:r>
+                        <a:rPr sz="1100" b="0">
+                          <a:solidFill>
+                            <a:srgbClr val="1A1A1A"/>
+                          </a:solidFill>
+                          <a:latin typeface="Arial"/>
+                        </a:rPr>
+                        <a:t/>
+                      </a:r>
+                    </a:p>
+                  </a:txBody>
+                  <a:tcPr>
+                    <a:solidFill>
+                      <a:srgbClr val="FFFFFF"/>
+                    </a:solidFill>
+                  </a:tcPr>
+                </a:tc>
+                <a:tc>
+                  <a:txBody>
+                    <a:bodyPr wrap="square"/>
+                    <a:lstStyle/>
+                    <a:p>
+                      <a:r>
+                        <a:rPr sz="1100" b="0">
+                          <a:solidFill>
+                            <a:srgbClr val="1A1A1A"/>
+                          </a:solidFill>
+                          <a:latin typeface="Arial"/>
+                        </a:rPr>
+                        <a:t/>
+                      </a:r>
+                    </a:p>
+                  </a:txBody>
+                  <a:tcPr>
+                    <a:solidFill>
+                      <a:srgbClr val="FFFFFF"/>
+                    </a:solidFill>
+                  </a:tcPr>
+                </a:tc>
+              </a:tr>
+              <a:tr h="475488">
+                <a:tc>
+                  <a:txBody>
+                    <a:bodyPr wrap="square"/>
+                    <a:lstStyle/>
+                    <a:p>
+                      <a:r>
+                        <a:rPr sz="1100" b="0">
+                          <a:solidFill>
+                            <a:srgbClr val="1A1A1A"/>
+                          </a:solidFill>
+                          <a:latin typeface="Arial"/>
+                        </a:rPr>
+                        <a:t>Ratingbasiert</a:t>
+                      </a:r>
+                    </a:p>
+                  </a:txBody>
+                  <a:tcPr>
+                    <a:solidFill>
+                      <a:srgbClr val="F4F6FA"/>
+                    </a:solidFill>
+                  </a:tcPr>
+                </a:tc>
+                <a:tc>
+                  <a:txBody>
+                    <a:bodyPr wrap="square"/>
+                    <a:lstStyle/>
+                    <a:p>
+                      <a:r>
+                        <a:rPr sz="1100" b="0">
+                          <a:solidFill>
+                            <a:srgbClr val="1A1A1A"/>
+                          </a:solidFill>
+                          <a:latin typeface="Arial"/>
+                        </a:rPr>
+                        <a:t/>
+                      </a:r>
+                    </a:p>
+                  </a:txBody>
+                  <a:tcPr>
+                    <a:solidFill>
+                      <a:srgbClr val="F4F6FA"/>
+                    </a:solidFill>
+                  </a:tcPr>
+                </a:tc>
+                <a:tc>
+                  <a:txBody>
+                    <a:bodyPr wrap="square"/>
+                    <a:lstStyle/>
+                    <a:p>
+                      <a:r>
+                        <a:rPr sz="1100" b="0">
+                          <a:solidFill>
+                            <a:srgbClr val="1A1A1A"/>
+                          </a:solidFill>
+                          <a:latin typeface="Arial"/>
+                        </a:rPr>
+                        <a:t/>
+                      </a:r>
+                    </a:p>
+                  </a:txBody>
+                  <a:tcPr>
+                    <a:solidFill>
+                      <a:srgbClr val="F4F6FA"/>
+                    </a:solidFill>
+                  </a:tcPr>
+                </a:tc>
+                <a:tc>
+                  <a:txBody>
+                    <a:bodyPr wrap="square"/>
+                    <a:lstStyle/>
+                    <a:p>
+                      <a:r>
+                        <a:rPr sz="1100" b="0">
+                          <a:solidFill>
+                            <a:srgbClr val="1A1A1A"/>
+                          </a:solidFill>
+                          <a:latin typeface="Arial"/>
+                        </a:rPr>
+                        <a:t/>
+                      </a:r>
+                    </a:p>
+                  </a:txBody>
+                  <a:tcPr>
+                    <a:solidFill>
+                      <a:srgbClr val="F4F6FA"/>
+                    </a:solidFill>
+                  </a:tcPr>
+                </a:tc>
+              </a:tr>
+              <a:tr h="475488">
+                <a:tc>
+                  <a:txBody>
+                    <a:bodyPr wrap="square"/>
+                    <a:lstStyle/>
+                    <a:p>
+                      <a:r>
+                        <a:rPr sz="1100" b="0">
+                          <a:solidFill>
+                            <a:srgbClr val="1A1A1A"/>
+                          </a:solidFill>
+                          <a:latin typeface="Arial"/>
+                        </a:rPr>
+                        <a:t>Lebensereignis</a:t>
+                      </a:r>
+                    </a:p>
+                  </a:txBody>
+                  <a:tcPr>
+                    <a:solidFill>
+                      <a:srgbClr val="FFFFFF"/>
+                    </a:solidFill>
+                  </a:tcPr>
+                </a:tc>
+                <a:tc>
+                  <a:txBody>
+                    <a:bodyPr wrap="square"/>
+                    <a:lstStyle/>
+                    <a:p>
+                      <a:r>
+                        <a:rPr sz="1100" b="0">
+                          <a:solidFill>
+                            <a:srgbClr val="1A1A1A"/>
+                          </a:solidFill>
+                          <a:latin typeface="Arial"/>
+                        </a:rPr>
+                        <a:t/>
+                      </a:r>
+                    </a:p>
+                  </a:txBody>
+                  <a:tcPr>
+                    <a:solidFill>
+                      <a:srgbClr val="FFFFFF"/>
+                    </a:solidFill>
+                  </a:tcPr>
+                </a:tc>
+                <a:tc>
+                  <a:txBody>
+                    <a:bodyPr wrap="square"/>
+                    <a:lstStyle/>
+                    <a:p>
+                      <a:r>
+                        <a:rPr sz="1100" b="0">
+                          <a:solidFill>
+                            <a:srgbClr val="1A1A1A"/>
+                          </a:solidFill>
+                          <a:latin typeface="Arial"/>
+                        </a:rPr>
+                        <a:t/>
+                      </a:r>
+                    </a:p>
+                  </a:txBody>
+                  <a:tcPr>
+                    <a:solidFill>
+                      <a:srgbClr val="FFFFFF"/>
+                    </a:solidFill>
+                  </a:tcPr>
+                </a:tc>
+                <a:tc>
+                  <a:txBody>
+                    <a:bodyPr wrap="square"/>
+                    <a:lstStyle/>
+                    <a:p>
+                      <a:r>
+                        <a:rPr sz="1100" b="0">
+                          <a:solidFill>
+                            <a:srgbClr val="1A1A1A"/>
+                          </a:solidFill>
+                          <a:latin typeface="Arial"/>
+                        </a:rPr>
+                        <a:t/>
+                      </a:r>
+                    </a:p>
+                  </a:txBody>
+                  <a:tcPr>
+                    <a:solidFill>
+                      <a:srgbClr val="FFFFFF"/>
+                    </a:solidFill>
+                  </a:tcPr>
+                </a:tc>
+              </a:tr>
+              <a:tr h="475488">
+                <a:tc>
+                  <a:txBody>
+                    <a:bodyPr wrap="square"/>
+                    <a:lstStyle/>
+                    <a:p>
+                      <a:r>
+                        <a:rPr sz="1100" b="0">
+                          <a:solidFill>
+                            <a:srgbClr val="1A1A1A"/>
+                          </a:solidFill>
+                          <a:latin typeface="Arial"/>
+                        </a:rPr>
+                        <a:t>Lebensereignis</a:t>
+                      </a:r>
+                    </a:p>
+                  </a:txBody>
+                  <a:tcPr>
+                    <a:solidFill>
+                      <a:srgbClr val="F4F6FA"/>
+                    </a:solidFill>
+                  </a:tcPr>
+                </a:tc>
+                <a:tc>
+                  <a:txBody>
+                    <a:bodyPr wrap="square"/>
+                    <a:lstStyle/>
+                    <a:p>
+                      <a:r>
+                        <a:rPr sz="1100" b="0">
+                          <a:solidFill>
+                            <a:srgbClr val="1A1A1A"/>
+                          </a:solidFill>
+                          <a:latin typeface="Arial"/>
+                        </a:rPr>
+                        <a:t/>
+                      </a:r>
+                    </a:p>
+                  </a:txBody>
+                  <a:tcPr>
+                    <a:solidFill>
+                      <a:srgbClr val="F4F6FA"/>
+                    </a:solidFill>
+                  </a:tcPr>
+                </a:tc>
+                <a:tc>
+                  <a:txBody>
+                    <a:bodyPr wrap="square"/>
+                    <a:lstStyle/>
+                    <a:p>
+                      <a:r>
+                        <a:rPr sz="1100" b="0">
+                          <a:solidFill>
+                            <a:srgbClr val="1A1A1A"/>
+                          </a:solidFill>
+                          <a:latin typeface="Arial"/>
+                        </a:rPr>
+                        <a:t/>
+                      </a:r>
+                    </a:p>
+                  </a:txBody>
+                  <a:tcPr>
+                    <a:solidFill>
+                      <a:srgbClr val="F4F6FA"/>
+                    </a:solidFill>
+                  </a:tcPr>
+                </a:tc>
+                <a:tc>
+                  <a:txBody>
+                    <a:bodyPr wrap="square"/>
+                    <a:lstStyle/>
+                    <a:p>
+                      <a:r>
+                        <a:rPr sz="1100" b="0">
+                          <a:solidFill>
+                            <a:srgbClr val="1A1A1A"/>
+                          </a:solidFill>
+                          <a:latin typeface="Arial"/>
+                        </a:rPr>
+                        <a:t/>
+                      </a:r>
+                    </a:p>
+                  </a:txBody>
+                  <a:tcPr>
+                    <a:solidFill>
+                      <a:srgbClr val="F4F6FA"/>
+                    </a:solidFill>
+                  </a:tcPr>
+                </a:tc>
+              </a:tr>
+            </a:tbl>
+          </a:graphicData>
+        </a:graphic>
+      </p:graphicFrame>
+    </p:spTree>
+  </p:cSld>
+  <p:clrMapOvr>
+    <a:masterClrMapping/>
+  </p:clrMapOvr>
+</p:sld>
+</file>
+
+<file path=ppt/slides/slide21.xml><?xml version="1.0" encoding="utf-8"?>
+<p:sld xmlns:a="http://schemas.openxmlformats.org/drawingml/2006/main" xmlns:p="http://schemas.openxmlformats.org/presentationml/2006/main" xmlns:r="http://schemas.openxmlformats.org/officeDocument/2006/relationships">
+  <p:cSld>
+    <p:bg>
+      <p:bgPr>
+        <a:solidFill>
+          <a:srgbClr val="1A1A1A"/>
+        </a:solidFill>
+        <a:effectLst/>
+      </p:bgPr>
+    </p:bg>
+    <p:spTree>
+      <p:nvGrpSpPr>
+        <p:cNvPr id="1" name=""/>
+        <p:cNvGrpSpPr/>
+        <p:nvPr/>
+      </p:nvGrpSpPr>
+      <p:grpSpPr/>
+      <p:sp>
+        <p:nvSpPr>
+          <p:cNvPr id="2" name="Rectangle 1"/>
+          <p:cNvSpPr/>
+          <p:nvPr/>
+        </p:nvSpPr>
+        <p:spPr>
+          <a:xfrm>
+            <a:off x="0" y="0"/>
+            <a:ext cx="73152" cy="6858000"/>
+          </a:xfrm>
+          <a:prstGeom prst="rect">
+            <a:avLst/>
+          </a:prstGeom>
+          <a:solidFill>
+            <a:srgbClr val="E05B00"/>
+          </a:solidFill>
+          <a:ln>
+            <a:noFill/>
+          </a:ln>
+        </p:spPr>
+        <p:style>
+          <a:lnRef idx="1">
+            <a:schemeClr val="accent1"/>
+          </a:lnRef>
+          <a:fillRef idx="3">
+            <a:schemeClr val="accent1"/>
+          </a:fillRef>
+          <a:effectRef idx="2">
+            <a:schemeClr val="accent1"/>
+          </a:effectRef>
+          <a:fontRef idx="minor">
+            <a:schemeClr val="lt1"/>
+          </a:fontRef>
+        </p:style>
+        <p:txBody>
+          <a:bodyPr rtlCol="0" anchor="ctr"/>
+          <a:lstStyle/>
+          <a:p>
+            <a:pPr algn="ctr"/>
+          </a:p>
+        </p:txBody>
+      </p:sp>
+      <p:sp>
+        <p:nvSpPr>
+          <p:cNvPr id="3" name="TextBox 2"/>
+          <p:cNvSpPr txBox="1"/>
+          <p:nvPr/>
+        </p:nvSpPr>
+        <p:spPr>
+          <a:xfrm>
+            <a:off x="365760" y="2011680"/>
+            <a:ext cx="11430000" cy="2011680"/>
+          </a:xfrm>
+          <a:prstGeom prst="rect">
+            <a:avLst/>
+          </a:prstGeom>
+          <a:noFill/>
+        </p:spPr>
+        <p:txBody>
+          <a:bodyPr wrap="square">
+            <a:spAutoFit/>
+          </a:bodyPr>
+          <a:lstStyle/>
+          <a:p>
+            <a:pPr algn="l"/>
+            <a:r>
+              <a:rPr sz="3600" b="1" i="0">
+                <a:solidFill>
+                  <a:srgbClr val="FFFFFF"/>
+                </a:solidFill>
+                <a:latin typeface="Arial"/>
+              </a:rPr>
+              <a:t>Arbeitsblatt B: Datenqualitäts-Audit (Top-10-Kunden)</a:t>
+            </a:r>
+          </a:p>
+        </p:txBody>
+      </p:sp>
+    </p:spTree>
+  </p:cSld>
+  <p:clrMapOvr>
+    <a:masterClrMapping/>
+  </p:clrMapOvr>
+</p:sld>
+</file>
+
+<file path=ppt/slides/slide22.xml><?xml version="1.0" encoding="utf-8"?>
+<p:sld xmlns:a="http://schemas.openxmlformats.org/drawingml/2006/main" xmlns:p="http://schemas.openxmlformats.org/presentationml/2006/main" xmlns:r="http://schemas.openxmlformats.org/officeDocument/2006/relationships">
+  <p:cSld>
+    <p:bg>
+      <p:bgPr>
+        <a:solidFill>
+          <a:srgbClr val="FFFFFF"/>
+        </a:solidFill>
+        <a:effectLst/>
+      </p:bgPr>
+    </p:bg>
+    <p:spTree>
+      <p:nvGrpSpPr>
+        <p:cNvPr id="1" name=""/>
+        <p:cNvGrpSpPr/>
+        <p:nvPr/>
+      </p:nvGrpSpPr>
+      <p:grpSpPr/>
+      <p:sp>
+        <p:nvSpPr>
+          <p:cNvPr id="2" name="Rectangle 1"/>
+          <p:cNvSpPr/>
+          <p:nvPr/>
+        </p:nvSpPr>
+        <p:spPr>
+          <a:xfrm>
+            <a:off x="0" y="0"/>
+            <a:ext cx="73152" cy="6858000"/>
+          </a:xfrm>
+          <a:prstGeom prst="rect">
+            <a:avLst/>
+          </a:prstGeom>
+          <a:solidFill>
+            <a:srgbClr val="003DA5"/>
+          </a:solidFill>
+          <a:ln>
+            <a:noFill/>
+          </a:ln>
+        </p:spPr>
+        <p:style>
+          <a:lnRef idx="1">
+            <a:schemeClr val="accent1"/>
+          </a:lnRef>
+          <a:fillRef idx="3">
+            <a:schemeClr val="accent1"/>
+          </a:fillRef>
+          <a:effectRef idx="2">
+            <a:schemeClr val="accent1"/>
+          </a:effectRef>
+          <a:fontRef idx="minor">
+            <a:schemeClr val="lt1"/>
+          </a:fontRef>
+        </p:style>
+        <p:txBody>
+          <a:bodyPr rtlCol="0" anchor="ctr"/>
+          <a:lstStyle/>
+          <a:p>
+            <a:pPr algn="ctr"/>
+          </a:p>
+        </p:txBody>
+      </p:sp>
+      <p:sp>
+        <p:nvSpPr>
+          <p:cNvPr id="3" name="TextBox 2"/>
+          <p:cNvSpPr txBox="1"/>
+          <p:nvPr/>
+        </p:nvSpPr>
+        <p:spPr>
+          <a:xfrm>
+            <a:off x="228600" y="182880"/>
+            <a:ext cx="11430000" cy="320040"/>
+          </a:xfrm>
+          <a:prstGeom prst="rect">
+            <a:avLst/>
+          </a:prstGeom>
+          <a:noFill/>
+        </p:spPr>
+        <p:txBody>
+          <a:bodyPr wrap="square">
+            <a:spAutoFit/>
+          </a:bodyPr>
+          <a:lstStyle/>
+          <a:p>
+            <a:pPr algn="l"/>
+            <a:r>
+              <a:rPr sz="900" b="0" i="0">
+                <a:solidFill>
+                  <a:srgbClr val="556575"/>
+                </a:solidFill>
+                <a:latin typeface="Arial"/>
+              </a:rPr>
+              <a:t>M18 · 4.7 Arbeitsblätter</a:t>
+            </a:r>
+          </a:p>
+        </p:txBody>
+      </p:sp>
+      <p:sp>
+        <p:nvSpPr>
+          <p:cNvPr id="4" name="TextBox 3"/>
+          <p:cNvSpPr txBox="1"/>
+          <p:nvPr/>
+        </p:nvSpPr>
+        <p:spPr>
+          <a:xfrm>
+            <a:off x="365760" y="274320"/>
+            <a:ext cx="11430000" cy="777240"/>
+          </a:xfrm>
+          <a:prstGeom prst="rect">
+            <a:avLst/>
+          </a:prstGeom>
+          <a:noFill/>
+        </p:spPr>
+        <p:txBody>
+          <a:bodyPr wrap="square">
+            <a:spAutoFit/>
+          </a:bodyPr>
+          <a:lstStyle/>
+          <a:p>
+            <a:pPr algn="l"/>
+            <a:r>
+              <a:rPr sz="2200" b="1" i="0">
+                <a:solidFill>
+                  <a:srgbClr val="003DA5"/>
+                </a:solidFill>
+                <a:latin typeface="Arial"/>
+              </a:rPr>
+              <a:t>Arbeitsblatt B: Datenqualitäts-Audit (Top-10-Kunden)</a:t>
+            </a:r>
+          </a:p>
+        </p:txBody>
+      </p:sp>
+      <p:sp>
+        <p:nvSpPr>
+          <p:cNvPr id="5" name="Rectangle 4"/>
+          <p:cNvSpPr/>
+          <p:nvPr/>
+        </p:nvSpPr>
+        <p:spPr>
+          <a:xfrm>
+            <a:off x="365760" y="1005840"/>
+            <a:ext cx="11430000" cy="27432"/>
+          </a:xfrm>
+          <a:prstGeom prst="rect">
+            <a:avLst/>
+          </a:prstGeom>
+          <a:solidFill>
+            <a:srgbClr val="D1D5DB"/>
+          </a:solidFill>
+          <a:ln>
+            <a:noFill/>
+          </a:ln>
+        </p:spPr>
+        <p:style>
+          <a:lnRef idx="1">
+            <a:schemeClr val="accent1"/>
+          </a:lnRef>
+          <a:fillRef idx="3">
+            <a:schemeClr val="accent1"/>
+          </a:fillRef>
+          <a:effectRef idx="2">
+            <a:schemeClr val="accent1"/>
+          </a:effectRef>
+          <a:fontRef idx="minor">
+            <a:schemeClr val="lt1"/>
+          </a:fontRef>
+        </p:style>
+        <p:txBody>
+          <a:bodyPr rtlCol="0" anchor="ctr"/>
+          <a:lstStyle/>
+          <a:p>
+            <a:pPr algn="ctr"/>
+          </a:p>
+        </p:txBody>
+      </p:sp>
+      <p:sp>
+        <p:nvSpPr>
+          <p:cNvPr id="6" name="TextBox 5"/>
+          <p:cNvSpPr txBox="1"/>
+          <p:nvPr/>
+        </p:nvSpPr>
+        <p:spPr>
+          <a:xfrm>
+            <a:off x="365760" y="1143000"/>
+            <a:ext cx="11430000" cy="5212080"/>
+          </a:xfrm>
+          <a:prstGeom prst="rect">
+            <a:avLst/>
+          </a:prstGeom>
+          <a:noFill/>
+        </p:spPr>
+        <p:txBody>
+          <a:bodyPr wrap="square">
+            <a:spAutoFit/>
+          </a:bodyPr>
+          <a:lstStyle/>
+          <a:p>
+            <a:pPr>
+              <a:spcBef>
+                <a:spcPts val="500"/>
+              </a:spcBef>
+            </a:pPr>
+            <a:r>
+              <a:rPr sz="1500">
+                <a:solidFill>
+                  <a:srgbClr val="003DA5"/>
+                </a:solidFill>
+                <a:latin typeface="Arial"/>
+              </a:rPr>
+              <a:t>▪  </a:t>
+            </a:r>
+            <a:r>
+              <a:rPr sz="1700">
+                <a:solidFill>
+                  <a:srgbClr val="1A1A1A"/>
+                </a:solidFill>
+                <a:latin typeface="Arial"/>
+              </a:rPr>
+              <a:t>Anzahl Datenlücken gesamt: _______ | Größte Schwachstelle: _______________________</a:t>
+            </a:r>
+          </a:p>
+        </p:txBody>
+      </p:sp>
+    </p:spTree>
+  </p:cSld>
+  <p:clrMapOvr>
+    <a:masterClrMapping/>
+  </p:clrMapOvr>
+</p:sld>
+</file>
+
+<file path=ppt/slides/slide23.xml><?xml version="1.0" encoding="utf-8"?>
 <p:sld xmlns:a="http://schemas.openxmlformats.org/drawingml/2006/main" xmlns:p="http://schemas.openxmlformats.org/presentationml/2006/main" xmlns:r="http://schemas.openxmlformats.org/officeDocument/2006/relationships">
   <p:cSld>
     <p:bg>
@@ -4038,8 +7428,8 @@
         </p:nvSpPr>
         <p:spPr>
           <a:xfrm>
-            <a:off x="365760" y="365760"/>
-            <a:ext cx="5486400" cy="365760"/>
+            <a:off x="365760" y="347472"/>
+            <a:ext cx="7315200" cy="384048"/>
           </a:xfrm>
           <a:prstGeom prst="rect">
             <a:avLst/>
@@ -4054,62 +7444,27 @@
           <a:p>
             <a:pPr algn="l"/>
             <a:r>
-              <a:rPr sz="1000" b="1">
+              <a:rPr sz="900" b="1" i="0">
                 <a:solidFill>
                   <a:srgbClr val="CCD6F0"/>
                 </a:solidFill>
                 <a:latin typeface="Arial"/>
               </a:rPr>
-              <a:t>PRAXISTRANSFER</a:t>
-            </a:r>
-          </a:p>
-        </p:txBody>
-      </p:sp>
-      <p:sp>
-        <p:nvSpPr>
-          <p:cNvPr id="4" name="TextBox 3"/>
-          <p:cNvSpPr txBox="1"/>
-          <p:nvPr/>
-        </p:nvSpPr>
-        <p:spPr>
-          <a:xfrm>
-            <a:off x="365760" y="640080"/>
-            <a:ext cx="9144000" cy="914400"/>
-          </a:xfrm>
-          <a:prstGeom prst="rect">
-            <a:avLst/>
-          </a:prstGeom>
-          <a:noFill/>
-        </p:spPr>
-        <p:txBody>
-          <a:bodyPr wrap="square">
-            <a:spAutoFit/>
-          </a:bodyPr>
-          <a:lstStyle/>
-          <a:p>
-            <a:pPr algn="l"/>
-            <a:r>
-              <a:rPr sz="2800" b="1">
-                <a:solidFill>
-                  <a:srgbClr val="FFFFFF"/>
-                </a:solidFill>
-                <a:latin typeface="Arial"/>
-              </a:rPr>
-              <a:t>Was nehmen Sie mit?</a:t>
-            </a:r>
-          </a:p>
-        </p:txBody>
-      </p:sp>
-      <p:sp>
-        <p:nvSpPr>
-          <p:cNvPr id="5" name="Rectangle 4"/>
+              <a:t>PRAXISTRANSFER &amp; NÄCHSTE SCHRITTE</a:t>
+            </a:r>
+          </a:p>
+        </p:txBody>
+      </p:sp>
+      <p:sp>
+        <p:nvSpPr>
+          <p:cNvPr id="4" name="Rectangle 3"/>
           <p:cNvSpPr/>
           <p:nvPr/>
         </p:nvSpPr>
         <p:spPr>
           <a:xfrm>
-            <a:off x="365760" y="1463040"/>
-            <a:ext cx="7315200" cy="27432"/>
+            <a:off x="365760" y="804672"/>
+            <a:ext cx="8229600" cy="22860"/>
           </a:xfrm>
           <a:prstGeom prst="rect">
             <a:avLst/>
@@ -4145,14 +7500,14 @@
       </p:sp>
       <p:sp>
         <p:nvSpPr>
-          <p:cNvPr id="6" name="TextBox 5"/>
+          <p:cNvPr id="5" name="TextBox 4"/>
           <p:cNvSpPr txBox="1"/>
           <p:nvPr/>
         </p:nvSpPr>
         <p:spPr>
           <a:xfrm>
-            <a:off x="365760" y="1645920"/>
-            <a:ext cx="11430000" cy="4114800"/>
+            <a:off x="365760" y="960120"/>
+            <a:ext cx="9144000" cy="914400"/>
           </a:xfrm>
           <a:prstGeom prst="rect">
             <a:avLst/>
@@ -4165,67 +7520,29 @@
           </a:bodyPr>
           <a:lstStyle/>
           <a:p>
-            <a:pPr>
-              <a:spcBef>
-                <a:spcPts val="400"/>
-              </a:spcBef>
-            </a:pPr>
-            <a:r>
-              <a:rPr sz="1600">
-                <a:solidFill>
-                  <a:srgbClr val="E05B00"/>
+            <a:pPr algn="l"/>
+            <a:r>
+              <a:rPr sz="3000" b="1" i="0">
+                <a:solidFill>
+                  <a:srgbClr val="FFFFFF"/>
                 </a:solidFill>
                 <a:latin typeface="Arial"/>
               </a:rPr>
-              <a:t>▪  </a:t>
-            </a:r>
-            <a:r>
-              <a:rPr sz="1800">
-                <a:solidFill>
-                  <a:srgbClr val="FFFFFF"/>
-                </a:solidFill>
-                <a:latin typeface="Arial"/>
-              </a:rPr>
-              <a:t>Transferaufgabe: Wenden Sie das Gelernte in den nächsten 14 Tagen bei einem konkreten Kunden an.</a:t>
-            </a:r>
-          </a:p>
-          <a:p>
-            <a:pPr>
-              <a:spcBef>
-                <a:spcPts val="400"/>
-              </a:spcBef>
-            </a:pPr>
-            <a:r>
-              <a:rPr sz="1600">
-                <a:solidFill>
-                  <a:srgbClr val="E05B00"/>
-                </a:solidFill>
-                <a:latin typeface="Arial"/>
-              </a:rPr>
-              <a:t>▪  </a:t>
-            </a:r>
-            <a:r>
-              <a:rPr sz="1800">
-                <a:solidFill>
-                  <a:srgbClr val="FFFFFF"/>
-                </a:solidFill>
-                <a:latin typeface="Arial"/>
-              </a:rPr>
-              <a:t>Selbstcheck nach 4 Wochen: Was hat sich verändert?</a:t>
-            </a:r>
-          </a:p>
-        </p:txBody>
-      </p:sp>
-      <p:sp>
-        <p:nvSpPr>
-          <p:cNvPr id="7" name="TextBox 6"/>
+              <a:t>Was nehmen Sie mit?</a:t>
+            </a:r>
+          </a:p>
+        </p:txBody>
+      </p:sp>
+      <p:sp>
+        <p:nvSpPr>
+          <p:cNvPr id="6" name="TextBox 5"/>
           <p:cNvSpPr txBox="1"/>
           <p:nvPr/>
         </p:nvSpPr>
         <p:spPr>
           <a:xfrm>
-            <a:off x="365760" y="6309360"/>
-            <a:ext cx="11430000" cy="365760"/>
+            <a:off x="365760" y="2103120"/>
+            <a:ext cx="11430000" cy="4114800"/>
           </a:xfrm>
           <a:prstGeom prst="rect">
             <a:avLst/>
@@ -4238,141 +7555,92 @@
           </a:bodyPr>
           <a:lstStyle/>
           <a:p>
-            <a:pPr algn="l"/>
-            <a:r>
-              <a:rPr sz="900" b="0">
-                <a:solidFill>
-                  <a:srgbClr val="99AACC"/>
+            <a:pPr>
+              <a:spcBef>
+                <a:spcPts val="500"/>
+              </a:spcBef>
+            </a:pPr>
+            <a:r>
+              <a:rPr sz="1600">
+                <a:solidFill>
+                  <a:srgbClr val="E05B00"/>
                 </a:solidFill>
                 <a:latin typeface="Arial"/>
               </a:rPr>
-              <a:t>M18 · Datengetriebener Vertrieb  ·  v0.4  ·  Benedikt Zoller Coaching</a:t>
-            </a:r>
-          </a:p>
-        </p:txBody>
-      </p:sp>
-    </p:spTree>
-  </p:cSld>
-  <p:clrMapOvr>
-    <a:masterClrMapping/>
-  </p:clrMapOvr>
-</p:sld>
-</file>
-
-<file path=ppt/slides/slide2.xml><?xml version="1.0" encoding="utf-8"?>
-<p:sld xmlns:a="http://schemas.openxmlformats.org/drawingml/2006/main" xmlns:p="http://schemas.openxmlformats.org/presentationml/2006/main" xmlns:r="http://schemas.openxmlformats.org/officeDocument/2006/relationships">
-  <p:cSld>
-    <p:bg>
-      <p:bgPr>
-        <a:solidFill>
-          <a:srgbClr val="F5F7FA"/>
-        </a:solidFill>
-        <a:effectLst/>
-      </p:bgPr>
-    </p:bg>
-    <p:spTree>
-      <p:nvGrpSpPr>
-        <p:cNvPr id="1" name=""/>
-        <p:cNvGrpSpPr/>
-        <p:nvPr/>
-      </p:nvGrpSpPr>
-      <p:grpSpPr/>
-      <p:sp>
-        <p:nvSpPr>
-          <p:cNvPr id="2" name="Rectangle 1"/>
-          <p:cNvSpPr/>
-          <p:nvPr/>
-        </p:nvSpPr>
-        <p:spPr>
-          <a:xfrm>
-            <a:off x="0" y="0"/>
-            <a:ext cx="73152" cy="6858000"/>
-          </a:xfrm>
-          <a:prstGeom prst="rect">
-            <a:avLst/>
-          </a:prstGeom>
-          <a:solidFill>
-            <a:srgbClr val="003DA5"/>
-          </a:solidFill>
-          <a:ln>
-            <a:noFill/>
-          </a:ln>
-        </p:spPr>
-        <p:style>
-          <a:lnRef idx="1">
-            <a:schemeClr val="accent1"/>
-          </a:lnRef>
-          <a:fillRef idx="3">
-            <a:schemeClr val="accent1"/>
-          </a:fillRef>
-          <a:effectRef idx="2">
-            <a:schemeClr val="accent1"/>
-          </a:effectRef>
-          <a:fontRef idx="minor">
-            <a:schemeClr val="lt1"/>
-          </a:fontRef>
-        </p:style>
-        <p:txBody>
-          <a:bodyPr rtlCol="0" anchor="ctr"/>
-          <a:lstStyle/>
-          <a:p>
-            <a:pPr algn="ctr"/>
-          </a:p>
-        </p:txBody>
-      </p:sp>
-      <p:sp>
-        <p:nvSpPr>
-          <p:cNvPr id="3" name="Rectangle 2"/>
-          <p:cNvSpPr/>
-          <p:nvPr/>
-        </p:nvSpPr>
-        <p:spPr>
-          <a:xfrm>
-            <a:off x="365760" y="868680"/>
-            <a:ext cx="7315200" cy="27432"/>
-          </a:xfrm>
-          <a:prstGeom prst="rect">
-            <a:avLst/>
-          </a:prstGeom>
-          <a:solidFill>
-            <a:srgbClr val="E5E7EB"/>
-          </a:solidFill>
-          <a:ln>
-            <a:noFill/>
-          </a:ln>
-        </p:spPr>
-        <p:style>
-          <a:lnRef idx="1">
-            <a:schemeClr val="accent1"/>
-          </a:lnRef>
-          <a:fillRef idx="3">
-            <a:schemeClr val="accent1"/>
-          </a:fillRef>
-          <a:effectRef idx="2">
-            <a:schemeClr val="accent1"/>
-          </a:effectRef>
-          <a:fontRef idx="minor">
-            <a:schemeClr val="lt1"/>
-          </a:fontRef>
-        </p:style>
-        <p:txBody>
-          <a:bodyPr rtlCol="0" anchor="ctr"/>
-          <a:lstStyle/>
-          <a:p>
-            <a:pPr algn="ctr"/>
-          </a:p>
-        </p:txBody>
-      </p:sp>
-      <p:sp>
-        <p:nvSpPr>
-          <p:cNvPr id="4" name="TextBox 3"/>
+              <a:t>▪  </a:t>
+            </a:r>
+            <a:r>
+              <a:rPr sz="1800">
+                <a:solidFill>
+                  <a:srgbClr val="FFFFFF"/>
+                </a:solidFill>
+                <a:latin typeface="Arial"/>
+              </a:rPr>
+              <a:t>Transferaufgabe: Wenden Sie das Gelernte in den nächsten 14 Tagen bei einem konkreten Kunden an.</a:t>
+            </a:r>
+          </a:p>
+          <a:p>
+            <a:pPr>
+              <a:spcBef>
+                <a:spcPts val="500"/>
+              </a:spcBef>
+            </a:pPr>
+            <a:r>
+              <a:rPr sz="1600">
+                <a:solidFill>
+                  <a:srgbClr val="E05B00"/>
+                </a:solidFill>
+                <a:latin typeface="Arial"/>
+              </a:rPr>
+              <a:t>▪  </a:t>
+            </a:r>
+            <a:r>
+              <a:rPr sz="1800">
+                <a:solidFill>
+                  <a:srgbClr val="FFFFFF"/>
+                </a:solidFill>
+                <a:latin typeface="Arial"/>
+              </a:rPr>
+              <a:t>Selbstcheck nach 4 Wochen: Bewerten Sie Ihre Fortschritte ehrlich.</a:t>
+            </a:r>
+          </a:p>
+          <a:p>
+            <a:pPr>
+              <a:spcBef>
+                <a:spcPts val="500"/>
+              </a:spcBef>
+            </a:pPr>
+            <a:r>
+              <a:rPr sz="1600">
+                <a:solidFill>
+                  <a:srgbClr val="E05B00"/>
+                </a:solidFill>
+                <a:latin typeface="Arial"/>
+              </a:rPr>
+              <a:t>▪  </a:t>
+            </a:r>
+            <a:r>
+              <a:rPr sz="1800">
+                <a:solidFill>
+                  <a:srgbClr val="FFFFFF"/>
+                </a:solidFill>
+                <a:latin typeface="Arial"/>
+              </a:rPr>
+              <a:t>Nächste Module: M15</a:t>
+            </a:r>
+          </a:p>
+        </p:txBody>
+      </p:sp>
+      <p:sp>
+        <p:nvSpPr>
+          <p:cNvPr id="7" name="TextBox 6"/>
           <p:cNvSpPr txBox="1"/>
           <p:nvPr/>
         </p:nvSpPr>
         <p:spPr>
           <a:xfrm>
-            <a:off x="365760" y="320040"/>
-            <a:ext cx="3657600" cy="365760"/>
+            <a:off x="365760" y="6309360"/>
+            <a:ext cx="11430000" cy="365760"/>
           </a:xfrm>
           <a:prstGeom prst="rect">
             <a:avLst/>
@@ -4387,196 +7655,13 @@
           <a:p>
             <a:pPr algn="l"/>
             <a:r>
-              <a:rPr sz="1000" b="1">
-                <a:solidFill>
-                  <a:srgbClr val="003DA5"/>
+              <a:rPr sz="900" b="0" i="0">
+                <a:solidFill>
+                  <a:srgbClr val="889ACC"/>
                 </a:solidFill>
                 <a:latin typeface="Arial"/>
               </a:rPr>
-              <a:t>LERNZIELE</a:t>
-            </a:r>
-          </a:p>
-        </p:txBody>
-      </p:sp>
-      <p:sp>
-        <p:nvSpPr>
-          <p:cNvPr id="5" name="TextBox 4"/>
-          <p:cNvSpPr txBox="1"/>
-          <p:nvPr/>
-        </p:nvSpPr>
-        <p:spPr>
-          <a:xfrm>
-            <a:off x="365760" y="502920"/>
-            <a:ext cx="9144000" cy="548640"/>
-          </a:xfrm>
-          <a:prstGeom prst="rect">
-            <a:avLst/>
-          </a:prstGeom>
-          <a:noFill/>
-        </p:spPr>
-        <p:txBody>
-          <a:bodyPr wrap="square">
-            <a:spAutoFit/>
-          </a:bodyPr>
-          <a:lstStyle/>
-          <a:p>
-            <a:pPr algn="l"/>
-            <a:r>
-              <a:rPr sz="2200" b="1">
-                <a:solidFill>
-                  <a:srgbClr val="1A1A1A"/>
-                </a:solidFill>
-                <a:latin typeface="Arial"/>
-              </a:rPr>
-              <a:t>Was Sie nach diesem Modul können.</a:t>
-            </a:r>
-          </a:p>
-        </p:txBody>
-      </p:sp>
-      <p:sp>
-        <p:nvSpPr>
-          <p:cNvPr id="6" name="TextBox 5"/>
-          <p:cNvSpPr txBox="1"/>
-          <p:nvPr/>
-        </p:nvSpPr>
-        <p:spPr>
-          <a:xfrm>
-            <a:off x="365760" y="1188720"/>
-            <a:ext cx="11430000" cy="5303520"/>
-          </a:xfrm>
-          <a:prstGeom prst="rect">
-            <a:avLst/>
-          </a:prstGeom>
-          <a:noFill/>
-        </p:spPr>
-        <p:txBody>
-          <a:bodyPr wrap="square">
-            <a:spAutoFit/>
-          </a:bodyPr>
-          <a:lstStyle/>
-          <a:p>
-            <a:pPr>
-              <a:spcBef>
-                <a:spcPts val="400"/>
-              </a:spcBef>
-            </a:pPr>
-            <a:r>
-              <a:rPr sz="1400">
-                <a:solidFill>
-                  <a:srgbClr val="003DA5"/>
-                </a:solidFill>
-                <a:latin typeface="Arial"/>
-              </a:rPr>
-              <a:t>▪  </a:t>
-            </a:r>
-            <a:r>
-              <a:rPr sz="1600">
-                <a:solidFill>
-                  <a:srgbClr val="1A1A1A"/>
-                </a:solidFill>
-                <a:latin typeface="Arial"/>
-              </a:rPr>
-              <a:t>Mindestens fünf Trigger-Ereignisse aus agree-Daten identifizieren und priorisieren</a:t>
-            </a:r>
-          </a:p>
-          <a:p>
-            <a:pPr>
-              <a:spcBef>
-                <a:spcPts val="400"/>
-              </a:spcBef>
-            </a:pPr>
-            <a:r>
-              <a:rPr sz="1400">
-                <a:solidFill>
-                  <a:srgbClr val="003DA5"/>
-                </a:solidFill>
-                <a:latin typeface="Arial"/>
-              </a:rPr>
-              <a:t>▪  </a:t>
-            </a:r>
-            <a:r>
-              <a:rPr sz="1600">
-                <a:solidFill>
-                  <a:srgbClr val="1A1A1A"/>
-                </a:solidFill>
-                <a:latin typeface="Arial"/>
-              </a:rPr>
-              <a:t>Datenqualität des CRM-Bestands analysieren und Lücken benennen</a:t>
-            </a:r>
-          </a:p>
-          <a:p>
-            <a:pPr>
-              <a:spcBef>
-                <a:spcPts val="400"/>
-              </a:spcBef>
-            </a:pPr>
-            <a:r>
-              <a:rPr sz="1400">
-                <a:solidFill>
-                  <a:srgbClr val="003DA5"/>
-                </a:solidFill>
-                <a:latin typeface="Arial"/>
-              </a:rPr>
-              <a:t>▪  </a:t>
-            </a:r>
-            <a:r>
-              <a:rPr sz="1600">
-                <a:solidFill>
-                  <a:srgbClr val="1A1A1A"/>
-                </a:solidFill>
-                <a:latin typeface="Arial"/>
-              </a:rPr>
-              <a:t>Reaktiven und trigger-basierten Vertrieb unterscheiden und erläutern</a:t>
-            </a:r>
-          </a:p>
-          <a:p>
-            <a:pPr>
-              <a:spcBef>
-                <a:spcPts val="400"/>
-              </a:spcBef>
-            </a:pPr>
-            <a:r>
-              <a:rPr sz="1400">
-                <a:solidFill>
-                  <a:srgbClr val="003DA5"/>
-                </a:solidFill>
-                <a:latin typeface="Arial"/>
-              </a:rPr>
-              <a:t>▪  </a:t>
-            </a:r>
-            <a:r>
-              <a:rPr sz="1600">
-                <a:solidFill>
-                  <a:srgbClr val="1A1A1A"/>
-                </a:solidFill>
-                <a:latin typeface="Arial"/>
-              </a:rPr>
-              <a:t>Drei Trigger-Typen hinsichtlich Vorlaufzeit und Wirksamkeit bewerten</a:t>
-            </a:r>
-          </a:p>
-          <a:p>
-            <a:pPr>
-              <a:spcBef>
-                <a:spcPts val="400"/>
-              </a:spcBef>
-            </a:pPr>
-            <a:r>
-              <a:rPr sz="1400">
-                <a:solidFill>
-                  <a:srgbClr val="003DA5"/>
-                </a:solidFill>
-                <a:latin typeface="Arial"/>
-              </a:rPr>
-              <a:t>▪  </a:t>
-            </a:r>
-            <a:r>
-              <a:rPr sz="1600">
-                <a:solidFill>
-                  <a:srgbClr val="1A1A1A"/>
-                </a:solidFill>
-                <a:latin typeface="Arial"/>
-              </a:rPr>
-              <a:t>Grundsätze der DSGVO-konformen Datennutzung im Vertriebskontext anwenden</a:t>
+              <a:t>M18 · Datengetriebener Vertrieb  ·  v0.4  ·  Benedikt Zoller Coaching</a:t>
             </a:r>
           </a:p>
         </p:txBody>
@@ -4658,8 +7743,8 @@
         </p:nvSpPr>
         <p:spPr>
           <a:xfrm>
-            <a:off x="365760" y="2286000"/>
-            <a:ext cx="11430000" cy="1828800"/>
+            <a:off x="365760" y="2011680"/>
+            <a:ext cx="11430000" cy="2011680"/>
           </a:xfrm>
           <a:prstGeom prst="rect">
             <a:avLst/>
@@ -4674,7 +7759,7 @@
           <a:p>
             <a:pPr algn="l"/>
             <a:r>
-              <a:rPr sz="3600" b="1">
+              <a:rPr sz="3600" b="1" i="0">
                 <a:solidFill>
                   <a:srgbClr val="FFFFFF"/>
                 </a:solidFill>
@@ -4699,7 +7784,7 @@
     <p:bg>
       <p:bgPr>
         <a:solidFill>
-          <a:srgbClr val="1A1A1A"/>
+          <a:srgbClr val="FFFFFF"/>
         </a:solidFill>
         <a:effectLst/>
       </p:bgPr>
@@ -4726,7 +7811,7 @@
             <a:avLst/>
           </a:prstGeom>
           <a:solidFill>
-            <a:srgbClr val="E05B00"/>
+            <a:srgbClr val="003DA5"/>
           </a:solidFill>
           <a:ln>
             <a:noFill/>
@@ -4762,8 +7847,8 @@
         </p:nvSpPr>
         <p:spPr>
           <a:xfrm>
-            <a:off x="365760" y="2286000"/>
-            <a:ext cx="11430000" cy="1828800"/>
+            <a:off x="228600" y="182880"/>
+            <a:ext cx="11430000" cy="320040"/>
           </a:xfrm>
           <a:prstGeom prst="rect">
             <a:avLst/>
@@ -4778,13 +7863,214 @@
           <a:p>
             <a:pPr algn="l"/>
             <a:r>
-              <a:rPr sz="3600" b="1">
-                <a:solidFill>
-                  <a:srgbClr val="FFFFFF"/>
+              <a:rPr sz="900" b="0" i="0">
+                <a:solidFill>
+                  <a:srgbClr val="556575"/>
                 </a:solidFill>
                 <a:latin typeface="Arial"/>
               </a:rPr>
-              <a:t>Die drei Grundprinzipien</a:t>
+              <a:t>M18 · Modulinhalte</a:t>
+            </a:r>
+          </a:p>
+        </p:txBody>
+      </p:sp>
+      <p:sp>
+        <p:nvSpPr>
+          <p:cNvPr id="4" name="TextBox 3"/>
+          <p:cNvSpPr txBox="1"/>
+          <p:nvPr/>
+        </p:nvSpPr>
+        <p:spPr>
+          <a:xfrm>
+            <a:off x="365760" y="274320"/>
+            <a:ext cx="11430000" cy="777240"/>
+          </a:xfrm>
+          <a:prstGeom prst="rect">
+            <a:avLst/>
+          </a:prstGeom>
+          <a:noFill/>
+        </p:spPr>
+        <p:txBody>
+          <a:bodyPr wrap="square">
+            <a:spAutoFit/>
+          </a:bodyPr>
+          <a:lstStyle/>
+          <a:p>
+            <a:pPr algn="l"/>
+            <a:r>
+              <a:rPr sz="2200" b="1" i="0">
+                <a:solidFill>
+                  <a:srgbClr val="003DA5"/>
+                </a:solidFill>
+                <a:latin typeface="Arial"/>
+              </a:rPr>
+              <a:t>Vom Zufallskontakt zum Signal-gesteuerten Gespräch</a:t>
+            </a:r>
+          </a:p>
+        </p:txBody>
+      </p:sp>
+      <p:sp>
+        <p:nvSpPr>
+          <p:cNvPr id="5" name="Rectangle 4"/>
+          <p:cNvSpPr/>
+          <p:nvPr/>
+        </p:nvSpPr>
+        <p:spPr>
+          <a:xfrm>
+            <a:off x="365760" y="1005840"/>
+            <a:ext cx="11430000" cy="27432"/>
+          </a:xfrm>
+          <a:prstGeom prst="rect">
+            <a:avLst/>
+          </a:prstGeom>
+          <a:solidFill>
+            <a:srgbClr val="D1D5DB"/>
+          </a:solidFill>
+          <a:ln>
+            <a:noFill/>
+          </a:ln>
+        </p:spPr>
+        <p:style>
+          <a:lnRef idx="1">
+            <a:schemeClr val="accent1"/>
+          </a:lnRef>
+          <a:fillRef idx="3">
+            <a:schemeClr val="accent1"/>
+          </a:fillRef>
+          <a:effectRef idx="2">
+            <a:schemeClr val="accent1"/>
+          </a:effectRef>
+          <a:fontRef idx="minor">
+            <a:schemeClr val="lt1"/>
+          </a:fontRef>
+        </p:style>
+        <p:txBody>
+          <a:bodyPr rtlCol="0" anchor="ctr"/>
+          <a:lstStyle/>
+          <a:p>
+            <a:pPr algn="ctr"/>
+          </a:p>
+        </p:txBody>
+      </p:sp>
+      <p:sp>
+        <p:nvSpPr>
+          <p:cNvPr id="6" name="TextBox 5"/>
+          <p:cNvSpPr txBox="1"/>
+          <p:nvPr/>
+        </p:nvSpPr>
+        <p:spPr>
+          <a:xfrm>
+            <a:off x="365760" y="1143000"/>
+            <a:ext cx="11430000" cy="5212080"/>
+          </a:xfrm>
+          <a:prstGeom prst="rect">
+            <a:avLst/>
+          </a:prstGeom>
+          <a:noFill/>
+        </p:spPr>
+        <p:txBody>
+          <a:bodyPr wrap="square">
+            <a:spAutoFit/>
+          </a:bodyPr>
+          <a:lstStyle/>
+          <a:p>
+            <a:pPr>
+              <a:spcBef>
+                <a:spcPts val="500"/>
+              </a:spcBef>
+            </a:pPr>
+            <a:r>
+              <a:rPr sz="1500">
+                <a:solidFill>
+                  <a:srgbClr val="003DA5"/>
+                </a:solidFill>
+                <a:latin typeface="Arial"/>
+              </a:rPr>
+              <a:t>▪  </a:t>
+            </a:r>
+            <a:r>
+              <a:rPr sz="1700">
+                <a:solidFill>
+                  <a:srgbClr val="1A1A1A"/>
+                </a:solidFill>
+                <a:latin typeface="Arial"/>
+              </a:rPr>
+              <a:t>Traditioneller Vertrieb funktioniert nach dem Kalendermodell: Jahresgespräch im Februar, Folgeaktivität wenn der Kunde anruft. Datengetriebener Vertrieb…</a:t>
+            </a:r>
+          </a:p>
+          <a:p>
+            <a:pPr>
+              <a:spcBef>
+                <a:spcPts val="500"/>
+              </a:spcBef>
+            </a:pPr>
+            <a:r>
+              <a:rPr sz="1500">
+                <a:solidFill>
+                  <a:srgbClr val="003DA5"/>
+                </a:solidFill>
+                <a:latin typeface="Arial"/>
+              </a:rPr>
+              <a:t>▪  </a:t>
+            </a:r>
+            <a:r>
+              <a:rPr sz="1700">
+                <a:solidFill>
+                  <a:srgbClr val="1A1A1A"/>
+                </a:solidFill>
+                <a:latin typeface="Arial"/>
+              </a:rPr>
+              <a:t>Branchenbeobachtungen deuten darauf hin, dass trigger-basiert arbeitende Berater deutlich höhere Konversionsraten erzielen als reaktiv vorgehende Berater (vgl.…</a:t>
+            </a:r>
+          </a:p>
+          <a:p>
+            <a:pPr>
+              <a:spcBef>
+                <a:spcPts val="500"/>
+              </a:spcBef>
+            </a:pPr>
+            <a:r>
+              <a:rPr sz="1500">
+                <a:solidFill>
+                  <a:srgbClr val="003DA5"/>
+                </a:solidFill>
+                <a:latin typeface="Arial"/>
+              </a:rPr>
+              <a:t>▪  </a:t>
+            </a:r>
+            <a:r>
+              <a:rPr sz="1700">
+                <a:solidFill>
+                  <a:srgbClr val="1A1A1A"/>
+                </a:solidFill>
+                <a:latin typeface="Arial"/>
+              </a:rPr>
+              <a:t>Kumar &amp; Reinartz (2018) beschreiben datengetriebenes CRM als systematische Nutzung von Kundendaten zur richtigen Zeit mit dem richtigen Angebot – nicht als…</a:t>
+            </a:r>
+          </a:p>
+          <a:p>
+            <a:pPr>
+              <a:spcBef>
+                <a:spcPts val="500"/>
+              </a:spcBef>
+            </a:pPr>
+            <a:r>
+              <a:rPr sz="1500">
+                <a:solidFill>
+                  <a:srgbClr val="003DA5"/>
+                </a:solidFill>
+                <a:latin typeface="Arial"/>
+              </a:rPr>
+              <a:t>▪  </a:t>
+            </a:r>
+            <a:r>
+              <a:rPr sz="1700">
+                <a:solidFill>
+                  <a:srgbClr val="1A1A1A"/>
+                </a:solidFill>
+                <a:latin typeface="Arial"/>
+              </a:rPr>
+              <a:t>&gt; Datengetriebener Vertrieb bedeutet nicht, Kunden zu überwachen. Es bedeutet, die Signale zu lesen, die der Kunde ohnehin sendet – und im richtigen Moment…</a:t>
             </a:r>
           </a:p>
         </p:txBody>
@@ -4866,8 +8152,8 @@
         </p:nvSpPr>
         <p:spPr>
           <a:xfrm>
-            <a:off x="365760" y="2286000"/>
-            <a:ext cx="11430000" cy="1828800"/>
+            <a:off x="365760" y="2011680"/>
+            <a:ext cx="11430000" cy="2011680"/>
           </a:xfrm>
           <a:prstGeom prst="rect">
             <a:avLst/>
@@ -4882,13 +8168,13 @@
           <a:p>
             <a:pPr algn="l"/>
             <a:r>
-              <a:rPr sz="3600" b="1">
+              <a:rPr sz="3600" b="1" i="0">
                 <a:solidFill>
                   <a:srgbClr val="FFFFFF"/>
                 </a:solidFill>
                 <a:latin typeface="Arial"/>
               </a:rPr>
-              <a:t>Typ 1: Transaktionale Trigger (aus agree-Kontodaten)</a:t>
+              <a:t>Die drei Grundprinzipien</a:t>
             </a:r>
           </a:p>
         </p:txBody>
@@ -4907,7 +8193,7 @@
     <p:bg>
       <p:bgPr>
         <a:solidFill>
-          <a:srgbClr val="1A1A1A"/>
+          <a:srgbClr val="FFFFFF"/>
         </a:solidFill>
         <a:effectLst/>
       </p:bgPr>
@@ -4934,7 +8220,7 @@
             <a:avLst/>
           </a:prstGeom>
           <a:solidFill>
-            <a:srgbClr val="E05B00"/>
+            <a:srgbClr val="003DA5"/>
           </a:solidFill>
           <a:ln>
             <a:noFill/>
@@ -4970,8 +8256,8 @@
         </p:nvSpPr>
         <p:spPr>
           <a:xfrm>
-            <a:off x="365760" y="2286000"/>
-            <a:ext cx="11430000" cy="1828800"/>
+            <a:off x="228600" y="182880"/>
+            <a:ext cx="11430000" cy="320040"/>
           </a:xfrm>
           <a:prstGeom prst="rect">
             <a:avLst/>
@@ -4986,13 +8272,216 @@
           <a:p>
             <a:pPr algn="l"/>
             <a:r>
-              <a:rPr sz="3600" b="1">
-                <a:solidFill>
-                  <a:srgbClr val="FFFFFF"/>
+              <a:rPr sz="900" b="0" i="0">
+                <a:solidFill>
+                  <a:srgbClr val="556575"/>
                 </a:solidFill>
                 <a:latin typeface="Arial"/>
               </a:rPr>
-              <a:t>Typ 2: Ratingbasierte Trigger (aus Kreditakte / Frühwarnsystem)</a:t>
+              <a:t>M18 · Modulinhalte</a:t>
+            </a:r>
+          </a:p>
+        </p:txBody>
+      </p:sp>
+      <p:sp>
+        <p:nvSpPr>
+          <p:cNvPr id="4" name="TextBox 3"/>
+          <p:cNvSpPr txBox="1"/>
+          <p:nvPr/>
+        </p:nvSpPr>
+        <p:spPr>
+          <a:xfrm>
+            <a:off x="365760" y="274320"/>
+            <a:ext cx="11430000" cy="777240"/>
+          </a:xfrm>
+          <a:prstGeom prst="rect">
+            <a:avLst/>
+          </a:prstGeom>
+          <a:noFill/>
+        </p:spPr>
+        <p:txBody>
+          <a:bodyPr wrap="square">
+            <a:spAutoFit/>
+          </a:bodyPr>
+          <a:lstStyle/>
+          <a:p>
+            <a:pPr algn="l"/>
+            <a:r>
+              <a:rPr sz="2200" b="1" i="0">
+                <a:solidFill>
+                  <a:srgbClr val="003DA5"/>
+                </a:solidFill>
+                <a:latin typeface="Arial"/>
+              </a:rPr>
+              <a:t>Die drei Grundprinzipien</a:t>
+            </a:r>
+          </a:p>
+        </p:txBody>
+      </p:sp>
+      <p:sp>
+        <p:nvSpPr>
+          <p:cNvPr id="5" name="Rectangle 4"/>
+          <p:cNvSpPr/>
+          <p:nvPr/>
+        </p:nvSpPr>
+        <p:spPr>
+          <a:xfrm>
+            <a:off x="365760" y="1005840"/>
+            <a:ext cx="11430000" cy="27432"/>
+          </a:xfrm>
+          <a:prstGeom prst="rect">
+            <a:avLst/>
+          </a:prstGeom>
+          <a:solidFill>
+            <a:srgbClr val="D1D5DB"/>
+          </a:solidFill>
+          <a:ln>
+            <a:noFill/>
+          </a:ln>
+        </p:spPr>
+        <p:style>
+          <a:lnRef idx="1">
+            <a:schemeClr val="accent1"/>
+          </a:lnRef>
+          <a:fillRef idx="3">
+            <a:schemeClr val="accent1"/>
+          </a:fillRef>
+          <a:effectRef idx="2">
+            <a:schemeClr val="accent1"/>
+          </a:effectRef>
+          <a:fontRef idx="minor">
+            <a:schemeClr val="lt1"/>
+          </a:fontRef>
+        </p:style>
+        <p:txBody>
+          <a:bodyPr rtlCol="0" anchor="ctr"/>
+          <a:lstStyle/>
+          <a:p>
+            <a:pPr algn="ctr"/>
+          </a:p>
+        </p:txBody>
+      </p:sp>
+      <p:sp>
+        <p:nvSpPr>
+          <p:cNvPr id="6" name="TextBox 5"/>
+          <p:cNvSpPr txBox="1"/>
+          <p:nvPr/>
+        </p:nvSpPr>
+        <p:spPr>
+          <a:xfrm>
+            <a:off x="365760" y="1143000"/>
+            <a:ext cx="11430000" cy="5212080"/>
+          </a:xfrm>
+          <a:prstGeom prst="rect">
+            <a:avLst/>
+          </a:prstGeom>
+          <a:noFill/>
+        </p:spPr>
+        <p:txBody>
+          <a:bodyPr wrap="square">
+            <a:spAutoFit/>
+          </a:bodyPr>
+          <a:lstStyle/>
+          <a:p>
+            <a:pPr>
+              <a:spcBef>
+                <a:spcPts val="500"/>
+              </a:spcBef>
+            </a:pPr>
+            <a:r>
+              <a:rPr sz="1500">
+                <a:solidFill>
+                  <a:srgbClr val="003DA5"/>
+                </a:solidFill>
+                <a:latin typeface="Arial"/>
+              </a:rPr>
+              <a:t>▪  </a:t>
+            </a:r>
+            <a:r>
+              <a:rPr sz="1700" b="1">
+                <a:solidFill>
+                  <a:srgbClr val="003DA5"/>
+                </a:solidFill>
+                <a:latin typeface="Arial"/>
+              </a:rPr>
+              <a:t>Timing schlägt Häufigkeit: </a:t>
+            </a:r>
+            <a:r>
+              <a:rPr sz="1700">
+                <a:solidFill>
+                  <a:srgbClr val="1A1A1A"/>
+                </a:solidFill>
+                <a:latin typeface="Arial"/>
+              </a:rPr>
+              <a:t>Ein Anruf zum richtigen Moment ist wertvoller als zehn Anrufe zum falschen Zeitpunkt. 2.</a:t>
+            </a:r>
+          </a:p>
+          <a:p>
+            <a:pPr>
+              <a:spcBef>
+                <a:spcPts val="500"/>
+              </a:spcBef>
+            </a:pPr>
+            <a:r>
+              <a:rPr sz="1500">
+                <a:solidFill>
+                  <a:srgbClr val="003DA5"/>
+                </a:solidFill>
+                <a:latin typeface="Arial"/>
+              </a:rPr>
+              <a:t>▪  </a:t>
+            </a:r>
+            <a:r>
+              <a:rPr sz="1700" b="1">
+                <a:solidFill>
+                  <a:srgbClr val="003DA5"/>
+                </a:solidFill>
+                <a:latin typeface="Arial"/>
+              </a:rPr>
+              <a:t>Relevanz schlägt Breite: </a:t>
+            </a:r>
+            <a:r>
+              <a:rPr sz="1700">
+                <a:solidFill>
+                  <a:srgbClr val="1A1A1A"/>
+                </a:solidFill>
+                <a:latin typeface="Arial"/>
+              </a:rPr>
+              <a:t>Ein auf den aktuellen Bedarf zugeschnittenes Gespräch überzeugt mehr als eine generische Produktpräsentation. 3.</a:t>
+            </a:r>
+          </a:p>
+          <a:p>
+            <a:pPr>
+              <a:spcBef>
+                <a:spcPts val="500"/>
+              </a:spcBef>
+            </a:pPr>
+            <a:r>
+              <a:rPr sz="1500">
+                <a:solidFill>
+                  <a:srgbClr val="003DA5"/>
+                </a:solidFill>
+                <a:latin typeface="Arial"/>
+              </a:rPr>
+              <a:t>▪  </a:t>
+            </a:r>
+            <a:r>
+              <a:rPr sz="1700" b="1">
+                <a:solidFill>
+                  <a:srgbClr val="003DA5"/>
+                </a:solidFill>
+                <a:latin typeface="Arial"/>
+              </a:rPr>
+              <a:t>Daten sind kein Ersatz für Beziehung: </a:t>
+            </a:r>
+            <a:r>
+              <a:rPr sz="1700">
+                <a:solidFill>
+                  <a:srgbClr val="1A1A1A"/>
+                </a:solidFill>
+                <a:latin typeface="Arial"/>
+              </a:rPr>
+              <a:t>Trigger öffnen die Tür – das Gespräch selbst bleibt menschlich.</a:t>
             </a:r>
           </a:p>
         </p:txBody>
@@ -5074,8 +8563,8 @@
         </p:nvSpPr>
         <p:spPr>
           <a:xfrm>
-            <a:off x="365760" y="2286000"/>
-            <a:ext cx="11430000" cy="1828800"/>
+            <a:off x="365760" y="2011680"/>
+            <a:ext cx="11430000" cy="2011680"/>
           </a:xfrm>
           <a:prstGeom prst="rect">
             <a:avLst/>
@@ -5090,13 +8579,13 @@
           <a:p>
             <a:pPr algn="l"/>
             <a:r>
-              <a:rPr sz="3600" b="1">
+              <a:rPr sz="3600" b="1" i="0">
                 <a:solidFill>
                   <a:srgbClr val="FFFFFF"/>
                 </a:solidFill>
                 <a:latin typeface="Arial"/>
               </a:rPr>
-              <a:t>Typ 3: Lebensereignisbasierte Trigger (aus CRM-Notizen, externen Quellen)</a:t>
+              <a:t>Typ 1: Transaktionale Trigger (aus agree-Kontodaten)</a:t>
             </a:r>
           </a:p>
         </p:txBody>
@@ -5115,7 +8604,7 @@
     <p:bg>
       <p:bgPr>
         <a:solidFill>
-          <a:srgbClr val="1A1A1A"/>
+          <a:srgbClr val="FFFFFF"/>
         </a:solidFill>
         <a:effectLst/>
       </p:bgPr>
@@ -5142,7 +8631,7 @@
             <a:avLst/>
           </a:prstGeom>
           <a:solidFill>
-            <a:srgbClr val="E05B00"/>
+            <a:srgbClr val="003DA5"/>
           </a:solidFill>
           <a:ln>
             <a:noFill/>
@@ -5178,8 +8667,8 @@
         </p:nvSpPr>
         <p:spPr>
           <a:xfrm>
-            <a:off x="365760" y="2286000"/>
-            <a:ext cx="11430000" cy="1828800"/>
+            <a:off x="228600" y="182880"/>
+            <a:ext cx="11430000" cy="320040"/>
           </a:xfrm>
           <a:prstGeom prst="rect">
             <a:avLst/>
@@ -5194,17 +8683,663 @@
           <a:p>
             <a:pPr algn="l"/>
             <a:r>
-              <a:rPr sz="3600" b="1">
-                <a:solidFill>
-                  <a:srgbClr val="FFFFFF"/>
+              <a:rPr sz="900" b="0" i="0">
+                <a:solidFill>
+                  <a:srgbClr val="556575"/>
                 </a:solidFill>
                 <a:latin typeface="Arial"/>
               </a:rPr>
-              <a:t>Datenqualitäts-Audit im eigenen Bestand</a:t>
-            </a:r>
-          </a:p>
-        </p:txBody>
-      </p:sp>
+              <a:t>M18 · 4.2 Trigger-Ereignisse: Drei Typen mit unterschiedlicher Logik</a:t>
+            </a:r>
+          </a:p>
+        </p:txBody>
+      </p:sp>
+      <p:sp>
+        <p:nvSpPr>
+          <p:cNvPr id="4" name="TextBox 3"/>
+          <p:cNvSpPr txBox="1"/>
+          <p:nvPr/>
+        </p:nvSpPr>
+        <p:spPr>
+          <a:xfrm>
+            <a:off x="365760" y="274320"/>
+            <a:ext cx="11430000" cy="777240"/>
+          </a:xfrm>
+          <a:prstGeom prst="rect">
+            <a:avLst/>
+          </a:prstGeom>
+          <a:noFill/>
+        </p:spPr>
+        <p:txBody>
+          <a:bodyPr wrap="square">
+            <a:spAutoFit/>
+          </a:bodyPr>
+          <a:lstStyle/>
+          <a:p>
+            <a:pPr algn="l"/>
+            <a:r>
+              <a:rPr sz="2200" b="1" i="0">
+                <a:solidFill>
+                  <a:srgbClr val="003DA5"/>
+                </a:solidFill>
+                <a:latin typeface="Arial"/>
+              </a:rPr>
+              <a:t>Typ 1: Transaktionale Trigger (aus agree-Kontodaten)</a:t>
+            </a:r>
+          </a:p>
+        </p:txBody>
+      </p:sp>
+      <p:sp>
+        <p:nvSpPr>
+          <p:cNvPr id="5" name="Rectangle 4"/>
+          <p:cNvSpPr/>
+          <p:nvPr/>
+        </p:nvSpPr>
+        <p:spPr>
+          <a:xfrm>
+            <a:off x="365760" y="1005840"/>
+            <a:ext cx="11430000" cy="27432"/>
+          </a:xfrm>
+          <a:prstGeom prst="rect">
+            <a:avLst/>
+          </a:prstGeom>
+          <a:solidFill>
+            <a:srgbClr val="D1D5DB"/>
+          </a:solidFill>
+          <a:ln>
+            <a:noFill/>
+          </a:ln>
+        </p:spPr>
+        <p:style>
+          <a:lnRef idx="1">
+            <a:schemeClr val="accent1"/>
+          </a:lnRef>
+          <a:fillRef idx="3">
+            <a:schemeClr val="accent1"/>
+          </a:fillRef>
+          <a:effectRef idx="2">
+            <a:schemeClr val="accent1"/>
+          </a:effectRef>
+          <a:fontRef idx="minor">
+            <a:schemeClr val="lt1"/>
+          </a:fontRef>
+        </p:style>
+        <p:txBody>
+          <a:bodyPr rtlCol="0" anchor="ctr"/>
+          <a:lstStyle/>
+          <a:p>
+            <a:pPr algn="ctr"/>
+          </a:p>
+        </p:txBody>
+      </p:sp>
+      <p:graphicFrame>
+        <p:nvGraphicFramePr>
+          <p:cNvPr id="6" name="Table 5"/>
+          <p:cNvGraphicFramePr>
+            <a:graphicFrameLocks noGrp="1"/>
+          </p:cNvGraphicFramePr>
+          <p:nvPr/>
+        </p:nvGraphicFramePr>
+        <p:xfrm>
+          <a:off x="365760" y="1143000"/>
+          <a:ext cx="11430000" cy="2852928"/>
+        </p:xfrm>
+        <a:graphic>
+          <a:graphicData uri="http://schemas.openxmlformats.org/drawingml/2006/table">
+            <a:tbl>
+              <a:tblPr firstRow="1" bandRow="1">
+                <a:tableStyleId>{5C22544A-7EE6-4342-B048-85BDC9FD1C3A}</a:tableStyleId>
+              </a:tblPr>
+              <a:tblGrid>
+                <a:gridCol w="2857500"/>
+                <a:gridCol w="2857500"/>
+                <a:gridCol w="2857500"/>
+                <a:gridCol w="2857500"/>
+              </a:tblGrid>
+              <a:tr h="475488">
+                <a:tc>
+                  <a:txBody>
+                    <a:bodyPr wrap="square"/>
+                    <a:lstStyle/>
+                    <a:p>
+                      <a:r>
+                        <a:rPr sz="1100" b="1">
+                          <a:solidFill>
+                            <a:srgbClr val="FFFFFF"/>
+                          </a:solidFill>
+                          <a:latin typeface="Arial"/>
+                        </a:rPr>
+                        <a:t>Signal</a:t>
+                      </a:r>
+                    </a:p>
+                  </a:txBody>
+                  <a:tcPr>
+                    <a:solidFill>
+                      <a:srgbClr val="003DA5"/>
+                    </a:solidFill>
+                  </a:tcPr>
+                </a:tc>
+                <a:tc>
+                  <a:txBody>
+                    <a:bodyPr wrap="square"/>
+                    <a:lstStyle/>
+                    <a:p>
+                      <a:r>
+                        <a:rPr sz="1100" b="1">
+                          <a:solidFill>
+                            <a:srgbClr val="FFFFFF"/>
+                          </a:solidFill>
+                          <a:latin typeface="Arial"/>
+                        </a:rPr>
+                        <a:t>Möglicher Bedarf</a:t>
+                      </a:r>
+                    </a:p>
+                  </a:txBody>
+                  <a:tcPr>
+                    <a:solidFill>
+                      <a:srgbClr val="003DA5"/>
+                    </a:solidFill>
+                  </a:tcPr>
+                </a:tc>
+                <a:tc>
+                  <a:txBody>
+                    <a:bodyPr wrap="square"/>
+                    <a:lstStyle/>
+                    <a:p>
+                      <a:r>
+                        <a:rPr sz="1100" b="1">
+                          <a:solidFill>
+                            <a:srgbClr val="FFFFFF"/>
+                          </a:solidFill>
+                          <a:latin typeface="Arial"/>
+                        </a:rPr>
+                        <a:t>Vorlaufzeit</a:t>
+                      </a:r>
+                    </a:p>
+                  </a:txBody>
+                  <a:tcPr>
+                    <a:solidFill>
+                      <a:srgbClr val="003DA5"/>
+                    </a:solidFill>
+                  </a:tcPr>
+                </a:tc>
+                <a:tc>
+                  <a:txBody>
+                    <a:bodyPr wrap="square"/>
+                    <a:lstStyle/>
+                    <a:p>
+                      <a:r>
+                        <a:rPr sz="1100" b="1">
+                          <a:solidFill>
+                            <a:srgbClr val="FFFFFF"/>
+                          </a:solidFill>
+                          <a:latin typeface="Arial"/>
+                        </a:rPr>
+                        <a:t>agree-Quelle (bankindividuell)</a:t>
+                      </a:r>
+                    </a:p>
+                  </a:txBody>
+                  <a:tcPr>
+                    <a:solidFill>
+                      <a:srgbClr val="003DA5"/>
+                    </a:solidFill>
+                  </a:tcPr>
+                </a:tc>
+              </a:tr>
+              <a:tr h="475488">
+                <a:tc>
+                  <a:txBody>
+                    <a:bodyPr wrap="square"/>
+                    <a:lstStyle/>
+                    <a:p>
+                      <a:r>
+                        <a:rPr sz="1100" b="0">
+                          <a:solidFill>
+                            <a:srgbClr val="1A1A1A"/>
+                          </a:solidFill>
+                          <a:latin typeface="Arial"/>
+                        </a:rPr>
+                        <a:t>Kontokorrent dauerhaft &gt; 80 % ausgelastet</a:t>
+                      </a:r>
+                    </a:p>
+                  </a:txBody>
+                  <a:tcPr>
+                    <a:solidFill>
+                      <a:srgbClr val="FFFFFF"/>
+                    </a:solidFill>
+                  </a:tcPr>
+                </a:tc>
+                <a:tc>
+                  <a:txBody>
+                    <a:bodyPr wrap="square"/>
+                    <a:lstStyle/>
+                    <a:p>
+                      <a:r>
+                        <a:rPr sz="1100" b="0">
+                          <a:solidFill>
+                            <a:srgbClr val="1A1A1A"/>
+                          </a:solidFill>
+                          <a:latin typeface="Arial"/>
+                        </a:rPr>
+                        <a:t>Betriebsmittelkrediterhöhung oder Liquiditätsplanung</a:t>
+                      </a:r>
+                    </a:p>
+                  </a:txBody>
+                  <a:tcPr>
+                    <a:solidFill>
+                      <a:srgbClr val="FFFFFF"/>
+                    </a:solidFill>
+                  </a:tcPr>
+                </a:tc>
+                <a:tc>
+                  <a:txBody>
+                    <a:bodyPr wrap="square"/>
+                    <a:lstStyle/>
+                    <a:p>
+                      <a:r>
+                        <a:rPr sz="1100" b="0">
+                          <a:solidFill>
+                            <a:srgbClr val="1A1A1A"/>
+                          </a:solidFill>
+                          <a:latin typeface="Arial"/>
+                        </a:rPr>
+                        <a:t>Sofort</a:t>
+                      </a:r>
+                    </a:p>
+                  </a:txBody>
+                  <a:tcPr>
+                    <a:solidFill>
+                      <a:srgbClr val="FFFFFF"/>
+                    </a:solidFill>
+                  </a:tcPr>
+                </a:tc>
+                <a:tc>
+                  <a:txBody>
+                    <a:bodyPr wrap="square"/>
+                    <a:lstStyle/>
+                    <a:p>
+                      <a:r>
+                        <a:rPr sz="1100" b="0">
+                          <a:solidFill>
+                            <a:srgbClr val="1A1A1A"/>
+                          </a:solidFill>
+                          <a:latin typeface="Arial"/>
+                        </a:rPr>
+                        <a:t>agree BAP → Auswertungen → Kontokorrentauslastung</a:t>
+                      </a:r>
+                    </a:p>
+                  </a:txBody>
+                  <a:tcPr>
+                    <a:solidFill>
+                      <a:srgbClr val="FFFFFF"/>
+                    </a:solidFill>
+                  </a:tcPr>
+                </a:tc>
+              </a:tr>
+              <a:tr h="475488">
+                <a:tc>
+                  <a:txBody>
+                    <a:bodyPr wrap="square"/>
+                    <a:lstStyle/>
+                    <a:p>
+                      <a:r>
+                        <a:rPr sz="1100" b="0">
+                          <a:solidFill>
+                            <a:srgbClr val="1A1A1A"/>
+                          </a:solidFill>
+                          <a:latin typeface="Arial"/>
+                        </a:rPr>
+                        <a:t>Eingangszahlungen deutlich gesunken (&gt; 20 % in 2 Monaten)</a:t>
+                      </a:r>
+                    </a:p>
+                  </a:txBody>
+                  <a:tcPr>
+                    <a:solidFill>
+                      <a:srgbClr val="F4F6FA"/>
+                    </a:solidFill>
+                  </a:tcPr>
+                </a:tc>
+                <a:tc>
+                  <a:txBody>
+                    <a:bodyPr wrap="square"/>
+                    <a:lstStyle/>
+                    <a:p>
+                      <a:r>
+                        <a:rPr sz="1100" b="0">
+                          <a:solidFill>
+                            <a:srgbClr val="1A1A1A"/>
+                          </a:solidFill>
+                          <a:latin typeface="Arial"/>
+                        </a:rPr>
+                        <a:t>Bonitätsgespräch, Frühwarnung (→ M04)</a:t>
+                      </a:r>
+                    </a:p>
+                  </a:txBody>
+                  <a:tcPr>
+                    <a:solidFill>
+                      <a:srgbClr val="F4F6FA"/>
+                    </a:solidFill>
+                  </a:tcPr>
+                </a:tc>
+                <a:tc>
+                  <a:txBody>
+                    <a:bodyPr wrap="square"/>
+                    <a:lstStyle/>
+                    <a:p>
+                      <a:r>
+                        <a:rPr sz="1100" b="0">
+                          <a:solidFill>
+                            <a:srgbClr val="1A1A1A"/>
+                          </a:solidFill>
+                          <a:latin typeface="Arial"/>
+                        </a:rPr>
+                        <a:t>Sofort</a:t>
+                      </a:r>
+                    </a:p>
+                  </a:txBody>
+                  <a:tcPr>
+                    <a:solidFill>
+                      <a:srgbClr val="F4F6FA"/>
+                    </a:solidFill>
+                  </a:tcPr>
+                </a:tc>
+                <a:tc>
+                  <a:txBody>
+                    <a:bodyPr wrap="square"/>
+                    <a:lstStyle/>
+                    <a:p>
+                      <a:r>
+                        <a:rPr sz="1100" b="0">
+                          <a:solidFill>
+                            <a:srgbClr val="1A1A1A"/>
+                          </a:solidFill>
+                          <a:latin typeface="Arial"/>
+                        </a:rPr>
+                        <a:t>Manuelle Umsatzabfrage im Konto oder Frühwarnbericht</a:t>
+                      </a:r>
+                    </a:p>
+                  </a:txBody>
+                  <a:tcPr>
+                    <a:solidFill>
+                      <a:srgbClr val="F4F6FA"/>
+                    </a:solidFill>
+                  </a:tcPr>
+                </a:tc>
+              </a:tr>
+              <a:tr h="475488">
+                <a:tc>
+                  <a:txBody>
+                    <a:bodyPr wrap="square"/>
+                    <a:lstStyle/>
+                    <a:p>
+                      <a:r>
+                        <a:rPr sz="1100" b="0">
+                          <a:solidFill>
+                            <a:srgbClr val="1A1A1A"/>
+                          </a:solidFill>
+                          <a:latin typeface="Arial"/>
+                        </a:rPr>
+                        <a:t>Auslandszahlungen erstmalig auftauchend</a:t>
+                      </a:r>
+                    </a:p>
+                  </a:txBody>
+                  <a:tcPr>
+                    <a:solidFill>
+                      <a:srgbClr val="FFFFFF"/>
+                    </a:solidFill>
+                  </a:tcPr>
+                </a:tc>
+                <a:tc>
+                  <a:txBody>
+                    <a:bodyPr wrap="square"/>
+                    <a:lstStyle/>
+                    <a:p>
+                      <a:r>
+                        <a:rPr sz="1100" b="0">
+                          <a:solidFill>
+                            <a:srgbClr val="1A1A1A"/>
+                          </a:solidFill>
+                          <a:latin typeface="Arial"/>
+                        </a:rPr>
+                        <a:t>Auslands-ZV, Währungsabsicherung (DZ BANK)</a:t>
+                      </a:r>
+                    </a:p>
+                  </a:txBody>
+                  <a:tcPr>
+                    <a:solidFill>
+                      <a:srgbClr val="FFFFFF"/>
+                    </a:solidFill>
+                  </a:tcPr>
+                </a:tc>
+                <a:tc>
+                  <a:txBody>
+                    <a:bodyPr wrap="square"/>
+                    <a:lstStyle/>
+                    <a:p>
+                      <a:r>
+                        <a:rPr sz="1100" b="0">
+                          <a:solidFill>
+                            <a:srgbClr val="1A1A1A"/>
+                          </a:solidFill>
+                          <a:latin typeface="Arial"/>
+                        </a:rPr>
+                        <a:t>Sofort</a:t>
+                      </a:r>
+                    </a:p>
+                  </a:txBody>
+                  <a:tcPr>
+                    <a:solidFill>
+                      <a:srgbClr val="FFFFFF"/>
+                    </a:solidFill>
+                  </a:tcPr>
+                </a:tc>
+                <a:tc>
+                  <a:txBody>
+                    <a:bodyPr wrap="square"/>
+                    <a:lstStyle/>
+                    <a:p>
+                      <a:r>
+                        <a:rPr sz="1100" b="0">
+                          <a:solidFill>
+                            <a:srgbClr val="1A1A1A"/>
+                          </a:solidFill>
+                          <a:latin typeface="Arial"/>
+                        </a:rPr>
+                        <a:t>ZV-Analyse im Kundenprofil</a:t>
+                      </a:r>
+                    </a:p>
+                  </a:txBody>
+                  <a:tcPr>
+                    <a:solidFill>
+                      <a:srgbClr val="FFFFFF"/>
+                    </a:solidFill>
+                  </a:tcPr>
+                </a:tc>
+              </a:tr>
+              <a:tr h="475488">
+                <a:tc>
+                  <a:txBody>
+                    <a:bodyPr wrap="square"/>
+                    <a:lstStyle/>
+                    <a:p>
+                      <a:r>
+                        <a:rPr sz="1100" b="0">
+                          <a:solidFill>
+                            <a:srgbClr val="1A1A1A"/>
+                          </a:solidFill>
+                          <a:latin typeface="Arial"/>
+                        </a:rPr>
+                        <a:t>Große Einmalzahlung auf Konto</a:t>
+                      </a:r>
+                    </a:p>
+                  </a:txBody>
+                  <a:tcPr>
+                    <a:solidFill>
+                      <a:srgbClr val="F4F6FA"/>
+                    </a:solidFill>
+                  </a:tcPr>
+                </a:tc>
+                <a:tc>
+                  <a:txBody>
+                    <a:bodyPr wrap="square"/>
+                    <a:lstStyle/>
+                    <a:p>
+                      <a:r>
+                        <a:rPr sz="1100" b="0">
+                          <a:solidFill>
+                            <a:srgbClr val="1A1A1A"/>
+                          </a:solidFill>
+                          <a:latin typeface="Arial"/>
+                        </a:rPr>
+                        <a:t>Kapitalanlage (Union Investment)</a:t>
+                      </a:r>
+                    </a:p>
+                  </a:txBody>
+                  <a:tcPr>
+                    <a:solidFill>
+                      <a:srgbClr val="F4F6FA"/>
+                    </a:solidFill>
+                  </a:tcPr>
+                </a:tc>
+                <a:tc>
+                  <a:txBody>
+                    <a:bodyPr wrap="square"/>
+                    <a:lstStyle/>
+                    <a:p>
+                      <a:r>
+                        <a:rPr sz="1100" b="0">
+                          <a:solidFill>
+                            <a:srgbClr val="1A1A1A"/>
+                          </a:solidFill>
+                          <a:latin typeface="Arial"/>
+                        </a:rPr>
+                        <a:t>Kurzfristig</a:t>
+                      </a:r>
+                    </a:p>
+                  </a:txBody>
+                  <a:tcPr>
+                    <a:solidFill>
+                      <a:srgbClr val="F4F6FA"/>
+                    </a:solidFill>
+                  </a:tcPr>
+                </a:tc>
+                <a:tc>
+                  <a:txBody>
+                    <a:bodyPr wrap="square"/>
+                    <a:lstStyle/>
+                    <a:p>
+                      <a:r>
+                        <a:rPr sz="1100" b="0">
+                          <a:solidFill>
+                            <a:srgbClr val="1A1A1A"/>
+                          </a:solidFill>
+                          <a:latin typeface="Arial"/>
+                        </a:rPr>
+                        <a:t>Kontokorrent-Umsatzübersicht</a:t>
+                      </a:r>
+                    </a:p>
+                  </a:txBody>
+                  <a:tcPr>
+                    <a:solidFill>
+                      <a:srgbClr val="F4F6FA"/>
+                    </a:solidFill>
+                  </a:tcPr>
+                </a:tc>
+              </a:tr>
+              <a:tr h="475488">
+                <a:tc>
+                  <a:txBody>
+                    <a:bodyPr wrap="square"/>
+                    <a:lstStyle/>
+                    <a:p>
+                      <a:r>
+                        <a:rPr sz="1100" b="0">
+                          <a:solidFill>
+                            <a:srgbClr val="1A1A1A"/>
+                          </a:solidFill>
+                          <a:latin typeface="Arial"/>
+                        </a:rPr>
+                        <a:t>Kontokorrent-Linie seit &gt; 6 Monaten nicht genutzt</a:t>
+                      </a:r>
+                    </a:p>
+                  </a:txBody>
+                  <a:tcPr>
+                    <a:solidFill>
+                      <a:srgbClr val="FFFFFF"/>
+                    </a:solidFill>
+                  </a:tcPr>
+                </a:tc>
+                <a:tc>
+                  <a:txBody>
+                    <a:bodyPr wrap="square"/>
+                    <a:lstStyle/>
+                    <a:p>
+                      <a:r>
+                        <a:rPr sz="1100" b="0">
+                          <a:solidFill>
+                            <a:srgbClr val="1A1A1A"/>
+                          </a:solidFill>
+                          <a:latin typeface="Arial"/>
+                        </a:rPr>
+                        <a:t>Linie reduzieren oder Umschuldung prüfen</a:t>
+                      </a:r>
+                    </a:p>
+                  </a:txBody>
+                  <a:tcPr>
+                    <a:solidFill>
+                      <a:srgbClr val="FFFFFF"/>
+                    </a:solidFill>
+                  </a:tcPr>
+                </a:tc>
+                <a:tc>
+                  <a:txBody>
+                    <a:bodyPr wrap="square"/>
+                    <a:lstStyle/>
+                    <a:p>
+                      <a:r>
+                        <a:rPr sz="1100" b="0">
+                          <a:solidFill>
+                            <a:srgbClr val="1A1A1A"/>
+                          </a:solidFill>
+                          <a:latin typeface="Arial"/>
+                        </a:rPr>
+                        <a:t>Mittelfristig</a:t>
+                      </a:r>
+                    </a:p>
+                  </a:txBody>
+                  <a:tcPr>
+                    <a:solidFill>
+                      <a:srgbClr val="FFFFFF"/>
+                    </a:solidFill>
+                  </a:tcPr>
+                </a:tc>
+                <a:tc>
+                  <a:txBody>
+                    <a:bodyPr wrap="square"/>
+                    <a:lstStyle/>
+                    <a:p>
+                      <a:r>
+                        <a:rPr sz="1100" b="0">
+                          <a:solidFill>
+                            <a:srgbClr val="1A1A1A"/>
+                          </a:solidFill>
+                          <a:latin typeface="Arial"/>
+                        </a:rPr>
+                        <a:t>Kreditbearbeitung → Engagementübersicht</a:t>
+                      </a:r>
+                    </a:p>
+                  </a:txBody>
+                  <a:tcPr>
+                    <a:solidFill>
+                      <a:srgbClr val="FFFFFF"/>
+                    </a:solidFill>
+                  </a:tcPr>
+                </a:tc>
+              </a:tr>
+            </a:tbl>
+          </a:graphicData>
+        </a:graphic>
+      </p:graphicFrame>
     </p:spTree>
   </p:cSld>
   <p:clrMapOvr>
@@ -5282,8 +9417,8 @@
         </p:nvSpPr>
         <p:spPr>
           <a:xfrm>
-            <a:off x="365760" y="2286000"/>
-            <a:ext cx="11430000" cy="1828800"/>
+            <a:off x="365760" y="2011680"/>
+            <a:ext cx="11430000" cy="2011680"/>
           </a:xfrm>
           <a:prstGeom prst="rect">
             <a:avLst/>
@@ -5298,13 +9433,13 @@
           <a:p>
             <a:pPr algn="l"/>
             <a:r>
-              <a:rPr sz="3600" b="1">
+              <a:rPr sz="3600" b="1" i="0">
                 <a:solidFill>
                   <a:srgbClr val="FFFFFF"/>
                 </a:solidFill>
                 <a:latin typeface="Arial"/>
               </a:rPr>
-              <a:t>Was ist erlaubt – was nicht?</a:t>
+              <a:t>Typ 2: Ratingbasierte Trigger (aus Kreditakte / Frühwarnsystem)</a:t>
             </a:r>
           </a:p>
         </p:txBody>

--- a/public/downloads/praesentation/M18.pptx
+++ b/public/downloads/praesentation/M18.pptx
@@ -3463,7 +3463,7 @@
     <p:bg>
       <p:bgPr>
         <a:solidFill>
-          <a:srgbClr val="191D2E"/>
+          <a:srgbClr val="1F2B56"/>
         </a:solidFill>
         <a:effectLst/>
       </p:bgPr>
@@ -4177,7 +4177,7 @@
     <p:bg>
       <p:bgPr>
         <a:solidFill>
-          <a:srgbClr val="191D2E"/>
+          <a:srgbClr val="1F2B56"/>
         </a:solidFill>
         <a:effectLst/>
       </p:bgPr>
@@ -4685,7 +4685,7 @@
                   </a:txBody>
                   <a:tcPr>
                     <a:solidFill>
-                      <a:srgbClr val="191D2E"/>
+                      <a:srgbClr val="1F2B56"/>
                     </a:solidFill>
                   </a:tcPr>
                 </a:tc>
@@ -4707,7 +4707,7 @@
                   </a:txBody>
                   <a:tcPr>
                     <a:solidFill>
-                      <a:srgbClr val="191D2E"/>
+                      <a:srgbClr val="1F2B56"/>
                     </a:solidFill>
                   </a:tcPr>
                 </a:tc>
@@ -4729,7 +4729,7 @@
                   </a:txBody>
                   <a:tcPr>
                     <a:solidFill>
-                      <a:srgbClr val="191D2E"/>
+                      <a:srgbClr val="1F2B56"/>
                     </a:solidFill>
                   </a:tcPr>
                 </a:tc>
@@ -6161,7 +6161,7 @@
     <p:bg>
       <p:bgPr>
         <a:solidFill>
-          <a:srgbClr val="191D2E"/>
+          <a:srgbClr val="1F2B56"/>
         </a:solidFill>
         <a:effectLst/>
       </p:bgPr>
@@ -6362,7 +6362,7 @@
     <p:bg>
       <p:bgPr>
         <a:solidFill>
-          <a:srgbClr val="191D2E"/>
+          <a:srgbClr val="1F2B56"/>
         </a:solidFill>
         <a:effectLst/>
       </p:bgPr>
@@ -6563,7 +6563,7 @@
     <p:bg>
       <p:bgPr>
         <a:solidFill>
-          <a:srgbClr val="191D2E"/>
+          <a:srgbClr val="1F2B56"/>
         </a:solidFill>
         <a:effectLst/>
       </p:bgPr>
@@ -7072,7 +7072,7 @@
                   </a:txBody>
                   <a:tcPr>
                     <a:solidFill>
-                      <a:srgbClr val="191D2E"/>
+                      <a:srgbClr val="1F2B56"/>
                     </a:solidFill>
                   </a:tcPr>
                 </a:tc>
@@ -7094,7 +7094,7 @@
                   </a:txBody>
                   <a:tcPr>
                     <a:solidFill>
-                      <a:srgbClr val="191D2E"/>
+                      <a:srgbClr val="1F2B56"/>
                     </a:solidFill>
                   </a:tcPr>
                 </a:tc>
@@ -7116,7 +7116,7 @@
                   </a:txBody>
                   <a:tcPr>
                     <a:solidFill>
-                      <a:srgbClr val="191D2E"/>
+                      <a:srgbClr val="1F2B56"/>
                     </a:solidFill>
                   </a:tcPr>
                 </a:tc>
@@ -7138,7 +7138,7 @@
                   </a:txBody>
                   <a:tcPr>
                     <a:solidFill>
-                      <a:srgbClr val="191D2E"/>
+                      <a:srgbClr val="1F2B56"/>
                     </a:solidFill>
                   </a:tcPr>
                 </a:tc>
@@ -7947,29 +7947,29 @@
         </p:nvSpPr>
         <p:spPr>
           <a:xfrm>
-            <a:off x="4064000" y="927100"/>
-            <a:ext cx="508000" cy="647700"/>
-          </a:xfrm>
-          <a:prstGeom prst="rect">
-            <a:avLst/>
-          </a:prstGeom>
-          <a:noFill/>
-        </p:spPr>
-        <p:txBody>
-          <a:bodyPr wrap="square">
+            <a:off x="4064000" y="939799"/>
+            <a:ext cx="762000" cy="647700"/>
+          </a:xfrm>
+          <a:prstGeom prst="rect">
+            <a:avLst/>
+          </a:prstGeom>
+          <a:noFill/>
+        </p:spPr>
+        <p:txBody>
+          <a:bodyPr wrap="none">
             <a:normAutofit/>
           </a:bodyPr>
           <a:lstStyle/>
           <a:p>
             <a:pPr algn="l"/>
             <a:r>
-              <a:rPr sz="2600" b="0" i="1">
+              <a:rPr sz="2400" b="0" i="1">
                 <a:solidFill>
                   <a:srgbClr val="1F2B56"/>
                 </a:solidFill>
                 <a:latin typeface="Georgia"/>
               </a:rPr>
-              <a:t>I.</a:t>
+              <a:t>I</a:t>
             </a:r>
           </a:p>
         </p:txBody>
@@ -7982,8 +7982,8 @@
         </p:nvSpPr>
         <p:spPr>
           <a:xfrm>
-            <a:off x="4699000" y="952500"/>
-            <a:ext cx="6858000" cy="622300"/>
+            <a:off x="4953000" y="952500"/>
+            <a:ext cx="6629400" cy="635000"/>
           </a:xfrm>
           <a:prstGeom prst="rect">
             <a:avLst/>
@@ -8017,7 +8017,7 @@
         </p:nvSpPr>
         <p:spPr>
           <a:xfrm>
-            <a:off x="4064000" y="1574800"/>
+            <a:off x="4064000" y="1587500"/>
             <a:ext cx="7518399" cy="6350"/>
           </a:xfrm>
           <a:prstGeom prst="rect">
@@ -8060,29 +8060,29 @@
         </p:nvSpPr>
         <p:spPr>
           <a:xfrm>
-            <a:off x="4064000" y="1612900"/>
-            <a:ext cx="508000" cy="647700"/>
-          </a:xfrm>
-          <a:prstGeom prst="rect">
-            <a:avLst/>
-          </a:prstGeom>
-          <a:noFill/>
-        </p:spPr>
-        <p:txBody>
-          <a:bodyPr wrap="square">
+            <a:off x="4064000" y="1638300"/>
+            <a:ext cx="762000" cy="647700"/>
+          </a:xfrm>
+          <a:prstGeom prst="rect">
+            <a:avLst/>
+          </a:prstGeom>
+          <a:noFill/>
+        </p:spPr>
+        <p:txBody>
+          <a:bodyPr wrap="none">
             <a:normAutofit/>
           </a:bodyPr>
           <a:lstStyle/>
           <a:p>
             <a:pPr algn="l"/>
             <a:r>
-              <a:rPr sz="2600" b="0" i="1">
+              <a:rPr sz="2400" b="0" i="1">
                 <a:solidFill>
                   <a:srgbClr val="1F2B56"/>
                 </a:solidFill>
                 <a:latin typeface="Georgia"/>
               </a:rPr>
-              <a:t>II.</a:t>
+              <a:t>II</a:t>
             </a:r>
           </a:p>
         </p:txBody>
@@ -8095,8 +8095,8 @@
         </p:nvSpPr>
         <p:spPr>
           <a:xfrm>
-            <a:off x="4699000" y="1638300"/>
-            <a:ext cx="6858000" cy="622300"/>
+            <a:off x="4953000" y="1651000"/>
+            <a:ext cx="6629400" cy="635000"/>
           </a:xfrm>
           <a:prstGeom prst="rect">
             <a:avLst/>
@@ -8130,7 +8130,7 @@
         </p:nvSpPr>
         <p:spPr>
           <a:xfrm>
-            <a:off x="4064000" y="2260600"/>
+            <a:off x="4064000" y="2286000"/>
             <a:ext cx="7518399" cy="6350"/>
           </a:xfrm>
           <a:prstGeom prst="rect">
@@ -8173,29 +8173,29 @@
         </p:nvSpPr>
         <p:spPr>
           <a:xfrm>
-            <a:off x="4064000" y="2298700"/>
-            <a:ext cx="508000" cy="647700"/>
-          </a:xfrm>
-          <a:prstGeom prst="rect">
-            <a:avLst/>
-          </a:prstGeom>
-          <a:noFill/>
-        </p:spPr>
-        <p:txBody>
-          <a:bodyPr wrap="square">
+            <a:off x="4064000" y="2336800"/>
+            <a:ext cx="762000" cy="647700"/>
+          </a:xfrm>
+          <a:prstGeom prst="rect">
+            <a:avLst/>
+          </a:prstGeom>
+          <a:noFill/>
+        </p:spPr>
+        <p:txBody>
+          <a:bodyPr wrap="none">
             <a:normAutofit/>
           </a:bodyPr>
           <a:lstStyle/>
           <a:p>
             <a:pPr algn="l"/>
             <a:r>
-              <a:rPr sz="2600" b="0" i="1">
+              <a:rPr sz="2400" b="0" i="1">
                 <a:solidFill>
                   <a:srgbClr val="1F2B56"/>
                 </a:solidFill>
                 <a:latin typeface="Georgia"/>
               </a:rPr>
-              <a:t>III.</a:t>
+              <a:t>III</a:t>
             </a:r>
           </a:p>
         </p:txBody>
@@ -8208,8 +8208,8 @@
         </p:nvSpPr>
         <p:spPr>
           <a:xfrm>
-            <a:off x="4699000" y="2324100"/>
-            <a:ext cx="6858000" cy="622300"/>
+            <a:off x="4953000" y="2349500"/>
+            <a:ext cx="6629400" cy="635000"/>
           </a:xfrm>
           <a:prstGeom prst="rect">
             <a:avLst/>
@@ -8243,7 +8243,7 @@
         </p:nvSpPr>
         <p:spPr>
           <a:xfrm>
-            <a:off x="4064000" y="2946400"/>
+            <a:off x="4064000" y="2984500"/>
             <a:ext cx="7518399" cy="6350"/>
           </a:xfrm>
           <a:prstGeom prst="rect">
@@ -8286,29 +8286,29 @@
         </p:nvSpPr>
         <p:spPr>
           <a:xfrm>
-            <a:off x="4064000" y="2984500"/>
-            <a:ext cx="508000" cy="647700"/>
-          </a:xfrm>
-          <a:prstGeom prst="rect">
-            <a:avLst/>
-          </a:prstGeom>
-          <a:noFill/>
-        </p:spPr>
-        <p:txBody>
-          <a:bodyPr wrap="square">
+            <a:off x="4064000" y="3035300"/>
+            <a:ext cx="762000" cy="647700"/>
+          </a:xfrm>
+          <a:prstGeom prst="rect">
+            <a:avLst/>
+          </a:prstGeom>
+          <a:noFill/>
+        </p:spPr>
+        <p:txBody>
+          <a:bodyPr wrap="none">
             <a:normAutofit/>
           </a:bodyPr>
           <a:lstStyle/>
           <a:p>
             <a:pPr algn="l"/>
             <a:r>
-              <a:rPr sz="2600" b="0" i="1">
+              <a:rPr sz="2400" b="0" i="1">
                 <a:solidFill>
                   <a:srgbClr val="1F2B56"/>
                 </a:solidFill>
                 <a:latin typeface="Georgia"/>
               </a:rPr>
-              <a:t>IV.</a:t>
+              <a:t>IV</a:t>
             </a:r>
           </a:p>
         </p:txBody>
@@ -8321,8 +8321,8 @@
         </p:nvSpPr>
         <p:spPr>
           <a:xfrm>
-            <a:off x="4699000" y="3009900"/>
-            <a:ext cx="6858000" cy="622300"/>
+            <a:off x="4953000" y="3048000"/>
+            <a:ext cx="6629400" cy="635000"/>
           </a:xfrm>
           <a:prstGeom prst="rect">
             <a:avLst/>
@@ -8356,7 +8356,7 @@
         </p:nvSpPr>
         <p:spPr>
           <a:xfrm>
-            <a:off x="4064000" y="3632200"/>
+            <a:off x="4064000" y="3683000"/>
             <a:ext cx="7518399" cy="6350"/>
           </a:xfrm>
           <a:prstGeom prst="rect">
@@ -8399,29 +8399,29 @@
         </p:nvSpPr>
         <p:spPr>
           <a:xfrm>
-            <a:off x="4064000" y="3670300"/>
-            <a:ext cx="508000" cy="647700"/>
-          </a:xfrm>
-          <a:prstGeom prst="rect">
-            <a:avLst/>
-          </a:prstGeom>
-          <a:noFill/>
-        </p:spPr>
-        <p:txBody>
-          <a:bodyPr wrap="square">
+            <a:off x="4064000" y="3733799"/>
+            <a:ext cx="762000" cy="647700"/>
+          </a:xfrm>
+          <a:prstGeom prst="rect">
+            <a:avLst/>
+          </a:prstGeom>
+          <a:noFill/>
+        </p:spPr>
+        <p:txBody>
+          <a:bodyPr wrap="none">
             <a:normAutofit/>
           </a:bodyPr>
           <a:lstStyle/>
           <a:p>
             <a:pPr algn="l"/>
             <a:r>
-              <a:rPr sz="2600" b="0" i="1">
+              <a:rPr sz="2400" b="0" i="1">
                 <a:solidFill>
                   <a:srgbClr val="1F2B56"/>
                 </a:solidFill>
                 <a:latin typeface="Georgia"/>
               </a:rPr>
-              <a:t>V.</a:t>
+              <a:t>V</a:t>
             </a:r>
           </a:p>
         </p:txBody>
@@ -8434,8 +8434,8 @@
         </p:nvSpPr>
         <p:spPr>
           <a:xfrm>
-            <a:off x="4699000" y="3695700"/>
-            <a:ext cx="6858000" cy="622300"/>
+            <a:off x="4953000" y="3746500"/>
+            <a:ext cx="6629400" cy="635000"/>
           </a:xfrm>
           <a:prstGeom prst="rect">
             <a:avLst/>
@@ -8840,7 +8840,7 @@
     <p:bg>
       <p:bgPr>
         <a:solidFill>
-          <a:srgbClr val="191D2E"/>
+          <a:srgbClr val="1F2B56"/>
         </a:solidFill>
         <a:effectLst/>
       </p:bgPr>
@@ -9041,7 +9041,7 @@
     <p:bg>
       <p:bgPr>
         <a:solidFill>
-          <a:srgbClr val="191D2E"/>
+          <a:srgbClr val="1F2B56"/>
         </a:solidFill>
         <a:effectLst/>
       </p:bgPr>
@@ -9242,7 +9242,7 @@
     <p:bg>
       <p:bgPr>
         <a:solidFill>
-          <a:srgbClr val="191D2E"/>
+          <a:srgbClr val="1F2B56"/>
         </a:solidFill>
         <a:effectLst/>
       </p:bgPr>
@@ -10547,7 +10547,7 @@
     <p:bg>
       <p:bgPr>
         <a:solidFill>
-          <a:srgbClr val="191D2E"/>
+          <a:srgbClr val="1F2B56"/>
         </a:solidFill>
         <a:effectLst/>
       </p:bgPr>
@@ -10748,7 +10748,7 @@
     <p:bg>
       <p:bgPr>
         <a:solidFill>
-          <a:srgbClr val="191D2E"/>
+          <a:srgbClr val="1F2B56"/>
         </a:solidFill>
         <a:effectLst/>
       </p:bgPr>
@@ -10949,7 +10949,7 @@
     <p:bg>
       <p:bgPr>
         <a:solidFill>
-          <a:srgbClr val="191D2E"/>
+          <a:srgbClr val="1F2B56"/>
         </a:solidFill>
         <a:effectLst/>
       </p:bgPr>
@@ -11150,7 +11150,7 @@
     <p:bg>
       <p:bgPr>
         <a:solidFill>
-          <a:srgbClr val="191D2E"/>
+          <a:srgbClr val="1F2B56"/>
         </a:solidFill>
         <a:effectLst/>
       </p:bgPr>
@@ -11351,7 +11351,7 @@
     <p:bg>
       <p:bgPr>
         <a:solidFill>
-          <a:srgbClr val="191D2E"/>
+          <a:srgbClr val="1F2B56"/>
         </a:solidFill>
         <a:effectLst/>
       </p:bgPr>
@@ -11587,7 +11587,7 @@
     <p:bg>
       <p:bgPr>
         <a:solidFill>
-          <a:srgbClr val="191D2E"/>
+          <a:srgbClr val="1F2B56"/>
         </a:solidFill>
         <a:effectLst/>
       </p:bgPr>
@@ -13207,7 +13207,7 @@
     <p:bg>
       <p:bgPr>
         <a:solidFill>
-          <a:srgbClr val="191D2E"/>
+          <a:srgbClr val="1F2B56"/>
         </a:solidFill>
         <a:effectLst/>
       </p:bgPr>
@@ -13716,7 +13716,7 @@
                   </a:txBody>
                   <a:tcPr>
                     <a:solidFill>
-                      <a:srgbClr val="191D2E"/>
+                      <a:srgbClr val="1F2B56"/>
                     </a:solidFill>
                   </a:tcPr>
                 </a:tc>
@@ -13738,7 +13738,7 @@
                   </a:txBody>
                   <a:tcPr>
                     <a:solidFill>
-                      <a:srgbClr val="191D2E"/>
+                      <a:srgbClr val="1F2B56"/>
                     </a:solidFill>
                   </a:tcPr>
                 </a:tc>
@@ -13760,7 +13760,7 @@
                   </a:txBody>
                   <a:tcPr>
                     <a:solidFill>
-                      <a:srgbClr val="191D2E"/>
+                      <a:srgbClr val="1F2B56"/>
                     </a:solidFill>
                   </a:tcPr>
                 </a:tc>
@@ -13782,7 +13782,7 @@
                   </a:txBody>
                   <a:tcPr>
                     <a:solidFill>
-                      <a:srgbClr val="191D2E"/>
+                      <a:srgbClr val="1F2B56"/>
                     </a:solidFill>
                   </a:tcPr>
                 </a:tc>
@@ -14492,7 +14492,7 @@
                   </a:txBody>
                   <a:tcPr>
                     <a:solidFill>
-                      <a:srgbClr val="191D2E"/>
+                      <a:srgbClr val="1F2B56"/>
                     </a:solidFill>
                   </a:tcPr>
                 </a:tc>
@@ -14514,7 +14514,7 @@
                   </a:txBody>
                   <a:tcPr>
                     <a:solidFill>
-                      <a:srgbClr val="191D2E"/>
+                      <a:srgbClr val="1F2B56"/>
                     </a:solidFill>
                   </a:tcPr>
                 </a:tc>
@@ -14536,7 +14536,7 @@
                   </a:txBody>
                   <a:tcPr>
                     <a:solidFill>
-                      <a:srgbClr val="191D2E"/>
+                      <a:srgbClr val="1F2B56"/>
                     </a:solidFill>
                   </a:tcPr>
                 </a:tc>
@@ -15104,7 +15104,7 @@
                   </a:txBody>
                   <a:tcPr>
                     <a:solidFill>
-                      <a:srgbClr val="191D2E"/>
+                      <a:srgbClr val="1F2B56"/>
                     </a:solidFill>
                   </a:tcPr>
                 </a:tc>
@@ -15126,7 +15126,7 @@
                   </a:txBody>
                   <a:tcPr>
                     <a:solidFill>
-                      <a:srgbClr val="191D2E"/>
+                      <a:srgbClr val="1F2B56"/>
                     </a:solidFill>
                   </a:tcPr>
                 </a:tc>
@@ -15148,7 +15148,7 @@
                   </a:txBody>
                   <a:tcPr>
                     <a:solidFill>
-                      <a:srgbClr val="191D2E"/>
+                      <a:srgbClr val="1F2B56"/>
                     </a:solidFill>
                   </a:tcPr>
                 </a:tc>
@@ -15170,7 +15170,7 @@
                   </a:txBody>
                   <a:tcPr>
                     <a:solidFill>
-                      <a:srgbClr val="191D2E"/>
+                      <a:srgbClr val="1F2B56"/>
                     </a:solidFill>
                   </a:tcPr>
                 </a:tc>

--- a/public/downloads/praesentation/M18.pptx
+++ b/public/downloads/praesentation/M18.pptx
@@ -15,8 +15,12 @@
     <p:sldId id="263" r:id="rId14"/>
     <p:sldId id="264" r:id="rId15"/>
     <p:sldId id="265" r:id="rId16"/>
+    <p:sldId id="266" r:id="rId17"/>
+    <p:sldId id="267" r:id="rId18"/>
+    <p:sldId id="268" r:id="rId19"/>
+    <p:sldId id="269" r:id="rId20"/>
   </p:sldIdLst>
-  <p:sldSz cx="12191695" cy="6858000" type="screen4x3"/>
+  <p:sldSz cx="12188952" cy="6858000" type="screen4x3"/>
   <p:notesSz cx="6858000" cy="9144000"/>
   <p:defaultTextStyle>
     <a:defPPr>
@@ -3090,14 +3094,6 @@
 <file path=ppt/slides/slide1.xml><?xml version="1.0" encoding="utf-8"?>
 <p:sld xmlns:a="http://schemas.openxmlformats.org/drawingml/2006/main" xmlns:p="http://schemas.openxmlformats.org/presentationml/2006/main" xmlns:r="http://schemas.openxmlformats.org/officeDocument/2006/relationships">
   <p:cSld>
-    <p:bg>
-      <p:bgPr>
-        <a:solidFill>
-          <a:srgbClr val="F8F8FA"/>
-        </a:solidFill>
-        <a:effectLst/>
-      </p:bgPr>
-    </p:bg>
     <p:spTree>
       <p:nvGrpSpPr>
         <p:cNvPr id="1" name=""/>
@@ -3107,125 +3103,20 @@
       <p:grpSpPr/>
       <p:sp>
         <p:nvSpPr>
-          <p:cNvPr id="2" name="TextBox 1"/>
-          <p:cNvSpPr txBox="1"/>
-          <p:nvPr/>
-        </p:nvSpPr>
-        <p:spPr>
-          <a:xfrm>
-            <a:off x="609600" y="304800"/>
-            <a:ext cx="3175000" cy="279400"/>
-          </a:xfrm>
-          <a:prstGeom prst="rect">
-            <a:avLst/>
-          </a:prstGeom>
-          <a:noFill/>
-        </p:spPr>
-        <p:txBody>
-          <a:bodyPr wrap="square">
-            <a:normAutofit/>
-          </a:bodyPr>
-          <a:lstStyle/>
-          <a:p>
-            <a:pPr algn="l"/>
-            <a:r>
-              <a:rPr sz="1000" b="1" i="0">
-                <a:solidFill>
-                  <a:srgbClr val="191D2E"/>
-                </a:solidFill>
-                <a:latin typeface="Arial"/>
-              </a:rPr>
-              <a:t>FKB  Campus</a:t>
-            </a:r>
-          </a:p>
-        </p:txBody>
-      </p:sp>
-      <p:sp>
-        <p:nvSpPr>
-          <p:cNvPr id="3" name="TextBox 2"/>
-          <p:cNvSpPr txBox="1"/>
-          <p:nvPr/>
-        </p:nvSpPr>
-        <p:spPr>
-          <a:xfrm>
-            <a:off x="609600" y="304800"/>
-            <a:ext cx="10972800" cy="279400"/>
-          </a:xfrm>
-          <a:prstGeom prst="rect">
-            <a:avLst/>
-          </a:prstGeom>
-          <a:noFill/>
-        </p:spPr>
-        <p:txBody>
-          <a:bodyPr wrap="square">
-            <a:normAutofit/>
-          </a:bodyPr>
-          <a:lstStyle/>
-          <a:p>
-            <a:pPr algn="r"/>
-            <a:r>
-              <a:rPr sz="900" b="0" i="0">
-                <a:solidFill>
-                  <a:srgbClr val="7B7FA0"/>
-                </a:solidFill>
-                <a:latin typeface="Courier New"/>
-              </a:rPr>
-              <a:t>M18  ·  v0.4</a:t>
-            </a:r>
-          </a:p>
-        </p:txBody>
-      </p:sp>
-      <p:sp>
-        <p:nvSpPr>
-          <p:cNvPr id="4" name="TextBox 3"/>
-          <p:cNvSpPr txBox="1"/>
-          <p:nvPr/>
-        </p:nvSpPr>
-        <p:spPr>
-          <a:xfrm>
-            <a:off x="609600" y="2794000"/>
-            <a:ext cx="10972800" cy="2032000"/>
-          </a:xfrm>
-          <a:prstGeom prst="rect">
-            <a:avLst/>
-          </a:prstGeom>
-          <a:noFill/>
-        </p:spPr>
-        <p:txBody>
-          <a:bodyPr wrap="square">
-            <a:normAutofit/>
-          </a:bodyPr>
-          <a:lstStyle/>
-          <a:p>
-            <a:pPr algn="l"/>
-            <a:r>
-              <a:rPr sz="6000" b="0" i="0">
-                <a:solidFill>
-                  <a:srgbClr val="191D2E"/>
-                </a:solidFill>
-                <a:latin typeface="Georgia"/>
-              </a:rPr>
-              <a:t>Datengetriebener Vertrieb</a:t>
-            </a:r>
-          </a:p>
-        </p:txBody>
-      </p:sp>
-      <p:sp>
-        <p:nvSpPr>
-          <p:cNvPr id="5" name="Rectangle 4"/>
+          <p:cNvPr id="2" name="Rectangle 1"/>
           <p:cNvSpPr/>
           <p:nvPr/>
         </p:nvSpPr>
         <p:spPr>
           <a:xfrm>
-            <a:off x="609600" y="4889500"/>
-            <a:ext cx="10972800" cy="6350"/>
+            <a:off x="0" y="0"/>
+            <a:ext cx="12188952" cy="6858000"/>
           </a:xfrm>
           <a:prstGeom prst="rect">
             <a:avLst/>
           </a:prstGeom>
           <a:solidFill>
-            <a:srgbClr val="191D2E"/>
+            <a:srgbClr val="1F2C56"/>
           </a:solidFill>
           <a:ln>
             <a:noFill/>
@@ -3255,14 +3146,57 @@
       </p:sp>
       <p:sp>
         <p:nvSpPr>
-          <p:cNvPr id="6" name="TextBox 5"/>
+          <p:cNvPr id="3" name="Rectangle 2"/>
+          <p:cNvSpPr/>
+          <p:nvPr/>
+        </p:nvSpPr>
+        <p:spPr>
+          <a:xfrm>
+            <a:off x="0" y="0"/>
+            <a:ext cx="12188952" cy="54864"/>
+          </a:xfrm>
+          <a:prstGeom prst="rect">
+            <a:avLst/>
+          </a:prstGeom>
+          <a:solidFill>
+            <a:srgbClr val="D9C089"/>
+          </a:solidFill>
+          <a:ln>
+            <a:noFill/>
+          </a:ln>
+        </p:spPr>
+        <p:style>
+          <a:lnRef idx="1">
+            <a:schemeClr val="accent1"/>
+          </a:lnRef>
+          <a:fillRef idx="3">
+            <a:schemeClr val="accent1"/>
+          </a:fillRef>
+          <a:effectRef idx="2">
+            <a:schemeClr val="accent1"/>
+          </a:effectRef>
+          <a:fontRef idx="minor">
+            <a:schemeClr val="lt1"/>
+          </a:fontRef>
+        </p:style>
+        <p:txBody>
+          <a:bodyPr rtlCol="0" anchor="ctr"/>
+          <a:lstStyle/>
+          <a:p>
+            <a:pPr algn="ctr"/>
+          </a:p>
+        </p:txBody>
+      </p:sp>
+      <p:sp>
+        <p:nvSpPr>
+          <p:cNvPr id="4" name="TextBox 3"/>
           <p:cNvSpPr txBox="1"/>
           <p:nvPr/>
         </p:nvSpPr>
         <p:spPr>
           <a:xfrm>
-            <a:off x="609600" y="5016500"/>
-            <a:ext cx="5207000" cy="1143000"/>
+            <a:off x="685800" y="201168"/>
+            <a:ext cx="10817352" cy="256032"/>
           </a:xfrm>
           <a:prstGeom prst="rect">
             <a:avLst/>
@@ -3270,21 +3204,99 @@
           <a:noFill/>
         </p:spPr>
         <p:txBody>
+          <a:bodyPr wrap="none">
+            <a:spAutoFit/>
+          </a:bodyPr>
+          <a:lstStyle/>
+          <a:p>
+            <a:pPr algn="l"/>
+            <a:r>
+              <a:rPr sz="800">
+                <a:solidFill>
+                  <a:srgbClr val="C8D2E6"/>
+                </a:solidFill>
+                <a:latin typeface="JetBrains Mono"/>
+              </a:rPr>
+              <a:t>FKB CAMPUS  ·  FIRMENKUNDENAKADEMIE  ·  M18</a:t>
+            </a:r>
+          </a:p>
+        </p:txBody>
+      </p:sp>
+      <p:sp>
+        <p:nvSpPr>
+          <p:cNvPr id="5" name="TextBox 4"/>
+          <p:cNvSpPr txBox="1"/>
+          <p:nvPr/>
+        </p:nvSpPr>
+        <p:spPr>
+          <a:xfrm>
+            <a:off x="685800" y="1828800"/>
+            <a:ext cx="10817352" cy="2011680"/>
+          </a:xfrm>
+          <a:prstGeom prst="rect">
+            <a:avLst/>
+          </a:prstGeom>
+          <a:noFill/>
+        </p:spPr>
+        <p:txBody>
           <a:bodyPr wrap="square">
-            <a:normAutofit/>
+            <a:spAutoFit/>
           </a:bodyPr>
           <a:lstStyle/>
           <a:p>
             <a:pPr algn="l"/>
             <a:r>
-              <a:rPr sz="1400" b="0" i="1">
-                <a:solidFill>
-                  <a:srgbClr val="4D5270"/>
-                </a:solidFill>
-                <a:latin typeface="Georgia"/>
+              <a:rPr sz="4600" b="1" i="0">
+                <a:solidFill>
+                  <a:srgbClr val="FFFFFF"/>
+                </a:solidFill>
+                <a:latin typeface="Source Serif 4"/>
               </a:rPr>
-              <a:t>Trigger-Signale aus agree erkennen und proaktiv nutzen</a:t>
-            </a:r>
+              <a:t>Datengetriebener Vertrieb</a:t>
+            </a:r>
+          </a:p>
+        </p:txBody>
+      </p:sp>
+      <p:sp>
+        <p:nvSpPr>
+          <p:cNvPr id="6" name="Rectangle 5"/>
+          <p:cNvSpPr/>
+          <p:nvPr/>
+        </p:nvSpPr>
+        <p:spPr>
+          <a:xfrm>
+            <a:off x="685800" y="5029200"/>
+            <a:ext cx="10817352" cy="12700"/>
+          </a:xfrm>
+          <a:prstGeom prst="rect">
+            <a:avLst/>
+          </a:prstGeom>
+          <a:solidFill>
+            <a:srgbClr val="FFFFFF"/>
+          </a:solidFill>
+          <a:ln>
+            <a:noFill/>
+          </a:ln>
+        </p:spPr>
+        <p:style>
+          <a:lnRef idx="1">
+            <a:schemeClr val="accent1"/>
+          </a:lnRef>
+          <a:fillRef idx="3">
+            <a:schemeClr val="accent1"/>
+          </a:fillRef>
+          <a:effectRef idx="2">
+            <a:schemeClr val="accent1"/>
+          </a:effectRef>
+          <a:fontRef idx="minor">
+            <a:schemeClr val="lt1"/>
+          </a:fontRef>
+        </p:style>
+        <p:txBody>
+          <a:bodyPr rtlCol="0" anchor="ctr"/>
+          <a:lstStyle/>
+          <a:p>
+            <a:pPr algn="ctr"/>
           </a:p>
         </p:txBody>
       </p:sp>
@@ -3296,8 +3308,8 @@
         </p:nvSpPr>
         <p:spPr>
           <a:xfrm>
-            <a:off x="6032500" y="5016500"/>
-            <a:ext cx="2540000" cy="177800"/>
+            <a:off x="685800" y="5193792"/>
+            <a:ext cx="5408676" cy="201168"/>
           </a:xfrm>
           <a:prstGeom prst="rect">
             <a:avLst/>
@@ -3305,20 +3317,20 @@
           <a:noFill/>
         </p:spPr>
         <p:txBody>
-          <a:bodyPr wrap="square">
-            <a:normAutofit/>
+          <a:bodyPr wrap="none">
+            <a:spAutoFit/>
           </a:bodyPr>
           <a:lstStyle/>
           <a:p>
             <a:pPr algn="l"/>
             <a:r>
-              <a:rPr sz="900" b="0" i="0">
-                <a:solidFill>
-                  <a:srgbClr val="7B7FA0"/>
-                </a:solidFill>
-                <a:latin typeface="Courier New"/>
+              <a:rPr sz="700">
+                <a:solidFill>
+                  <a:srgbClr val="A0B4D2"/>
+                </a:solidFill>
+                <a:latin typeface="JetBrains Mono"/>
               </a:rPr>
-              <a:t>ZIELSTUFE</a:t>
+              <a:t>KOMPETENZSTUFE</a:t>
             </a:r>
           </a:p>
         </p:txBody>
@@ -3331,8 +3343,8 @@
         </p:nvSpPr>
         <p:spPr>
           <a:xfrm>
-            <a:off x="6032500" y="5207000"/>
-            <a:ext cx="2540000" cy="508000"/>
+            <a:off x="685800" y="5394960"/>
+            <a:ext cx="5408676" cy="320040"/>
           </a:xfrm>
           <a:prstGeom prst="rect">
             <a:avLst/>
@@ -3341,19 +3353,19 @@
         </p:spPr>
         <p:txBody>
           <a:bodyPr wrap="square">
-            <a:normAutofit/>
+            <a:spAutoFit/>
           </a:bodyPr>
           <a:lstStyle/>
           <a:p>
             <a:pPr algn="l"/>
             <a:r>
-              <a:rPr sz="1400" b="0" i="0">
-                <a:solidFill>
-                  <a:srgbClr val="191D2E"/>
-                </a:solidFill>
-                <a:latin typeface="Georgia"/>
+              <a:rPr sz="1100" b="0" i="0">
+                <a:solidFill>
+                  <a:srgbClr val="FFFFFF"/>
+                </a:solidFill>
+                <a:latin typeface="Arial"/>
               </a:rPr>
-              <a:t>Sparringspartner</a:t>
+              <a:t>Sparring</a:t>
             </a:r>
           </a:p>
         </p:txBody>
@@ -3366,8 +3378,8 @@
         </p:nvSpPr>
         <p:spPr>
           <a:xfrm>
-            <a:off x="8890000" y="5016500"/>
-            <a:ext cx="2667000" cy="177800"/>
+            <a:off x="6094476" y="5193792"/>
+            <a:ext cx="5408676" cy="201168"/>
           </a:xfrm>
           <a:prstGeom prst="rect">
             <a:avLst/>
@@ -3375,20 +3387,20 @@
           <a:noFill/>
         </p:spPr>
         <p:txBody>
-          <a:bodyPr wrap="square">
-            <a:normAutofit/>
+          <a:bodyPr wrap="none">
+            <a:spAutoFit/>
           </a:bodyPr>
           <a:lstStyle/>
           <a:p>
             <a:pPr algn="l"/>
             <a:r>
-              <a:rPr sz="900" b="0" i="0">
-                <a:solidFill>
-                  <a:srgbClr val="7B7FA0"/>
-                </a:solidFill>
-                <a:latin typeface="Courier New"/>
+              <a:rPr sz="700">
+                <a:solidFill>
+                  <a:srgbClr val="A0B4D2"/>
+                </a:solidFill>
+                <a:latin typeface="JetBrains Mono"/>
               </a:rPr>
-              <a:t>DAUER</a:t>
+              <a:t>VERSION</a:t>
             </a:r>
           </a:p>
         </p:txBody>
@@ -3401,8 +3413,8 @@
         </p:nvSpPr>
         <p:spPr>
           <a:xfrm>
-            <a:off x="8890000" y="5207000"/>
-            <a:ext cx="2667000" cy="508000"/>
+            <a:off x="6094476" y="5394960"/>
+            <a:ext cx="5408676" cy="320040"/>
           </a:xfrm>
           <a:prstGeom prst="rect">
             <a:avLst/>
@@ -3411,19 +3423,132 @@
         </p:spPr>
         <p:txBody>
           <a:bodyPr wrap="square">
-            <a:normAutofit/>
+            <a:spAutoFit/>
           </a:bodyPr>
           <a:lstStyle/>
           <a:p>
             <a:pPr algn="l"/>
             <a:r>
-              <a:rPr sz="1400" b="0" i="0">
-                <a:solidFill>
-                  <a:srgbClr val="191D2E"/>
-                </a:solidFill>
-                <a:latin typeface="Georgia"/>
+              <a:rPr sz="1100" b="0" i="0">
+                <a:solidFill>
+                  <a:srgbClr val="FFFFFF"/>
+                </a:solidFill>
+                <a:latin typeface="Arial"/>
               </a:rPr>
-              <a:t>90 Min.</a:t>
+              <a:t>v0.4</a:t>
+            </a:r>
+          </a:p>
+        </p:txBody>
+      </p:sp>
+      <p:sp>
+        <p:nvSpPr>
+          <p:cNvPr id="11" name="Rectangle 10"/>
+          <p:cNvSpPr/>
+          <p:nvPr/>
+        </p:nvSpPr>
+        <p:spPr>
+          <a:xfrm>
+            <a:off x="0" y="6510528"/>
+            <a:ext cx="12188952" cy="347472"/>
+          </a:xfrm>
+          <a:prstGeom prst="rect">
+            <a:avLst/>
+          </a:prstGeom>
+          <a:solidFill>
+            <a:srgbClr val="0A1937"/>
+          </a:solidFill>
+          <a:ln>
+            <a:noFill/>
+          </a:ln>
+        </p:spPr>
+        <p:style>
+          <a:lnRef idx="1">
+            <a:schemeClr val="accent1"/>
+          </a:lnRef>
+          <a:fillRef idx="3">
+            <a:schemeClr val="accent1"/>
+          </a:fillRef>
+          <a:effectRef idx="2">
+            <a:schemeClr val="accent1"/>
+          </a:effectRef>
+          <a:fontRef idx="minor">
+            <a:schemeClr val="lt1"/>
+          </a:fontRef>
+        </p:style>
+        <p:txBody>
+          <a:bodyPr rtlCol="0" anchor="ctr"/>
+          <a:lstStyle/>
+          <a:p>
+            <a:pPr algn="ctr"/>
+          </a:p>
+        </p:txBody>
+      </p:sp>
+      <p:sp>
+        <p:nvSpPr>
+          <p:cNvPr id="12" name="TextBox 11"/>
+          <p:cNvSpPr txBox="1"/>
+          <p:nvPr/>
+        </p:nvSpPr>
+        <p:spPr>
+          <a:xfrm>
+            <a:off x="685800" y="6583680"/>
+            <a:ext cx="5408676" cy="256032"/>
+          </a:xfrm>
+          <a:prstGeom prst="rect">
+            <a:avLst/>
+          </a:prstGeom>
+          <a:noFill/>
+        </p:spPr>
+        <p:txBody>
+          <a:bodyPr wrap="none">
+            <a:spAutoFit/>
+          </a:bodyPr>
+          <a:lstStyle/>
+          <a:p>
+            <a:pPr algn="l"/>
+            <a:r>
+              <a:rPr sz="700">
+                <a:solidFill>
+                  <a:srgbClr val="96A5BE"/>
+                </a:solidFill>
+                <a:latin typeface="JetBrains Mono"/>
+              </a:rPr>
+              <a:t>Benedikt Zoller Coaching  ·  FKB Campus  ·  2026</a:t>
+            </a:r>
+          </a:p>
+        </p:txBody>
+      </p:sp>
+      <p:sp>
+        <p:nvSpPr>
+          <p:cNvPr id="13" name="TextBox 12"/>
+          <p:cNvSpPr txBox="1"/>
+          <p:nvPr/>
+        </p:nvSpPr>
+        <p:spPr>
+          <a:xfrm>
+            <a:off x="6094476" y="6583680"/>
+            <a:ext cx="5408676" cy="256032"/>
+          </a:xfrm>
+          <a:prstGeom prst="rect">
+            <a:avLst/>
+          </a:prstGeom>
+          <a:noFill/>
+        </p:spPr>
+        <p:txBody>
+          <a:bodyPr wrap="none">
+            <a:spAutoFit/>
+          </a:bodyPr>
+          <a:lstStyle/>
+          <a:p>
+            <a:pPr algn="r"/>
+            <a:r>
+              <a:rPr sz="700">
+                <a:solidFill>
+                  <a:srgbClr val="96A5BE"/>
+                </a:solidFill>
+                <a:latin typeface="JetBrains Mono"/>
+              </a:rPr>
+              <a:t>Trainer-Präsentation</a:t>
             </a:r>
           </a:p>
         </p:txBody>
@@ -3439,14 +3564,6 @@
 <file path=ppt/slides/slide10.xml><?xml version="1.0" encoding="utf-8"?>
 <p:sld xmlns:a="http://schemas.openxmlformats.org/drawingml/2006/main" xmlns:p="http://schemas.openxmlformats.org/presentationml/2006/main" xmlns:r="http://schemas.openxmlformats.org/officeDocument/2006/relationships">
   <p:cSld>
-    <p:bg>
-      <p:bgPr>
-        <a:solidFill>
-          <a:srgbClr val="F8F8FA"/>
-        </a:solidFill>
-        <a:effectLst/>
-      </p:bgPr>
-    </p:bg>
     <p:spTree>
       <p:nvGrpSpPr>
         <p:cNvPr id="1" name=""/>
@@ -3456,126 +3573,20 @@
       <p:grpSpPr/>
       <p:sp>
         <p:nvSpPr>
-          <p:cNvPr id="2" name="TextBox 1"/>
-          <p:cNvSpPr txBox="1"/>
-          <p:nvPr/>
-        </p:nvSpPr>
-        <p:spPr>
-          <a:xfrm>
-            <a:off x="609600" y="457200"/>
-            <a:ext cx="3175000" cy="279400"/>
-          </a:xfrm>
-          <a:prstGeom prst="rect">
-            <a:avLst/>
-          </a:prstGeom>
-          <a:noFill/>
-        </p:spPr>
-        <p:txBody>
-          <a:bodyPr wrap="square">
-            <a:normAutofit/>
-          </a:bodyPr>
-          <a:lstStyle/>
-          <a:p>
-            <a:pPr algn="l"/>
-            <a:r>
-              <a:rPr sz="1000" b="1" i="0">
-                <a:solidFill>
-                  <a:srgbClr val="191D2E"/>
-                </a:solidFill>
-                <a:latin typeface="Arial"/>
-              </a:rPr>
-              <a:t>FKB  Campus</a:t>
-            </a:r>
-          </a:p>
-        </p:txBody>
-      </p:sp>
-      <p:sp>
-        <p:nvSpPr>
-          <p:cNvPr id="3" name="TextBox 2"/>
-          <p:cNvSpPr txBox="1"/>
-          <p:nvPr/>
-        </p:nvSpPr>
-        <p:spPr>
-          <a:xfrm>
-            <a:off x="609600" y="457200"/>
-            <a:ext cx="10972800" cy="279400"/>
-          </a:xfrm>
-          <a:prstGeom prst="rect">
-            <a:avLst/>
-          </a:prstGeom>
-          <a:noFill/>
-        </p:spPr>
-        <p:txBody>
-          <a:bodyPr wrap="square">
-            <a:normAutofit/>
-          </a:bodyPr>
-          <a:lstStyle/>
-          <a:p>
-            <a:pPr algn="r"/>
-            <a:r>
-              <a:rPr sz="900" b="0" i="0">
-                <a:solidFill>
-                  <a:srgbClr val="7B7FA0"/>
-                </a:solidFill>
-                <a:latin typeface="Courier New"/>
-              </a:rPr>
-              <a:t>Ende · v0.4</a:t>
-            </a:r>
-          </a:p>
-        </p:txBody>
-      </p:sp>
-      <p:sp>
-        <p:nvSpPr>
-          <p:cNvPr id="4" name="TextBox 3"/>
-          <p:cNvSpPr txBox="1"/>
-          <p:nvPr/>
-        </p:nvSpPr>
-        <p:spPr>
-          <a:xfrm>
-            <a:off x="609600" y="1143000"/>
-            <a:ext cx="10972800" cy="3556000"/>
-          </a:xfrm>
-          <a:prstGeom prst="rect">
-            <a:avLst/>
-          </a:prstGeom>
-          <a:noFill/>
-        </p:spPr>
-        <p:txBody>
-          <a:bodyPr wrap="square">
-            <a:normAutofit/>
-          </a:bodyPr>
-          <a:lstStyle/>
-          <a:p>
-            <a:pPr algn="l"/>
-            <a:r>
-              <a:rPr sz="9600" b="0" i="0">
-                <a:solidFill>
-                  <a:srgbClr val="191D2E"/>
-                </a:solidFill>
-                <a:latin typeface="Georgia"/>
-              </a:rPr>
-              <a:t>Danke.
-Fragen?</a:t>
-            </a:r>
-          </a:p>
-        </p:txBody>
-      </p:sp>
-      <p:sp>
-        <p:nvSpPr>
-          <p:cNvPr id="5" name="Rectangle 4"/>
+          <p:cNvPr id="2" name="Rectangle 1"/>
           <p:cNvSpPr/>
           <p:nvPr/>
         </p:nvSpPr>
         <p:spPr>
           <a:xfrm>
-            <a:off x="609600" y="4826000"/>
-            <a:ext cx="10972800" cy="6350"/>
+            <a:off x="0" y="0"/>
+            <a:ext cx="12188952" cy="6858000"/>
           </a:xfrm>
           <a:prstGeom prst="rect">
             <a:avLst/>
           </a:prstGeom>
           <a:solidFill>
-            <a:srgbClr val="191D2E"/>
+            <a:srgbClr val="EDEDF3"/>
           </a:solidFill>
           <a:ln>
             <a:noFill/>
@@ -3605,14 +3616,57 @@
       </p:sp>
       <p:sp>
         <p:nvSpPr>
-          <p:cNvPr id="6" name="TextBox 5"/>
+          <p:cNvPr id="3" name="Rectangle 2"/>
+          <p:cNvSpPr/>
+          <p:nvPr/>
+        </p:nvSpPr>
+        <p:spPr>
+          <a:xfrm>
+            <a:off x="0" y="0"/>
+            <a:ext cx="12188952" cy="50292"/>
+          </a:xfrm>
+          <a:prstGeom prst="rect">
+            <a:avLst/>
+          </a:prstGeom>
+          <a:solidFill>
+            <a:srgbClr val="1F2C56"/>
+          </a:solidFill>
+          <a:ln>
+            <a:noFill/>
+          </a:ln>
+        </p:spPr>
+        <p:style>
+          <a:lnRef idx="1">
+            <a:schemeClr val="accent1"/>
+          </a:lnRef>
+          <a:fillRef idx="3">
+            <a:schemeClr val="accent1"/>
+          </a:fillRef>
+          <a:effectRef idx="2">
+            <a:schemeClr val="accent1"/>
+          </a:effectRef>
+          <a:fontRef idx="minor">
+            <a:schemeClr val="lt1"/>
+          </a:fontRef>
+        </p:style>
+        <p:txBody>
+          <a:bodyPr rtlCol="0" anchor="ctr"/>
+          <a:lstStyle/>
+          <a:p>
+            <a:pPr algn="ctr"/>
+          </a:p>
+        </p:txBody>
+      </p:sp>
+      <p:sp>
+        <p:nvSpPr>
+          <p:cNvPr id="4" name="TextBox 3"/>
           <p:cNvSpPr txBox="1"/>
           <p:nvPr/>
         </p:nvSpPr>
         <p:spPr>
           <a:xfrm>
-            <a:off x="609600" y="4953000"/>
-            <a:ext cx="5715000" cy="1143000"/>
+            <a:off x="685800" y="109728"/>
+            <a:ext cx="10817352" cy="228600"/>
           </a:xfrm>
           <a:prstGeom prst="rect">
             <a:avLst/>
@@ -3620,21 +3674,107 @@
           <a:noFill/>
         </p:spPr>
         <p:txBody>
-          <a:bodyPr wrap="square">
-            <a:normAutofit/>
+          <a:bodyPr wrap="none">
+            <a:spAutoFit/>
           </a:bodyPr>
           <a:lstStyle/>
           <a:p>
             <a:pPr algn="l"/>
             <a:r>
-              <a:rPr sz="1400" b="0" i="1">
-                <a:solidFill>
-                  <a:srgbClr val="191D2E"/>
-                </a:solidFill>
-                <a:latin typeface="Georgia"/>
+              <a:rPr sz="750">
+                <a:solidFill>
+                  <a:srgbClr val="78808C"/>
+                </a:solidFill>
+                <a:latin typeface="JetBrains Mono"/>
               </a:rPr>
-              <a:t>Modul «Datengetriebener Vertrieb» auf FKB Campus — 5 Lernziele, Praxisfall und Quellenapparat.</a:t>
-            </a:r>
+              <a:t>M18  ·  INHALT</a:t>
+            </a:r>
+          </a:p>
+        </p:txBody>
+      </p:sp>
+      <p:sp>
+        <p:nvSpPr>
+          <p:cNvPr id="5" name="Rectangle 4"/>
+          <p:cNvSpPr/>
+          <p:nvPr/>
+        </p:nvSpPr>
+        <p:spPr>
+          <a:xfrm>
+            <a:off x="0" y="1234440"/>
+            <a:ext cx="12188952" cy="12700"/>
+          </a:xfrm>
+          <a:prstGeom prst="rect">
+            <a:avLst/>
+          </a:prstGeom>
+          <a:solidFill>
+            <a:srgbClr val="D8DFE4"/>
+          </a:solidFill>
+          <a:ln>
+            <a:noFill/>
+          </a:ln>
+        </p:spPr>
+        <p:style>
+          <a:lnRef idx="1">
+            <a:schemeClr val="accent1"/>
+          </a:lnRef>
+          <a:fillRef idx="3">
+            <a:schemeClr val="accent1"/>
+          </a:fillRef>
+          <a:effectRef idx="2">
+            <a:schemeClr val="accent1"/>
+          </a:effectRef>
+          <a:fontRef idx="minor">
+            <a:schemeClr val="lt1"/>
+          </a:fontRef>
+        </p:style>
+        <p:txBody>
+          <a:bodyPr rtlCol="0" anchor="ctr"/>
+          <a:lstStyle/>
+          <a:p>
+            <a:pPr algn="ctr"/>
+          </a:p>
+        </p:txBody>
+      </p:sp>
+      <p:sp>
+        <p:nvSpPr>
+          <p:cNvPr id="6" name="Rectangle 5"/>
+          <p:cNvSpPr/>
+          <p:nvPr/>
+        </p:nvSpPr>
+        <p:spPr>
+          <a:xfrm>
+            <a:off x="685800" y="502920"/>
+            <a:ext cx="36576" cy="658368"/>
+          </a:xfrm>
+          <a:prstGeom prst="rect">
+            <a:avLst/>
+          </a:prstGeom>
+          <a:solidFill>
+            <a:srgbClr val="D9C089"/>
+          </a:solidFill>
+          <a:ln>
+            <a:noFill/>
+          </a:ln>
+        </p:spPr>
+        <p:style>
+          <a:lnRef idx="1">
+            <a:schemeClr val="accent1"/>
+          </a:lnRef>
+          <a:fillRef idx="3">
+            <a:schemeClr val="accent1"/>
+          </a:fillRef>
+          <a:effectRef idx="2">
+            <a:schemeClr val="accent1"/>
+          </a:effectRef>
+          <a:fontRef idx="minor">
+            <a:schemeClr val="lt1"/>
+          </a:fontRef>
+        </p:style>
+        <p:txBody>
+          <a:bodyPr rtlCol="0" anchor="ctr"/>
+          <a:lstStyle/>
+          <a:p>
+            <a:pPr algn="ctr"/>
           </a:p>
         </p:txBody>
       </p:sp>
@@ -3646,8 +3786,8 @@
         </p:nvSpPr>
         <p:spPr>
           <a:xfrm>
-            <a:off x="6731000" y="4953000"/>
-            <a:ext cx="2413000" cy="177800"/>
+            <a:off x="813816" y="502920"/>
+            <a:ext cx="10634472" cy="685800"/>
           </a:xfrm>
           <a:prstGeom prst="rect">
             <a:avLst/>
@@ -3656,19 +3796,19 @@
         </p:spPr>
         <p:txBody>
           <a:bodyPr wrap="square">
-            <a:normAutofit/>
+            <a:spAutoFit/>
           </a:bodyPr>
           <a:lstStyle/>
           <a:p>
             <a:pPr algn="l"/>
             <a:r>
-              <a:rPr sz="900" b="0" i="0">
-                <a:solidFill>
-                  <a:srgbClr val="7B7FA0"/>
-                </a:solidFill>
-                <a:latin typeface="Courier New"/>
+              <a:rPr sz="2400" b="1" i="0">
+                <a:solidFill>
+                  <a:srgbClr val="1F2C56"/>
+                </a:solidFill>
+                <a:latin typeface="Source Serif 4"/>
               </a:rPr>
-              <a:t>Trainer</a:t>
+              <a:t>Was ist erlaubt – was nicht?</a:t>
             </a:r>
           </a:p>
         </p:txBody>
@@ -3681,8 +3821,8 @@
         </p:nvSpPr>
         <p:spPr>
           <a:xfrm>
-            <a:off x="6731000" y="5156200"/>
-            <a:ext cx="2413000" cy="381000"/>
+            <a:off x="685800" y="1417320"/>
+            <a:ext cx="10817352" cy="5029200"/>
           </a:xfrm>
           <a:prstGeom prst="rect">
             <a:avLst/>
@@ -3691,20 +3831,465 @@
         </p:spPr>
         <p:txBody>
           <a:bodyPr wrap="square">
-            <a:normAutofit/>
+            <a:spAutoFit/>
           </a:bodyPr>
           <a:lstStyle/>
           <a:p>
+            <a:pPr>
+              <a:spcBef>
+                <a:spcPts val="400"/>
+              </a:spcBef>
+              <a:spcAft>
+                <a:spcPts val="200"/>
+              </a:spcAft>
+            </a:pPr>
+            <a:r>
+              <a:rPr sz="1200">
+                <a:solidFill>
+                  <a:srgbClr val="3D5466"/>
+                </a:solidFill>
+                <a:latin typeface="Arial"/>
+              </a:rPr>
+              <a:t>Kundendaten dürfen für Vertriebszwecke genutzt werden, wenn:</a:t>
+            </a:r>
+          </a:p>
+          <a:p>
+            <a:pPr>
+              <a:spcBef>
+                <a:spcPts val="400"/>
+              </a:spcBef>
+              <a:spcAft>
+                <a:spcPts val="200"/>
+              </a:spcAft>
+            </a:pPr>
+            <a:r>
+              <a:rPr sz="1300">
+                <a:solidFill>
+                  <a:srgbClr val="3D5466"/>
+                </a:solidFill>
+                <a:latin typeface="Arial"/>
+              </a:rPr>
+              <a:t>▸  Eine Rechtsgrundlage besteht (Art. 6 DSGVO): Bei Bankbeziehungen gilt üblicherweise das berechtigte Interesse (Art. 6 Abs. 1 lit. f DSGVO) für Bestandskundenpflege und -beratung</a:t>
+            </a:r>
+          </a:p>
+          <a:p>
+            <a:pPr>
+              <a:spcBef>
+                <a:spcPts val="400"/>
+              </a:spcBef>
+              <a:spcAft>
+                <a:spcPts val="200"/>
+              </a:spcAft>
+            </a:pPr>
+            <a:r>
+              <a:rPr sz="1300">
+                <a:solidFill>
+                  <a:srgbClr val="3D5466"/>
+                </a:solidFill>
+                <a:latin typeface="Arial"/>
+              </a:rPr>
+              <a:t>▸  Die Nutzung dem Kunden gegenüber transparent gemacht wird (Datenschutzerklärung)</a:t>
+            </a:r>
+          </a:p>
+          <a:p>
+            <a:pPr>
+              <a:spcBef>
+                <a:spcPts val="400"/>
+              </a:spcBef>
+              <a:spcAft>
+                <a:spcPts val="200"/>
+              </a:spcAft>
+            </a:pPr>
+            <a:r>
+              <a:rPr sz="1300">
+                <a:solidFill>
+                  <a:srgbClr val="3D5466"/>
+                </a:solidFill>
+                <a:latin typeface="Arial"/>
+              </a:rPr>
+              <a:t>▸  Keine sensiblen Daten (Art. 9 DSGVO) ohne explizite Einwilligung verarbeitet werden</a:t>
+            </a:r>
+          </a:p>
+        </p:txBody>
+      </p:sp>
+      <p:sp>
+        <p:nvSpPr>
+          <p:cNvPr id="9" name="Rectangle 8"/>
+          <p:cNvSpPr/>
+          <p:nvPr/>
+        </p:nvSpPr>
+        <p:spPr>
+          <a:xfrm>
+            <a:off x="0" y="6510528"/>
+            <a:ext cx="12188952" cy="347472"/>
+          </a:xfrm>
+          <a:prstGeom prst="rect">
+            <a:avLst/>
+          </a:prstGeom>
+          <a:solidFill>
+            <a:srgbClr val="0A1937"/>
+          </a:solidFill>
+          <a:ln>
+            <a:noFill/>
+          </a:ln>
+        </p:spPr>
+        <p:style>
+          <a:lnRef idx="1">
+            <a:schemeClr val="accent1"/>
+          </a:lnRef>
+          <a:fillRef idx="3">
+            <a:schemeClr val="accent1"/>
+          </a:fillRef>
+          <a:effectRef idx="2">
+            <a:schemeClr val="accent1"/>
+          </a:effectRef>
+          <a:fontRef idx="minor">
+            <a:schemeClr val="lt1"/>
+          </a:fontRef>
+        </p:style>
+        <p:txBody>
+          <a:bodyPr rtlCol="0" anchor="ctr"/>
+          <a:lstStyle/>
+          <a:p>
+            <a:pPr algn="ctr"/>
+          </a:p>
+        </p:txBody>
+      </p:sp>
+      <p:sp>
+        <p:nvSpPr>
+          <p:cNvPr id="10" name="TextBox 9"/>
+          <p:cNvSpPr txBox="1"/>
+          <p:nvPr/>
+        </p:nvSpPr>
+        <p:spPr>
+          <a:xfrm>
+            <a:off x="685800" y="6583680"/>
+            <a:ext cx="6490411" cy="256032"/>
+          </a:xfrm>
+          <a:prstGeom prst="rect">
+            <a:avLst/>
+          </a:prstGeom>
+          <a:noFill/>
+        </p:spPr>
+        <p:txBody>
+          <a:bodyPr wrap="none">
+            <a:spAutoFit/>
+          </a:bodyPr>
+          <a:lstStyle/>
+          <a:p>
             <a:pPr algn="l"/>
             <a:r>
-              <a:rPr sz="1400" b="0" i="0">
-                <a:solidFill>
-                  <a:srgbClr val="4D5270"/>
-                </a:solidFill>
-                <a:latin typeface="Georgia"/>
+              <a:rPr sz="700">
+                <a:solidFill>
+                  <a:srgbClr val="A0B4D2"/>
+                </a:solidFill>
+                <a:latin typeface="JetBrains Mono"/>
               </a:rPr>
-              <a:t>[Name · Kontakt]</a:t>
-            </a:r>
+              <a:t>Benedikt Zoller Coaching  ·  FKB Campus  ·  M18</a:t>
+            </a:r>
+          </a:p>
+        </p:txBody>
+      </p:sp>
+    </p:spTree>
+  </p:cSld>
+  <p:clrMapOvr>
+    <a:masterClrMapping/>
+  </p:clrMapOvr>
+</p:sld>
+</file>
+
+<file path=ppt/slides/slide11.xml><?xml version="1.0" encoding="utf-8"?>
+<p:sld xmlns:a="http://schemas.openxmlformats.org/drawingml/2006/main" xmlns:p="http://schemas.openxmlformats.org/presentationml/2006/main" xmlns:r="http://schemas.openxmlformats.org/officeDocument/2006/relationships">
+  <p:cSld>
+    <p:spTree>
+      <p:nvGrpSpPr>
+        <p:cNvPr id="1" name=""/>
+        <p:cNvGrpSpPr/>
+        <p:nvPr/>
+      </p:nvGrpSpPr>
+      <p:grpSpPr/>
+      <p:sp>
+        <p:nvSpPr>
+          <p:cNvPr id="2" name="Rectangle 1"/>
+          <p:cNvSpPr/>
+          <p:nvPr/>
+        </p:nvSpPr>
+        <p:spPr>
+          <a:xfrm>
+            <a:off x="0" y="0"/>
+            <a:ext cx="12188952" cy="6858000"/>
+          </a:xfrm>
+          <a:prstGeom prst="rect">
+            <a:avLst/>
+          </a:prstGeom>
+          <a:solidFill>
+            <a:srgbClr val="EDEDF3"/>
+          </a:solidFill>
+          <a:ln>
+            <a:noFill/>
+          </a:ln>
+        </p:spPr>
+        <p:style>
+          <a:lnRef idx="1">
+            <a:schemeClr val="accent1"/>
+          </a:lnRef>
+          <a:fillRef idx="3">
+            <a:schemeClr val="accent1"/>
+          </a:fillRef>
+          <a:effectRef idx="2">
+            <a:schemeClr val="accent1"/>
+          </a:effectRef>
+          <a:fontRef idx="minor">
+            <a:schemeClr val="lt1"/>
+          </a:fontRef>
+        </p:style>
+        <p:txBody>
+          <a:bodyPr rtlCol="0" anchor="ctr"/>
+          <a:lstStyle/>
+          <a:p>
+            <a:pPr algn="ctr"/>
+          </a:p>
+        </p:txBody>
+      </p:sp>
+      <p:sp>
+        <p:nvSpPr>
+          <p:cNvPr id="3" name="Rectangle 2"/>
+          <p:cNvSpPr/>
+          <p:nvPr/>
+        </p:nvSpPr>
+        <p:spPr>
+          <a:xfrm>
+            <a:off x="0" y="0"/>
+            <a:ext cx="12188952" cy="50292"/>
+          </a:xfrm>
+          <a:prstGeom prst="rect">
+            <a:avLst/>
+          </a:prstGeom>
+          <a:solidFill>
+            <a:srgbClr val="1F2C56"/>
+          </a:solidFill>
+          <a:ln>
+            <a:noFill/>
+          </a:ln>
+        </p:spPr>
+        <p:style>
+          <a:lnRef idx="1">
+            <a:schemeClr val="accent1"/>
+          </a:lnRef>
+          <a:fillRef idx="3">
+            <a:schemeClr val="accent1"/>
+          </a:fillRef>
+          <a:effectRef idx="2">
+            <a:schemeClr val="accent1"/>
+          </a:effectRef>
+          <a:fontRef idx="minor">
+            <a:schemeClr val="lt1"/>
+          </a:fontRef>
+        </p:style>
+        <p:txBody>
+          <a:bodyPr rtlCol="0" anchor="ctr"/>
+          <a:lstStyle/>
+          <a:p>
+            <a:pPr algn="ctr"/>
+          </a:p>
+        </p:txBody>
+      </p:sp>
+      <p:sp>
+        <p:nvSpPr>
+          <p:cNvPr id="4" name="TextBox 3"/>
+          <p:cNvSpPr txBox="1"/>
+          <p:nvPr/>
+        </p:nvSpPr>
+        <p:spPr>
+          <a:xfrm>
+            <a:off x="685800" y="109728"/>
+            <a:ext cx="10817352" cy="228600"/>
+          </a:xfrm>
+          <a:prstGeom prst="rect">
+            <a:avLst/>
+          </a:prstGeom>
+          <a:noFill/>
+        </p:spPr>
+        <p:txBody>
+          <a:bodyPr wrap="none">
+            <a:spAutoFit/>
+          </a:bodyPr>
+          <a:lstStyle/>
+          <a:p>
+            <a:pPr algn="l"/>
+            <a:r>
+              <a:rPr sz="750">
+                <a:solidFill>
+                  <a:srgbClr val="78808C"/>
+                </a:solidFill>
+                <a:latin typeface="JetBrains Mono"/>
+              </a:rPr>
+              <a:t>M18  ·  INHALT</a:t>
+            </a:r>
+          </a:p>
+        </p:txBody>
+      </p:sp>
+      <p:sp>
+        <p:nvSpPr>
+          <p:cNvPr id="5" name="Rectangle 4"/>
+          <p:cNvSpPr/>
+          <p:nvPr/>
+        </p:nvSpPr>
+        <p:spPr>
+          <a:xfrm>
+            <a:off x="0" y="1234440"/>
+            <a:ext cx="12188952" cy="12700"/>
+          </a:xfrm>
+          <a:prstGeom prst="rect">
+            <a:avLst/>
+          </a:prstGeom>
+          <a:solidFill>
+            <a:srgbClr val="D8DFE4"/>
+          </a:solidFill>
+          <a:ln>
+            <a:noFill/>
+          </a:ln>
+        </p:spPr>
+        <p:style>
+          <a:lnRef idx="1">
+            <a:schemeClr val="accent1"/>
+          </a:lnRef>
+          <a:fillRef idx="3">
+            <a:schemeClr val="accent1"/>
+          </a:fillRef>
+          <a:effectRef idx="2">
+            <a:schemeClr val="accent1"/>
+          </a:effectRef>
+          <a:fontRef idx="minor">
+            <a:schemeClr val="lt1"/>
+          </a:fontRef>
+        </p:style>
+        <p:txBody>
+          <a:bodyPr rtlCol="0" anchor="ctr"/>
+          <a:lstStyle/>
+          <a:p>
+            <a:pPr algn="ctr"/>
+          </a:p>
+        </p:txBody>
+      </p:sp>
+      <p:sp>
+        <p:nvSpPr>
+          <p:cNvPr id="6" name="Rectangle 5"/>
+          <p:cNvSpPr/>
+          <p:nvPr/>
+        </p:nvSpPr>
+        <p:spPr>
+          <a:xfrm>
+            <a:off x="685800" y="502920"/>
+            <a:ext cx="36576" cy="658368"/>
+          </a:xfrm>
+          <a:prstGeom prst="rect">
+            <a:avLst/>
+          </a:prstGeom>
+          <a:solidFill>
+            <a:srgbClr val="D9C089"/>
+          </a:solidFill>
+          <a:ln>
+            <a:noFill/>
+          </a:ln>
+        </p:spPr>
+        <p:style>
+          <a:lnRef idx="1">
+            <a:schemeClr val="accent1"/>
+          </a:lnRef>
+          <a:fillRef idx="3">
+            <a:schemeClr val="accent1"/>
+          </a:fillRef>
+          <a:effectRef idx="2">
+            <a:schemeClr val="accent1"/>
+          </a:effectRef>
+          <a:fontRef idx="minor">
+            <a:schemeClr val="lt1"/>
+          </a:fontRef>
+        </p:style>
+        <p:txBody>
+          <a:bodyPr rtlCol="0" anchor="ctr"/>
+          <a:lstStyle/>
+          <a:p>
+            <a:pPr algn="ctr"/>
+          </a:p>
+        </p:txBody>
+      </p:sp>
+      <p:sp>
+        <p:nvSpPr>
+          <p:cNvPr id="7" name="TextBox 6"/>
+          <p:cNvSpPr txBox="1"/>
+          <p:nvPr/>
+        </p:nvSpPr>
+        <p:spPr>
+          <a:xfrm>
+            <a:off x="813816" y="502920"/>
+            <a:ext cx="10634472" cy="685800"/>
+          </a:xfrm>
+          <a:prstGeom prst="rect">
+            <a:avLst/>
+          </a:prstGeom>
+          <a:noFill/>
+        </p:spPr>
+        <p:txBody>
+          <a:bodyPr wrap="square">
+            <a:spAutoFit/>
+          </a:bodyPr>
+          <a:lstStyle/>
+          <a:p>
+            <a:pPr algn="l"/>
+            <a:r>
+              <a:rPr sz="2400" b="1" i="0">
+                <a:solidFill>
+                  <a:srgbClr val="1F2C56"/>
+                </a:solidFill>
+                <a:latin typeface="Source Serif 4"/>
+              </a:rPr>
+              <a:t>Verbundpartner-Einwilligung: Pflichtcheck vor jeder Übergabe</a:t>
+            </a:r>
+          </a:p>
+        </p:txBody>
+      </p:sp>
+      <p:sp>
+        <p:nvSpPr>
+          <p:cNvPr id="8" name="Rectangle 7"/>
+          <p:cNvSpPr/>
+          <p:nvPr/>
+        </p:nvSpPr>
+        <p:spPr>
+          <a:xfrm>
+            <a:off x="0" y="6510528"/>
+            <a:ext cx="12188952" cy="347472"/>
+          </a:xfrm>
+          <a:prstGeom prst="rect">
+            <a:avLst/>
+          </a:prstGeom>
+          <a:solidFill>
+            <a:srgbClr val="0A1937"/>
+          </a:solidFill>
+          <a:ln>
+            <a:noFill/>
+          </a:ln>
+        </p:spPr>
+        <p:style>
+          <a:lnRef idx="1">
+            <a:schemeClr val="accent1"/>
+          </a:lnRef>
+          <a:fillRef idx="3">
+            <a:schemeClr val="accent1"/>
+          </a:fillRef>
+          <a:effectRef idx="2">
+            <a:schemeClr val="accent1"/>
+          </a:effectRef>
+          <a:fontRef idx="minor">
+            <a:schemeClr val="lt1"/>
+          </a:fontRef>
+        </p:style>
+        <p:txBody>
+          <a:bodyPr rtlCol="0" anchor="ctr"/>
+          <a:lstStyle/>
+          <a:p>
+            <a:pPr algn="ctr"/>
           </a:p>
         </p:txBody>
       </p:sp>
@@ -3716,8 +4301,8 @@
         </p:nvSpPr>
         <p:spPr>
           <a:xfrm>
-            <a:off x="9398000" y="4953000"/>
-            <a:ext cx="2184400" cy="177800"/>
+            <a:off x="685800" y="6583680"/>
+            <a:ext cx="6490411" cy="256032"/>
           </a:xfrm>
           <a:prstGeom prst="rect">
             <a:avLst/>
@@ -3725,21 +4310,575 @@
           <a:noFill/>
         </p:spPr>
         <p:txBody>
+          <a:bodyPr wrap="none">
+            <a:spAutoFit/>
+          </a:bodyPr>
+          <a:lstStyle/>
+          <a:p>
+            <a:pPr algn="l"/>
+            <a:r>
+              <a:rPr sz="700">
+                <a:solidFill>
+                  <a:srgbClr val="A0B4D2"/>
+                </a:solidFill>
+                <a:latin typeface="JetBrains Mono"/>
+              </a:rPr>
+              <a:t>Benedikt Zoller Coaching  ·  FKB Campus  ·  M18</a:t>
+            </a:r>
+          </a:p>
+        </p:txBody>
+      </p:sp>
+    </p:spTree>
+  </p:cSld>
+  <p:clrMapOvr>
+    <a:masterClrMapping/>
+  </p:clrMapOvr>
+</p:sld>
+</file>
+
+<file path=ppt/slides/slide12.xml><?xml version="1.0" encoding="utf-8"?>
+<p:sld xmlns:a="http://schemas.openxmlformats.org/drawingml/2006/main" xmlns:p="http://schemas.openxmlformats.org/presentationml/2006/main" xmlns:r="http://schemas.openxmlformats.org/officeDocument/2006/relationships">
+  <p:cSld>
+    <p:spTree>
+      <p:nvGrpSpPr>
+        <p:cNvPr id="1" name=""/>
+        <p:cNvGrpSpPr/>
+        <p:nvPr/>
+      </p:nvGrpSpPr>
+      <p:grpSpPr/>
+      <p:sp>
+        <p:nvSpPr>
+          <p:cNvPr id="2" name="Rectangle 1"/>
+          <p:cNvSpPr/>
+          <p:nvPr/>
+        </p:nvSpPr>
+        <p:spPr>
+          <a:xfrm>
+            <a:off x="0" y="0"/>
+            <a:ext cx="12188952" cy="6858000"/>
+          </a:xfrm>
+          <a:prstGeom prst="rect">
+            <a:avLst/>
+          </a:prstGeom>
+          <a:solidFill>
+            <a:srgbClr val="EDEDF3"/>
+          </a:solidFill>
+          <a:ln>
+            <a:noFill/>
+          </a:ln>
+        </p:spPr>
+        <p:style>
+          <a:lnRef idx="1">
+            <a:schemeClr val="accent1"/>
+          </a:lnRef>
+          <a:fillRef idx="3">
+            <a:schemeClr val="accent1"/>
+          </a:fillRef>
+          <a:effectRef idx="2">
+            <a:schemeClr val="accent1"/>
+          </a:effectRef>
+          <a:fontRef idx="minor">
+            <a:schemeClr val="lt1"/>
+          </a:fontRef>
+        </p:style>
+        <p:txBody>
+          <a:bodyPr rtlCol="0" anchor="ctr"/>
+          <a:lstStyle/>
+          <a:p>
+            <a:pPr algn="ctr"/>
+          </a:p>
+        </p:txBody>
+      </p:sp>
+      <p:sp>
+        <p:nvSpPr>
+          <p:cNvPr id="3" name="Rectangle 2"/>
+          <p:cNvSpPr/>
+          <p:nvPr/>
+        </p:nvSpPr>
+        <p:spPr>
+          <a:xfrm>
+            <a:off x="0" y="0"/>
+            <a:ext cx="12188952" cy="50292"/>
+          </a:xfrm>
+          <a:prstGeom prst="rect">
+            <a:avLst/>
+          </a:prstGeom>
+          <a:solidFill>
+            <a:srgbClr val="1F2C56"/>
+          </a:solidFill>
+          <a:ln>
+            <a:noFill/>
+          </a:ln>
+        </p:spPr>
+        <p:style>
+          <a:lnRef idx="1">
+            <a:schemeClr val="accent1"/>
+          </a:lnRef>
+          <a:fillRef idx="3">
+            <a:schemeClr val="accent1"/>
+          </a:fillRef>
+          <a:effectRef idx="2">
+            <a:schemeClr val="accent1"/>
+          </a:effectRef>
+          <a:fontRef idx="minor">
+            <a:schemeClr val="lt1"/>
+          </a:fontRef>
+        </p:style>
+        <p:txBody>
+          <a:bodyPr rtlCol="0" anchor="ctr"/>
+          <a:lstStyle/>
+          <a:p>
+            <a:pPr algn="ctr"/>
+          </a:p>
+        </p:txBody>
+      </p:sp>
+      <p:sp>
+        <p:nvSpPr>
+          <p:cNvPr id="4" name="TextBox 3"/>
+          <p:cNvSpPr txBox="1"/>
+          <p:nvPr/>
+        </p:nvSpPr>
+        <p:spPr>
+          <a:xfrm>
+            <a:off x="685800" y="109728"/>
+            <a:ext cx="10817352" cy="228600"/>
+          </a:xfrm>
+          <a:prstGeom prst="rect">
+            <a:avLst/>
+          </a:prstGeom>
+          <a:noFill/>
+        </p:spPr>
+        <p:txBody>
+          <a:bodyPr wrap="none">
+            <a:spAutoFit/>
+          </a:bodyPr>
+          <a:lstStyle/>
+          <a:p>
+            <a:pPr algn="l"/>
+            <a:r>
+              <a:rPr sz="750">
+                <a:solidFill>
+                  <a:srgbClr val="78808C"/>
+                </a:solidFill>
+                <a:latin typeface="JetBrains Mono"/>
+              </a:rPr>
+              <a:t>M18  ·  INHALT</a:t>
+            </a:r>
+          </a:p>
+        </p:txBody>
+      </p:sp>
+      <p:sp>
+        <p:nvSpPr>
+          <p:cNvPr id="5" name="Rectangle 4"/>
+          <p:cNvSpPr/>
+          <p:nvPr/>
+        </p:nvSpPr>
+        <p:spPr>
+          <a:xfrm>
+            <a:off x="0" y="1234440"/>
+            <a:ext cx="12188952" cy="12700"/>
+          </a:xfrm>
+          <a:prstGeom prst="rect">
+            <a:avLst/>
+          </a:prstGeom>
+          <a:solidFill>
+            <a:srgbClr val="D8DFE4"/>
+          </a:solidFill>
+          <a:ln>
+            <a:noFill/>
+          </a:ln>
+        </p:spPr>
+        <p:style>
+          <a:lnRef idx="1">
+            <a:schemeClr val="accent1"/>
+          </a:lnRef>
+          <a:fillRef idx="3">
+            <a:schemeClr val="accent1"/>
+          </a:fillRef>
+          <a:effectRef idx="2">
+            <a:schemeClr val="accent1"/>
+          </a:effectRef>
+          <a:fontRef idx="minor">
+            <a:schemeClr val="lt1"/>
+          </a:fontRef>
+        </p:style>
+        <p:txBody>
+          <a:bodyPr rtlCol="0" anchor="ctr"/>
+          <a:lstStyle/>
+          <a:p>
+            <a:pPr algn="ctr"/>
+          </a:p>
+        </p:txBody>
+      </p:sp>
+      <p:sp>
+        <p:nvSpPr>
+          <p:cNvPr id="6" name="Rectangle 5"/>
+          <p:cNvSpPr/>
+          <p:nvPr/>
+        </p:nvSpPr>
+        <p:spPr>
+          <a:xfrm>
+            <a:off x="685800" y="502920"/>
+            <a:ext cx="36576" cy="658368"/>
+          </a:xfrm>
+          <a:prstGeom prst="rect">
+            <a:avLst/>
+          </a:prstGeom>
+          <a:solidFill>
+            <a:srgbClr val="D9C089"/>
+          </a:solidFill>
+          <a:ln>
+            <a:noFill/>
+          </a:ln>
+        </p:spPr>
+        <p:style>
+          <a:lnRef idx="1">
+            <a:schemeClr val="accent1"/>
+          </a:lnRef>
+          <a:fillRef idx="3">
+            <a:schemeClr val="accent1"/>
+          </a:fillRef>
+          <a:effectRef idx="2">
+            <a:schemeClr val="accent1"/>
+          </a:effectRef>
+          <a:fontRef idx="minor">
+            <a:schemeClr val="lt1"/>
+          </a:fontRef>
+        </p:style>
+        <p:txBody>
+          <a:bodyPr rtlCol="0" anchor="ctr"/>
+          <a:lstStyle/>
+          <a:p>
+            <a:pPr algn="ctr"/>
+          </a:p>
+        </p:txBody>
+      </p:sp>
+      <p:sp>
+        <p:nvSpPr>
+          <p:cNvPr id="7" name="TextBox 6"/>
+          <p:cNvSpPr txBox="1"/>
+          <p:nvPr/>
+        </p:nvSpPr>
+        <p:spPr>
+          <a:xfrm>
+            <a:off x="813816" y="502920"/>
+            <a:ext cx="10634472" cy="685800"/>
+          </a:xfrm>
+          <a:prstGeom prst="rect">
+            <a:avLst/>
+          </a:prstGeom>
+          <a:noFill/>
+        </p:spPr>
+        <p:txBody>
           <a:bodyPr wrap="square">
-            <a:normAutofit/>
+            <a:spAutoFit/>
           </a:bodyPr>
           <a:lstStyle/>
           <a:p>
             <a:pPr algn="l"/>
             <a:r>
-              <a:rPr sz="900" b="0" i="0">
-                <a:solidFill>
-                  <a:srgbClr val="7B7FA0"/>
-                </a:solidFill>
-                <a:latin typeface="Courier New"/>
+              <a:rPr sz="2400" b="1" i="0">
+                <a:solidFill>
+                  <a:srgbClr val="1F2C56"/>
+                </a:solidFill>
+                <a:latin typeface="Source Serif 4"/>
               </a:rPr>
-              <a:t>Modul</a:t>
-            </a:r>
+              <a:t>Transparenz als Vertrauensmoment</a:t>
+            </a:r>
+          </a:p>
+        </p:txBody>
+      </p:sp>
+      <p:sp>
+        <p:nvSpPr>
+          <p:cNvPr id="8" name="TextBox 7"/>
+          <p:cNvSpPr txBox="1"/>
+          <p:nvPr/>
+        </p:nvSpPr>
+        <p:spPr>
+          <a:xfrm>
+            <a:off x="685800" y="1417320"/>
+            <a:ext cx="10817352" cy="5029200"/>
+          </a:xfrm>
+          <a:prstGeom prst="rect">
+            <a:avLst/>
+          </a:prstGeom>
+          <a:noFill/>
+        </p:spPr>
+        <p:txBody>
+          <a:bodyPr wrap="square">
+            <a:spAutoFit/>
+          </a:bodyPr>
+          <a:lstStyle/>
+          <a:p>
+            <a:pPr>
+              <a:spcBef>
+                <a:spcPts val="400"/>
+              </a:spcBef>
+              <a:spcAft>
+                <a:spcPts val="200"/>
+              </a:spcAft>
+            </a:pPr>
+            <a:r>
+              <a:rPr sz="1200">
+                <a:solidFill>
+                  <a:srgbClr val="3D5466"/>
+                </a:solidFill>
+                <a:latin typeface="Arial"/>
+              </a:rPr>
+              <a:t>## 4.5 Praxiscase: Drei Trigger, drei Gespräche</a:t>
+            </a:r>
+          </a:p>
+          <a:p>
+            <a:pPr>
+              <a:spcBef>
+                <a:spcPts val="400"/>
+              </a:spcBef>
+              <a:spcAft>
+                <a:spcPts val="200"/>
+              </a:spcAft>
+            </a:pPr>
+            <a:r>
+              <a:rPr sz="1200">
+                <a:solidFill>
+                  <a:srgbClr val="3D5466"/>
+                </a:solidFill>
+                <a:latin typeface="Arial"/>
+              </a:rPr>
+              <a:t>Ausgangssituation</a:t>
+            </a:r>
+          </a:p>
+          <a:p>
+            <a:pPr>
+              <a:spcBef>
+                <a:spcPts val="400"/>
+              </a:spcBef>
+              <a:spcAft>
+                <a:spcPts val="200"/>
+              </a:spcAft>
+            </a:pPr>
+            <a:r>
+              <a:rPr sz="1200">
+                <a:solidFill>
+                  <a:srgbClr val="3D5466"/>
+                </a:solidFill>
+                <a:latin typeface="Arial"/>
+              </a:rPr>
+              <a:t>Beraterin Anna Schreiber hat 38 Firmenkunden. Sie etabliert eine neue Montagsroutine: 20 Minuten agree-Triggerliste durcharbeiten. Was findet sie in der ersten Woche?</a:t>
+            </a:r>
+          </a:p>
+          <a:p>
+            <a:pPr>
+              <a:spcBef>
+                <a:spcPts val="400"/>
+              </a:spcBef>
+              <a:spcAft>
+                <a:spcPts val="200"/>
+              </a:spcAft>
+            </a:pPr>
+            <a:r>
+              <a:rPr sz="1200">
+                <a:solidFill>
+                  <a:srgbClr val="3D5466"/>
+                </a:solidFill>
+                <a:latin typeface="Arial"/>
+              </a:rPr>
+              <a:t>Trigger 1: Transaktional – Auslandszahlung erstmals aufgetaucht</a:t>
+            </a:r>
+          </a:p>
+          <a:p>
+            <a:pPr>
+              <a:spcBef>
+                <a:spcPts val="400"/>
+              </a:spcBef>
+              <a:spcAft>
+                <a:spcPts val="200"/>
+              </a:spcAft>
+            </a:pPr>
+            <a:r>
+              <a:rPr sz="1200">
+                <a:solidFill>
+                  <a:srgbClr val="3D5466"/>
+                </a:solidFill>
+                <a:latin typeface="Arial"/>
+              </a:rPr>
+              <a:t>Trigger 2: Ratingbasiert – Prolongation in 5 Monaten</a:t>
+            </a:r>
+          </a:p>
+          <a:p>
+            <a:pPr>
+              <a:spcBef>
+                <a:spcPts val="400"/>
+              </a:spcBef>
+              <a:spcAft>
+                <a:spcPts val="200"/>
+              </a:spcAft>
+            </a:pPr>
+            <a:r>
+              <a:rPr sz="1200">
+                <a:solidFill>
+                  <a:srgbClr val="3D5466"/>
+                </a:solidFill>
+                <a:latin typeface="Arial"/>
+              </a:rPr>
+              <a:t>Trigger 3: Lebensereignis – Gesellschafterin 58 Jahre</a:t>
+            </a:r>
+          </a:p>
+          <a:p>
+            <a:pPr>
+              <a:spcBef>
+                <a:spcPts val="400"/>
+              </a:spcBef>
+              <a:spcAft>
+                <a:spcPts val="200"/>
+              </a:spcAft>
+            </a:pPr>
+            <a:r>
+              <a:rPr sz="1200">
+                <a:solidFill>
+                  <a:srgbClr val="3D5466"/>
+                </a:solidFill>
+                <a:latin typeface="Arial"/>
+              </a:rPr>
+              <a:t>Ergebnis in 4 Wochen</a:t>
+            </a:r>
+          </a:p>
+          <a:p>
+            <a:pPr>
+              <a:spcBef>
+                <a:spcPts val="400"/>
+              </a:spcBef>
+              <a:spcAft>
+                <a:spcPts val="200"/>
+              </a:spcAft>
+            </a:pPr>
+            <a:r>
+              <a:rPr sz="1200">
+                <a:solidFill>
+                  <a:srgbClr val="3D5466"/>
+                </a:solidFill>
+                <a:latin typeface="Arial"/>
+              </a:rPr>
+              <a:t>Anna hat mit drei Triggern drei Gespräche initiiert – alle mit konkretem Ergebnis. Kein Gespräch war ein „Kaltanruf". Alle hatten eine evidenzbasierte Gesprächseröffnung.</a:t>
+            </a:r>
+          </a:p>
+          <a:p>
+            <a:pPr>
+              <a:spcBef>
+                <a:spcPts val="400"/>
+              </a:spcBef>
+              <a:spcAft>
+                <a:spcPts val="200"/>
+              </a:spcAft>
+            </a:pPr>
+            <a:r>
+              <a:rPr sz="1200">
+                <a:solidFill>
+                  <a:srgbClr val="3D5466"/>
+                </a:solidFill>
+                <a:latin typeface="Arial"/>
+              </a:rPr>
+              <a:t>Reflexionsfragen</a:t>
+            </a:r>
+          </a:p>
+          <a:p>
+            <a:pPr>
+              <a:spcBef>
+                <a:spcPts val="400"/>
+              </a:spcBef>
+              <a:spcAft>
+                <a:spcPts val="200"/>
+              </a:spcAft>
+            </a:pPr>
+            <a:r>
+              <a:rPr sz="1300">
+                <a:solidFill>
+                  <a:srgbClr val="3D5466"/>
+                </a:solidFill>
+                <a:latin typeface="Arial"/>
+              </a:rPr>
+              <a:t>▸  Welche der drei Trigger-Typen ist in Ihrem Bestand am häufigsten verfügbar?</a:t>
+            </a:r>
+          </a:p>
+          <a:p>
+            <a:pPr>
+              <a:spcBef>
+                <a:spcPts val="400"/>
+              </a:spcBef>
+              <a:spcAft>
+                <a:spcPts val="200"/>
+              </a:spcAft>
+            </a:pPr>
+            <a:r>
+              <a:rPr sz="1300">
+                <a:solidFill>
+                  <a:srgbClr val="3D5466"/>
+                </a:solidFill>
+                <a:latin typeface="Arial"/>
+              </a:rPr>
+              <a:t>▸  Wo in agree würden Sie morgen früh mit der Triggersuche anfangen?</a:t>
+            </a:r>
+          </a:p>
+          <a:p>
+            <a:pPr>
+              <a:spcBef>
+                <a:spcPts val="400"/>
+              </a:spcBef>
+              <a:spcAft>
+                <a:spcPts val="200"/>
+              </a:spcAft>
+            </a:pPr>
+            <a:r>
+              <a:rPr sz="1300">
+                <a:solidFill>
+                  <a:srgbClr val="3D5466"/>
+                </a:solidFill>
+                <a:latin typeface="Arial"/>
+              </a:rPr>
+              <a:t>▸  Wie würden Sie dem Kunden Becker erklären, warum Sie angerufen haben – ohne dass er sich überwacht fühlt?</a:t>
+            </a:r>
+          </a:p>
+        </p:txBody>
+      </p:sp>
+      <p:sp>
+        <p:nvSpPr>
+          <p:cNvPr id="9" name="Rectangle 8"/>
+          <p:cNvSpPr/>
+          <p:nvPr/>
+        </p:nvSpPr>
+        <p:spPr>
+          <a:xfrm>
+            <a:off x="0" y="6510528"/>
+            <a:ext cx="12188952" cy="347472"/>
+          </a:xfrm>
+          <a:prstGeom prst="rect">
+            <a:avLst/>
+          </a:prstGeom>
+          <a:solidFill>
+            <a:srgbClr val="0A1937"/>
+          </a:solidFill>
+          <a:ln>
+            <a:noFill/>
+          </a:ln>
+        </p:spPr>
+        <p:style>
+          <a:lnRef idx="1">
+            <a:schemeClr val="accent1"/>
+          </a:lnRef>
+          <a:fillRef idx="3">
+            <a:schemeClr val="accent1"/>
+          </a:fillRef>
+          <a:effectRef idx="2">
+            <a:schemeClr val="accent1"/>
+          </a:effectRef>
+          <a:fontRef idx="minor">
+            <a:schemeClr val="lt1"/>
+          </a:fontRef>
+        </p:style>
+        <p:txBody>
+          <a:bodyPr rtlCol="0" anchor="ctr"/>
+          <a:lstStyle/>
+          <a:p>
+            <a:pPr algn="ctr"/>
           </a:p>
         </p:txBody>
       </p:sp>
@@ -3751,8 +4890,8 @@
         </p:nvSpPr>
         <p:spPr>
           <a:xfrm>
-            <a:off x="9398000" y="5156200"/>
-            <a:ext cx="2184400" cy="381000"/>
+            <a:off x="685800" y="6583680"/>
+            <a:ext cx="6490411" cy="256032"/>
           </a:xfrm>
           <a:prstGeom prst="rect">
             <a:avLst/>
@@ -3760,20 +4899,856 @@
           <a:noFill/>
         </p:spPr>
         <p:txBody>
+          <a:bodyPr wrap="none">
+            <a:spAutoFit/>
+          </a:bodyPr>
+          <a:lstStyle/>
+          <a:p>
+            <a:pPr algn="l"/>
+            <a:r>
+              <a:rPr sz="700">
+                <a:solidFill>
+                  <a:srgbClr val="A0B4D2"/>
+                </a:solidFill>
+                <a:latin typeface="JetBrains Mono"/>
+              </a:rPr>
+              <a:t>Benedikt Zoller Coaching  ·  FKB Campus  ·  M18</a:t>
+            </a:r>
+          </a:p>
+        </p:txBody>
+      </p:sp>
+    </p:spTree>
+  </p:cSld>
+  <p:clrMapOvr>
+    <a:masterClrMapping/>
+  </p:clrMapOvr>
+</p:sld>
+</file>
+
+<file path=ppt/slides/slide13.xml><?xml version="1.0" encoding="utf-8"?>
+<p:sld xmlns:a="http://schemas.openxmlformats.org/drawingml/2006/main" xmlns:p="http://schemas.openxmlformats.org/presentationml/2006/main" xmlns:r="http://schemas.openxmlformats.org/officeDocument/2006/relationships">
+  <p:cSld>
+    <p:spTree>
+      <p:nvGrpSpPr>
+        <p:cNvPr id="1" name=""/>
+        <p:cNvGrpSpPr/>
+        <p:nvPr/>
+      </p:nvGrpSpPr>
+      <p:grpSpPr/>
+      <p:sp>
+        <p:nvSpPr>
+          <p:cNvPr id="2" name="Rectangle 1"/>
+          <p:cNvSpPr/>
+          <p:nvPr/>
+        </p:nvSpPr>
+        <p:spPr>
+          <a:xfrm>
+            <a:off x="0" y="0"/>
+            <a:ext cx="12188952" cy="6858000"/>
+          </a:xfrm>
+          <a:prstGeom prst="rect">
+            <a:avLst/>
+          </a:prstGeom>
+          <a:solidFill>
+            <a:srgbClr val="EDEDF3"/>
+          </a:solidFill>
+          <a:ln>
+            <a:noFill/>
+          </a:ln>
+        </p:spPr>
+        <p:style>
+          <a:lnRef idx="1">
+            <a:schemeClr val="accent1"/>
+          </a:lnRef>
+          <a:fillRef idx="3">
+            <a:schemeClr val="accent1"/>
+          </a:fillRef>
+          <a:effectRef idx="2">
+            <a:schemeClr val="accent1"/>
+          </a:effectRef>
+          <a:fontRef idx="minor">
+            <a:schemeClr val="lt1"/>
+          </a:fontRef>
+        </p:style>
+        <p:txBody>
+          <a:bodyPr rtlCol="0" anchor="ctr"/>
+          <a:lstStyle/>
+          <a:p>
+            <a:pPr algn="ctr"/>
+          </a:p>
+        </p:txBody>
+      </p:sp>
+      <p:sp>
+        <p:nvSpPr>
+          <p:cNvPr id="3" name="Rectangle 2"/>
+          <p:cNvSpPr/>
+          <p:nvPr/>
+        </p:nvSpPr>
+        <p:spPr>
+          <a:xfrm>
+            <a:off x="0" y="0"/>
+            <a:ext cx="12188952" cy="50292"/>
+          </a:xfrm>
+          <a:prstGeom prst="rect">
+            <a:avLst/>
+          </a:prstGeom>
+          <a:solidFill>
+            <a:srgbClr val="1F2C56"/>
+          </a:solidFill>
+          <a:ln>
+            <a:noFill/>
+          </a:ln>
+        </p:spPr>
+        <p:style>
+          <a:lnRef idx="1">
+            <a:schemeClr val="accent1"/>
+          </a:lnRef>
+          <a:fillRef idx="3">
+            <a:schemeClr val="accent1"/>
+          </a:fillRef>
+          <a:effectRef idx="2">
+            <a:schemeClr val="accent1"/>
+          </a:effectRef>
+          <a:fontRef idx="minor">
+            <a:schemeClr val="lt1"/>
+          </a:fontRef>
+        </p:style>
+        <p:txBody>
+          <a:bodyPr rtlCol="0" anchor="ctr"/>
+          <a:lstStyle/>
+          <a:p>
+            <a:pPr algn="ctr"/>
+          </a:p>
+        </p:txBody>
+      </p:sp>
+      <p:sp>
+        <p:nvSpPr>
+          <p:cNvPr id="4" name="TextBox 3"/>
+          <p:cNvSpPr txBox="1"/>
+          <p:nvPr/>
+        </p:nvSpPr>
+        <p:spPr>
+          <a:xfrm>
+            <a:off x="685800" y="109728"/>
+            <a:ext cx="10817352" cy="228600"/>
+          </a:xfrm>
+          <a:prstGeom prst="rect">
+            <a:avLst/>
+          </a:prstGeom>
+          <a:noFill/>
+        </p:spPr>
+        <p:txBody>
+          <a:bodyPr wrap="none">
+            <a:spAutoFit/>
+          </a:bodyPr>
+          <a:lstStyle/>
+          <a:p>
+            <a:pPr algn="l"/>
+            <a:r>
+              <a:rPr sz="750">
+                <a:solidFill>
+                  <a:srgbClr val="78808C"/>
+                </a:solidFill>
+                <a:latin typeface="JetBrains Mono"/>
+              </a:rPr>
+              <a:t>M18  ·  INHALT</a:t>
+            </a:r>
+          </a:p>
+        </p:txBody>
+      </p:sp>
+      <p:sp>
+        <p:nvSpPr>
+          <p:cNvPr id="5" name="Rectangle 4"/>
+          <p:cNvSpPr/>
+          <p:nvPr/>
+        </p:nvSpPr>
+        <p:spPr>
+          <a:xfrm>
+            <a:off x="0" y="1234440"/>
+            <a:ext cx="12188952" cy="12700"/>
+          </a:xfrm>
+          <a:prstGeom prst="rect">
+            <a:avLst/>
+          </a:prstGeom>
+          <a:solidFill>
+            <a:srgbClr val="D8DFE4"/>
+          </a:solidFill>
+          <a:ln>
+            <a:noFill/>
+          </a:ln>
+        </p:spPr>
+        <p:style>
+          <a:lnRef idx="1">
+            <a:schemeClr val="accent1"/>
+          </a:lnRef>
+          <a:fillRef idx="3">
+            <a:schemeClr val="accent1"/>
+          </a:fillRef>
+          <a:effectRef idx="2">
+            <a:schemeClr val="accent1"/>
+          </a:effectRef>
+          <a:fontRef idx="minor">
+            <a:schemeClr val="lt1"/>
+          </a:fontRef>
+        </p:style>
+        <p:txBody>
+          <a:bodyPr rtlCol="0" anchor="ctr"/>
+          <a:lstStyle/>
+          <a:p>
+            <a:pPr algn="ctr"/>
+          </a:p>
+        </p:txBody>
+      </p:sp>
+      <p:sp>
+        <p:nvSpPr>
+          <p:cNvPr id="6" name="Rectangle 5"/>
+          <p:cNvSpPr/>
+          <p:nvPr/>
+        </p:nvSpPr>
+        <p:spPr>
+          <a:xfrm>
+            <a:off x="685800" y="502920"/>
+            <a:ext cx="36576" cy="658368"/>
+          </a:xfrm>
+          <a:prstGeom prst="rect">
+            <a:avLst/>
+          </a:prstGeom>
+          <a:solidFill>
+            <a:srgbClr val="D9C089"/>
+          </a:solidFill>
+          <a:ln>
+            <a:noFill/>
+          </a:ln>
+        </p:spPr>
+        <p:style>
+          <a:lnRef idx="1">
+            <a:schemeClr val="accent1"/>
+          </a:lnRef>
+          <a:fillRef idx="3">
+            <a:schemeClr val="accent1"/>
+          </a:fillRef>
+          <a:effectRef idx="2">
+            <a:schemeClr val="accent1"/>
+          </a:effectRef>
+          <a:fontRef idx="minor">
+            <a:schemeClr val="lt1"/>
+          </a:fontRef>
+        </p:style>
+        <p:txBody>
+          <a:bodyPr rtlCol="0" anchor="ctr"/>
+          <a:lstStyle/>
+          <a:p>
+            <a:pPr algn="ctr"/>
+          </a:p>
+        </p:txBody>
+      </p:sp>
+      <p:sp>
+        <p:nvSpPr>
+          <p:cNvPr id="7" name="TextBox 6"/>
+          <p:cNvSpPr txBox="1"/>
+          <p:nvPr/>
+        </p:nvSpPr>
+        <p:spPr>
+          <a:xfrm>
+            <a:off x="813816" y="502920"/>
+            <a:ext cx="10634472" cy="685800"/>
+          </a:xfrm>
+          <a:prstGeom prst="rect">
+            <a:avLst/>
+          </a:prstGeom>
+          <a:noFill/>
+        </p:spPr>
+        <p:txBody>
           <a:bodyPr wrap="square">
-            <a:normAutofit/>
+            <a:spAutoFit/>
           </a:bodyPr>
           <a:lstStyle/>
           <a:p>
             <a:pPr algn="l"/>
             <a:r>
-              <a:rPr sz="1400" b="0" i="0">
-                <a:solidFill>
-                  <a:srgbClr val="191D2E"/>
-                </a:solidFill>
-                <a:latin typeface="Georgia"/>
+              <a:rPr sz="2400" b="1" i="0">
+                <a:solidFill>
+                  <a:srgbClr val="1F2C56"/>
+                </a:solidFill>
+                <a:latin typeface="Source Serif 4"/>
               </a:rPr>
-              <a:t>M18 · Sparringspartner</a:t>
+              <a:t>Arbeitsblatt A: Meine Trigger-Bibliothek</a:t>
+            </a:r>
+          </a:p>
+        </p:txBody>
+      </p:sp>
+      <p:sp>
+        <p:nvSpPr>
+          <p:cNvPr id="8" name="TextBox 7"/>
+          <p:cNvSpPr txBox="1"/>
+          <p:nvPr/>
+        </p:nvSpPr>
+        <p:spPr>
+          <a:xfrm>
+            <a:off x="685800" y="1417320"/>
+            <a:ext cx="10817352" cy="5029200"/>
+          </a:xfrm>
+          <a:prstGeom prst="rect">
+            <a:avLst/>
+          </a:prstGeom>
+          <a:noFill/>
+        </p:spPr>
+        <p:txBody>
+          <a:bodyPr wrap="square">
+            <a:spAutoFit/>
+          </a:bodyPr>
+          <a:lstStyle/>
+          <a:p>
+            <a:pPr>
+              <a:spcBef>
+                <a:spcPts val="400"/>
+              </a:spcBef>
+              <a:spcAft>
+                <a:spcPts val="200"/>
+              </a:spcAft>
+            </a:pPr>
+            <a:r>
+              <a:rPr sz="1200">
+                <a:solidFill>
+                  <a:srgbClr val="3D5466"/>
+                </a:solidFill>
+                <a:latin typeface="Arial"/>
+              </a:rPr>
+              <a:t>(Nutzen Sie die Priorisierungstabelle aus Sec 4.6, um Ihren wirkungsvollsten Trigger zu bestimmen)</a:t>
+            </a:r>
+          </a:p>
+          <a:p>
+            <a:pPr>
+              <a:spcBef>
+                <a:spcPts val="400"/>
+              </a:spcBef>
+              <a:spcAft>
+                <a:spcPts val="200"/>
+              </a:spcAft>
+            </a:pPr>
+            <a:r>
+              <a:rPr sz="1200">
+                <a:solidFill>
+                  <a:srgbClr val="3D5466"/>
+                </a:solidFill>
+                <a:latin typeface="Arial"/>
+              </a:rPr>
+              <a:t>Ergänzen Sie für Ihren Bestand die relevantesten Trigger je Typ:</a:t>
+            </a:r>
+          </a:p>
+          <a:p>
+            <a:pPr>
+              <a:spcBef>
+                <a:spcPts val="400"/>
+              </a:spcBef>
+              <a:spcAft>
+                <a:spcPts val="200"/>
+              </a:spcAft>
+            </a:pPr>
+            <a:r>
+              <a:rPr sz="1200">
+                <a:solidFill>
+                  <a:srgbClr val="3D5466"/>
+                </a:solidFill>
+                <a:latin typeface="Arial"/>
+              </a:rPr>
+              <a:t>Mein wirkungsvollster Trigger für die nächsten 4 Wochen:</a:t>
+            </a:r>
+          </a:p>
+          <a:p>
+            <a:pPr>
+              <a:spcBef>
+                <a:spcPts val="400"/>
+              </a:spcBef>
+              <a:spcAft>
+                <a:spcPts val="200"/>
+              </a:spcAft>
+            </a:pPr>
+            <a:r>
+              <a:rPr sz="1200">
+                <a:solidFill>
+                  <a:srgbClr val="3D5466"/>
+                </a:solidFill>
+                <a:latin typeface="Arial"/>
+              </a:rPr>
+              <a:t>___________________________________________________________________________</a:t>
+            </a:r>
+          </a:p>
+        </p:txBody>
+      </p:sp>
+      <p:sp>
+        <p:nvSpPr>
+          <p:cNvPr id="9" name="Rectangle 8"/>
+          <p:cNvSpPr/>
+          <p:nvPr/>
+        </p:nvSpPr>
+        <p:spPr>
+          <a:xfrm>
+            <a:off x="0" y="6510528"/>
+            <a:ext cx="12188952" cy="347472"/>
+          </a:xfrm>
+          <a:prstGeom prst="rect">
+            <a:avLst/>
+          </a:prstGeom>
+          <a:solidFill>
+            <a:srgbClr val="0A1937"/>
+          </a:solidFill>
+          <a:ln>
+            <a:noFill/>
+          </a:ln>
+        </p:spPr>
+        <p:style>
+          <a:lnRef idx="1">
+            <a:schemeClr val="accent1"/>
+          </a:lnRef>
+          <a:fillRef idx="3">
+            <a:schemeClr val="accent1"/>
+          </a:fillRef>
+          <a:effectRef idx="2">
+            <a:schemeClr val="accent1"/>
+          </a:effectRef>
+          <a:fontRef idx="minor">
+            <a:schemeClr val="lt1"/>
+          </a:fontRef>
+        </p:style>
+        <p:txBody>
+          <a:bodyPr rtlCol="0" anchor="ctr"/>
+          <a:lstStyle/>
+          <a:p>
+            <a:pPr algn="ctr"/>
+          </a:p>
+        </p:txBody>
+      </p:sp>
+      <p:sp>
+        <p:nvSpPr>
+          <p:cNvPr id="10" name="TextBox 9"/>
+          <p:cNvSpPr txBox="1"/>
+          <p:nvPr/>
+        </p:nvSpPr>
+        <p:spPr>
+          <a:xfrm>
+            <a:off x="685800" y="6583680"/>
+            <a:ext cx="6490411" cy="256032"/>
+          </a:xfrm>
+          <a:prstGeom prst="rect">
+            <a:avLst/>
+          </a:prstGeom>
+          <a:noFill/>
+        </p:spPr>
+        <p:txBody>
+          <a:bodyPr wrap="none">
+            <a:spAutoFit/>
+          </a:bodyPr>
+          <a:lstStyle/>
+          <a:p>
+            <a:pPr algn="l"/>
+            <a:r>
+              <a:rPr sz="700">
+                <a:solidFill>
+                  <a:srgbClr val="A0B4D2"/>
+                </a:solidFill>
+                <a:latin typeface="JetBrains Mono"/>
+              </a:rPr>
+              <a:t>Benedikt Zoller Coaching  ·  FKB Campus  ·  M18</a:t>
+            </a:r>
+          </a:p>
+        </p:txBody>
+      </p:sp>
+    </p:spTree>
+  </p:cSld>
+  <p:clrMapOvr>
+    <a:masterClrMapping/>
+  </p:clrMapOvr>
+</p:sld>
+</file>
+
+<file path=ppt/slides/slide14.xml><?xml version="1.0" encoding="utf-8"?>
+<p:sld xmlns:a="http://schemas.openxmlformats.org/drawingml/2006/main" xmlns:p="http://schemas.openxmlformats.org/presentationml/2006/main" xmlns:r="http://schemas.openxmlformats.org/officeDocument/2006/relationships">
+  <p:cSld>
+    <p:spTree>
+      <p:nvGrpSpPr>
+        <p:cNvPr id="1" name=""/>
+        <p:cNvGrpSpPr/>
+        <p:nvPr/>
+      </p:nvGrpSpPr>
+      <p:grpSpPr/>
+      <p:sp>
+        <p:nvSpPr>
+          <p:cNvPr id="2" name="Rectangle 1"/>
+          <p:cNvSpPr/>
+          <p:nvPr/>
+        </p:nvSpPr>
+        <p:spPr>
+          <a:xfrm>
+            <a:off x="0" y="0"/>
+            <a:ext cx="12188952" cy="6858000"/>
+          </a:xfrm>
+          <a:prstGeom prst="rect">
+            <a:avLst/>
+          </a:prstGeom>
+          <a:solidFill>
+            <a:srgbClr val="EDEDF3"/>
+          </a:solidFill>
+          <a:ln>
+            <a:noFill/>
+          </a:ln>
+        </p:spPr>
+        <p:style>
+          <a:lnRef idx="1">
+            <a:schemeClr val="accent1"/>
+          </a:lnRef>
+          <a:fillRef idx="3">
+            <a:schemeClr val="accent1"/>
+          </a:fillRef>
+          <a:effectRef idx="2">
+            <a:schemeClr val="accent1"/>
+          </a:effectRef>
+          <a:fontRef idx="minor">
+            <a:schemeClr val="lt1"/>
+          </a:fontRef>
+        </p:style>
+        <p:txBody>
+          <a:bodyPr rtlCol="0" anchor="ctr"/>
+          <a:lstStyle/>
+          <a:p>
+            <a:pPr algn="ctr"/>
+          </a:p>
+        </p:txBody>
+      </p:sp>
+      <p:sp>
+        <p:nvSpPr>
+          <p:cNvPr id="3" name="Rectangle 2"/>
+          <p:cNvSpPr/>
+          <p:nvPr/>
+        </p:nvSpPr>
+        <p:spPr>
+          <a:xfrm>
+            <a:off x="0" y="0"/>
+            <a:ext cx="12188952" cy="50292"/>
+          </a:xfrm>
+          <a:prstGeom prst="rect">
+            <a:avLst/>
+          </a:prstGeom>
+          <a:solidFill>
+            <a:srgbClr val="1F2C56"/>
+          </a:solidFill>
+          <a:ln>
+            <a:noFill/>
+          </a:ln>
+        </p:spPr>
+        <p:style>
+          <a:lnRef idx="1">
+            <a:schemeClr val="accent1"/>
+          </a:lnRef>
+          <a:fillRef idx="3">
+            <a:schemeClr val="accent1"/>
+          </a:fillRef>
+          <a:effectRef idx="2">
+            <a:schemeClr val="accent1"/>
+          </a:effectRef>
+          <a:fontRef idx="minor">
+            <a:schemeClr val="lt1"/>
+          </a:fontRef>
+        </p:style>
+        <p:txBody>
+          <a:bodyPr rtlCol="0" anchor="ctr"/>
+          <a:lstStyle/>
+          <a:p>
+            <a:pPr algn="ctr"/>
+          </a:p>
+        </p:txBody>
+      </p:sp>
+      <p:sp>
+        <p:nvSpPr>
+          <p:cNvPr id="4" name="TextBox 3"/>
+          <p:cNvSpPr txBox="1"/>
+          <p:nvPr/>
+        </p:nvSpPr>
+        <p:spPr>
+          <a:xfrm>
+            <a:off x="685800" y="109728"/>
+            <a:ext cx="10817352" cy="228600"/>
+          </a:xfrm>
+          <a:prstGeom prst="rect">
+            <a:avLst/>
+          </a:prstGeom>
+          <a:noFill/>
+        </p:spPr>
+        <p:txBody>
+          <a:bodyPr wrap="none">
+            <a:spAutoFit/>
+          </a:bodyPr>
+          <a:lstStyle/>
+          <a:p>
+            <a:pPr algn="l"/>
+            <a:r>
+              <a:rPr sz="750">
+                <a:solidFill>
+                  <a:srgbClr val="78808C"/>
+                </a:solidFill>
+                <a:latin typeface="JetBrains Mono"/>
+              </a:rPr>
+              <a:t>M18  ·  INHALT</a:t>
+            </a:r>
+          </a:p>
+        </p:txBody>
+      </p:sp>
+      <p:sp>
+        <p:nvSpPr>
+          <p:cNvPr id="5" name="Rectangle 4"/>
+          <p:cNvSpPr/>
+          <p:nvPr/>
+        </p:nvSpPr>
+        <p:spPr>
+          <a:xfrm>
+            <a:off x="0" y="1234440"/>
+            <a:ext cx="12188952" cy="12700"/>
+          </a:xfrm>
+          <a:prstGeom prst="rect">
+            <a:avLst/>
+          </a:prstGeom>
+          <a:solidFill>
+            <a:srgbClr val="D8DFE4"/>
+          </a:solidFill>
+          <a:ln>
+            <a:noFill/>
+          </a:ln>
+        </p:spPr>
+        <p:style>
+          <a:lnRef idx="1">
+            <a:schemeClr val="accent1"/>
+          </a:lnRef>
+          <a:fillRef idx="3">
+            <a:schemeClr val="accent1"/>
+          </a:fillRef>
+          <a:effectRef idx="2">
+            <a:schemeClr val="accent1"/>
+          </a:effectRef>
+          <a:fontRef idx="minor">
+            <a:schemeClr val="lt1"/>
+          </a:fontRef>
+        </p:style>
+        <p:txBody>
+          <a:bodyPr rtlCol="0" anchor="ctr"/>
+          <a:lstStyle/>
+          <a:p>
+            <a:pPr algn="ctr"/>
+          </a:p>
+        </p:txBody>
+      </p:sp>
+      <p:sp>
+        <p:nvSpPr>
+          <p:cNvPr id="6" name="Rectangle 5"/>
+          <p:cNvSpPr/>
+          <p:nvPr/>
+        </p:nvSpPr>
+        <p:spPr>
+          <a:xfrm>
+            <a:off x="685800" y="502920"/>
+            <a:ext cx="36576" cy="658368"/>
+          </a:xfrm>
+          <a:prstGeom prst="rect">
+            <a:avLst/>
+          </a:prstGeom>
+          <a:solidFill>
+            <a:srgbClr val="D9C089"/>
+          </a:solidFill>
+          <a:ln>
+            <a:noFill/>
+          </a:ln>
+        </p:spPr>
+        <p:style>
+          <a:lnRef idx="1">
+            <a:schemeClr val="accent1"/>
+          </a:lnRef>
+          <a:fillRef idx="3">
+            <a:schemeClr val="accent1"/>
+          </a:fillRef>
+          <a:effectRef idx="2">
+            <a:schemeClr val="accent1"/>
+          </a:effectRef>
+          <a:fontRef idx="minor">
+            <a:schemeClr val="lt1"/>
+          </a:fontRef>
+        </p:style>
+        <p:txBody>
+          <a:bodyPr rtlCol="0" anchor="ctr"/>
+          <a:lstStyle/>
+          <a:p>
+            <a:pPr algn="ctr"/>
+          </a:p>
+        </p:txBody>
+      </p:sp>
+      <p:sp>
+        <p:nvSpPr>
+          <p:cNvPr id="7" name="TextBox 6"/>
+          <p:cNvSpPr txBox="1"/>
+          <p:nvPr/>
+        </p:nvSpPr>
+        <p:spPr>
+          <a:xfrm>
+            <a:off x="813816" y="502920"/>
+            <a:ext cx="10634472" cy="685800"/>
+          </a:xfrm>
+          <a:prstGeom prst="rect">
+            <a:avLst/>
+          </a:prstGeom>
+          <a:noFill/>
+        </p:spPr>
+        <p:txBody>
+          <a:bodyPr wrap="square">
+            <a:spAutoFit/>
+          </a:bodyPr>
+          <a:lstStyle/>
+          <a:p>
+            <a:pPr algn="l"/>
+            <a:r>
+              <a:rPr sz="2400" b="1" i="0">
+                <a:solidFill>
+                  <a:srgbClr val="1F2C56"/>
+                </a:solidFill>
+                <a:latin typeface="Source Serif 4"/>
+              </a:rPr>
+              <a:t>Arbeitsblatt B: Datenqualitäts-Audit (Top-10-Kunden)</a:t>
+            </a:r>
+          </a:p>
+        </p:txBody>
+      </p:sp>
+      <p:sp>
+        <p:nvSpPr>
+          <p:cNvPr id="8" name="TextBox 7"/>
+          <p:cNvSpPr txBox="1"/>
+          <p:nvPr/>
+        </p:nvSpPr>
+        <p:spPr>
+          <a:xfrm>
+            <a:off x="685800" y="1417320"/>
+            <a:ext cx="10817352" cy="5029200"/>
+          </a:xfrm>
+          <a:prstGeom prst="rect">
+            <a:avLst/>
+          </a:prstGeom>
+          <a:noFill/>
+        </p:spPr>
+        <p:txBody>
+          <a:bodyPr wrap="square">
+            <a:spAutoFit/>
+          </a:bodyPr>
+          <a:lstStyle/>
+          <a:p>
+            <a:pPr>
+              <a:spcBef>
+                <a:spcPts val="400"/>
+              </a:spcBef>
+              <a:spcAft>
+                <a:spcPts val="200"/>
+              </a:spcAft>
+            </a:pPr>
+            <a:r>
+              <a:rPr sz="1200">
+                <a:solidFill>
+                  <a:srgbClr val="3D5466"/>
+                </a:solidFill>
+                <a:latin typeface="Arial"/>
+              </a:rPr>
+              <a:t>Anzahl Datenlücken gesamt: _______ | Größte Schwachstelle: _______________________</a:t>
+            </a:r>
+          </a:p>
+          <a:p>
+            <a:pPr>
+              <a:spcBef>
+                <a:spcPts val="400"/>
+              </a:spcBef>
+              <a:spcAft>
+                <a:spcPts val="200"/>
+              </a:spcAft>
+            </a:pPr>
+            <a:r>
+              <a:rPr sz="1200">
+                <a:solidFill>
+                  <a:srgbClr val="3D5466"/>
+                </a:solidFill>
+                <a:latin typeface="Arial"/>
+              </a:rPr>
+              <a:t># 5. PRAXISTRANSFER</a:t>
+            </a:r>
+          </a:p>
+        </p:txBody>
+      </p:sp>
+      <p:sp>
+        <p:nvSpPr>
+          <p:cNvPr id="9" name="Rectangle 8"/>
+          <p:cNvSpPr/>
+          <p:nvPr/>
+        </p:nvSpPr>
+        <p:spPr>
+          <a:xfrm>
+            <a:off x="0" y="6510528"/>
+            <a:ext cx="12188952" cy="347472"/>
+          </a:xfrm>
+          <a:prstGeom prst="rect">
+            <a:avLst/>
+          </a:prstGeom>
+          <a:solidFill>
+            <a:srgbClr val="0A1937"/>
+          </a:solidFill>
+          <a:ln>
+            <a:noFill/>
+          </a:ln>
+        </p:spPr>
+        <p:style>
+          <a:lnRef idx="1">
+            <a:schemeClr val="accent1"/>
+          </a:lnRef>
+          <a:fillRef idx="3">
+            <a:schemeClr val="accent1"/>
+          </a:fillRef>
+          <a:effectRef idx="2">
+            <a:schemeClr val="accent1"/>
+          </a:effectRef>
+          <a:fontRef idx="minor">
+            <a:schemeClr val="lt1"/>
+          </a:fontRef>
+        </p:style>
+        <p:txBody>
+          <a:bodyPr rtlCol="0" anchor="ctr"/>
+          <a:lstStyle/>
+          <a:p>
+            <a:pPr algn="ctr"/>
+          </a:p>
+        </p:txBody>
+      </p:sp>
+      <p:sp>
+        <p:nvSpPr>
+          <p:cNvPr id="10" name="TextBox 9"/>
+          <p:cNvSpPr txBox="1"/>
+          <p:nvPr/>
+        </p:nvSpPr>
+        <p:spPr>
+          <a:xfrm>
+            <a:off x="685800" y="6583680"/>
+            <a:ext cx="6490411" cy="256032"/>
+          </a:xfrm>
+          <a:prstGeom prst="rect">
+            <a:avLst/>
+          </a:prstGeom>
+          <a:noFill/>
+        </p:spPr>
+        <p:txBody>
+          <a:bodyPr wrap="none">
+            <a:spAutoFit/>
+          </a:bodyPr>
+          <a:lstStyle/>
+          <a:p>
+            <a:pPr algn="l"/>
+            <a:r>
+              <a:rPr sz="700">
+                <a:solidFill>
+                  <a:srgbClr val="A0B4D2"/>
+                </a:solidFill>
+                <a:latin typeface="JetBrains Mono"/>
+              </a:rPr>
+              <a:t>Benedikt Zoller Coaching  ·  FKB Campus  ·  M18</a:t>
             </a:r>
           </a:p>
         </p:txBody>
@@ -3789,14 +5764,6 @@
 <file path=ppt/slides/slide2.xml><?xml version="1.0" encoding="utf-8"?>
 <p:sld xmlns:a="http://schemas.openxmlformats.org/drawingml/2006/main" xmlns:p="http://schemas.openxmlformats.org/presentationml/2006/main" xmlns:r="http://schemas.openxmlformats.org/officeDocument/2006/relationships">
   <p:cSld>
-    <p:bg>
-      <p:bgPr>
-        <a:solidFill>
-          <a:srgbClr val="F8F8FA"/>
-        </a:solidFill>
-        <a:effectLst/>
-      </p:bgPr>
-    </p:bg>
     <p:spTree>
       <p:nvGrpSpPr>
         <p:cNvPr id="1" name=""/>
@@ -3806,125 +5773,20 @@
       <p:grpSpPr/>
       <p:sp>
         <p:nvSpPr>
-          <p:cNvPr id="2" name="TextBox 1"/>
-          <p:cNvSpPr txBox="1"/>
-          <p:nvPr/>
-        </p:nvSpPr>
-        <p:spPr>
-          <a:xfrm>
-            <a:off x="609600" y="279400"/>
-            <a:ext cx="2540000" cy="279400"/>
-          </a:xfrm>
-          <a:prstGeom prst="rect">
-            <a:avLst/>
-          </a:prstGeom>
-          <a:noFill/>
-        </p:spPr>
-        <p:txBody>
-          <a:bodyPr wrap="square">
-            <a:normAutofit/>
-          </a:bodyPr>
-          <a:lstStyle/>
-          <a:p>
-            <a:pPr algn="l"/>
-            <a:r>
-              <a:rPr sz="1000" b="1" i="0">
-                <a:solidFill>
-                  <a:srgbClr val="191D2E"/>
-                </a:solidFill>
-                <a:latin typeface="Arial"/>
-              </a:rPr>
-              <a:t>FKB  Campus</a:t>
-            </a:r>
-          </a:p>
-        </p:txBody>
-      </p:sp>
-      <p:sp>
-        <p:nvSpPr>
-          <p:cNvPr id="3" name="TextBox 2"/>
-          <p:cNvSpPr txBox="1"/>
-          <p:nvPr/>
-        </p:nvSpPr>
-        <p:spPr>
-          <a:xfrm>
-            <a:off x="609600" y="279400"/>
-            <a:ext cx="10972800" cy="279400"/>
-          </a:xfrm>
-          <a:prstGeom prst="rect">
-            <a:avLst/>
-          </a:prstGeom>
-          <a:noFill/>
-        </p:spPr>
-        <p:txBody>
-          <a:bodyPr wrap="square">
-            <a:normAutofit/>
-          </a:bodyPr>
-          <a:lstStyle/>
-          <a:p>
-            <a:pPr algn="r"/>
-            <a:r>
-              <a:rPr sz="900" b="0" i="0">
-                <a:solidFill>
-                  <a:srgbClr val="7B7FA0"/>
-                </a:solidFill>
-                <a:latin typeface="Courier New"/>
-              </a:rPr>
-              <a:t>§ 00 — LERNZIELE</a:t>
-            </a:r>
-          </a:p>
-        </p:txBody>
-      </p:sp>
-      <p:sp>
-        <p:nvSpPr>
-          <p:cNvPr id="4" name="TextBox 3"/>
-          <p:cNvSpPr txBox="1"/>
-          <p:nvPr/>
-        </p:nvSpPr>
-        <p:spPr>
-          <a:xfrm>
-            <a:off x="609600" y="6426200"/>
-            <a:ext cx="10972800" cy="228600"/>
-          </a:xfrm>
-          <a:prstGeom prst="rect">
-            <a:avLst/>
-          </a:prstGeom>
-          <a:noFill/>
-        </p:spPr>
-        <p:txBody>
-          <a:bodyPr wrap="square">
-            <a:normAutofit/>
-          </a:bodyPr>
-          <a:lstStyle/>
-          <a:p>
-            <a:pPr algn="r"/>
-            <a:r>
-              <a:rPr sz="900" b="0" i="0">
-                <a:solidFill>
-                  <a:srgbClr val="7B7FA0"/>
-                </a:solidFill>
-                <a:latin typeface="Courier New"/>
-              </a:rPr>
-              <a:t>02</a:t>
-            </a:r>
-          </a:p>
-        </p:txBody>
-      </p:sp>
-      <p:sp>
-        <p:nvSpPr>
-          <p:cNvPr id="5" name="Rectangle 4"/>
+          <p:cNvPr id="2" name="Rectangle 1"/>
           <p:cNvSpPr/>
           <p:nvPr/>
         </p:nvSpPr>
         <p:spPr>
           <a:xfrm>
-            <a:off x="609600" y="825500"/>
-            <a:ext cx="10972800" cy="6350"/>
+            <a:off x="0" y="0"/>
+            <a:ext cx="12188952" cy="6858000"/>
           </a:xfrm>
           <a:prstGeom prst="rect">
             <a:avLst/>
           </a:prstGeom>
           <a:solidFill>
-            <a:srgbClr val="191D2E"/>
+            <a:srgbClr val="EDEDF3"/>
           </a:solidFill>
           <a:ln>
             <a:noFill/>
@@ -3954,55 +5816,20 @@
       </p:sp>
       <p:sp>
         <p:nvSpPr>
-          <p:cNvPr id="6" name="TextBox 5"/>
-          <p:cNvSpPr txBox="1"/>
-          <p:nvPr/>
-        </p:nvSpPr>
-        <p:spPr>
-          <a:xfrm>
-            <a:off x="609600" y="920750"/>
-            <a:ext cx="3175000" cy="1651000"/>
-          </a:xfrm>
-          <a:prstGeom prst="rect">
-            <a:avLst/>
-          </a:prstGeom>
-          <a:noFill/>
-        </p:spPr>
-        <p:txBody>
-          <a:bodyPr wrap="square">
-            <a:normAutofit/>
-          </a:bodyPr>
-          <a:lstStyle/>
-          <a:p>
-            <a:pPr algn="l"/>
-            <a:r>
-              <a:rPr sz="4800" b="0" i="1">
-                <a:solidFill>
-                  <a:srgbClr val="1F2B56"/>
-                </a:solidFill>
-                <a:latin typeface="Georgia"/>
-              </a:rPr>
-              <a:t>Inhalt.</a:t>
-            </a:r>
-          </a:p>
-        </p:txBody>
-      </p:sp>
-      <p:sp>
-        <p:nvSpPr>
-          <p:cNvPr id="7" name="Rectangle 6"/>
+          <p:cNvPr id="3" name="Rectangle 2"/>
           <p:cNvSpPr/>
           <p:nvPr/>
         </p:nvSpPr>
         <p:spPr>
           <a:xfrm>
-            <a:off x="4064000" y="889000"/>
-            <a:ext cx="7518399" cy="6350"/>
+            <a:off x="0" y="0"/>
+            <a:ext cx="12188952" cy="50292"/>
           </a:xfrm>
           <a:prstGeom prst="rect">
             <a:avLst/>
           </a:prstGeom>
           <a:solidFill>
-            <a:srgbClr val="E0E0E8"/>
+            <a:srgbClr val="1F2C56"/>
           </a:solidFill>
           <a:ln>
             <a:noFill/>
@@ -4032,14 +5859,14 @@
       </p:sp>
       <p:sp>
         <p:nvSpPr>
-          <p:cNvPr id="8" name="TextBox 7"/>
+          <p:cNvPr id="4" name="TextBox 3"/>
           <p:cNvSpPr txBox="1"/>
           <p:nvPr/>
         </p:nvSpPr>
         <p:spPr>
           <a:xfrm>
-            <a:off x="4064000" y="939799"/>
-            <a:ext cx="762000" cy="647700"/>
+            <a:off x="685800" y="109728"/>
+            <a:ext cx="10817352" cy="228600"/>
           </a:xfrm>
           <a:prstGeom prst="rect">
             <a:avLst/>
@@ -4048,74 +5875,39 @@
         </p:spPr>
         <p:txBody>
           <a:bodyPr wrap="none">
-            <a:normAutofit/>
+            <a:spAutoFit/>
           </a:bodyPr>
           <a:lstStyle/>
           <a:p>
             <a:pPr algn="l"/>
             <a:r>
-              <a:rPr sz="2400" b="0" i="1">
-                <a:solidFill>
-                  <a:srgbClr val="1F2B56"/>
-                </a:solidFill>
-                <a:latin typeface="Georgia"/>
+              <a:rPr sz="750">
+                <a:solidFill>
+                  <a:srgbClr val="78808C"/>
+                </a:solidFill>
+                <a:latin typeface="JetBrains Mono"/>
               </a:rPr>
-              <a:t>I</a:t>
-            </a:r>
-          </a:p>
-        </p:txBody>
-      </p:sp>
-      <p:sp>
-        <p:nvSpPr>
-          <p:cNvPr id="9" name="TextBox 8"/>
-          <p:cNvSpPr txBox="1"/>
-          <p:nvPr/>
-        </p:nvSpPr>
-        <p:spPr>
-          <a:xfrm>
-            <a:off x="4953000" y="952500"/>
-            <a:ext cx="6629400" cy="635000"/>
-          </a:xfrm>
-          <a:prstGeom prst="rect">
-            <a:avLst/>
-          </a:prstGeom>
-          <a:noFill/>
-        </p:spPr>
-        <p:txBody>
-          <a:bodyPr wrap="square">
-            <a:normAutofit/>
-          </a:bodyPr>
-          <a:lstStyle/>
-          <a:p>
-            <a:pPr algn="l"/>
-            <a:r>
-              <a:rPr sz="1400" b="0" i="0">
-                <a:solidFill>
-                  <a:srgbClr val="191D2E"/>
-                </a:solidFill>
-                <a:latin typeface="Georgia"/>
-              </a:rPr>
-              <a:t>Mindestens fünf Trigger-Ereignisse aus agree-Daten identifizieren und priorisieren</a:t>
-            </a:r>
-          </a:p>
-        </p:txBody>
-      </p:sp>
-      <p:sp>
-        <p:nvSpPr>
-          <p:cNvPr id="10" name="Rectangle 9"/>
+              <a:t>LERNZIELE  ·  M18</a:t>
+            </a:r>
+          </a:p>
+        </p:txBody>
+      </p:sp>
+      <p:sp>
+        <p:nvSpPr>
+          <p:cNvPr id="5" name="Rectangle 4"/>
           <p:cNvSpPr/>
           <p:nvPr/>
         </p:nvSpPr>
         <p:spPr>
           <a:xfrm>
-            <a:off x="4064000" y="1587500"/>
-            <a:ext cx="7518399" cy="6350"/>
+            <a:off x="0" y="1234440"/>
+            <a:ext cx="12188952" cy="12700"/>
           </a:xfrm>
           <a:prstGeom prst="rect">
             <a:avLst/>
           </a:prstGeom>
           <a:solidFill>
-            <a:srgbClr val="E0E0E8"/>
+            <a:srgbClr val="D8DFE4"/>
           </a:solidFill>
           <a:ln>
             <a:noFill/>
@@ -4145,14 +5937,14 @@
       </p:sp>
       <p:sp>
         <p:nvSpPr>
-          <p:cNvPr id="11" name="TextBox 10"/>
+          <p:cNvPr id="6" name="TextBox 5"/>
           <p:cNvSpPr txBox="1"/>
           <p:nvPr/>
         </p:nvSpPr>
         <p:spPr>
           <a:xfrm>
-            <a:off x="4064000" y="1638300"/>
-            <a:ext cx="762000" cy="647700"/>
+            <a:off x="685800" y="502920"/>
+            <a:ext cx="10817352" cy="658368"/>
           </a:xfrm>
           <a:prstGeom prst="rect">
             <a:avLst/>
@@ -4160,34 +5952,34 @@
           <a:noFill/>
         </p:spPr>
         <p:txBody>
-          <a:bodyPr wrap="none">
-            <a:normAutofit/>
+          <a:bodyPr wrap="square">
+            <a:spAutoFit/>
           </a:bodyPr>
           <a:lstStyle/>
           <a:p>
             <a:pPr algn="l"/>
             <a:r>
-              <a:rPr sz="2400" b="0" i="1">
-                <a:solidFill>
-                  <a:srgbClr val="1F2B56"/>
-                </a:solidFill>
-                <a:latin typeface="Georgia"/>
+              <a:rPr sz="2600" b="1" i="0">
+                <a:solidFill>
+                  <a:srgbClr val="1F2C56"/>
+                </a:solidFill>
+                <a:latin typeface="Source Serif 4"/>
               </a:rPr>
-              <a:t>II</a:t>
-            </a:r>
-          </a:p>
-        </p:txBody>
-      </p:sp>
-      <p:sp>
-        <p:nvSpPr>
-          <p:cNvPr id="12" name="TextBox 11"/>
+              <a:t>Was Sie heute mitnehmen</a:t>
+            </a:r>
+          </a:p>
+        </p:txBody>
+      </p:sp>
+      <p:sp>
+        <p:nvSpPr>
+          <p:cNvPr id="7" name="TextBox 6"/>
           <p:cNvSpPr txBox="1"/>
           <p:nvPr/>
         </p:nvSpPr>
         <p:spPr>
           <a:xfrm>
-            <a:off x="4953000" y="1651000"/>
-            <a:ext cx="6629400" cy="635000"/>
+            <a:off x="685800" y="1371600"/>
+            <a:ext cx="10817352" cy="5120640"/>
           </a:xfrm>
           <a:prstGeom prst="rect">
             <a:avLst/>
@@ -4196,39 +5988,122 @@
         </p:spPr>
         <p:txBody>
           <a:bodyPr wrap="square">
-            <a:normAutofit/>
+            <a:spAutoFit/>
           </a:bodyPr>
           <a:lstStyle/>
           <a:p>
-            <a:pPr algn="l"/>
-            <a:r>
-              <a:rPr sz="1400" b="0" i="0">
-                <a:solidFill>
-                  <a:srgbClr val="191D2E"/>
-                </a:solidFill>
-                <a:latin typeface="Georgia"/>
+            <a:pPr>
+              <a:spcBef>
+                <a:spcPts val="800"/>
+              </a:spcBef>
+              <a:spcAft>
+                <a:spcPts val="200"/>
+              </a:spcAft>
+            </a:pPr>
+            <a:r>
+              <a:rPr sz="1400">
+                <a:solidFill>
+                  <a:srgbClr val="3D5466"/>
+                </a:solidFill>
+                <a:latin typeface="Arial"/>
               </a:rPr>
-              <a:t>Datenqualität des CRM-Bestands analysieren und Lücken benennen</a:t>
-            </a:r>
-          </a:p>
-        </p:txBody>
-      </p:sp>
-      <p:sp>
-        <p:nvSpPr>
-          <p:cNvPr id="13" name="Rectangle 12"/>
+              <a:t>▸  Mindestens fünf Trigger-Ereignisse aus agree-Daten identifizieren und priorisieren</a:t>
+            </a:r>
+          </a:p>
+          <a:p>
+            <a:pPr>
+              <a:spcBef>
+                <a:spcPts val="800"/>
+              </a:spcBef>
+              <a:spcAft>
+                <a:spcPts val="200"/>
+              </a:spcAft>
+            </a:pPr>
+            <a:r>
+              <a:rPr sz="1400">
+                <a:solidFill>
+                  <a:srgbClr val="3D5466"/>
+                </a:solidFill>
+                <a:latin typeface="Arial"/>
+              </a:rPr>
+              <a:t>▸  Datenqualität des CRM-Bestands analysieren und Lücken benennen</a:t>
+            </a:r>
+          </a:p>
+          <a:p>
+            <a:pPr>
+              <a:spcBef>
+                <a:spcPts val="800"/>
+              </a:spcBef>
+              <a:spcAft>
+                <a:spcPts val="200"/>
+              </a:spcAft>
+            </a:pPr>
+            <a:r>
+              <a:rPr sz="1400">
+                <a:solidFill>
+                  <a:srgbClr val="3D5466"/>
+                </a:solidFill>
+                <a:latin typeface="Arial"/>
+              </a:rPr>
+              <a:t>▸  Reaktiven und trigger-basierten Vertrieb unterscheiden und erläutern</a:t>
+            </a:r>
+          </a:p>
+          <a:p>
+            <a:pPr>
+              <a:spcBef>
+                <a:spcPts val="800"/>
+              </a:spcBef>
+              <a:spcAft>
+                <a:spcPts val="200"/>
+              </a:spcAft>
+            </a:pPr>
+            <a:r>
+              <a:rPr sz="1400">
+                <a:solidFill>
+                  <a:srgbClr val="3D5466"/>
+                </a:solidFill>
+                <a:latin typeface="Arial"/>
+              </a:rPr>
+              <a:t>▸  Drei Trigger-Typen hinsichtlich Vorlaufzeit und Wirksamkeit bewerten</a:t>
+            </a:r>
+          </a:p>
+          <a:p>
+            <a:pPr>
+              <a:spcBef>
+                <a:spcPts val="800"/>
+              </a:spcBef>
+              <a:spcAft>
+                <a:spcPts val="200"/>
+              </a:spcAft>
+            </a:pPr>
+            <a:r>
+              <a:rPr sz="1400">
+                <a:solidFill>
+                  <a:srgbClr val="3D5466"/>
+                </a:solidFill>
+                <a:latin typeface="Arial"/>
+              </a:rPr>
+              <a:t>▸  Grundsätze der DSGVO-konformen Datennutzung im Vertriebskontext anwenden</a:t>
+            </a:r>
+          </a:p>
+        </p:txBody>
+      </p:sp>
+      <p:sp>
+        <p:nvSpPr>
+          <p:cNvPr id="8" name="Rectangle 7"/>
           <p:cNvSpPr/>
           <p:nvPr/>
         </p:nvSpPr>
         <p:spPr>
           <a:xfrm>
-            <a:off x="4064000" y="2286000"/>
-            <a:ext cx="7518399" cy="6350"/>
+            <a:off x="0" y="6510528"/>
+            <a:ext cx="12188952" cy="347472"/>
           </a:xfrm>
           <a:prstGeom prst="rect">
             <a:avLst/>
           </a:prstGeom>
           <a:solidFill>
-            <a:srgbClr val="E0E0E8"/>
+            <a:srgbClr val="0A1937"/>
           </a:solidFill>
           <a:ln>
             <a:noFill/>
@@ -4258,14 +6133,14 @@
       </p:sp>
       <p:sp>
         <p:nvSpPr>
-          <p:cNvPr id="14" name="TextBox 13"/>
+          <p:cNvPr id="9" name="TextBox 8"/>
           <p:cNvSpPr txBox="1"/>
           <p:nvPr/>
         </p:nvSpPr>
         <p:spPr>
           <a:xfrm>
-            <a:off x="4064000" y="2336800"/>
-            <a:ext cx="762000" cy="647700"/>
+            <a:off x="685800" y="6583680"/>
+            <a:ext cx="6490411" cy="256032"/>
           </a:xfrm>
           <a:prstGeom prst="rect">
             <a:avLst/>
@@ -4274,280 +6149,19 @@
         </p:spPr>
         <p:txBody>
           <a:bodyPr wrap="none">
-            <a:normAutofit/>
+            <a:spAutoFit/>
           </a:bodyPr>
           <a:lstStyle/>
           <a:p>
             <a:pPr algn="l"/>
             <a:r>
-              <a:rPr sz="2400" b="0" i="1">
-                <a:solidFill>
-                  <a:srgbClr val="1F2B56"/>
-                </a:solidFill>
-                <a:latin typeface="Georgia"/>
+              <a:rPr sz="700">
+                <a:solidFill>
+                  <a:srgbClr val="A0B4D2"/>
+                </a:solidFill>
+                <a:latin typeface="JetBrains Mono"/>
               </a:rPr>
-              <a:t>III</a:t>
-            </a:r>
-          </a:p>
-        </p:txBody>
-      </p:sp>
-      <p:sp>
-        <p:nvSpPr>
-          <p:cNvPr id="15" name="TextBox 14"/>
-          <p:cNvSpPr txBox="1"/>
-          <p:nvPr/>
-        </p:nvSpPr>
-        <p:spPr>
-          <a:xfrm>
-            <a:off x="4953000" y="2349500"/>
-            <a:ext cx="6629400" cy="635000"/>
-          </a:xfrm>
-          <a:prstGeom prst="rect">
-            <a:avLst/>
-          </a:prstGeom>
-          <a:noFill/>
-        </p:spPr>
-        <p:txBody>
-          <a:bodyPr wrap="square">
-            <a:normAutofit/>
-          </a:bodyPr>
-          <a:lstStyle/>
-          <a:p>
-            <a:pPr algn="l"/>
-            <a:r>
-              <a:rPr sz="1400" b="0" i="0">
-                <a:solidFill>
-                  <a:srgbClr val="191D2E"/>
-                </a:solidFill>
-                <a:latin typeface="Georgia"/>
-              </a:rPr>
-              <a:t>Reaktiven und trigger-basierten Vertrieb unterscheiden und erläutern</a:t>
-            </a:r>
-          </a:p>
-        </p:txBody>
-      </p:sp>
-      <p:sp>
-        <p:nvSpPr>
-          <p:cNvPr id="16" name="Rectangle 15"/>
-          <p:cNvSpPr/>
-          <p:nvPr/>
-        </p:nvSpPr>
-        <p:spPr>
-          <a:xfrm>
-            <a:off x="4064000" y="2984500"/>
-            <a:ext cx="7518399" cy="6350"/>
-          </a:xfrm>
-          <a:prstGeom prst="rect">
-            <a:avLst/>
-          </a:prstGeom>
-          <a:solidFill>
-            <a:srgbClr val="E0E0E8"/>
-          </a:solidFill>
-          <a:ln>
-            <a:noFill/>
-          </a:ln>
-        </p:spPr>
-        <p:style>
-          <a:lnRef idx="1">
-            <a:schemeClr val="accent1"/>
-          </a:lnRef>
-          <a:fillRef idx="3">
-            <a:schemeClr val="accent1"/>
-          </a:fillRef>
-          <a:effectRef idx="2">
-            <a:schemeClr val="accent1"/>
-          </a:effectRef>
-          <a:fontRef idx="minor">
-            <a:schemeClr val="lt1"/>
-          </a:fontRef>
-        </p:style>
-        <p:txBody>
-          <a:bodyPr rtlCol="0" anchor="ctr"/>
-          <a:lstStyle/>
-          <a:p>
-            <a:pPr algn="ctr"/>
-          </a:p>
-        </p:txBody>
-      </p:sp>
-      <p:sp>
-        <p:nvSpPr>
-          <p:cNvPr id="17" name="TextBox 16"/>
-          <p:cNvSpPr txBox="1"/>
-          <p:nvPr/>
-        </p:nvSpPr>
-        <p:spPr>
-          <a:xfrm>
-            <a:off x="4064000" y="3035300"/>
-            <a:ext cx="762000" cy="647700"/>
-          </a:xfrm>
-          <a:prstGeom prst="rect">
-            <a:avLst/>
-          </a:prstGeom>
-          <a:noFill/>
-        </p:spPr>
-        <p:txBody>
-          <a:bodyPr wrap="none">
-            <a:normAutofit/>
-          </a:bodyPr>
-          <a:lstStyle/>
-          <a:p>
-            <a:pPr algn="l"/>
-            <a:r>
-              <a:rPr sz="2400" b="0" i="1">
-                <a:solidFill>
-                  <a:srgbClr val="1F2B56"/>
-                </a:solidFill>
-                <a:latin typeface="Georgia"/>
-              </a:rPr>
-              <a:t>IV</a:t>
-            </a:r>
-          </a:p>
-        </p:txBody>
-      </p:sp>
-      <p:sp>
-        <p:nvSpPr>
-          <p:cNvPr id="18" name="TextBox 17"/>
-          <p:cNvSpPr txBox="1"/>
-          <p:nvPr/>
-        </p:nvSpPr>
-        <p:spPr>
-          <a:xfrm>
-            <a:off x="4953000" y="3048000"/>
-            <a:ext cx="6629400" cy="635000"/>
-          </a:xfrm>
-          <a:prstGeom prst="rect">
-            <a:avLst/>
-          </a:prstGeom>
-          <a:noFill/>
-        </p:spPr>
-        <p:txBody>
-          <a:bodyPr wrap="square">
-            <a:normAutofit/>
-          </a:bodyPr>
-          <a:lstStyle/>
-          <a:p>
-            <a:pPr algn="l"/>
-            <a:r>
-              <a:rPr sz="1400" b="0" i="0">
-                <a:solidFill>
-                  <a:srgbClr val="191D2E"/>
-                </a:solidFill>
-                <a:latin typeface="Georgia"/>
-              </a:rPr>
-              <a:t>Drei Trigger-Typen hinsichtlich Vorlaufzeit und Wirksamkeit bewerten</a:t>
-            </a:r>
-          </a:p>
-        </p:txBody>
-      </p:sp>
-      <p:sp>
-        <p:nvSpPr>
-          <p:cNvPr id="19" name="Rectangle 18"/>
-          <p:cNvSpPr/>
-          <p:nvPr/>
-        </p:nvSpPr>
-        <p:spPr>
-          <a:xfrm>
-            <a:off x="4064000" y="3683000"/>
-            <a:ext cx="7518399" cy="6350"/>
-          </a:xfrm>
-          <a:prstGeom prst="rect">
-            <a:avLst/>
-          </a:prstGeom>
-          <a:solidFill>
-            <a:srgbClr val="E0E0E8"/>
-          </a:solidFill>
-          <a:ln>
-            <a:noFill/>
-          </a:ln>
-        </p:spPr>
-        <p:style>
-          <a:lnRef idx="1">
-            <a:schemeClr val="accent1"/>
-          </a:lnRef>
-          <a:fillRef idx="3">
-            <a:schemeClr val="accent1"/>
-          </a:fillRef>
-          <a:effectRef idx="2">
-            <a:schemeClr val="accent1"/>
-          </a:effectRef>
-          <a:fontRef idx="minor">
-            <a:schemeClr val="lt1"/>
-          </a:fontRef>
-        </p:style>
-        <p:txBody>
-          <a:bodyPr rtlCol="0" anchor="ctr"/>
-          <a:lstStyle/>
-          <a:p>
-            <a:pPr algn="ctr"/>
-          </a:p>
-        </p:txBody>
-      </p:sp>
-      <p:sp>
-        <p:nvSpPr>
-          <p:cNvPr id="20" name="TextBox 19"/>
-          <p:cNvSpPr txBox="1"/>
-          <p:nvPr/>
-        </p:nvSpPr>
-        <p:spPr>
-          <a:xfrm>
-            <a:off x="4064000" y="3733799"/>
-            <a:ext cx="762000" cy="647700"/>
-          </a:xfrm>
-          <a:prstGeom prst="rect">
-            <a:avLst/>
-          </a:prstGeom>
-          <a:noFill/>
-        </p:spPr>
-        <p:txBody>
-          <a:bodyPr wrap="none">
-            <a:normAutofit/>
-          </a:bodyPr>
-          <a:lstStyle/>
-          <a:p>
-            <a:pPr algn="l"/>
-            <a:r>
-              <a:rPr sz="2400" b="0" i="1">
-                <a:solidFill>
-                  <a:srgbClr val="1F2B56"/>
-                </a:solidFill>
-                <a:latin typeface="Georgia"/>
-              </a:rPr>
-              <a:t>V</a:t>
-            </a:r>
-          </a:p>
-        </p:txBody>
-      </p:sp>
-      <p:sp>
-        <p:nvSpPr>
-          <p:cNvPr id="21" name="TextBox 20"/>
-          <p:cNvSpPr txBox="1"/>
-          <p:nvPr/>
-        </p:nvSpPr>
-        <p:spPr>
-          <a:xfrm>
-            <a:off x="4953000" y="3746500"/>
-            <a:ext cx="6629400" cy="635000"/>
-          </a:xfrm>
-          <a:prstGeom prst="rect">
-            <a:avLst/>
-          </a:prstGeom>
-          <a:noFill/>
-        </p:spPr>
-        <p:txBody>
-          <a:bodyPr wrap="square">
-            <a:normAutofit/>
-          </a:bodyPr>
-          <a:lstStyle/>
-          <a:p>
-            <a:pPr algn="l"/>
-            <a:r>
-              <a:rPr sz="1400" b="0" i="0">
-                <a:solidFill>
-                  <a:srgbClr val="191D2E"/>
-                </a:solidFill>
-                <a:latin typeface="Georgia"/>
-              </a:rPr>
-              <a:t>Grundsätze der DSGVO-konformen Datennutzung im Vertriebskontext anwenden</a:t>
+              <a:t>Benedikt Zoller Coaching  ·  FKB Campus  ·  M18</a:t>
             </a:r>
           </a:p>
         </p:txBody>
@@ -4563,14 +6177,6 @@
 <file path=ppt/slides/slide3.xml><?xml version="1.0" encoding="utf-8"?>
 <p:sld xmlns:a="http://schemas.openxmlformats.org/drawingml/2006/main" xmlns:p="http://schemas.openxmlformats.org/presentationml/2006/main" xmlns:r="http://schemas.openxmlformats.org/officeDocument/2006/relationships">
   <p:cSld>
-    <p:bg>
-      <p:bgPr>
-        <a:solidFill>
-          <a:srgbClr val="1F2B56"/>
-        </a:solidFill>
-        <a:effectLst/>
-      </p:bgPr>
-    </p:bg>
     <p:spTree>
       <p:nvGrpSpPr>
         <p:cNvPr id="1" name=""/>
@@ -4580,14 +6186,100 @@
       <p:grpSpPr/>
       <p:sp>
         <p:nvSpPr>
-          <p:cNvPr id="2" name="TextBox 1"/>
+          <p:cNvPr id="2" name="Rectangle 1"/>
+          <p:cNvSpPr/>
+          <p:nvPr/>
+        </p:nvSpPr>
+        <p:spPr>
+          <a:xfrm>
+            <a:off x="0" y="0"/>
+            <a:ext cx="12188952" cy="6858000"/>
+          </a:xfrm>
+          <a:prstGeom prst="rect">
+            <a:avLst/>
+          </a:prstGeom>
+          <a:solidFill>
+            <a:srgbClr val="EDEDF3"/>
+          </a:solidFill>
+          <a:ln>
+            <a:noFill/>
+          </a:ln>
+        </p:spPr>
+        <p:style>
+          <a:lnRef idx="1">
+            <a:schemeClr val="accent1"/>
+          </a:lnRef>
+          <a:fillRef idx="3">
+            <a:schemeClr val="accent1"/>
+          </a:fillRef>
+          <a:effectRef idx="2">
+            <a:schemeClr val="accent1"/>
+          </a:effectRef>
+          <a:fontRef idx="minor">
+            <a:schemeClr val="lt1"/>
+          </a:fontRef>
+        </p:style>
+        <p:txBody>
+          <a:bodyPr rtlCol="0" anchor="ctr"/>
+          <a:lstStyle/>
+          <a:p>
+            <a:pPr algn="ctr"/>
+          </a:p>
+        </p:txBody>
+      </p:sp>
+      <p:sp>
+        <p:nvSpPr>
+          <p:cNvPr id="3" name="Rectangle 2"/>
+          <p:cNvSpPr/>
+          <p:nvPr/>
+        </p:nvSpPr>
+        <p:spPr>
+          <a:xfrm>
+            <a:off x="0" y="0"/>
+            <a:ext cx="12188952" cy="50292"/>
+          </a:xfrm>
+          <a:prstGeom prst="rect">
+            <a:avLst/>
+          </a:prstGeom>
+          <a:solidFill>
+            <a:srgbClr val="1F2C56"/>
+          </a:solidFill>
+          <a:ln>
+            <a:noFill/>
+          </a:ln>
+        </p:spPr>
+        <p:style>
+          <a:lnRef idx="1">
+            <a:schemeClr val="accent1"/>
+          </a:lnRef>
+          <a:fillRef idx="3">
+            <a:schemeClr val="accent1"/>
+          </a:fillRef>
+          <a:effectRef idx="2">
+            <a:schemeClr val="accent1"/>
+          </a:effectRef>
+          <a:fontRef idx="minor">
+            <a:schemeClr val="lt1"/>
+          </a:fontRef>
+        </p:style>
+        <p:txBody>
+          <a:bodyPr rtlCol="0" anchor="ctr"/>
+          <a:lstStyle/>
+          <a:p>
+            <a:pPr algn="ctr"/>
+          </a:p>
+        </p:txBody>
+      </p:sp>
+      <p:sp>
+        <p:nvSpPr>
+          <p:cNvPr id="4" name="TextBox 3"/>
           <p:cNvSpPr txBox="1"/>
           <p:nvPr/>
         </p:nvSpPr>
         <p:spPr>
           <a:xfrm>
-            <a:off x="609600" y="279400"/>
-            <a:ext cx="2540000" cy="279400"/>
+            <a:off x="685800" y="109728"/>
+            <a:ext cx="10817352" cy="228600"/>
           </a:xfrm>
           <a:prstGeom prst="rect">
             <a:avLst/>
@@ -4595,34 +6287,240 @@
           <a:noFill/>
         </p:spPr>
         <p:txBody>
+          <a:bodyPr wrap="none">
+            <a:spAutoFit/>
+          </a:bodyPr>
+          <a:lstStyle/>
+          <a:p>
+            <a:pPr algn="l"/>
+            <a:r>
+              <a:rPr sz="750">
+                <a:solidFill>
+                  <a:srgbClr val="78808C"/>
+                </a:solidFill>
+                <a:latin typeface="JetBrains Mono"/>
+              </a:rPr>
+              <a:t>M18  ·  INHALT</a:t>
+            </a:r>
+          </a:p>
+        </p:txBody>
+      </p:sp>
+      <p:sp>
+        <p:nvSpPr>
+          <p:cNvPr id="5" name="Rectangle 4"/>
+          <p:cNvSpPr/>
+          <p:nvPr/>
+        </p:nvSpPr>
+        <p:spPr>
+          <a:xfrm>
+            <a:off x="0" y="1234440"/>
+            <a:ext cx="12188952" cy="12700"/>
+          </a:xfrm>
+          <a:prstGeom prst="rect">
+            <a:avLst/>
+          </a:prstGeom>
+          <a:solidFill>
+            <a:srgbClr val="D8DFE4"/>
+          </a:solidFill>
+          <a:ln>
+            <a:noFill/>
+          </a:ln>
+        </p:spPr>
+        <p:style>
+          <a:lnRef idx="1">
+            <a:schemeClr val="accent1"/>
+          </a:lnRef>
+          <a:fillRef idx="3">
+            <a:schemeClr val="accent1"/>
+          </a:fillRef>
+          <a:effectRef idx="2">
+            <a:schemeClr val="accent1"/>
+          </a:effectRef>
+          <a:fontRef idx="minor">
+            <a:schemeClr val="lt1"/>
+          </a:fontRef>
+        </p:style>
+        <p:txBody>
+          <a:bodyPr rtlCol="0" anchor="ctr"/>
+          <a:lstStyle/>
+          <a:p>
+            <a:pPr algn="ctr"/>
+          </a:p>
+        </p:txBody>
+      </p:sp>
+      <p:sp>
+        <p:nvSpPr>
+          <p:cNvPr id="6" name="Rectangle 5"/>
+          <p:cNvSpPr/>
+          <p:nvPr/>
+        </p:nvSpPr>
+        <p:spPr>
+          <a:xfrm>
+            <a:off x="685800" y="502920"/>
+            <a:ext cx="36576" cy="658368"/>
+          </a:xfrm>
+          <a:prstGeom prst="rect">
+            <a:avLst/>
+          </a:prstGeom>
+          <a:solidFill>
+            <a:srgbClr val="D9C089"/>
+          </a:solidFill>
+          <a:ln>
+            <a:noFill/>
+          </a:ln>
+        </p:spPr>
+        <p:style>
+          <a:lnRef idx="1">
+            <a:schemeClr val="accent1"/>
+          </a:lnRef>
+          <a:fillRef idx="3">
+            <a:schemeClr val="accent1"/>
+          </a:fillRef>
+          <a:effectRef idx="2">
+            <a:schemeClr val="accent1"/>
+          </a:effectRef>
+          <a:fontRef idx="minor">
+            <a:schemeClr val="lt1"/>
+          </a:fontRef>
+        </p:style>
+        <p:txBody>
+          <a:bodyPr rtlCol="0" anchor="ctr"/>
+          <a:lstStyle/>
+          <a:p>
+            <a:pPr algn="ctr"/>
+          </a:p>
+        </p:txBody>
+      </p:sp>
+      <p:sp>
+        <p:nvSpPr>
+          <p:cNvPr id="7" name="TextBox 6"/>
+          <p:cNvSpPr txBox="1"/>
+          <p:nvPr/>
+        </p:nvSpPr>
+        <p:spPr>
+          <a:xfrm>
+            <a:off x="813816" y="502920"/>
+            <a:ext cx="10634472" cy="685800"/>
+          </a:xfrm>
+          <a:prstGeom prst="rect">
+            <a:avLst/>
+          </a:prstGeom>
+          <a:noFill/>
+        </p:spPr>
+        <p:txBody>
           <a:bodyPr wrap="square">
-            <a:normAutofit/>
+            <a:spAutoFit/>
           </a:bodyPr>
           <a:lstStyle/>
           <a:p>
             <a:pPr algn="l"/>
             <a:r>
-              <a:rPr sz="1000" b="1" i="0">
-                <a:solidFill>
-                  <a:srgbClr val="F8F8FA"/>
+              <a:rPr sz="2400" b="1" i="0">
+                <a:solidFill>
+                  <a:srgbClr val="1F2C56"/>
+                </a:solidFill>
+                <a:latin typeface="Source Serif 4"/>
+              </a:rPr>
+              <a:t>Vom Zufallskontakt zum Signal-gesteuerten Gespräch</a:t>
+            </a:r>
+          </a:p>
+        </p:txBody>
+      </p:sp>
+      <p:sp>
+        <p:nvSpPr>
+          <p:cNvPr id="8" name="TextBox 7"/>
+          <p:cNvSpPr txBox="1"/>
+          <p:nvPr/>
+        </p:nvSpPr>
+        <p:spPr>
+          <a:xfrm>
+            <a:off x="685800" y="1417320"/>
+            <a:ext cx="10817352" cy="5029200"/>
+          </a:xfrm>
+          <a:prstGeom prst="rect">
+            <a:avLst/>
+          </a:prstGeom>
+          <a:noFill/>
+        </p:spPr>
+        <p:txBody>
+          <a:bodyPr wrap="square">
+            <a:spAutoFit/>
+          </a:bodyPr>
+          <a:lstStyle/>
+          <a:p>
+            <a:pPr>
+              <a:spcBef>
+                <a:spcPts val="600"/>
+              </a:spcBef>
+              <a:spcAft>
+                <a:spcPts val="200"/>
+              </a:spcAft>
+            </a:pPr>
+            <a:r>
+              <a:rPr sz="1200" i="1">
+                <a:solidFill>
+                  <a:srgbClr val="3D5466"/>
                 </a:solidFill>
                 <a:latin typeface="Arial"/>
               </a:rPr>
-              <a:t>FKB  Campus</a:t>
-            </a:r>
-          </a:p>
-        </p:txBody>
-      </p:sp>
-      <p:sp>
-        <p:nvSpPr>
-          <p:cNvPr id="3" name="TextBox 2"/>
+              <a:t>→  Datengetriebener Vertrieb bedeutet nicht, Kunden zu überwachen. Es bedeutet, die Signale zu lesen, die der Kunde ohnehin sendet – und im richtigen Moment präsent zu sein.</a:t>
+            </a:r>
+          </a:p>
+        </p:txBody>
+      </p:sp>
+      <p:sp>
+        <p:nvSpPr>
+          <p:cNvPr id="9" name="Rectangle 8"/>
+          <p:cNvSpPr/>
+          <p:nvPr/>
+        </p:nvSpPr>
+        <p:spPr>
+          <a:xfrm>
+            <a:off x="0" y="6510528"/>
+            <a:ext cx="12188952" cy="347472"/>
+          </a:xfrm>
+          <a:prstGeom prst="rect">
+            <a:avLst/>
+          </a:prstGeom>
+          <a:solidFill>
+            <a:srgbClr val="0A1937"/>
+          </a:solidFill>
+          <a:ln>
+            <a:noFill/>
+          </a:ln>
+        </p:spPr>
+        <p:style>
+          <a:lnRef idx="1">
+            <a:schemeClr val="accent1"/>
+          </a:lnRef>
+          <a:fillRef idx="3">
+            <a:schemeClr val="accent1"/>
+          </a:fillRef>
+          <a:effectRef idx="2">
+            <a:schemeClr val="accent1"/>
+          </a:effectRef>
+          <a:fontRef idx="minor">
+            <a:schemeClr val="lt1"/>
+          </a:fontRef>
+        </p:style>
+        <p:txBody>
+          <a:bodyPr rtlCol="0" anchor="ctr"/>
+          <a:lstStyle/>
+          <a:p>
+            <a:pPr algn="ctr"/>
+          </a:p>
+        </p:txBody>
+      </p:sp>
+      <p:sp>
+        <p:nvSpPr>
+          <p:cNvPr id="10" name="TextBox 9"/>
           <p:cNvSpPr txBox="1"/>
           <p:nvPr/>
         </p:nvSpPr>
         <p:spPr>
           <a:xfrm>
-            <a:off x="609600" y="279400"/>
-            <a:ext cx="10972800" cy="279400"/>
+            <a:off x="685800" y="6583680"/>
+            <a:ext cx="6490411" cy="256032"/>
           </a:xfrm>
           <a:prstGeom prst="rect">
             <a:avLst/>
@@ -4630,160 +6528,20 @@
           <a:noFill/>
         </p:spPr>
         <p:txBody>
-          <a:bodyPr wrap="square">
-            <a:normAutofit/>
+          <a:bodyPr wrap="none">
+            <a:spAutoFit/>
           </a:bodyPr>
           <a:lstStyle/>
           <a:p>
-            <a:pPr algn="r"/>
-            <a:r>
-              <a:rPr sz="900" b="0" i="0">
-                <a:solidFill>
-                  <a:srgbClr val="7B7FA0"/>
-                </a:solidFill>
-                <a:latin typeface="Courier New"/>
+            <a:pPr algn="l"/>
+            <a:r>
+              <a:rPr sz="700">
+                <a:solidFill>
+                  <a:srgbClr val="A0B4D2"/>
+                </a:solidFill>
+                <a:latin typeface="JetBrains Mono"/>
               </a:rPr>
-              <a:t>VOM ZUFALLSKONTAKT ZUM SIGNAL-GESTEUERTEN VERTRIEB</a:t>
-            </a:r>
-          </a:p>
-        </p:txBody>
-      </p:sp>
-      <p:sp>
-        <p:nvSpPr>
-          <p:cNvPr id="4" name="TextBox 3"/>
-          <p:cNvSpPr txBox="1"/>
-          <p:nvPr/>
-        </p:nvSpPr>
-        <p:spPr>
-          <a:xfrm>
-            <a:off x="609600" y="6426200"/>
-            <a:ext cx="10972800" cy="228600"/>
-          </a:xfrm>
-          <a:prstGeom prst="rect">
-            <a:avLst/>
-          </a:prstGeom>
-          <a:noFill/>
-        </p:spPr>
-        <p:txBody>
-          <a:bodyPr wrap="square">
-            <a:normAutofit/>
-          </a:bodyPr>
-          <a:lstStyle/>
-          <a:p>
-            <a:pPr algn="r"/>
-            <a:r>
-              <a:rPr sz="900" b="0" i="0">
-                <a:solidFill>
-                  <a:srgbClr val="7B7FA0"/>
-                </a:solidFill>
-                <a:latin typeface="Courier New"/>
-              </a:rPr>
-              <a:t>03</a:t>
-            </a:r>
-          </a:p>
-        </p:txBody>
-      </p:sp>
-      <p:sp>
-        <p:nvSpPr>
-          <p:cNvPr id="5" name="TextBox 4"/>
-          <p:cNvSpPr txBox="1"/>
-          <p:nvPr/>
-        </p:nvSpPr>
-        <p:spPr>
-          <a:xfrm>
-            <a:off x="609600" y="635000"/>
-            <a:ext cx="5461000" cy="5461000"/>
-          </a:xfrm>
-          <a:prstGeom prst="rect">
-            <a:avLst/>
-          </a:prstGeom>
-          <a:noFill/>
-        </p:spPr>
-        <p:txBody>
-          <a:bodyPr wrap="square">
-            <a:normAutofit/>
-          </a:bodyPr>
-          <a:lstStyle/>
-          <a:p>
-            <a:pPr algn="l"/>
-            <a:r>
-              <a:rPr sz="28000" b="0" i="1">
-                <a:solidFill>
-                  <a:srgbClr val="D9BF7A"/>
-                </a:solidFill>
-                <a:latin typeface="Georgia"/>
-              </a:rPr>
-              <a:t>I</a:t>
-            </a:r>
-          </a:p>
-        </p:txBody>
-      </p:sp>
-      <p:sp>
-        <p:nvSpPr>
-          <p:cNvPr id="6" name="TextBox 5"/>
-          <p:cNvSpPr txBox="1"/>
-          <p:nvPr/>
-        </p:nvSpPr>
-        <p:spPr>
-          <a:xfrm>
-            <a:off x="6731000" y="4064000"/>
-            <a:ext cx="4851400" cy="1778000"/>
-          </a:xfrm>
-          <a:prstGeom prst="rect">
-            <a:avLst/>
-          </a:prstGeom>
-          <a:noFill/>
-        </p:spPr>
-        <p:txBody>
-          <a:bodyPr wrap="square">
-            <a:normAutofit/>
-          </a:bodyPr>
-          <a:lstStyle/>
-          <a:p>
-            <a:pPr algn="r"/>
-            <a:r>
-              <a:rPr sz="3800" b="0" i="0">
-                <a:solidFill>
-                  <a:srgbClr val="F8F8FA"/>
-                </a:solidFill>
-                <a:latin typeface="Georgia"/>
-              </a:rPr>
-              <a:t>Vom Zufallskontakt zum Signal-gesteuerten Vertrieb</a:t>
-            </a:r>
-          </a:p>
-        </p:txBody>
-      </p:sp>
-      <p:sp>
-        <p:nvSpPr>
-          <p:cNvPr id="7" name="TextBox 6"/>
-          <p:cNvSpPr txBox="1"/>
-          <p:nvPr/>
-        </p:nvSpPr>
-        <p:spPr>
-          <a:xfrm>
-            <a:off x="6731000" y="5842000"/>
-            <a:ext cx="4851400" cy="635000"/>
-          </a:xfrm>
-          <a:prstGeom prst="rect">
-            <a:avLst/>
-          </a:prstGeom>
-          <a:noFill/>
-        </p:spPr>
-        <p:txBody>
-          <a:bodyPr wrap="square">
-            <a:normAutofit/>
-          </a:bodyPr>
-          <a:lstStyle/>
-          <a:p>
-            <a:pPr algn="r"/>
-            <a:r>
-              <a:rPr sz="1400" b="0" i="1">
-                <a:solidFill>
-                  <a:srgbClr val="7B7FA0"/>
-                </a:solidFill>
-                <a:latin typeface="Georgia"/>
-              </a:rPr>
-              <a:t>Daten in agree erzählen Geschichten — man muss sie nur lesen</a:t>
+              <a:t>Benedikt Zoller Coaching  ·  FKB Campus  ·  M18</a:t>
             </a:r>
           </a:p>
         </p:txBody>
@@ -4799,14 +6557,6 @@
 <file path=ppt/slides/slide4.xml><?xml version="1.0" encoding="utf-8"?>
 <p:sld xmlns:a="http://schemas.openxmlformats.org/drawingml/2006/main" xmlns:p="http://schemas.openxmlformats.org/presentationml/2006/main" xmlns:r="http://schemas.openxmlformats.org/officeDocument/2006/relationships">
   <p:cSld>
-    <p:bg>
-      <p:bgPr>
-        <a:solidFill>
-          <a:srgbClr val="F8F8FA"/>
-        </a:solidFill>
-        <a:effectLst/>
-      </p:bgPr>
-    </p:bg>
     <p:spTree>
       <p:nvGrpSpPr>
         <p:cNvPr id="1" name=""/>
@@ -4816,125 +6566,20 @@
       <p:grpSpPr/>
       <p:sp>
         <p:nvSpPr>
-          <p:cNvPr id="2" name="TextBox 1"/>
-          <p:cNvSpPr txBox="1"/>
-          <p:nvPr/>
-        </p:nvSpPr>
-        <p:spPr>
-          <a:xfrm>
-            <a:off x="609600" y="279400"/>
-            <a:ext cx="2540000" cy="279400"/>
-          </a:xfrm>
-          <a:prstGeom prst="rect">
-            <a:avLst/>
-          </a:prstGeom>
-          <a:noFill/>
-        </p:spPr>
-        <p:txBody>
-          <a:bodyPr wrap="square">
-            <a:normAutofit/>
-          </a:bodyPr>
-          <a:lstStyle/>
-          <a:p>
-            <a:pPr algn="l"/>
-            <a:r>
-              <a:rPr sz="1000" b="1" i="0">
-                <a:solidFill>
-                  <a:srgbClr val="191D2E"/>
-                </a:solidFill>
-                <a:latin typeface="Arial"/>
-              </a:rPr>
-              <a:t>FKB  Campus</a:t>
-            </a:r>
-          </a:p>
-        </p:txBody>
-      </p:sp>
-      <p:sp>
-        <p:nvSpPr>
-          <p:cNvPr id="3" name="TextBox 2"/>
-          <p:cNvSpPr txBox="1"/>
-          <p:nvPr/>
-        </p:nvSpPr>
-        <p:spPr>
-          <a:xfrm>
-            <a:off x="609600" y="279400"/>
-            <a:ext cx="10972800" cy="279400"/>
-          </a:xfrm>
-          <a:prstGeom prst="rect">
-            <a:avLst/>
-          </a:prstGeom>
-          <a:noFill/>
-        </p:spPr>
-        <p:txBody>
-          <a:bodyPr wrap="square">
-            <a:normAutofit/>
-          </a:bodyPr>
-          <a:lstStyle/>
-          <a:p>
-            <a:pPr algn="r"/>
-            <a:r>
-              <a:rPr sz="900" b="0" i="0">
-                <a:solidFill>
-                  <a:srgbClr val="7B7FA0"/>
-                </a:solidFill>
-                <a:latin typeface="Courier New"/>
-              </a:rPr>
-              <a:t>I · VOM ZUFALLSKONTAKT ZUM SIGNAL-GESTEUERTEN VERTRIEB</a:t>
-            </a:r>
-          </a:p>
-        </p:txBody>
-      </p:sp>
-      <p:sp>
-        <p:nvSpPr>
-          <p:cNvPr id="4" name="TextBox 3"/>
-          <p:cNvSpPr txBox="1"/>
-          <p:nvPr/>
-        </p:nvSpPr>
-        <p:spPr>
-          <a:xfrm>
-            <a:off x="609600" y="6426200"/>
-            <a:ext cx="10972800" cy="228600"/>
-          </a:xfrm>
-          <a:prstGeom prst="rect">
-            <a:avLst/>
-          </a:prstGeom>
-          <a:noFill/>
-        </p:spPr>
-        <p:txBody>
-          <a:bodyPr wrap="square">
-            <a:normAutofit/>
-          </a:bodyPr>
-          <a:lstStyle/>
-          <a:p>
-            <a:pPr algn="r"/>
-            <a:r>
-              <a:rPr sz="900" b="0" i="0">
-                <a:solidFill>
-                  <a:srgbClr val="7B7FA0"/>
-                </a:solidFill>
-                <a:latin typeface="Courier New"/>
-              </a:rPr>
-              <a:t>04</a:t>
-            </a:r>
-          </a:p>
-        </p:txBody>
-      </p:sp>
-      <p:sp>
-        <p:nvSpPr>
-          <p:cNvPr id="5" name="Rectangle 4"/>
+          <p:cNvPr id="2" name="Rectangle 1"/>
           <p:cNvSpPr/>
           <p:nvPr/>
         </p:nvSpPr>
         <p:spPr>
           <a:xfrm>
-            <a:off x="609600" y="825500"/>
-            <a:ext cx="10972800" cy="6350"/>
+            <a:off x="0" y="0"/>
+            <a:ext cx="12188952" cy="6858000"/>
           </a:xfrm>
           <a:prstGeom prst="rect">
             <a:avLst/>
           </a:prstGeom>
           <a:solidFill>
-            <a:srgbClr val="191D2E"/>
+            <a:srgbClr val="EDEDF3"/>
           </a:solidFill>
           <a:ln>
             <a:noFill/>
@@ -4964,90 +6609,20 @@
       </p:sp>
       <p:sp>
         <p:nvSpPr>
-          <p:cNvPr id="6" name="TextBox 5"/>
-          <p:cNvSpPr txBox="1"/>
-          <p:nvPr/>
-        </p:nvSpPr>
-        <p:spPr>
-          <a:xfrm>
-            <a:off x="609600" y="889000"/>
-            <a:ext cx="3810000" cy="177800"/>
-          </a:xfrm>
-          <a:prstGeom prst="rect">
-            <a:avLst/>
-          </a:prstGeom>
-          <a:noFill/>
-        </p:spPr>
-        <p:txBody>
-          <a:bodyPr wrap="square">
-            <a:normAutofit/>
-          </a:bodyPr>
-          <a:lstStyle/>
-          <a:p>
-            <a:pPr algn="l"/>
-            <a:r>
-              <a:rPr sz="900" b="0" i="0">
-                <a:solidFill>
-                  <a:srgbClr val="7B7FA0"/>
-                </a:solidFill>
-                <a:latin typeface="Courier New"/>
-              </a:rPr>
-              <a:t>Kernaussage</a:t>
-            </a:r>
-          </a:p>
-        </p:txBody>
-      </p:sp>
-      <p:sp>
-        <p:nvSpPr>
-          <p:cNvPr id="7" name="TextBox 6"/>
-          <p:cNvSpPr txBox="1"/>
-          <p:nvPr/>
-        </p:nvSpPr>
-        <p:spPr>
-          <a:xfrm>
-            <a:off x="609600" y="920750"/>
-            <a:ext cx="10972800" cy="1778000"/>
-          </a:xfrm>
-          <a:prstGeom prst="rect">
-            <a:avLst/>
-          </a:prstGeom>
-          <a:noFill/>
-        </p:spPr>
-        <p:txBody>
-          <a:bodyPr wrap="square">
-            <a:normAutofit/>
-          </a:bodyPr>
-          <a:lstStyle/>
-          <a:p>
-            <a:pPr algn="l"/>
-            <a:r>
-              <a:rPr sz="3800" b="0" i="0">
-                <a:solidFill>
-                  <a:srgbClr val="191D2E"/>
-                </a:solidFill>
-                <a:latin typeface="Georgia"/>
-              </a:rPr>
-              <a:t>Reaktiver vs. trigger-basierter Vertrieb</a:t>
-            </a:r>
-          </a:p>
-        </p:txBody>
-      </p:sp>
-      <p:sp>
-        <p:nvSpPr>
-          <p:cNvPr id="8" name="Rectangle 7"/>
+          <p:cNvPr id="3" name="Rectangle 2"/>
           <p:cNvSpPr/>
           <p:nvPr/>
         </p:nvSpPr>
         <p:spPr>
           <a:xfrm>
-            <a:off x="609600" y="2762250"/>
-            <a:ext cx="10972800" cy="6350"/>
+            <a:off x="0" y="0"/>
+            <a:ext cx="12188952" cy="50292"/>
           </a:xfrm>
           <a:prstGeom prst="rect">
             <a:avLst/>
           </a:prstGeom>
           <a:solidFill>
-            <a:srgbClr val="191D2E"/>
+            <a:srgbClr val="1F2C56"/>
           </a:solidFill>
           <a:ln>
             <a:noFill/>
@@ -5077,14 +6652,14 @@
       </p:sp>
       <p:sp>
         <p:nvSpPr>
-          <p:cNvPr id="9" name="TextBox 8"/>
+          <p:cNvPr id="4" name="TextBox 3"/>
           <p:cNvSpPr txBox="1"/>
           <p:nvPr/>
         </p:nvSpPr>
         <p:spPr>
           <a:xfrm>
-            <a:off x="609600" y="2825750"/>
-            <a:ext cx="5207000" cy="2857500"/>
+            <a:off x="685800" y="109728"/>
+            <a:ext cx="10817352" cy="228600"/>
           </a:xfrm>
           <a:prstGeom prst="rect">
             <a:avLst/>
@@ -5092,21 +6667,303 @@
           <a:noFill/>
         </p:spPr>
         <p:txBody>
+          <a:bodyPr wrap="none">
+            <a:spAutoFit/>
+          </a:bodyPr>
+          <a:lstStyle/>
+          <a:p>
+            <a:pPr algn="l"/>
+            <a:r>
+              <a:rPr sz="750">
+                <a:solidFill>
+                  <a:srgbClr val="78808C"/>
+                </a:solidFill>
+                <a:latin typeface="JetBrains Mono"/>
+              </a:rPr>
+              <a:t>M18  ·  INHALT</a:t>
+            </a:r>
+          </a:p>
+        </p:txBody>
+      </p:sp>
+      <p:sp>
+        <p:nvSpPr>
+          <p:cNvPr id="5" name="Rectangle 4"/>
+          <p:cNvSpPr/>
+          <p:nvPr/>
+        </p:nvSpPr>
+        <p:spPr>
+          <a:xfrm>
+            <a:off x="0" y="1234440"/>
+            <a:ext cx="12188952" cy="12700"/>
+          </a:xfrm>
+          <a:prstGeom prst="rect">
+            <a:avLst/>
+          </a:prstGeom>
+          <a:solidFill>
+            <a:srgbClr val="D8DFE4"/>
+          </a:solidFill>
+          <a:ln>
+            <a:noFill/>
+          </a:ln>
+        </p:spPr>
+        <p:style>
+          <a:lnRef idx="1">
+            <a:schemeClr val="accent1"/>
+          </a:lnRef>
+          <a:fillRef idx="3">
+            <a:schemeClr val="accent1"/>
+          </a:fillRef>
+          <a:effectRef idx="2">
+            <a:schemeClr val="accent1"/>
+          </a:effectRef>
+          <a:fontRef idx="minor">
+            <a:schemeClr val="lt1"/>
+          </a:fontRef>
+        </p:style>
+        <p:txBody>
+          <a:bodyPr rtlCol="0" anchor="ctr"/>
+          <a:lstStyle/>
+          <a:p>
+            <a:pPr algn="ctr"/>
+          </a:p>
+        </p:txBody>
+      </p:sp>
+      <p:sp>
+        <p:nvSpPr>
+          <p:cNvPr id="6" name="Rectangle 5"/>
+          <p:cNvSpPr/>
+          <p:nvPr/>
+        </p:nvSpPr>
+        <p:spPr>
+          <a:xfrm>
+            <a:off x="685800" y="502920"/>
+            <a:ext cx="36576" cy="658368"/>
+          </a:xfrm>
+          <a:prstGeom prst="rect">
+            <a:avLst/>
+          </a:prstGeom>
+          <a:solidFill>
+            <a:srgbClr val="D9C089"/>
+          </a:solidFill>
+          <a:ln>
+            <a:noFill/>
+          </a:ln>
+        </p:spPr>
+        <p:style>
+          <a:lnRef idx="1">
+            <a:schemeClr val="accent1"/>
+          </a:lnRef>
+          <a:fillRef idx="3">
+            <a:schemeClr val="accent1"/>
+          </a:fillRef>
+          <a:effectRef idx="2">
+            <a:schemeClr val="accent1"/>
+          </a:effectRef>
+          <a:fontRef idx="minor">
+            <a:schemeClr val="lt1"/>
+          </a:fontRef>
+        </p:style>
+        <p:txBody>
+          <a:bodyPr rtlCol="0" anchor="ctr"/>
+          <a:lstStyle/>
+          <a:p>
+            <a:pPr algn="ctr"/>
+          </a:p>
+        </p:txBody>
+      </p:sp>
+      <p:sp>
+        <p:nvSpPr>
+          <p:cNvPr id="7" name="TextBox 6"/>
+          <p:cNvSpPr txBox="1"/>
+          <p:nvPr/>
+        </p:nvSpPr>
+        <p:spPr>
+          <a:xfrm>
+            <a:off x="813816" y="502920"/>
+            <a:ext cx="10634472" cy="685800"/>
+          </a:xfrm>
+          <a:prstGeom prst="rect">
+            <a:avLst/>
+          </a:prstGeom>
+          <a:noFill/>
+        </p:spPr>
+        <p:txBody>
           <a:bodyPr wrap="square">
-            <a:normAutofit/>
+            <a:spAutoFit/>
           </a:bodyPr>
           <a:lstStyle/>
           <a:p>
             <a:pPr algn="l"/>
             <a:r>
-              <a:rPr sz="1400" b="0" i="0">
-                <a:solidFill>
-                  <a:srgbClr val="191D2E"/>
-                </a:solidFill>
-                <a:latin typeface="Georgia"/>
+              <a:rPr sz="2400" b="1" i="0">
+                <a:solidFill>
+                  <a:srgbClr val="1F2C56"/>
+                </a:solidFill>
+                <a:latin typeface="Source Serif 4"/>
               </a:rPr>
-              <a:t>Reaktiv: Der Kunde ruft an, weil er ein Problem hat. Trigger-basiert: Sie rufen an, weil Sie sehen, dass ein Problem entstehen könnte — oder eine Chance.</a:t>
-            </a:r>
+              <a:t>Die drei Grundprinzipien</a:t>
+            </a:r>
+          </a:p>
+        </p:txBody>
+      </p:sp>
+      <p:sp>
+        <p:nvSpPr>
+          <p:cNvPr id="8" name="TextBox 7"/>
+          <p:cNvSpPr txBox="1"/>
+          <p:nvPr/>
+        </p:nvSpPr>
+        <p:spPr>
+          <a:xfrm>
+            <a:off x="685800" y="1417320"/>
+            <a:ext cx="10817352" cy="5029200"/>
+          </a:xfrm>
+          <a:prstGeom prst="rect">
+            <a:avLst/>
+          </a:prstGeom>
+          <a:noFill/>
+        </p:spPr>
+        <p:txBody>
+          <a:bodyPr wrap="square">
+            <a:spAutoFit/>
+          </a:bodyPr>
+          <a:lstStyle/>
+          <a:p>
+            <a:pPr>
+              <a:spcBef>
+                <a:spcPts val="400"/>
+              </a:spcBef>
+              <a:spcAft>
+                <a:spcPts val="200"/>
+              </a:spcAft>
+            </a:pPr>
+            <a:r>
+              <a:rPr sz="1300">
+                <a:solidFill>
+                  <a:srgbClr val="3D5466"/>
+                </a:solidFill>
+                <a:latin typeface="Arial"/>
+              </a:rPr>
+              <a:t>▸  Timing schlägt Häufigkeit: Ein Anruf zum richtigen Moment ist wertvoller als zehn Anrufe zum falschen Zeitpunkt.</a:t>
+            </a:r>
+          </a:p>
+          <a:p>
+            <a:pPr>
+              <a:spcBef>
+                <a:spcPts val="400"/>
+              </a:spcBef>
+              <a:spcAft>
+                <a:spcPts val="200"/>
+              </a:spcAft>
+            </a:pPr>
+            <a:r>
+              <a:rPr sz="1300">
+                <a:solidFill>
+                  <a:srgbClr val="3D5466"/>
+                </a:solidFill>
+                <a:latin typeface="Arial"/>
+              </a:rPr>
+              <a:t>▸  Relevanz schlägt Breite: Ein auf den aktuellen Bedarf zugeschnittenes Gespräch überzeugt mehr als eine generische Produktpräsentation.</a:t>
+            </a:r>
+          </a:p>
+          <a:p>
+            <a:pPr>
+              <a:spcBef>
+                <a:spcPts val="400"/>
+              </a:spcBef>
+              <a:spcAft>
+                <a:spcPts val="200"/>
+              </a:spcAft>
+            </a:pPr>
+            <a:r>
+              <a:rPr sz="1300">
+                <a:solidFill>
+                  <a:srgbClr val="3D5466"/>
+                </a:solidFill>
+                <a:latin typeface="Arial"/>
+              </a:rPr>
+              <a:t>▸  Daten sind kein Ersatz für Beziehung: Trigger öffnen die Tür – das Gespräch selbst bleibt menschlich.</a:t>
+            </a:r>
+          </a:p>
+          <a:p>
+            <a:pPr>
+              <a:spcBef>
+                <a:spcPts val="400"/>
+              </a:spcBef>
+              <a:spcAft>
+                <a:spcPts val="200"/>
+              </a:spcAft>
+            </a:pPr>
+            <a:r>
+              <a:rPr sz="1200">
+                <a:solidFill>
+                  <a:srgbClr val="3D5466"/>
+                </a:solidFill>
+                <a:latin typeface="Arial"/>
+              </a:rPr>
+              <a:t>## 4.2 Trigger-Ereignisse: Drei Typen mit unterschiedlicher Logik</a:t>
+            </a:r>
+          </a:p>
+          <a:p>
+            <a:pPr>
+              <a:spcBef>
+                <a:spcPts val="400"/>
+              </a:spcBef>
+              <a:spcAft>
+                <a:spcPts val="200"/>
+              </a:spcAft>
+            </a:pPr>
+            <a:r>
+              <a:rPr sz="1200">
+                <a:solidFill>
+                  <a:srgbClr val="3D5466"/>
+                </a:solidFill>
+                <a:latin typeface="Arial"/>
+              </a:rPr>
+              <a:t>Ein Trigger ist ein Datenpunkt oder ein Ereignis, das mit hoher Wahrscheinlichkeit auf einen aktuellen oder bevorstehenden Beratungsbedarf hinweist. Es gibt drei Typen:</a:t>
+            </a:r>
+          </a:p>
+        </p:txBody>
+      </p:sp>
+      <p:sp>
+        <p:nvSpPr>
+          <p:cNvPr id="9" name="Rectangle 8"/>
+          <p:cNvSpPr/>
+          <p:nvPr/>
+        </p:nvSpPr>
+        <p:spPr>
+          <a:xfrm>
+            <a:off x="0" y="6510528"/>
+            <a:ext cx="12188952" cy="347472"/>
+          </a:xfrm>
+          <a:prstGeom prst="rect">
+            <a:avLst/>
+          </a:prstGeom>
+          <a:solidFill>
+            <a:srgbClr val="0A1937"/>
+          </a:solidFill>
+          <a:ln>
+            <a:noFill/>
+          </a:ln>
+        </p:spPr>
+        <p:style>
+          <a:lnRef idx="1">
+            <a:schemeClr val="accent1"/>
+          </a:lnRef>
+          <a:fillRef idx="3">
+            <a:schemeClr val="accent1"/>
+          </a:fillRef>
+          <a:effectRef idx="2">
+            <a:schemeClr val="accent1"/>
+          </a:effectRef>
+          <a:fontRef idx="minor">
+            <a:schemeClr val="lt1"/>
+          </a:fontRef>
+        </p:style>
+        <p:txBody>
+          <a:bodyPr rtlCol="0" anchor="ctr"/>
+          <a:lstStyle/>
+          <a:p>
+            <a:pPr algn="ctr"/>
           </a:p>
         </p:txBody>
       </p:sp>
@@ -5118,8 +6975,8 @@
         </p:nvSpPr>
         <p:spPr>
           <a:xfrm>
-            <a:off x="6096000" y="2825750"/>
-            <a:ext cx="4851400" cy="177800"/>
+            <a:off x="685800" y="6583680"/>
+            <a:ext cx="6490411" cy="256032"/>
           </a:xfrm>
           <a:prstGeom prst="rect">
             <a:avLst/>
@@ -5127,55 +6984,20 @@
           <a:noFill/>
         </p:spPr>
         <p:txBody>
-          <a:bodyPr wrap="square">
-            <a:normAutofit/>
+          <a:bodyPr wrap="none">
+            <a:spAutoFit/>
           </a:bodyPr>
           <a:lstStyle/>
           <a:p>
             <a:pPr algn="l"/>
             <a:r>
-              <a:rPr sz="900" b="0" i="0">
-                <a:solidFill>
-                  <a:srgbClr val="1F2B56"/>
-                </a:solidFill>
-                <a:latin typeface="Courier New"/>
+              <a:rPr sz="700">
+                <a:solidFill>
+                  <a:srgbClr val="A0B4D2"/>
+                </a:solidFill>
+                <a:latin typeface="JetBrains Mono"/>
               </a:rPr>
-              <a:t>Mitnahme</a:t>
-            </a:r>
-          </a:p>
-        </p:txBody>
-      </p:sp>
-      <p:sp>
-        <p:nvSpPr>
-          <p:cNvPr id="11" name="TextBox 10"/>
-          <p:cNvSpPr txBox="1"/>
-          <p:nvPr/>
-        </p:nvSpPr>
-        <p:spPr>
-          <a:xfrm>
-            <a:off x="6096000" y="3041650"/>
-            <a:ext cx="4851400" cy="2667000"/>
-          </a:xfrm>
-          <a:prstGeom prst="rect">
-            <a:avLst/>
-          </a:prstGeom>
-          <a:noFill/>
-        </p:spPr>
-        <p:txBody>
-          <a:bodyPr wrap="square">
-            <a:normAutofit/>
-          </a:bodyPr>
-          <a:lstStyle/>
-          <a:p>
-            <a:pPr algn="l"/>
-            <a:r>
-              <a:rPr sz="1400" b="0" i="1">
-                <a:solidFill>
-                  <a:srgbClr val="191D2E"/>
-                </a:solidFill>
-                <a:latin typeface="Georgia"/>
-              </a:rPr>
-              <a:t>Agree liefert täglich Signale: Kontokorrentauslastung, Zahlungseingänge, ablaufende Zinsbindungen, neue Zahlungsverbindungen. Wer sie liest, hat immer einen Gesprächsanlass.</a:t>
+              <a:t>Benedikt Zoller Coaching  ·  FKB Campus  ·  M18</a:t>
             </a:r>
           </a:p>
         </p:txBody>
@@ -5191,14 +7013,6 @@
 <file path=ppt/slides/slide5.xml><?xml version="1.0" encoding="utf-8"?>
 <p:sld xmlns:a="http://schemas.openxmlformats.org/drawingml/2006/main" xmlns:p="http://schemas.openxmlformats.org/presentationml/2006/main" xmlns:r="http://schemas.openxmlformats.org/officeDocument/2006/relationships">
   <p:cSld>
-    <p:bg>
-      <p:bgPr>
-        <a:solidFill>
-          <a:srgbClr val="1F2B56"/>
-        </a:solidFill>
-        <a:effectLst/>
-      </p:bgPr>
-    </p:bg>
     <p:spTree>
       <p:nvGrpSpPr>
         <p:cNvPr id="1" name=""/>
@@ -5208,71 +7022,87 @@
       <p:grpSpPr/>
       <p:sp>
         <p:nvSpPr>
-          <p:cNvPr id="2" name="TextBox 1"/>
-          <p:cNvSpPr txBox="1"/>
-          <p:nvPr/>
-        </p:nvSpPr>
-        <p:spPr>
-          <a:xfrm>
-            <a:off x="609600" y="279400"/>
-            <a:ext cx="2540000" cy="279400"/>
-          </a:xfrm>
-          <a:prstGeom prst="rect">
-            <a:avLst/>
-          </a:prstGeom>
-          <a:noFill/>
-        </p:spPr>
-        <p:txBody>
-          <a:bodyPr wrap="square">
-            <a:normAutofit/>
-          </a:bodyPr>
-          <a:lstStyle/>
-          <a:p>
-            <a:pPr algn="l"/>
-            <a:r>
-              <a:rPr sz="1000" b="1" i="0">
-                <a:solidFill>
-                  <a:srgbClr val="F8F8FA"/>
-                </a:solidFill>
-                <a:latin typeface="Arial"/>
-              </a:rPr>
-              <a:t>FKB  Campus</a:t>
-            </a:r>
-          </a:p>
-        </p:txBody>
-      </p:sp>
-      <p:sp>
-        <p:nvSpPr>
-          <p:cNvPr id="3" name="TextBox 2"/>
-          <p:cNvSpPr txBox="1"/>
-          <p:nvPr/>
-        </p:nvSpPr>
-        <p:spPr>
-          <a:xfrm>
-            <a:off x="609600" y="279400"/>
-            <a:ext cx="10972800" cy="279400"/>
-          </a:xfrm>
-          <a:prstGeom prst="rect">
-            <a:avLst/>
-          </a:prstGeom>
-          <a:noFill/>
-        </p:spPr>
-        <p:txBody>
-          <a:bodyPr wrap="square">
-            <a:normAutofit/>
-          </a:bodyPr>
-          <a:lstStyle/>
-          <a:p>
-            <a:pPr algn="r"/>
-            <a:r>
-              <a:rPr sz="900" b="0" i="0">
-                <a:solidFill>
-                  <a:srgbClr val="7B7FA0"/>
-                </a:solidFill>
-                <a:latin typeface="Courier New"/>
-              </a:rPr>
-              <a:t>FÜNF TRIGGER-TYPEN DIE SIE KENNEN MÜSSEN</a:t>
-            </a:r>
+          <p:cNvPr id="2" name="Rectangle 1"/>
+          <p:cNvSpPr/>
+          <p:nvPr/>
+        </p:nvSpPr>
+        <p:spPr>
+          <a:xfrm>
+            <a:off x="0" y="0"/>
+            <a:ext cx="12188952" cy="6858000"/>
+          </a:xfrm>
+          <a:prstGeom prst="rect">
+            <a:avLst/>
+          </a:prstGeom>
+          <a:solidFill>
+            <a:srgbClr val="EDEDF3"/>
+          </a:solidFill>
+          <a:ln>
+            <a:noFill/>
+          </a:ln>
+        </p:spPr>
+        <p:style>
+          <a:lnRef idx="1">
+            <a:schemeClr val="accent1"/>
+          </a:lnRef>
+          <a:fillRef idx="3">
+            <a:schemeClr val="accent1"/>
+          </a:fillRef>
+          <a:effectRef idx="2">
+            <a:schemeClr val="accent1"/>
+          </a:effectRef>
+          <a:fontRef idx="minor">
+            <a:schemeClr val="lt1"/>
+          </a:fontRef>
+        </p:style>
+        <p:txBody>
+          <a:bodyPr rtlCol="0" anchor="ctr"/>
+          <a:lstStyle/>
+          <a:p>
+            <a:pPr algn="ctr"/>
+          </a:p>
+        </p:txBody>
+      </p:sp>
+      <p:sp>
+        <p:nvSpPr>
+          <p:cNvPr id="3" name="Rectangle 2"/>
+          <p:cNvSpPr/>
+          <p:nvPr/>
+        </p:nvSpPr>
+        <p:spPr>
+          <a:xfrm>
+            <a:off x="0" y="0"/>
+            <a:ext cx="12188952" cy="50292"/>
+          </a:xfrm>
+          <a:prstGeom prst="rect">
+            <a:avLst/>
+          </a:prstGeom>
+          <a:solidFill>
+            <a:srgbClr val="1F2C56"/>
+          </a:solidFill>
+          <a:ln>
+            <a:noFill/>
+          </a:ln>
+        </p:spPr>
+        <p:style>
+          <a:lnRef idx="1">
+            <a:schemeClr val="accent1"/>
+          </a:lnRef>
+          <a:fillRef idx="3">
+            <a:schemeClr val="accent1"/>
+          </a:fillRef>
+          <a:effectRef idx="2">
+            <a:schemeClr val="accent1"/>
+          </a:effectRef>
+          <a:fontRef idx="minor">
+            <a:schemeClr val="lt1"/>
+          </a:fontRef>
+        </p:style>
+        <p:txBody>
+          <a:bodyPr rtlCol="0" anchor="ctr"/>
+          <a:lstStyle/>
+          <a:p>
+            <a:pPr algn="ctr"/>
           </a:p>
         </p:txBody>
       </p:sp>
@@ -5284,8 +7114,8 @@
         </p:nvSpPr>
         <p:spPr>
           <a:xfrm>
-            <a:off x="609600" y="6426200"/>
-            <a:ext cx="10972800" cy="228600"/>
+            <a:off x="685800" y="109728"/>
+            <a:ext cx="10817352" cy="228600"/>
           </a:xfrm>
           <a:prstGeom prst="rect">
             <a:avLst/>
@@ -5293,91 +7123,107 @@
           <a:noFill/>
         </p:spPr>
         <p:txBody>
-          <a:bodyPr wrap="square">
-            <a:normAutofit/>
+          <a:bodyPr wrap="none">
+            <a:spAutoFit/>
           </a:bodyPr>
           <a:lstStyle/>
           <a:p>
-            <a:pPr algn="r"/>
-            <a:r>
-              <a:rPr sz="900" b="0" i="0">
-                <a:solidFill>
-                  <a:srgbClr val="7B7FA0"/>
-                </a:solidFill>
-                <a:latin typeface="Courier New"/>
+            <a:pPr algn="l"/>
+            <a:r>
+              <a:rPr sz="750">
+                <a:solidFill>
+                  <a:srgbClr val="78808C"/>
+                </a:solidFill>
+                <a:latin typeface="JetBrains Mono"/>
               </a:rPr>
-              <a:t>05</a:t>
-            </a:r>
-          </a:p>
-        </p:txBody>
-      </p:sp>
-      <p:sp>
-        <p:nvSpPr>
-          <p:cNvPr id="5" name="TextBox 4"/>
-          <p:cNvSpPr txBox="1"/>
-          <p:nvPr/>
-        </p:nvSpPr>
-        <p:spPr>
-          <a:xfrm>
-            <a:off x="609600" y="635000"/>
-            <a:ext cx="5461000" cy="5461000"/>
-          </a:xfrm>
-          <a:prstGeom prst="rect">
-            <a:avLst/>
-          </a:prstGeom>
-          <a:noFill/>
-        </p:spPr>
-        <p:txBody>
-          <a:bodyPr wrap="square">
-            <a:normAutofit/>
-          </a:bodyPr>
-          <a:lstStyle/>
-          <a:p>
-            <a:pPr algn="l"/>
-            <a:r>
-              <a:rPr sz="28000" b="0" i="1">
-                <a:solidFill>
-                  <a:srgbClr val="D9BF7A"/>
-                </a:solidFill>
-                <a:latin typeface="Georgia"/>
-              </a:rPr>
-              <a:t>II</a:t>
-            </a:r>
-          </a:p>
-        </p:txBody>
-      </p:sp>
-      <p:sp>
-        <p:nvSpPr>
-          <p:cNvPr id="6" name="TextBox 5"/>
-          <p:cNvSpPr txBox="1"/>
-          <p:nvPr/>
-        </p:nvSpPr>
-        <p:spPr>
-          <a:xfrm>
-            <a:off x="6731000" y="4064000"/>
-            <a:ext cx="4851400" cy="1778000"/>
-          </a:xfrm>
-          <a:prstGeom prst="rect">
-            <a:avLst/>
-          </a:prstGeom>
-          <a:noFill/>
-        </p:spPr>
-        <p:txBody>
-          <a:bodyPr wrap="square">
-            <a:normAutofit/>
-          </a:bodyPr>
-          <a:lstStyle/>
-          <a:p>
-            <a:pPr algn="r"/>
-            <a:r>
-              <a:rPr sz="3800" b="0" i="0">
-                <a:solidFill>
-                  <a:srgbClr val="F8F8FA"/>
-                </a:solidFill>
-                <a:latin typeface="Georgia"/>
-              </a:rPr>
-              <a:t>Fünf Trigger-Typen die Sie kennen müssen</a:t>
-            </a:r>
+              <a:t>M18  ·  INHALT</a:t>
+            </a:r>
+          </a:p>
+        </p:txBody>
+      </p:sp>
+      <p:sp>
+        <p:nvSpPr>
+          <p:cNvPr id="5" name="Rectangle 4"/>
+          <p:cNvSpPr/>
+          <p:nvPr/>
+        </p:nvSpPr>
+        <p:spPr>
+          <a:xfrm>
+            <a:off x="0" y="1234440"/>
+            <a:ext cx="12188952" cy="12700"/>
+          </a:xfrm>
+          <a:prstGeom prst="rect">
+            <a:avLst/>
+          </a:prstGeom>
+          <a:solidFill>
+            <a:srgbClr val="D8DFE4"/>
+          </a:solidFill>
+          <a:ln>
+            <a:noFill/>
+          </a:ln>
+        </p:spPr>
+        <p:style>
+          <a:lnRef idx="1">
+            <a:schemeClr val="accent1"/>
+          </a:lnRef>
+          <a:fillRef idx="3">
+            <a:schemeClr val="accent1"/>
+          </a:fillRef>
+          <a:effectRef idx="2">
+            <a:schemeClr val="accent1"/>
+          </a:effectRef>
+          <a:fontRef idx="minor">
+            <a:schemeClr val="lt1"/>
+          </a:fontRef>
+        </p:style>
+        <p:txBody>
+          <a:bodyPr rtlCol="0" anchor="ctr"/>
+          <a:lstStyle/>
+          <a:p>
+            <a:pPr algn="ctr"/>
+          </a:p>
+        </p:txBody>
+      </p:sp>
+      <p:sp>
+        <p:nvSpPr>
+          <p:cNvPr id="6" name="Rectangle 5"/>
+          <p:cNvSpPr/>
+          <p:nvPr/>
+        </p:nvSpPr>
+        <p:spPr>
+          <a:xfrm>
+            <a:off x="685800" y="502920"/>
+            <a:ext cx="36576" cy="658368"/>
+          </a:xfrm>
+          <a:prstGeom prst="rect">
+            <a:avLst/>
+          </a:prstGeom>
+          <a:solidFill>
+            <a:srgbClr val="D9C089"/>
+          </a:solidFill>
+          <a:ln>
+            <a:noFill/>
+          </a:ln>
+        </p:spPr>
+        <p:style>
+          <a:lnRef idx="1">
+            <a:schemeClr val="accent1"/>
+          </a:lnRef>
+          <a:fillRef idx="3">
+            <a:schemeClr val="accent1"/>
+          </a:fillRef>
+          <a:effectRef idx="2">
+            <a:schemeClr val="accent1"/>
+          </a:effectRef>
+          <a:fontRef idx="minor">
+            <a:schemeClr val="lt1"/>
+          </a:fontRef>
+        </p:style>
+        <p:txBody>
+          <a:bodyPr rtlCol="0" anchor="ctr"/>
+          <a:lstStyle/>
+          <a:p>
+            <a:pPr algn="ctr"/>
           </a:p>
         </p:txBody>
       </p:sp>
@@ -5389,8 +7235,8 @@
         </p:nvSpPr>
         <p:spPr>
           <a:xfrm>
-            <a:off x="6731000" y="5842000"/>
-            <a:ext cx="4851400" cy="635000"/>
+            <a:off x="813816" y="502920"/>
+            <a:ext cx="10634472" cy="685800"/>
           </a:xfrm>
           <a:prstGeom prst="rect">
             <a:avLst/>
@@ -5399,19 +7245,97 @@
         </p:spPr>
         <p:txBody>
           <a:bodyPr wrap="square">
-            <a:normAutofit/>
+            <a:spAutoFit/>
           </a:bodyPr>
           <a:lstStyle/>
           <a:p>
-            <a:pPr algn="r"/>
-            <a:r>
-              <a:rPr sz="1400" b="0" i="1">
-                <a:solidFill>
-                  <a:srgbClr val="7B7FA0"/>
-                </a:solidFill>
-                <a:latin typeface="Georgia"/>
+            <a:pPr algn="l"/>
+            <a:r>
+              <a:rPr sz="2400" b="1" i="0">
+                <a:solidFill>
+                  <a:srgbClr val="1F2C56"/>
+                </a:solidFill>
+                <a:latin typeface="Source Serif 4"/>
               </a:rPr>
-              <a:t>Mit Vorlaufzeit und Wirksamkeit</a:t>
+              <a:t>Typ 1: Transaktionale Trigger (aus agree-Kontodaten)</a:t>
+            </a:r>
+          </a:p>
+        </p:txBody>
+      </p:sp>
+      <p:sp>
+        <p:nvSpPr>
+          <p:cNvPr id="8" name="Rectangle 7"/>
+          <p:cNvSpPr/>
+          <p:nvPr/>
+        </p:nvSpPr>
+        <p:spPr>
+          <a:xfrm>
+            <a:off x="0" y="6510528"/>
+            <a:ext cx="12188952" cy="347472"/>
+          </a:xfrm>
+          <a:prstGeom prst="rect">
+            <a:avLst/>
+          </a:prstGeom>
+          <a:solidFill>
+            <a:srgbClr val="0A1937"/>
+          </a:solidFill>
+          <a:ln>
+            <a:noFill/>
+          </a:ln>
+        </p:spPr>
+        <p:style>
+          <a:lnRef idx="1">
+            <a:schemeClr val="accent1"/>
+          </a:lnRef>
+          <a:fillRef idx="3">
+            <a:schemeClr val="accent1"/>
+          </a:fillRef>
+          <a:effectRef idx="2">
+            <a:schemeClr val="accent1"/>
+          </a:effectRef>
+          <a:fontRef idx="minor">
+            <a:schemeClr val="lt1"/>
+          </a:fontRef>
+        </p:style>
+        <p:txBody>
+          <a:bodyPr rtlCol="0" anchor="ctr"/>
+          <a:lstStyle/>
+          <a:p>
+            <a:pPr algn="ctr"/>
+          </a:p>
+        </p:txBody>
+      </p:sp>
+      <p:sp>
+        <p:nvSpPr>
+          <p:cNvPr id="9" name="TextBox 8"/>
+          <p:cNvSpPr txBox="1"/>
+          <p:nvPr/>
+        </p:nvSpPr>
+        <p:spPr>
+          <a:xfrm>
+            <a:off x="685800" y="6583680"/>
+            <a:ext cx="6490411" cy="256032"/>
+          </a:xfrm>
+          <a:prstGeom prst="rect">
+            <a:avLst/>
+          </a:prstGeom>
+          <a:noFill/>
+        </p:spPr>
+        <p:txBody>
+          <a:bodyPr wrap="none">
+            <a:spAutoFit/>
+          </a:bodyPr>
+          <a:lstStyle/>
+          <a:p>
+            <a:pPr algn="l"/>
+            <a:r>
+              <a:rPr sz="700">
+                <a:solidFill>
+                  <a:srgbClr val="A0B4D2"/>
+                </a:solidFill>
+                <a:latin typeface="JetBrains Mono"/>
+              </a:rPr>
+              <a:t>Benedikt Zoller Coaching  ·  FKB Campus  ·  M18</a:t>
             </a:r>
           </a:p>
         </p:txBody>
@@ -5427,14 +7351,6 @@
 <file path=ppt/slides/slide6.xml><?xml version="1.0" encoding="utf-8"?>
 <p:sld xmlns:a="http://schemas.openxmlformats.org/drawingml/2006/main" xmlns:p="http://schemas.openxmlformats.org/presentationml/2006/main" xmlns:r="http://schemas.openxmlformats.org/officeDocument/2006/relationships">
   <p:cSld>
-    <p:bg>
-      <p:bgPr>
-        <a:solidFill>
-          <a:srgbClr val="F8F8FA"/>
-        </a:solidFill>
-        <a:effectLst/>
-      </p:bgPr>
-    </p:bg>
     <p:spTree>
       <p:nvGrpSpPr>
         <p:cNvPr id="1" name=""/>
@@ -5444,125 +7360,20 @@
       <p:grpSpPr/>
       <p:sp>
         <p:nvSpPr>
-          <p:cNvPr id="2" name="TextBox 1"/>
-          <p:cNvSpPr txBox="1"/>
-          <p:nvPr/>
-        </p:nvSpPr>
-        <p:spPr>
-          <a:xfrm>
-            <a:off x="609600" y="279400"/>
-            <a:ext cx="2540000" cy="279400"/>
-          </a:xfrm>
-          <a:prstGeom prst="rect">
-            <a:avLst/>
-          </a:prstGeom>
-          <a:noFill/>
-        </p:spPr>
-        <p:txBody>
-          <a:bodyPr wrap="square">
-            <a:normAutofit/>
-          </a:bodyPr>
-          <a:lstStyle/>
-          <a:p>
-            <a:pPr algn="l"/>
-            <a:r>
-              <a:rPr sz="1000" b="1" i="0">
-                <a:solidFill>
-                  <a:srgbClr val="191D2E"/>
-                </a:solidFill>
-                <a:latin typeface="Arial"/>
-              </a:rPr>
-              <a:t>FKB  Campus</a:t>
-            </a:r>
-          </a:p>
-        </p:txBody>
-      </p:sp>
-      <p:sp>
-        <p:nvSpPr>
-          <p:cNvPr id="3" name="TextBox 2"/>
-          <p:cNvSpPr txBox="1"/>
-          <p:nvPr/>
-        </p:nvSpPr>
-        <p:spPr>
-          <a:xfrm>
-            <a:off x="609600" y="279400"/>
-            <a:ext cx="10972800" cy="279400"/>
-          </a:xfrm>
-          <a:prstGeom prst="rect">
-            <a:avLst/>
-          </a:prstGeom>
-          <a:noFill/>
-        </p:spPr>
-        <p:txBody>
-          <a:bodyPr wrap="square">
-            <a:normAutofit/>
-          </a:bodyPr>
-          <a:lstStyle/>
-          <a:p>
-            <a:pPr algn="r"/>
-            <a:r>
-              <a:rPr sz="900" b="0" i="0">
-                <a:solidFill>
-                  <a:srgbClr val="7B7FA0"/>
-                </a:solidFill>
-                <a:latin typeface="Courier New"/>
-              </a:rPr>
-              <a:t>II · FÜNF TRIGGER-TYPEN DIE SIE KENNEN MÜSSEN</a:t>
-            </a:r>
-          </a:p>
-        </p:txBody>
-      </p:sp>
-      <p:sp>
-        <p:nvSpPr>
-          <p:cNvPr id="4" name="TextBox 3"/>
-          <p:cNvSpPr txBox="1"/>
-          <p:nvPr/>
-        </p:nvSpPr>
-        <p:spPr>
-          <a:xfrm>
-            <a:off x="609600" y="6426200"/>
-            <a:ext cx="10972800" cy="228600"/>
-          </a:xfrm>
-          <a:prstGeom prst="rect">
-            <a:avLst/>
-          </a:prstGeom>
-          <a:noFill/>
-        </p:spPr>
-        <p:txBody>
-          <a:bodyPr wrap="square">
-            <a:normAutofit/>
-          </a:bodyPr>
-          <a:lstStyle/>
-          <a:p>
-            <a:pPr algn="r"/>
-            <a:r>
-              <a:rPr sz="900" b="0" i="0">
-                <a:solidFill>
-                  <a:srgbClr val="7B7FA0"/>
-                </a:solidFill>
-                <a:latin typeface="Courier New"/>
-              </a:rPr>
-              <a:t>06</a:t>
-            </a:r>
-          </a:p>
-        </p:txBody>
-      </p:sp>
-      <p:sp>
-        <p:nvSpPr>
-          <p:cNvPr id="5" name="Rectangle 4"/>
+          <p:cNvPr id="2" name="Rectangle 1"/>
           <p:cNvSpPr/>
           <p:nvPr/>
         </p:nvSpPr>
         <p:spPr>
           <a:xfrm>
-            <a:off x="609600" y="825500"/>
-            <a:ext cx="10972800" cy="6350"/>
+            <a:off x="0" y="0"/>
+            <a:ext cx="12188952" cy="6858000"/>
           </a:xfrm>
           <a:prstGeom prst="rect">
             <a:avLst/>
           </a:prstGeom>
           <a:solidFill>
-            <a:srgbClr val="191D2E"/>
+            <a:srgbClr val="EDEDF3"/>
           </a:solidFill>
           <a:ln>
             <a:noFill/>
@@ -5592,55 +7403,20 @@
       </p:sp>
       <p:sp>
         <p:nvSpPr>
-          <p:cNvPr id="6" name="TextBox 5"/>
-          <p:cNvSpPr txBox="1"/>
-          <p:nvPr/>
-        </p:nvSpPr>
-        <p:spPr>
-          <a:xfrm>
-            <a:off x="609600" y="920750"/>
-            <a:ext cx="10972800" cy="1778000"/>
-          </a:xfrm>
-          <a:prstGeom prst="rect">
-            <a:avLst/>
-          </a:prstGeom>
-          <a:noFill/>
-        </p:spPr>
-        <p:txBody>
-          <a:bodyPr wrap="square">
-            <a:normAutofit/>
-          </a:bodyPr>
-          <a:lstStyle/>
-          <a:p>
-            <a:pPr algn="l"/>
-            <a:r>
-              <a:rPr sz="3800" b="0" i="0">
-                <a:solidFill>
-                  <a:srgbClr val="191D2E"/>
-                </a:solidFill>
-                <a:latin typeface="Georgia"/>
-              </a:rPr>
-              <a:t>Trigger-Signale aus agree — priorisiert</a:t>
-            </a:r>
-          </a:p>
-        </p:txBody>
-      </p:sp>
-      <p:sp>
-        <p:nvSpPr>
-          <p:cNvPr id="7" name="Rectangle 6"/>
+          <p:cNvPr id="3" name="Rectangle 2"/>
           <p:cNvSpPr/>
           <p:nvPr/>
         </p:nvSpPr>
         <p:spPr>
           <a:xfrm>
-            <a:off x="609600" y="2762250"/>
-            <a:ext cx="10972800" cy="6350"/>
+            <a:off x="0" y="0"/>
+            <a:ext cx="12188952" cy="50292"/>
           </a:xfrm>
           <a:prstGeom prst="rect">
             <a:avLst/>
           </a:prstGeom>
           <a:solidFill>
-            <a:srgbClr val="E0E0E8"/>
+            <a:srgbClr val="1F2C56"/>
           </a:solidFill>
           <a:ln>
             <a:noFill/>
@@ -5670,14 +7446,14 @@
       </p:sp>
       <p:sp>
         <p:nvSpPr>
-          <p:cNvPr id="8" name="TextBox 7"/>
+          <p:cNvPr id="4" name="TextBox 3"/>
           <p:cNvSpPr txBox="1"/>
           <p:nvPr/>
         </p:nvSpPr>
         <p:spPr>
           <a:xfrm>
-            <a:off x="609600" y="2851150"/>
-            <a:ext cx="10972800" cy="3448050"/>
+            <a:off x="685800" y="109728"/>
+            <a:ext cx="10817352" cy="228600"/>
           </a:xfrm>
           <a:prstGeom prst="rect">
             <a:avLst/>
@@ -5685,103 +7461,219 @@
           <a:noFill/>
         </p:spPr>
         <p:txBody>
+          <a:bodyPr wrap="none">
+            <a:spAutoFit/>
+          </a:bodyPr>
+          <a:lstStyle/>
+          <a:p>
+            <a:pPr algn="l"/>
+            <a:r>
+              <a:rPr sz="750">
+                <a:solidFill>
+                  <a:srgbClr val="78808C"/>
+                </a:solidFill>
+                <a:latin typeface="JetBrains Mono"/>
+              </a:rPr>
+              <a:t>M18  ·  INHALT</a:t>
+            </a:r>
+          </a:p>
+        </p:txBody>
+      </p:sp>
+      <p:sp>
+        <p:nvSpPr>
+          <p:cNvPr id="5" name="Rectangle 4"/>
+          <p:cNvSpPr/>
+          <p:nvPr/>
+        </p:nvSpPr>
+        <p:spPr>
+          <a:xfrm>
+            <a:off x="0" y="1234440"/>
+            <a:ext cx="12188952" cy="12700"/>
+          </a:xfrm>
+          <a:prstGeom prst="rect">
+            <a:avLst/>
+          </a:prstGeom>
+          <a:solidFill>
+            <a:srgbClr val="D8DFE4"/>
+          </a:solidFill>
+          <a:ln>
+            <a:noFill/>
+          </a:ln>
+        </p:spPr>
+        <p:style>
+          <a:lnRef idx="1">
+            <a:schemeClr val="accent1"/>
+          </a:lnRef>
+          <a:fillRef idx="3">
+            <a:schemeClr val="accent1"/>
+          </a:fillRef>
+          <a:effectRef idx="2">
+            <a:schemeClr val="accent1"/>
+          </a:effectRef>
+          <a:fontRef idx="minor">
+            <a:schemeClr val="lt1"/>
+          </a:fontRef>
+        </p:style>
+        <p:txBody>
+          <a:bodyPr rtlCol="0" anchor="ctr"/>
+          <a:lstStyle/>
+          <a:p>
+            <a:pPr algn="ctr"/>
+          </a:p>
+        </p:txBody>
+      </p:sp>
+      <p:sp>
+        <p:nvSpPr>
+          <p:cNvPr id="6" name="Rectangle 5"/>
+          <p:cNvSpPr/>
+          <p:nvPr/>
+        </p:nvSpPr>
+        <p:spPr>
+          <a:xfrm>
+            <a:off x="685800" y="502920"/>
+            <a:ext cx="36576" cy="658368"/>
+          </a:xfrm>
+          <a:prstGeom prst="rect">
+            <a:avLst/>
+          </a:prstGeom>
+          <a:solidFill>
+            <a:srgbClr val="D9C089"/>
+          </a:solidFill>
+          <a:ln>
+            <a:noFill/>
+          </a:ln>
+        </p:spPr>
+        <p:style>
+          <a:lnRef idx="1">
+            <a:schemeClr val="accent1"/>
+          </a:lnRef>
+          <a:fillRef idx="3">
+            <a:schemeClr val="accent1"/>
+          </a:fillRef>
+          <a:effectRef idx="2">
+            <a:schemeClr val="accent1"/>
+          </a:effectRef>
+          <a:fontRef idx="minor">
+            <a:schemeClr val="lt1"/>
+          </a:fontRef>
+        </p:style>
+        <p:txBody>
+          <a:bodyPr rtlCol="0" anchor="ctr"/>
+          <a:lstStyle/>
+          <a:p>
+            <a:pPr algn="ctr"/>
+          </a:p>
+        </p:txBody>
+      </p:sp>
+      <p:sp>
+        <p:nvSpPr>
+          <p:cNvPr id="7" name="TextBox 6"/>
+          <p:cNvSpPr txBox="1"/>
+          <p:nvPr/>
+        </p:nvSpPr>
+        <p:spPr>
+          <a:xfrm>
+            <a:off x="813816" y="502920"/>
+            <a:ext cx="10634472" cy="685800"/>
+          </a:xfrm>
+          <a:prstGeom prst="rect">
+            <a:avLst/>
+          </a:prstGeom>
+          <a:noFill/>
+        </p:spPr>
+        <p:txBody>
           <a:bodyPr wrap="square">
-            <a:normAutofit/>
+            <a:spAutoFit/>
           </a:bodyPr>
           <a:lstStyle/>
           <a:p>
-            <a:pPr>
-              <a:spcBef>
-                <a:spcPts val="600"/>
-              </a:spcBef>
-              <a:spcAft>
-                <a:spcPts val="600"/>
-              </a:spcAft>
-            </a:pPr>
-            <a:r>
-              <a:rPr sz="1400">
-                <a:solidFill>
-                  <a:srgbClr val="191D2E"/>
-                </a:solidFill>
-                <a:latin typeface="Georgia"/>
+            <a:pPr algn="l"/>
+            <a:r>
+              <a:rPr sz="2400" b="1" i="0">
+                <a:solidFill>
+                  <a:srgbClr val="1F2C56"/>
+                </a:solidFill>
+                <a:latin typeface="Source Serif 4"/>
               </a:rPr>
-              <a:t>–  Zinsbindungsauslauf: 6–12 Monate Vorlaufzeit → Prolongationsgespräch</a:t>
-            </a:r>
-          </a:p>
-          <a:p>
-            <a:pPr>
-              <a:spcBef>
-                <a:spcPts val="600"/>
-              </a:spcBef>
-              <a:spcAft>
-                <a:spcPts val="600"/>
-              </a:spcAft>
-            </a:pPr>
-            <a:r>
-              <a:rPr sz="1400">
-                <a:solidFill>
-                  <a:srgbClr val="191D2E"/>
-                </a:solidFill>
-                <a:latin typeface="Georgia"/>
+              <a:t>Typ 2: Ratingbasierte Trigger (aus Kreditakte / Frühwarnsystem)</a:t>
+            </a:r>
+          </a:p>
+        </p:txBody>
+      </p:sp>
+      <p:sp>
+        <p:nvSpPr>
+          <p:cNvPr id="8" name="Rectangle 7"/>
+          <p:cNvSpPr/>
+          <p:nvPr/>
+        </p:nvSpPr>
+        <p:spPr>
+          <a:xfrm>
+            <a:off x="0" y="6510528"/>
+            <a:ext cx="12188952" cy="347472"/>
+          </a:xfrm>
+          <a:prstGeom prst="rect">
+            <a:avLst/>
+          </a:prstGeom>
+          <a:solidFill>
+            <a:srgbClr val="0A1937"/>
+          </a:solidFill>
+          <a:ln>
+            <a:noFill/>
+          </a:ln>
+        </p:spPr>
+        <p:style>
+          <a:lnRef idx="1">
+            <a:schemeClr val="accent1"/>
+          </a:lnRef>
+          <a:fillRef idx="3">
+            <a:schemeClr val="accent1"/>
+          </a:fillRef>
+          <a:effectRef idx="2">
+            <a:schemeClr val="accent1"/>
+          </a:effectRef>
+          <a:fontRef idx="minor">
+            <a:schemeClr val="lt1"/>
+          </a:fontRef>
+        </p:style>
+        <p:txBody>
+          <a:bodyPr rtlCol="0" anchor="ctr"/>
+          <a:lstStyle/>
+          <a:p>
+            <a:pPr algn="ctr"/>
+          </a:p>
+        </p:txBody>
+      </p:sp>
+      <p:sp>
+        <p:nvSpPr>
+          <p:cNvPr id="9" name="TextBox 8"/>
+          <p:cNvSpPr txBox="1"/>
+          <p:nvPr/>
+        </p:nvSpPr>
+        <p:spPr>
+          <a:xfrm>
+            <a:off x="685800" y="6583680"/>
+            <a:ext cx="6490411" cy="256032"/>
+          </a:xfrm>
+          <a:prstGeom prst="rect">
+            <a:avLst/>
+          </a:prstGeom>
+          <a:noFill/>
+        </p:spPr>
+        <p:txBody>
+          <a:bodyPr wrap="none">
+            <a:spAutoFit/>
+          </a:bodyPr>
+          <a:lstStyle/>
+          <a:p>
+            <a:pPr algn="l"/>
+            <a:r>
+              <a:rPr sz="700">
+                <a:solidFill>
+                  <a:srgbClr val="A0B4D2"/>
+                </a:solidFill>
+                <a:latin typeface="JetBrains Mono"/>
               </a:rPr>
-              <a:t>–  KK-Auslastung &gt; 80 %: Sofortiger Handlungsbedarf → Kreditgespräch</a:t>
-            </a:r>
-          </a:p>
-          <a:p>
-            <a:pPr>
-              <a:spcBef>
-                <a:spcPts val="600"/>
-              </a:spcBef>
-              <a:spcAft>
-                <a:spcPts val="600"/>
-              </a:spcAft>
-            </a:pPr>
-            <a:r>
-              <a:rPr sz="1400">
-                <a:solidFill>
-                  <a:srgbClr val="191D2E"/>
-                </a:solidFill>
-                <a:latin typeface="Georgia"/>
-              </a:rPr>
-              <a:t>–  Neue Zahlungsverbindung: Kontoverbindung zu Mitbewerber → Gespräch suchen</a:t>
-            </a:r>
-          </a:p>
-          <a:p>
-            <a:pPr>
-              <a:spcBef>
-                <a:spcPts val="600"/>
-              </a:spcBef>
-              <a:spcAft>
-                <a:spcPts val="600"/>
-              </a:spcAft>
-            </a:pPr>
-            <a:r>
-              <a:rPr sz="1400">
-                <a:solidFill>
-                  <a:srgbClr val="191D2E"/>
-                </a:solidFill>
-                <a:latin typeface="Georgia"/>
-              </a:rPr>
-              <a:t>–  Jahresabschluss steht aus: Checkliste anstoßen, § 18 KWG sichern</a:t>
-            </a:r>
-          </a:p>
-          <a:p>
-            <a:pPr>
-              <a:spcBef>
-                <a:spcPts val="600"/>
-              </a:spcBef>
-              <a:spcAft>
-                <a:spcPts val="600"/>
-              </a:spcAft>
-            </a:pPr>
-            <a:r>
-              <a:rPr sz="1400">
-                <a:solidFill>
-                  <a:srgbClr val="191D2E"/>
-                </a:solidFill>
-                <a:latin typeface="Georgia"/>
-              </a:rPr>
-              <a:t>–  Umsatzeinbruch &gt; 20 %: Frühwarnsignal → proaktiv nachfragen</a:t>
+              <a:t>Benedikt Zoller Coaching  ·  FKB Campus  ·  M18</a:t>
             </a:r>
           </a:p>
         </p:txBody>
@@ -5797,14 +7689,6 @@
 <file path=ppt/slides/slide7.xml><?xml version="1.0" encoding="utf-8"?>
 <p:sld xmlns:a="http://schemas.openxmlformats.org/drawingml/2006/main" xmlns:p="http://schemas.openxmlformats.org/presentationml/2006/main" xmlns:r="http://schemas.openxmlformats.org/officeDocument/2006/relationships">
   <p:cSld>
-    <p:bg>
-      <p:bgPr>
-        <a:solidFill>
-          <a:srgbClr val="1F2B56"/>
-        </a:solidFill>
-        <a:effectLst/>
-      </p:bgPr>
-    </p:bg>
     <p:spTree>
       <p:nvGrpSpPr>
         <p:cNvPr id="1" name=""/>
@@ -5814,14 +7698,100 @@
       <p:grpSpPr/>
       <p:sp>
         <p:nvSpPr>
-          <p:cNvPr id="2" name="TextBox 1"/>
+          <p:cNvPr id="2" name="Rectangle 1"/>
+          <p:cNvSpPr/>
+          <p:nvPr/>
+        </p:nvSpPr>
+        <p:spPr>
+          <a:xfrm>
+            <a:off x="0" y="0"/>
+            <a:ext cx="12188952" cy="6858000"/>
+          </a:xfrm>
+          <a:prstGeom prst="rect">
+            <a:avLst/>
+          </a:prstGeom>
+          <a:solidFill>
+            <a:srgbClr val="EDEDF3"/>
+          </a:solidFill>
+          <a:ln>
+            <a:noFill/>
+          </a:ln>
+        </p:spPr>
+        <p:style>
+          <a:lnRef idx="1">
+            <a:schemeClr val="accent1"/>
+          </a:lnRef>
+          <a:fillRef idx="3">
+            <a:schemeClr val="accent1"/>
+          </a:fillRef>
+          <a:effectRef idx="2">
+            <a:schemeClr val="accent1"/>
+          </a:effectRef>
+          <a:fontRef idx="minor">
+            <a:schemeClr val="lt1"/>
+          </a:fontRef>
+        </p:style>
+        <p:txBody>
+          <a:bodyPr rtlCol="0" anchor="ctr"/>
+          <a:lstStyle/>
+          <a:p>
+            <a:pPr algn="ctr"/>
+          </a:p>
+        </p:txBody>
+      </p:sp>
+      <p:sp>
+        <p:nvSpPr>
+          <p:cNvPr id="3" name="Rectangle 2"/>
+          <p:cNvSpPr/>
+          <p:nvPr/>
+        </p:nvSpPr>
+        <p:spPr>
+          <a:xfrm>
+            <a:off x="0" y="0"/>
+            <a:ext cx="12188952" cy="50292"/>
+          </a:xfrm>
+          <a:prstGeom prst="rect">
+            <a:avLst/>
+          </a:prstGeom>
+          <a:solidFill>
+            <a:srgbClr val="1F2C56"/>
+          </a:solidFill>
+          <a:ln>
+            <a:noFill/>
+          </a:ln>
+        </p:spPr>
+        <p:style>
+          <a:lnRef idx="1">
+            <a:schemeClr val="accent1"/>
+          </a:lnRef>
+          <a:fillRef idx="3">
+            <a:schemeClr val="accent1"/>
+          </a:fillRef>
+          <a:effectRef idx="2">
+            <a:schemeClr val="accent1"/>
+          </a:effectRef>
+          <a:fontRef idx="minor">
+            <a:schemeClr val="lt1"/>
+          </a:fontRef>
+        </p:style>
+        <p:txBody>
+          <a:bodyPr rtlCol="0" anchor="ctr"/>
+          <a:lstStyle/>
+          <a:p>
+            <a:pPr algn="ctr"/>
+          </a:p>
+        </p:txBody>
+      </p:sp>
+      <p:sp>
+        <p:nvSpPr>
+          <p:cNvPr id="4" name="TextBox 3"/>
           <p:cNvSpPr txBox="1"/>
           <p:nvPr/>
         </p:nvSpPr>
         <p:spPr>
           <a:xfrm>
-            <a:off x="609600" y="279400"/>
-            <a:ext cx="2540000" cy="279400"/>
+            <a:off x="685800" y="109728"/>
+            <a:ext cx="10817352" cy="228600"/>
           </a:xfrm>
           <a:prstGeom prst="rect">
             <a:avLst/>
@@ -5829,34 +7799,278 @@
           <a:noFill/>
         </p:spPr>
         <p:txBody>
+          <a:bodyPr wrap="none">
+            <a:spAutoFit/>
+          </a:bodyPr>
+          <a:lstStyle/>
+          <a:p>
+            <a:pPr algn="l"/>
+            <a:r>
+              <a:rPr sz="750">
+                <a:solidFill>
+                  <a:srgbClr val="78808C"/>
+                </a:solidFill>
+                <a:latin typeface="JetBrains Mono"/>
+              </a:rPr>
+              <a:t>M18  ·  INHALT</a:t>
+            </a:r>
+          </a:p>
+        </p:txBody>
+      </p:sp>
+      <p:sp>
+        <p:nvSpPr>
+          <p:cNvPr id="5" name="Rectangle 4"/>
+          <p:cNvSpPr/>
+          <p:nvPr/>
+        </p:nvSpPr>
+        <p:spPr>
+          <a:xfrm>
+            <a:off x="0" y="1234440"/>
+            <a:ext cx="12188952" cy="12700"/>
+          </a:xfrm>
+          <a:prstGeom prst="rect">
+            <a:avLst/>
+          </a:prstGeom>
+          <a:solidFill>
+            <a:srgbClr val="D8DFE4"/>
+          </a:solidFill>
+          <a:ln>
+            <a:noFill/>
+          </a:ln>
+        </p:spPr>
+        <p:style>
+          <a:lnRef idx="1">
+            <a:schemeClr val="accent1"/>
+          </a:lnRef>
+          <a:fillRef idx="3">
+            <a:schemeClr val="accent1"/>
+          </a:fillRef>
+          <a:effectRef idx="2">
+            <a:schemeClr val="accent1"/>
+          </a:effectRef>
+          <a:fontRef idx="minor">
+            <a:schemeClr val="lt1"/>
+          </a:fontRef>
+        </p:style>
+        <p:txBody>
+          <a:bodyPr rtlCol="0" anchor="ctr"/>
+          <a:lstStyle/>
+          <a:p>
+            <a:pPr algn="ctr"/>
+          </a:p>
+        </p:txBody>
+      </p:sp>
+      <p:sp>
+        <p:nvSpPr>
+          <p:cNvPr id="6" name="Rectangle 5"/>
+          <p:cNvSpPr/>
+          <p:nvPr/>
+        </p:nvSpPr>
+        <p:spPr>
+          <a:xfrm>
+            <a:off x="685800" y="502920"/>
+            <a:ext cx="36576" cy="658368"/>
+          </a:xfrm>
+          <a:prstGeom prst="rect">
+            <a:avLst/>
+          </a:prstGeom>
+          <a:solidFill>
+            <a:srgbClr val="D9C089"/>
+          </a:solidFill>
+          <a:ln>
+            <a:noFill/>
+          </a:ln>
+        </p:spPr>
+        <p:style>
+          <a:lnRef idx="1">
+            <a:schemeClr val="accent1"/>
+          </a:lnRef>
+          <a:fillRef idx="3">
+            <a:schemeClr val="accent1"/>
+          </a:fillRef>
+          <a:effectRef idx="2">
+            <a:schemeClr val="accent1"/>
+          </a:effectRef>
+          <a:fontRef idx="minor">
+            <a:schemeClr val="lt1"/>
+          </a:fontRef>
+        </p:style>
+        <p:txBody>
+          <a:bodyPr rtlCol="0" anchor="ctr"/>
+          <a:lstStyle/>
+          <a:p>
+            <a:pPr algn="ctr"/>
+          </a:p>
+        </p:txBody>
+      </p:sp>
+      <p:sp>
+        <p:nvSpPr>
+          <p:cNvPr id="7" name="TextBox 6"/>
+          <p:cNvSpPr txBox="1"/>
+          <p:nvPr/>
+        </p:nvSpPr>
+        <p:spPr>
+          <a:xfrm>
+            <a:off x="813816" y="502920"/>
+            <a:ext cx="10634472" cy="685800"/>
+          </a:xfrm>
+          <a:prstGeom prst="rect">
+            <a:avLst/>
+          </a:prstGeom>
+          <a:noFill/>
+        </p:spPr>
+        <p:txBody>
           <a:bodyPr wrap="square">
-            <a:normAutofit/>
+            <a:spAutoFit/>
           </a:bodyPr>
           <a:lstStyle/>
           <a:p>
             <a:pPr algn="l"/>
             <a:r>
-              <a:rPr sz="1000" b="1" i="0">
-                <a:solidFill>
-                  <a:srgbClr val="F8F8FA"/>
+              <a:rPr sz="2400" b="1" i="0">
+                <a:solidFill>
+                  <a:srgbClr val="1F2C56"/>
+                </a:solidFill>
+                <a:latin typeface="Source Serif 4"/>
+              </a:rPr>
+              <a:t>Typ 3: Lebensereignisbasierte Trigger (aus CRM-Notizen, externen Quellen)</a:t>
+            </a:r>
+          </a:p>
+        </p:txBody>
+      </p:sp>
+      <p:sp>
+        <p:nvSpPr>
+          <p:cNvPr id="8" name="TextBox 7"/>
+          <p:cNvSpPr txBox="1"/>
+          <p:nvPr/>
+        </p:nvSpPr>
+        <p:spPr>
+          <a:xfrm>
+            <a:off x="685800" y="1417320"/>
+            <a:ext cx="10817352" cy="5029200"/>
+          </a:xfrm>
+          <a:prstGeom prst="rect">
+            <a:avLst/>
+          </a:prstGeom>
+          <a:noFill/>
+        </p:spPr>
+        <p:txBody>
+          <a:bodyPr wrap="square">
+            <a:spAutoFit/>
+          </a:bodyPr>
+          <a:lstStyle/>
+          <a:p>
+            <a:pPr>
+              <a:spcBef>
+                <a:spcPts val="400"/>
+              </a:spcBef>
+              <a:spcAft>
+                <a:spcPts val="200"/>
+              </a:spcAft>
+            </a:pPr>
+            <a:r>
+              <a:rPr sz="1200">
+                <a:solidFill>
+                  <a:srgbClr val="3D5466"/>
                 </a:solidFill>
                 <a:latin typeface="Arial"/>
               </a:rPr>
-              <a:t>FKB  Campus</a:t>
-            </a:r>
-          </a:p>
-        </p:txBody>
-      </p:sp>
-      <p:sp>
-        <p:nvSpPr>
-          <p:cNvPr id="3" name="TextBox 2"/>
+              <a:t>## 4.3 Datenqualität: Die Voraussetzung für alles</a:t>
+            </a:r>
+          </a:p>
+          <a:p>
+            <a:pPr>
+              <a:spcBef>
+                <a:spcPts val="400"/>
+              </a:spcBef>
+              <a:spcAft>
+                <a:spcPts val="200"/>
+              </a:spcAft>
+            </a:pPr>
+            <a:r>
+              <a:rPr sz="1200">
+                <a:solidFill>
+                  <a:srgbClr val="3D5466"/>
+                </a:solidFill>
+                <a:latin typeface="Arial"/>
+              </a:rPr>
+              <a:t>Datengetriebener Vertrieb funktioniert nur, wenn die Datenbasis stimmt. Die häufigsten Qualitätsmängel:</a:t>
+            </a:r>
+          </a:p>
+          <a:p>
+            <a:pPr>
+              <a:spcBef>
+                <a:spcPts val="400"/>
+              </a:spcBef>
+              <a:spcAft>
+                <a:spcPts val="200"/>
+              </a:spcAft>
+            </a:pPr>
+            <a:r>
+              <a:rPr sz="1200">
+                <a:solidFill>
+                  <a:srgbClr val="3D5466"/>
+                </a:solidFill>
+                <a:latin typeface="Arial"/>
+              </a:rPr>
+              <a:t>Faustregel: Daten, die älter als 18 Monate sind, ohne Update, sind für trigger-basierten Vertrieb unzuverlässig.</a:t>
+            </a:r>
+          </a:p>
+        </p:txBody>
+      </p:sp>
+      <p:sp>
+        <p:nvSpPr>
+          <p:cNvPr id="9" name="Rectangle 8"/>
+          <p:cNvSpPr/>
+          <p:nvPr/>
+        </p:nvSpPr>
+        <p:spPr>
+          <a:xfrm>
+            <a:off x="0" y="6510528"/>
+            <a:ext cx="12188952" cy="347472"/>
+          </a:xfrm>
+          <a:prstGeom prst="rect">
+            <a:avLst/>
+          </a:prstGeom>
+          <a:solidFill>
+            <a:srgbClr val="0A1937"/>
+          </a:solidFill>
+          <a:ln>
+            <a:noFill/>
+          </a:ln>
+        </p:spPr>
+        <p:style>
+          <a:lnRef idx="1">
+            <a:schemeClr val="accent1"/>
+          </a:lnRef>
+          <a:fillRef idx="3">
+            <a:schemeClr val="accent1"/>
+          </a:fillRef>
+          <a:effectRef idx="2">
+            <a:schemeClr val="accent1"/>
+          </a:effectRef>
+          <a:fontRef idx="minor">
+            <a:schemeClr val="lt1"/>
+          </a:fontRef>
+        </p:style>
+        <p:txBody>
+          <a:bodyPr rtlCol="0" anchor="ctr"/>
+          <a:lstStyle/>
+          <a:p>
+            <a:pPr algn="ctr"/>
+          </a:p>
+        </p:txBody>
+      </p:sp>
+      <p:sp>
+        <p:nvSpPr>
+          <p:cNvPr id="10" name="TextBox 9"/>
           <p:cNvSpPr txBox="1"/>
           <p:nvPr/>
         </p:nvSpPr>
         <p:spPr>
           <a:xfrm>
-            <a:off x="609600" y="279400"/>
-            <a:ext cx="10972800" cy="279400"/>
+            <a:off x="685800" y="6583680"/>
+            <a:ext cx="6490411" cy="256032"/>
           </a:xfrm>
           <a:prstGeom prst="rect">
             <a:avLst/>
@@ -5864,160 +8078,20 @@
           <a:noFill/>
         </p:spPr>
         <p:txBody>
-          <a:bodyPr wrap="square">
-            <a:normAutofit/>
+          <a:bodyPr wrap="none">
+            <a:spAutoFit/>
           </a:bodyPr>
           <a:lstStyle/>
           <a:p>
-            <a:pPr algn="r"/>
-            <a:r>
-              <a:rPr sz="900" b="0" i="0">
-                <a:solidFill>
-                  <a:srgbClr val="7B7FA0"/>
-                </a:solidFill>
-                <a:latin typeface="Courier New"/>
+            <a:pPr algn="l"/>
+            <a:r>
+              <a:rPr sz="700">
+                <a:solidFill>
+                  <a:srgbClr val="A0B4D2"/>
+                </a:solidFill>
+                <a:latin typeface="JetBrains Mono"/>
               </a:rPr>
-              <a:t>DSGVO-KONFORM ARBEITEN</a:t>
-            </a:r>
-          </a:p>
-        </p:txBody>
-      </p:sp>
-      <p:sp>
-        <p:nvSpPr>
-          <p:cNvPr id="4" name="TextBox 3"/>
-          <p:cNvSpPr txBox="1"/>
-          <p:nvPr/>
-        </p:nvSpPr>
-        <p:spPr>
-          <a:xfrm>
-            <a:off x="609600" y="6426200"/>
-            <a:ext cx="10972800" cy="228600"/>
-          </a:xfrm>
-          <a:prstGeom prst="rect">
-            <a:avLst/>
-          </a:prstGeom>
-          <a:noFill/>
-        </p:spPr>
-        <p:txBody>
-          <a:bodyPr wrap="square">
-            <a:normAutofit/>
-          </a:bodyPr>
-          <a:lstStyle/>
-          <a:p>
-            <a:pPr algn="r"/>
-            <a:r>
-              <a:rPr sz="900" b="0" i="0">
-                <a:solidFill>
-                  <a:srgbClr val="7B7FA0"/>
-                </a:solidFill>
-                <a:latin typeface="Courier New"/>
-              </a:rPr>
-              <a:t>07</a:t>
-            </a:r>
-          </a:p>
-        </p:txBody>
-      </p:sp>
-      <p:sp>
-        <p:nvSpPr>
-          <p:cNvPr id="5" name="TextBox 4"/>
-          <p:cNvSpPr txBox="1"/>
-          <p:nvPr/>
-        </p:nvSpPr>
-        <p:spPr>
-          <a:xfrm>
-            <a:off x="609600" y="635000"/>
-            <a:ext cx="5461000" cy="5461000"/>
-          </a:xfrm>
-          <a:prstGeom prst="rect">
-            <a:avLst/>
-          </a:prstGeom>
-          <a:noFill/>
-        </p:spPr>
-        <p:txBody>
-          <a:bodyPr wrap="square">
-            <a:normAutofit/>
-          </a:bodyPr>
-          <a:lstStyle/>
-          <a:p>
-            <a:pPr algn="l"/>
-            <a:r>
-              <a:rPr sz="28000" b="0" i="1">
-                <a:solidFill>
-                  <a:srgbClr val="D9BF7A"/>
-                </a:solidFill>
-                <a:latin typeface="Georgia"/>
-              </a:rPr>
-              <a:t>III</a:t>
-            </a:r>
-          </a:p>
-        </p:txBody>
-      </p:sp>
-      <p:sp>
-        <p:nvSpPr>
-          <p:cNvPr id="6" name="TextBox 5"/>
-          <p:cNvSpPr txBox="1"/>
-          <p:nvPr/>
-        </p:nvSpPr>
-        <p:spPr>
-          <a:xfrm>
-            <a:off x="6731000" y="4064000"/>
-            <a:ext cx="4851400" cy="1778000"/>
-          </a:xfrm>
-          <a:prstGeom prst="rect">
-            <a:avLst/>
-          </a:prstGeom>
-          <a:noFill/>
-        </p:spPr>
-        <p:txBody>
-          <a:bodyPr wrap="square">
-            <a:normAutofit/>
-          </a:bodyPr>
-          <a:lstStyle/>
-          <a:p>
-            <a:pPr algn="r"/>
-            <a:r>
-              <a:rPr sz="3800" b="0" i="0">
-                <a:solidFill>
-                  <a:srgbClr val="F8F8FA"/>
-                </a:solidFill>
-                <a:latin typeface="Georgia"/>
-              </a:rPr>
-              <a:t>DSGVO-konform arbeiten</a:t>
-            </a:r>
-          </a:p>
-        </p:txBody>
-      </p:sp>
-      <p:sp>
-        <p:nvSpPr>
-          <p:cNvPr id="7" name="TextBox 6"/>
-          <p:cNvSpPr txBox="1"/>
-          <p:nvPr/>
-        </p:nvSpPr>
-        <p:spPr>
-          <a:xfrm>
-            <a:off x="6731000" y="5842000"/>
-            <a:ext cx="4851400" cy="635000"/>
-          </a:xfrm>
-          <a:prstGeom prst="rect">
-            <a:avLst/>
-          </a:prstGeom>
-          <a:noFill/>
-        </p:spPr>
-        <p:txBody>
-          <a:bodyPr wrap="square">
-            <a:normAutofit/>
-          </a:bodyPr>
-          <a:lstStyle/>
-          <a:p>
-            <a:pPr algn="r"/>
-            <a:r>
-              <a:rPr sz="1400" b="0" i="1">
-                <a:solidFill>
-                  <a:srgbClr val="7B7FA0"/>
-                </a:solidFill>
-                <a:latin typeface="Georgia"/>
-              </a:rPr>
-              <a:t>Was erlaubt ist — was nicht</a:t>
+              <a:t>Benedikt Zoller Coaching  ·  FKB Campus  ·  M18</a:t>
             </a:r>
           </a:p>
         </p:txBody>
@@ -6033,14 +8107,6 @@
 <file path=ppt/slides/slide8.xml><?xml version="1.0" encoding="utf-8"?>
 <p:sld xmlns:a="http://schemas.openxmlformats.org/drawingml/2006/main" xmlns:p="http://schemas.openxmlformats.org/presentationml/2006/main" xmlns:r="http://schemas.openxmlformats.org/officeDocument/2006/relationships">
   <p:cSld>
-    <p:bg>
-      <p:bgPr>
-        <a:solidFill>
-          <a:srgbClr val="F8F8FA"/>
-        </a:solidFill>
-        <a:effectLst/>
-      </p:bgPr>
-    </p:bg>
     <p:spTree>
       <p:nvGrpSpPr>
         <p:cNvPr id="1" name=""/>
@@ -6050,125 +8116,20 @@
       <p:grpSpPr/>
       <p:sp>
         <p:nvSpPr>
-          <p:cNvPr id="2" name="TextBox 1"/>
-          <p:cNvSpPr txBox="1"/>
-          <p:nvPr/>
-        </p:nvSpPr>
-        <p:spPr>
-          <a:xfrm>
-            <a:off x="609600" y="279400"/>
-            <a:ext cx="2540000" cy="279400"/>
-          </a:xfrm>
-          <a:prstGeom prst="rect">
-            <a:avLst/>
-          </a:prstGeom>
-          <a:noFill/>
-        </p:spPr>
-        <p:txBody>
-          <a:bodyPr wrap="square">
-            <a:normAutofit/>
-          </a:bodyPr>
-          <a:lstStyle/>
-          <a:p>
-            <a:pPr algn="l"/>
-            <a:r>
-              <a:rPr sz="1000" b="1" i="0">
-                <a:solidFill>
-                  <a:srgbClr val="191D2E"/>
-                </a:solidFill>
-                <a:latin typeface="Arial"/>
-              </a:rPr>
-              <a:t>FKB  Campus</a:t>
-            </a:r>
-          </a:p>
-        </p:txBody>
-      </p:sp>
-      <p:sp>
-        <p:nvSpPr>
-          <p:cNvPr id="3" name="TextBox 2"/>
-          <p:cNvSpPr txBox="1"/>
-          <p:nvPr/>
-        </p:nvSpPr>
-        <p:spPr>
-          <a:xfrm>
-            <a:off x="609600" y="279400"/>
-            <a:ext cx="10972800" cy="279400"/>
-          </a:xfrm>
-          <a:prstGeom prst="rect">
-            <a:avLst/>
-          </a:prstGeom>
-          <a:noFill/>
-        </p:spPr>
-        <p:txBody>
-          <a:bodyPr wrap="square">
-            <a:normAutofit/>
-          </a:bodyPr>
-          <a:lstStyle/>
-          <a:p>
-            <a:pPr algn="r"/>
-            <a:r>
-              <a:rPr sz="900" b="0" i="0">
-                <a:solidFill>
-                  <a:srgbClr val="7B7FA0"/>
-                </a:solidFill>
-                <a:latin typeface="Courier New"/>
-              </a:rPr>
-              <a:t>III · DSGVO-KONFORM ARBEITEN</a:t>
-            </a:r>
-          </a:p>
-        </p:txBody>
-      </p:sp>
-      <p:sp>
-        <p:nvSpPr>
-          <p:cNvPr id="4" name="TextBox 3"/>
-          <p:cNvSpPr txBox="1"/>
-          <p:nvPr/>
-        </p:nvSpPr>
-        <p:spPr>
-          <a:xfrm>
-            <a:off x="609600" y="6426200"/>
-            <a:ext cx="10972800" cy="228600"/>
-          </a:xfrm>
-          <a:prstGeom prst="rect">
-            <a:avLst/>
-          </a:prstGeom>
-          <a:noFill/>
-        </p:spPr>
-        <p:txBody>
-          <a:bodyPr wrap="square">
-            <a:normAutofit/>
-          </a:bodyPr>
-          <a:lstStyle/>
-          <a:p>
-            <a:pPr algn="r"/>
-            <a:r>
-              <a:rPr sz="900" b="0" i="0">
-                <a:solidFill>
-                  <a:srgbClr val="7B7FA0"/>
-                </a:solidFill>
-                <a:latin typeface="Courier New"/>
-              </a:rPr>
-              <a:t>08</a:t>
-            </a:r>
-          </a:p>
-        </p:txBody>
-      </p:sp>
-      <p:sp>
-        <p:nvSpPr>
-          <p:cNvPr id="5" name="Rectangle 4"/>
+          <p:cNvPr id="2" name="Rectangle 1"/>
           <p:cNvSpPr/>
           <p:nvPr/>
         </p:nvSpPr>
         <p:spPr>
           <a:xfrm>
-            <a:off x="609600" y="825500"/>
-            <a:ext cx="10972800" cy="6350"/>
+            <a:off x="0" y="0"/>
+            <a:ext cx="12188952" cy="6858000"/>
           </a:xfrm>
           <a:prstGeom prst="rect">
             <a:avLst/>
           </a:prstGeom>
           <a:solidFill>
-            <a:srgbClr val="191D2E"/>
+            <a:srgbClr val="FFFFFF"/>
           </a:solidFill>
           <a:ln>
             <a:noFill/>
@@ -6198,55 +8159,20 @@
       </p:sp>
       <p:sp>
         <p:nvSpPr>
-          <p:cNvPr id="6" name="TextBox 5"/>
-          <p:cNvSpPr txBox="1"/>
-          <p:nvPr/>
-        </p:nvSpPr>
-        <p:spPr>
-          <a:xfrm>
-            <a:off x="609600" y="920750"/>
-            <a:ext cx="10972800" cy="1778000"/>
-          </a:xfrm>
-          <a:prstGeom prst="rect">
-            <a:avLst/>
-          </a:prstGeom>
-          <a:noFill/>
-        </p:spPr>
-        <p:txBody>
-          <a:bodyPr wrap="square">
-            <a:normAutofit/>
-          </a:bodyPr>
-          <a:lstStyle/>
-          <a:p>
-            <a:pPr algn="l"/>
-            <a:r>
-              <a:rPr sz="3800" b="0" i="0">
-                <a:solidFill>
-                  <a:srgbClr val="191D2E"/>
-                </a:solidFill>
-                <a:latin typeface="Georgia"/>
-              </a:rPr>
-              <a:t>Drei Grundsätze der datenschutzkonformen Nutzung</a:t>
-            </a:r>
-          </a:p>
-        </p:txBody>
-      </p:sp>
-      <p:sp>
-        <p:nvSpPr>
-          <p:cNvPr id="7" name="Rectangle 6"/>
+          <p:cNvPr id="3" name="Rectangle 2"/>
           <p:cNvSpPr/>
           <p:nvPr/>
         </p:nvSpPr>
         <p:spPr>
           <a:xfrm>
-            <a:off x="609600" y="2762250"/>
-            <a:ext cx="10972800" cy="6350"/>
+            <a:off x="0" y="0"/>
+            <a:ext cx="12188952" cy="50292"/>
           </a:xfrm>
           <a:prstGeom prst="rect">
             <a:avLst/>
           </a:prstGeom>
           <a:solidFill>
-            <a:srgbClr val="E0E0E8"/>
+            <a:srgbClr val="1F2C56"/>
           </a:solidFill>
           <a:ln>
             <a:noFill/>
@@ -6276,14 +8202,14 @@
       </p:sp>
       <p:sp>
         <p:nvSpPr>
-          <p:cNvPr id="8" name="TextBox 7"/>
+          <p:cNvPr id="4" name="TextBox 3"/>
           <p:cNvSpPr txBox="1"/>
           <p:nvPr/>
         </p:nvSpPr>
         <p:spPr>
           <a:xfrm>
-            <a:off x="609600" y="2851150"/>
-            <a:ext cx="10972800" cy="3448050"/>
+            <a:off x="685800" y="109728"/>
+            <a:ext cx="10817352" cy="228600"/>
           </a:xfrm>
           <a:prstGeom prst="rect">
             <a:avLst/>
@@ -6291,84 +8217,235 @@
           <a:noFill/>
         </p:spPr>
         <p:txBody>
+          <a:bodyPr wrap="none">
+            <a:spAutoFit/>
+          </a:bodyPr>
+          <a:lstStyle/>
+          <a:p>
+            <a:pPr algn="l"/>
+            <a:r>
+              <a:rPr sz="750">
+                <a:solidFill>
+                  <a:srgbClr val="78808C"/>
+                </a:solidFill>
+                <a:latin typeface="JetBrains Mono"/>
+              </a:rPr>
+              <a:t>M18  ·  SCHAUBILD</a:t>
+            </a:r>
+          </a:p>
+        </p:txBody>
+      </p:sp>
+      <p:sp>
+        <p:nvSpPr>
+          <p:cNvPr id="5" name="TextBox 4"/>
+          <p:cNvSpPr txBox="1"/>
+          <p:nvPr/>
+        </p:nvSpPr>
+        <p:spPr>
+          <a:xfrm>
+            <a:off x="685800" y="502920"/>
+            <a:ext cx="10817352" cy="594360"/>
+          </a:xfrm>
+          <a:prstGeom prst="rect">
+            <a:avLst/>
+          </a:prstGeom>
+          <a:noFill/>
+        </p:spPr>
+        <p:txBody>
           <a:bodyPr wrap="square">
-            <a:normAutofit/>
+            <a:spAutoFit/>
           </a:bodyPr>
           <a:lstStyle/>
           <a:p>
-            <a:pPr>
-              <a:spcBef>
-                <a:spcPts val="600"/>
-              </a:spcBef>
-              <a:spcAft>
-                <a:spcPts val="600"/>
-              </a:spcAft>
-            </a:pPr>
-            <a:r>
-              <a:rPr sz="1400">
-                <a:solidFill>
-                  <a:srgbClr val="191D2E"/>
-                </a:solidFill>
-                <a:latin typeface="Georgia"/>
+            <a:pPr algn="l"/>
+            <a:r>
+              <a:rPr sz="2000" b="1" i="0">
+                <a:solidFill>
+                  <a:srgbClr val="1F2C56"/>
+                </a:solidFill>
+                <a:latin typeface="Source Serif 4"/>
               </a:rPr>
-              <a:t>–  Zweckbindung: Daten nur für die Zwecke nutzen, die der Kunde kennt</a:t>
-            </a:r>
-          </a:p>
-          <a:p>
-            <a:pPr>
-              <a:spcBef>
-                <a:spcPts val="600"/>
-              </a:spcBef>
-              <a:spcAft>
-                <a:spcPts val="600"/>
-              </a:spcAft>
-            </a:pPr>
-            <a:r>
-              <a:rPr sz="1400">
-                <a:solidFill>
-                  <a:srgbClr val="191D2E"/>
-                </a:solidFill>
-                <a:latin typeface="Georgia"/>
+              <a:t>Drei Trigger-Typen im datengetriebenen Vertrieb</a:t>
+            </a:r>
+          </a:p>
+        </p:txBody>
+      </p:sp>
+      <p:sp>
+        <p:nvSpPr>
+          <p:cNvPr id="6" name="Rectangle 5"/>
+          <p:cNvSpPr/>
+          <p:nvPr/>
+        </p:nvSpPr>
+        <p:spPr>
+          <a:xfrm>
+            <a:off x="685800" y="1143000"/>
+            <a:ext cx="10817352" cy="25400"/>
+          </a:xfrm>
+          <a:prstGeom prst="rect">
+            <a:avLst/>
+          </a:prstGeom>
+          <a:solidFill>
+            <a:srgbClr val="D9C089"/>
+          </a:solidFill>
+          <a:ln>
+            <a:noFill/>
+          </a:ln>
+        </p:spPr>
+        <p:style>
+          <a:lnRef idx="1">
+            <a:schemeClr val="accent1"/>
+          </a:lnRef>
+          <a:fillRef idx="3">
+            <a:schemeClr val="accent1"/>
+          </a:fillRef>
+          <a:effectRef idx="2">
+            <a:schemeClr val="accent1"/>
+          </a:effectRef>
+          <a:fontRef idx="minor">
+            <a:schemeClr val="lt1"/>
+          </a:fontRef>
+        </p:style>
+        <p:txBody>
+          <a:bodyPr rtlCol="0" anchor="ctr"/>
+          <a:lstStyle/>
+          <a:p>
+            <a:pPr algn="ctr"/>
+          </a:p>
+        </p:txBody>
+      </p:sp>
+      <p:pic>
+        <p:nvPicPr>
+          <p:cNvPr id="7" name="Picture 6" descr="image.png"/>
+          <p:cNvPicPr>
+            <a:picLocks noChangeAspect="1"/>
+          </p:cNvPicPr>
+          <p:nvPr/>
+        </p:nvPicPr>
+        <p:blipFill>
+          <a:blip r:embed="rId2"/>
+          <a:stretch>
+            <a:fillRect/>
+          </a:stretch>
+        </p:blipFill>
+        <p:spPr>
+          <a:xfrm>
+            <a:off x="2303489" y="1325880"/>
+            <a:ext cx="7581973" cy="4937760"/>
+          </a:xfrm>
+          <a:prstGeom prst="rect">
+            <a:avLst/>
+          </a:prstGeom>
+        </p:spPr>
+      </p:pic>
+      <p:sp>
+        <p:nvSpPr>
+          <p:cNvPr id="8" name="Rectangle 7"/>
+          <p:cNvSpPr/>
+          <p:nvPr/>
+        </p:nvSpPr>
+        <p:spPr>
+          <a:xfrm>
+            <a:off x="0" y="6510528"/>
+            <a:ext cx="12188952" cy="347472"/>
+          </a:xfrm>
+          <a:prstGeom prst="rect">
+            <a:avLst/>
+          </a:prstGeom>
+          <a:solidFill>
+            <a:srgbClr val="0A1937"/>
+          </a:solidFill>
+          <a:ln>
+            <a:noFill/>
+          </a:ln>
+        </p:spPr>
+        <p:style>
+          <a:lnRef idx="1">
+            <a:schemeClr val="accent1"/>
+          </a:lnRef>
+          <a:fillRef idx="3">
+            <a:schemeClr val="accent1"/>
+          </a:fillRef>
+          <a:effectRef idx="2">
+            <a:schemeClr val="accent1"/>
+          </a:effectRef>
+          <a:fontRef idx="minor">
+            <a:schemeClr val="lt1"/>
+          </a:fontRef>
+        </p:style>
+        <p:txBody>
+          <a:bodyPr rtlCol="0" anchor="ctr"/>
+          <a:lstStyle/>
+          <a:p>
+            <a:pPr algn="ctr"/>
+          </a:p>
+        </p:txBody>
+      </p:sp>
+      <p:sp>
+        <p:nvSpPr>
+          <p:cNvPr id="9" name="TextBox 8"/>
+          <p:cNvSpPr txBox="1"/>
+          <p:nvPr/>
+        </p:nvSpPr>
+        <p:spPr>
+          <a:xfrm>
+            <a:off x="685800" y="6583680"/>
+            <a:ext cx="6490411" cy="256032"/>
+          </a:xfrm>
+          <a:prstGeom prst="rect">
+            <a:avLst/>
+          </a:prstGeom>
+          <a:noFill/>
+        </p:spPr>
+        <p:txBody>
+          <a:bodyPr wrap="none">
+            <a:spAutoFit/>
+          </a:bodyPr>
+          <a:lstStyle/>
+          <a:p>
+            <a:pPr algn="l"/>
+            <a:r>
+              <a:rPr sz="700">
+                <a:solidFill>
+                  <a:srgbClr val="A0B4D2"/>
+                </a:solidFill>
+                <a:latin typeface="JetBrains Mono"/>
               </a:rPr>
-              <a:t>–  Verhältnismäßigkeit: Nur die Daten auswerten, die wirklich relevant sind</a:t>
-            </a:r>
-          </a:p>
-          <a:p>
-            <a:pPr>
-              <a:spcBef>
-                <a:spcPts val="600"/>
-              </a:spcBef>
-              <a:spcAft>
-                <a:spcPts val="600"/>
-              </a:spcAft>
-            </a:pPr>
-            <a:r>
-              <a:rPr sz="1400">
-                <a:solidFill>
-                  <a:srgbClr val="191D2E"/>
-                </a:solidFill>
-                <a:latin typeface="Georgia"/>
+              <a:t>Benedikt Zoller Coaching  ·  FKB Campus  ·  M18</a:t>
+            </a:r>
+          </a:p>
+        </p:txBody>
+      </p:sp>
+      <p:sp>
+        <p:nvSpPr>
+          <p:cNvPr id="10" name="TextBox 9"/>
+          <p:cNvSpPr txBox="1"/>
+          <p:nvPr/>
+        </p:nvSpPr>
+        <p:spPr>
+          <a:xfrm>
+            <a:off x="7176211" y="6583680"/>
+            <a:ext cx="4326940" cy="256032"/>
+          </a:xfrm>
+          <a:prstGeom prst="rect">
+            <a:avLst/>
+          </a:prstGeom>
+          <a:noFill/>
+        </p:spPr>
+        <p:txBody>
+          <a:bodyPr wrap="none">
+            <a:spAutoFit/>
+          </a:bodyPr>
+          <a:lstStyle/>
+          <a:p>
+            <a:pPr algn="r"/>
+            <a:r>
+              <a:rPr sz="700">
+                <a:solidFill>
+                  <a:srgbClr val="A0B4D2"/>
+                </a:solidFill>
+                <a:latin typeface="JetBrains Mono"/>
               </a:rPr>
-              <a:t>–  Transparenz: Kunden können fragen, welche Daten genutzt werden</a:t>
-            </a:r>
-          </a:p>
-          <a:p>
-            <a:pPr>
-              <a:spcBef>
-                <a:spcPts val="600"/>
-              </a:spcBef>
-              <a:spcAft>
-                <a:spcPts val="600"/>
-              </a:spcAft>
-            </a:pPr>
-            <a:r>
-              <a:rPr sz="1400">
-                <a:solidFill>
-                  <a:srgbClr val="191D2E"/>
-                </a:solidFill>
-                <a:latin typeface="Georgia"/>
-              </a:rPr>
-              <a:t>–  Praxisregel: Wenn Sie unsicher sind, fragen Sie den Datenschutzbeauftragten</a:t>
+              <a:t>Schaubild</a:t>
             </a:r>
           </a:p>
         </p:txBody>
@@ -6384,14 +8461,6 @@
 <file path=ppt/slides/slide9.xml><?xml version="1.0" encoding="utf-8"?>
 <p:sld xmlns:a="http://schemas.openxmlformats.org/drawingml/2006/main" xmlns:p="http://schemas.openxmlformats.org/presentationml/2006/main" xmlns:r="http://schemas.openxmlformats.org/officeDocument/2006/relationships">
   <p:cSld>
-    <p:bg>
-      <p:bgPr>
-        <a:solidFill>
-          <a:srgbClr val="F8F8FA"/>
-        </a:solidFill>
-        <a:effectLst/>
-      </p:bgPr>
-    </p:bg>
     <p:spTree>
       <p:nvGrpSpPr>
         <p:cNvPr id="1" name=""/>
@@ -6401,125 +8470,20 @@
       <p:grpSpPr/>
       <p:sp>
         <p:nvSpPr>
-          <p:cNvPr id="2" name="TextBox 1"/>
-          <p:cNvSpPr txBox="1"/>
-          <p:nvPr/>
-        </p:nvSpPr>
-        <p:spPr>
-          <a:xfrm>
-            <a:off x="609600" y="279400"/>
-            <a:ext cx="2540000" cy="279400"/>
-          </a:xfrm>
-          <a:prstGeom prst="rect">
-            <a:avLst/>
-          </a:prstGeom>
-          <a:noFill/>
-        </p:spPr>
-        <p:txBody>
-          <a:bodyPr wrap="square">
-            <a:normAutofit/>
-          </a:bodyPr>
-          <a:lstStyle/>
-          <a:p>
-            <a:pPr algn="l"/>
-            <a:r>
-              <a:rPr sz="1000" b="1" i="0">
-                <a:solidFill>
-                  <a:srgbClr val="191D2E"/>
-                </a:solidFill>
-                <a:latin typeface="Arial"/>
-              </a:rPr>
-              <a:t>FKB  Campus</a:t>
-            </a:r>
-          </a:p>
-        </p:txBody>
-      </p:sp>
-      <p:sp>
-        <p:nvSpPr>
-          <p:cNvPr id="3" name="TextBox 2"/>
-          <p:cNvSpPr txBox="1"/>
-          <p:nvPr/>
-        </p:nvSpPr>
-        <p:spPr>
-          <a:xfrm>
-            <a:off x="609600" y="279400"/>
-            <a:ext cx="10972800" cy="279400"/>
-          </a:xfrm>
-          <a:prstGeom prst="rect">
-            <a:avLst/>
-          </a:prstGeom>
-          <a:noFill/>
-        </p:spPr>
-        <p:txBody>
-          <a:bodyPr wrap="square">
-            <a:normAutofit/>
-          </a:bodyPr>
-          <a:lstStyle/>
-          <a:p>
-            <a:pPr algn="r"/>
-            <a:r>
-              <a:rPr sz="900" b="0" i="0">
-                <a:solidFill>
-                  <a:srgbClr val="7B7FA0"/>
-                </a:solidFill>
-                <a:latin typeface="Courier New"/>
-              </a:rPr>
-              <a:t>III · DSGVO-KONFORM ARBEITEN</a:t>
-            </a:r>
-          </a:p>
-        </p:txBody>
-      </p:sp>
-      <p:sp>
-        <p:nvSpPr>
-          <p:cNvPr id="4" name="TextBox 3"/>
-          <p:cNvSpPr txBox="1"/>
-          <p:nvPr/>
-        </p:nvSpPr>
-        <p:spPr>
-          <a:xfrm>
-            <a:off x="609600" y="6426200"/>
-            <a:ext cx="10972800" cy="228600"/>
-          </a:xfrm>
-          <a:prstGeom prst="rect">
-            <a:avLst/>
-          </a:prstGeom>
-          <a:noFill/>
-        </p:spPr>
-        <p:txBody>
-          <a:bodyPr wrap="square">
-            <a:normAutofit/>
-          </a:bodyPr>
-          <a:lstStyle/>
-          <a:p>
-            <a:pPr algn="r"/>
-            <a:r>
-              <a:rPr sz="900" b="0" i="0">
-                <a:solidFill>
-                  <a:srgbClr val="7B7FA0"/>
-                </a:solidFill>
-                <a:latin typeface="Courier New"/>
-              </a:rPr>
-              <a:t>09</a:t>
-            </a:r>
-          </a:p>
-        </p:txBody>
-      </p:sp>
-      <p:sp>
-        <p:nvSpPr>
-          <p:cNvPr id="5" name="Rectangle 4"/>
+          <p:cNvPr id="2" name="Rectangle 1"/>
           <p:cNvSpPr/>
           <p:nvPr/>
         </p:nvSpPr>
         <p:spPr>
           <a:xfrm>
-            <a:off x="609600" y="825500"/>
-            <a:ext cx="10972800" cy="6350"/>
+            <a:off x="0" y="0"/>
+            <a:ext cx="12188952" cy="6858000"/>
           </a:xfrm>
           <a:prstGeom prst="rect">
             <a:avLst/>
           </a:prstGeom>
           <a:solidFill>
-            <a:srgbClr val="191D2E"/>
+            <a:srgbClr val="EDEDF3"/>
           </a:solidFill>
           <a:ln>
             <a:noFill/>
@@ -6549,55 +8513,20 @@
       </p:sp>
       <p:sp>
         <p:nvSpPr>
-          <p:cNvPr id="6" name="TextBox 5"/>
-          <p:cNvSpPr txBox="1"/>
-          <p:nvPr/>
-        </p:nvSpPr>
-        <p:spPr>
-          <a:xfrm>
-            <a:off x="609600" y="920750"/>
-            <a:ext cx="10972800" cy="1778000"/>
-          </a:xfrm>
-          <a:prstGeom prst="rect">
-            <a:avLst/>
-          </a:prstGeom>
-          <a:noFill/>
-        </p:spPr>
-        <p:txBody>
-          <a:bodyPr wrap="square">
-            <a:normAutofit/>
-          </a:bodyPr>
-          <a:lstStyle/>
-          <a:p>
-            <a:pPr algn="l"/>
-            <a:r>
-              <a:rPr sz="3800" b="0" i="0">
-                <a:solidFill>
-                  <a:srgbClr val="191D2E"/>
-                </a:solidFill>
-                <a:latin typeface="Georgia"/>
-              </a:rPr>
-              <a:t>Ihr Auftrag: Trigger-Dashboard einrichten</a:t>
-            </a:r>
-          </a:p>
-        </p:txBody>
-      </p:sp>
-      <p:sp>
-        <p:nvSpPr>
-          <p:cNvPr id="7" name="Rectangle 6"/>
+          <p:cNvPr id="3" name="Rectangle 2"/>
           <p:cNvSpPr/>
           <p:nvPr/>
         </p:nvSpPr>
         <p:spPr>
           <a:xfrm>
-            <a:off x="609600" y="2762250"/>
-            <a:ext cx="10972800" cy="6350"/>
+            <a:off x="0" y="0"/>
+            <a:ext cx="12188952" cy="50292"/>
           </a:xfrm>
           <a:prstGeom prst="rect">
             <a:avLst/>
           </a:prstGeom>
           <a:solidFill>
-            <a:srgbClr val="E0E0E8"/>
+            <a:srgbClr val="1F2C56"/>
           </a:solidFill>
           <a:ln>
             <a:noFill/>
@@ -6627,14 +8556,170 @@
       </p:sp>
       <p:sp>
         <p:nvSpPr>
+          <p:cNvPr id="4" name="TextBox 3"/>
+          <p:cNvSpPr txBox="1"/>
+          <p:nvPr/>
+        </p:nvSpPr>
+        <p:spPr>
+          <a:xfrm>
+            <a:off x="685800" y="109728"/>
+            <a:ext cx="10817352" cy="228600"/>
+          </a:xfrm>
+          <a:prstGeom prst="rect">
+            <a:avLst/>
+          </a:prstGeom>
+          <a:noFill/>
+        </p:spPr>
+        <p:txBody>
+          <a:bodyPr wrap="none">
+            <a:spAutoFit/>
+          </a:bodyPr>
+          <a:lstStyle/>
+          <a:p>
+            <a:pPr algn="l"/>
+            <a:r>
+              <a:rPr sz="750">
+                <a:solidFill>
+                  <a:srgbClr val="78808C"/>
+                </a:solidFill>
+                <a:latin typeface="JetBrains Mono"/>
+              </a:rPr>
+              <a:t>M18  ·  INHALT</a:t>
+            </a:r>
+          </a:p>
+        </p:txBody>
+      </p:sp>
+      <p:sp>
+        <p:nvSpPr>
+          <p:cNvPr id="5" name="Rectangle 4"/>
+          <p:cNvSpPr/>
+          <p:nvPr/>
+        </p:nvSpPr>
+        <p:spPr>
+          <a:xfrm>
+            <a:off x="0" y="1234440"/>
+            <a:ext cx="12188952" cy="12700"/>
+          </a:xfrm>
+          <a:prstGeom prst="rect">
+            <a:avLst/>
+          </a:prstGeom>
+          <a:solidFill>
+            <a:srgbClr val="D8DFE4"/>
+          </a:solidFill>
+          <a:ln>
+            <a:noFill/>
+          </a:ln>
+        </p:spPr>
+        <p:style>
+          <a:lnRef idx="1">
+            <a:schemeClr val="accent1"/>
+          </a:lnRef>
+          <a:fillRef idx="3">
+            <a:schemeClr val="accent1"/>
+          </a:fillRef>
+          <a:effectRef idx="2">
+            <a:schemeClr val="accent1"/>
+          </a:effectRef>
+          <a:fontRef idx="minor">
+            <a:schemeClr val="lt1"/>
+          </a:fontRef>
+        </p:style>
+        <p:txBody>
+          <a:bodyPr rtlCol="0" anchor="ctr"/>
+          <a:lstStyle/>
+          <a:p>
+            <a:pPr algn="ctr"/>
+          </a:p>
+        </p:txBody>
+      </p:sp>
+      <p:sp>
+        <p:nvSpPr>
+          <p:cNvPr id="6" name="Rectangle 5"/>
+          <p:cNvSpPr/>
+          <p:nvPr/>
+        </p:nvSpPr>
+        <p:spPr>
+          <a:xfrm>
+            <a:off x="685800" y="502920"/>
+            <a:ext cx="36576" cy="658368"/>
+          </a:xfrm>
+          <a:prstGeom prst="rect">
+            <a:avLst/>
+          </a:prstGeom>
+          <a:solidFill>
+            <a:srgbClr val="D9C089"/>
+          </a:solidFill>
+          <a:ln>
+            <a:noFill/>
+          </a:ln>
+        </p:spPr>
+        <p:style>
+          <a:lnRef idx="1">
+            <a:schemeClr val="accent1"/>
+          </a:lnRef>
+          <a:fillRef idx="3">
+            <a:schemeClr val="accent1"/>
+          </a:fillRef>
+          <a:effectRef idx="2">
+            <a:schemeClr val="accent1"/>
+          </a:effectRef>
+          <a:fontRef idx="minor">
+            <a:schemeClr val="lt1"/>
+          </a:fontRef>
+        </p:style>
+        <p:txBody>
+          <a:bodyPr rtlCol="0" anchor="ctr"/>
+          <a:lstStyle/>
+          <a:p>
+            <a:pPr algn="ctr"/>
+          </a:p>
+        </p:txBody>
+      </p:sp>
+      <p:sp>
+        <p:nvSpPr>
+          <p:cNvPr id="7" name="TextBox 6"/>
+          <p:cNvSpPr txBox="1"/>
+          <p:nvPr/>
+        </p:nvSpPr>
+        <p:spPr>
+          <a:xfrm>
+            <a:off x="813816" y="502920"/>
+            <a:ext cx="10634472" cy="685800"/>
+          </a:xfrm>
+          <a:prstGeom prst="rect">
+            <a:avLst/>
+          </a:prstGeom>
+          <a:noFill/>
+        </p:spPr>
+        <p:txBody>
+          <a:bodyPr wrap="square">
+            <a:spAutoFit/>
+          </a:bodyPr>
+          <a:lstStyle/>
+          <a:p>
+            <a:pPr algn="l"/>
+            <a:r>
+              <a:rPr sz="2400" b="1" i="0">
+                <a:solidFill>
+                  <a:srgbClr val="1F2C56"/>
+                </a:solidFill>
+                <a:latin typeface="Source Serif 4"/>
+              </a:rPr>
+              <a:t>Datenqualitäts-Audit im eigenen Bestand</a:t>
+            </a:r>
+          </a:p>
+        </p:txBody>
+      </p:sp>
+      <p:sp>
+        <p:nvSpPr>
           <p:cNvPr id="8" name="TextBox 7"/>
           <p:cNvSpPr txBox="1"/>
           <p:nvPr/>
         </p:nvSpPr>
         <p:spPr>
           <a:xfrm>
-            <a:off x="609600" y="2851150"/>
-            <a:ext cx="10972800" cy="3448050"/>
+            <a:off x="685800" y="1417320"/>
+            <a:ext cx="10817352" cy="5029200"/>
           </a:xfrm>
           <a:prstGeom prst="rect">
             <a:avLst/>
@@ -6643,83 +8728,180 @@
         </p:spPr>
         <p:txBody>
           <a:bodyPr wrap="square">
-            <a:normAutofit/>
+            <a:spAutoFit/>
           </a:bodyPr>
           <a:lstStyle/>
           <a:p>
             <a:pPr>
               <a:spcBef>
-                <a:spcPts val="600"/>
+                <a:spcPts val="400"/>
               </a:spcBef>
               <a:spcAft>
-                <a:spcPts val="600"/>
+                <a:spcPts val="200"/>
               </a:spcAft>
             </a:pPr>
             <a:r>
-              <a:rPr sz="1400">
-                <a:solidFill>
-                  <a:srgbClr val="191D2E"/>
-                </a:solidFill>
-                <a:latin typeface="Georgia"/>
+              <a:rPr sz="1200">
+                <a:solidFill>
+                  <a:srgbClr val="3D5466"/>
+                </a:solidFill>
+                <a:latin typeface="Arial"/>
               </a:rPr>
-              <a:t>–  Frühwarnbericht aus agree für Ihren Bestand abrufen</a:t>
+              <a:t>Führen Sie einmalig pro Jahr einen strukturierten Datencheck durch:</a:t>
             </a:r>
           </a:p>
           <a:p>
             <a:pPr>
               <a:spcBef>
-                <a:spcPts val="600"/>
+                <a:spcPts val="400"/>
               </a:spcBef>
               <a:spcAft>
-                <a:spcPts val="600"/>
+                <a:spcPts val="200"/>
               </a:spcAft>
             </a:pPr>
             <a:r>
-              <a:rPr sz="1400">
-                <a:solidFill>
-                  <a:srgbClr val="191D2E"/>
-                </a:solidFill>
-                <a:latin typeface="Georgia"/>
+              <a:rPr sz="1300">
+                <a:solidFill>
+                  <a:srgbClr val="3D5466"/>
+                </a:solidFill>
+                <a:latin typeface="Arial"/>
               </a:rPr>
-              <a:t>–  Fünf Kunden mit aktiven Signalen identifizieren</a:t>
+              <a:t>▸  In agree eine Bestandsliste Ihrer Firmenkunden aufrufen (Weg je nach Bankinstallation: Bestandsbetreuer-Cockpit oder Listenabfrage über agree-Auswertungskomponente – lassen Sie sich das einmalig von Ihrem IT-Koordinator zeigen, da ein standardisierter „Lückenanalyse"-Menüpunkt nicht in jeder Installation verfügbar ist). Alternativ: Export als Excel aus dem Bestandscockpit und manuelle Filterung.</a:t>
             </a:r>
           </a:p>
           <a:p>
             <a:pPr>
               <a:spcBef>
-                <a:spcPts val="600"/>
+                <a:spcPts val="400"/>
               </a:spcBef>
               <a:spcAft>
-                <a:spcPts val="600"/>
+                <a:spcPts val="200"/>
               </a:spcAft>
             </a:pPr>
             <a:r>
-              <a:rPr sz="1400">
-                <a:solidFill>
-                  <a:srgbClr val="191D2E"/>
-                </a:solidFill>
-                <a:latin typeface="Georgia"/>
+              <a:rPr sz="1300">
+                <a:solidFill>
+                  <a:srgbClr val="3D5466"/>
+                </a:solidFill>
+                <a:latin typeface="Arial"/>
               </a:rPr>
-              <a:t>–  Für jeden: Welcher Trigger? Welche Aktion? Bis wann?</a:t>
+              <a:t>▸  Für alle Kunden mit &gt; 500k Kreditvolumen prüfen: Geburtsdatum, Branche, Gesellschafterstruktur, Jahresabschluss-Datum (Arbeitsblatt B als Checkliste nutzen)</a:t>
             </a:r>
           </a:p>
           <a:p>
             <a:pPr>
               <a:spcBef>
-                <a:spcPts val="600"/>
+                <a:spcPts val="400"/>
               </a:spcBef>
               <a:spcAft>
-                <a:spcPts val="600"/>
+                <a:spcPts val="200"/>
               </a:spcAft>
             </a:pPr>
             <a:r>
-              <a:rPr sz="1400">
-                <a:solidFill>
-                  <a:srgbClr val="191D2E"/>
-                </a:solidFill>
-                <a:latin typeface="Georgia"/>
+              <a:rPr sz="1300">
+                <a:solidFill>
+                  <a:srgbClr val="3D5466"/>
+                </a:solidFill>
+                <a:latin typeface="Arial"/>
               </a:rPr>
-              <a:t>–  Terminkalender: Zwei Kontakte in dieser Woche auslösen</a:t>
+              <a:t>▸  Fehler in den nächsten drei Kundengesprächen schließen (gezielt im Gespräch erfragen)</a:t>
+            </a:r>
+          </a:p>
+          <a:p>
+            <a:pPr>
+              <a:spcBef>
+                <a:spcPts val="400"/>
+              </a:spcBef>
+              <a:spcAft>
+                <a:spcPts val="200"/>
+              </a:spcAft>
+            </a:pPr>
+            <a:r>
+              <a:rPr sz="1200">
+                <a:solidFill>
+                  <a:srgbClr val="3D5466"/>
+                </a:solidFill>
+                <a:latin typeface="Arial"/>
+              </a:rPr>
+              <a:t>## 4.4 DSGVO-konforme Datennutzung im Vertrieb</a:t>
+            </a:r>
+          </a:p>
+        </p:txBody>
+      </p:sp>
+      <p:sp>
+        <p:nvSpPr>
+          <p:cNvPr id="9" name="Rectangle 8"/>
+          <p:cNvSpPr/>
+          <p:nvPr/>
+        </p:nvSpPr>
+        <p:spPr>
+          <a:xfrm>
+            <a:off x="0" y="6510528"/>
+            <a:ext cx="12188952" cy="347472"/>
+          </a:xfrm>
+          <a:prstGeom prst="rect">
+            <a:avLst/>
+          </a:prstGeom>
+          <a:solidFill>
+            <a:srgbClr val="0A1937"/>
+          </a:solidFill>
+          <a:ln>
+            <a:noFill/>
+          </a:ln>
+        </p:spPr>
+        <p:style>
+          <a:lnRef idx="1">
+            <a:schemeClr val="accent1"/>
+          </a:lnRef>
+          <a:fillRef idx="3">
+            <a:schemeClr val="accent1"/>
+          </a:fillRef>
+          <a:effectRef idx="2">
+            <a:schemeClr val="accent1"/>
+          </a:effectRef>
+          <a:fontRef idx="minor">
+            <a:schemeClr val="lt1"/>
+          </a:fontRef>
+        </p:style>
+        <p:txBody>
+          <a:bodyPr rtlCol="0" anchor="ctr"/>
+          <a:lstStyle/>
+          <a:p>
+            <a:pPr algn="ctr"/>
+          </a:p>
+        </p:txBody>
+      </p:sp>
+      <p:sp>
+        <p:nvSpPr>
+          <p:cNvPr id="10" name="TextBox 9"/>
+          <p:cNvSpPr txBox="1"/>
+          <p:nvPr/>
+        </p:nvSpPr>
+        <p:spPr>
+          <a:xfrm>
+            <a:off x="685800" y="6583680"/>
+            <a:ext cx="6490411" cy="256032"/>
+          </a:xfrm>
+          <a:prstGeom prst="rect">
+            <a:avLst/>
+          </a:prstGeom>
+          <a:noFill/>
+        </p:spPr>
+        <p:txBody>
+          <a:bodyPr wrap="none">
+            <a:spAutoFit/>
+          </a:bodyPr>
+          <a:lstStyle/>
+          <a:p>
+            <a:pPr algn="l"/>
+            <a:r>
+              <a:rPr sz="700">
+                <a:solidFill>
+                  <a:srgbClr val="A0B4D2"/>
+                </a:solidFill>
+                <a:latin typeface="JetBrains Mono"/>
+              </a:rPr>
+              <a:t>Benedikt Zoller Coaching  ·  FKB Campus  ·  M18</a:t>
             </a:r>
           </a:p>
         </p:txBody>

--- a/public/downloads/praesentation/M18.pptx
+++ b/public/downloads/praesentation/M18.pptx
@@ -3259,7 +3259,42 @@
       </p:sp>
       <p:sp>
         <p:nvSpPr>
-          <p:cNvPr id="6" name="Rectangle 5"/>
+          <p:cNvPr id="6" name="TextBox 5"/>
+          <p:cNvSpPr txBox="1"/>
+          <p:nvPr/>
+        </p:nvSpPr>
+        <p:spPr>
+          <a:xfrm>
+            <a:off x="685800" y="3977639"/>
+            <a:ext cx="10817352" cy="731520"/>
+          </a:xfrm>
+          <a:prstGeom prst="rect">
+            <a:avLst/>
+          </a:prstGeom>
+          <a:noFill/>
+        </p:spPr>
+        <p:txBody>
+          <a:bodyPr wrap="square">
+            <a:spAutoFit/>
+          </a:bodyPr>
+          <a:lstStyle/>
+          <a:p>
+            <a:pPr algn="l"/>
+            <a:r>
+              <a:rPr sz="1900" b="0" i="1">
+                <a:solidFill>
+                  <a:srgbClr val="BECDE6"/>
+                </a:solidFill>
+                <a:latin typeface="Source Serif 4"/>
+              </a:rPr>
+              <a:t>Trigger-Signale aus agree erkennen und proaktiv nutzen</a:t>
+            </a:r>
+          </a:p>
+        </p:txBody>
+      </p:sp>
+      <p:sp>
+        <p:nvSpPr>
+          <p:cNvPr id="7" name="Rectangle 6"/>
           <p:cNvSpPr/>
           <p:nvPr/>
         </p:nvSpPr>
@@ -3302,14 +3337,14 @@
       </p:sp>
       <p:sp>
         <p:nvSpPr>
-          <p:cNvPr id="7" name="TextBox 6"/>
+          <p:cNvPr id="8" name="TextBox 7"/>
           <p:cNvSpPr txBox="1"/>
           <p:nvPr/>
         </p:nvSpPr>
         <p:spPr>
           <a:xfrm>
             <a:off x="685800" y="5193792"/>
-            <a:ext cx="5408676" cy="201168"/>
+            <a:ext cx="3605784" cy="201168"/>
           </a:xfrm>
           <a:prstGeom prst="rect">
             <a:avLst/>
@@ -3330,21 +3365,21 @@
                 </a:solidFill>
                 <a:latin typeface="JetBrains Mono"/>
               </a:rPr>
-              <a:t>KOMPETENZSTUFE</a:t>
-            </a:r>
-          </a:p>
-        </p:txBody>
-      </p:sp>
-      <p:sp>
-        <p:nvSpPr>
-          <p:cNvPr id="8" name="TextBox 7"/>
+              <a:t>KOMPETENZFELD</a:t>
+            </a:r>
+          </a:p>
+        </p:txBody>
+      </p:sp>
+      <p:sp>
+        <p:nvSpPr>
+          <p:cNvPr id="9" name="TextBox 8"/>
           <p:cNvSpPr txBox="1"/>
           <p:nvPr/>
         </p:nvSpPr>
         <p:spPr>
           <a:xfrm>
             <a:off x="685800" y="5394960"/>
-            <a:ext cx="5408676" cy="320040"/>
+            <a:ext cx="3605784" cy="320040"/>
           </a:xfrm>
           <a:prstGeom prst="rect">
             <a:avLst/>
@@ -3365,21 +3400,21 @@
                 </a:solidFill>
                 <a:latin typeface="Arial"/>
               </a:rPr>
-              <a:t>Sparring</a:t>
-            </a:r>
-          </a:p>
-        </p:txBody>
-      </p:sp>
-      <p:sp>
-        <p:nvSpPr>
-          <p:cNvPr id="9" name="TextBox 8"/>
+              <a:t>K-05 Digital &amp; Daten</a:t>
+            </a:r>
+          </a:p>
+        </p:txBody>
+      </p:sp>
+      <p:sp>
+        <p:nvSpPr>
+          <p:cNvPr id="10" name="TextBox 9"/>
           <p:cNvSpPr txBox="1"/>
           <p:nvPr/>
         </p:nvSpPr>
         <p:spPr>
           <a:xfrm>
-            <a:off x="6094476" y="5193792"/>
-            <a:ext cx="5408676" cy="201168"/>
+            <a:off x="4291584" y="5193792"/>
+            <a:ext cx="3605784" cy="201168"/>
           </a:xfrm>
           <a:prstGeom prst="rect">
             <a:avLst/>
@@ -3400,21 +3435,21 @@
                 </a:solidFill>
                 <a:latin typeface="JetBrains Mono"/>
               </a:rPr>
-              <a:t>VERSION</a:t>
-            </a:r>
-          </a:p>
-        </p:txBody>
-      </p:sp>
-      <p:sp>
-        <p:nvSpPr>
-          <p:cNvPr id="10" name="TextBox 9"/>
+              <a:t>KOMPETENZSTUFE</a:t>
+            </a:r>
+          </a:p>
+        </p:txBody>
+      </p:sp>
+      <p:sp>
+        <p:nvSpPr>
+          <p:cNvPr id="11" name="TextBox 10"/>
           <p:cNvSpPr txBox="1"/>
           <p:nvPr/>
         </p:nvSpPr>
         <p:spPr>
           <a:xfrm>
-            <a:off x="6094476" y="5394960"/>
-            <a:ext cx="5408676" cy="320040"/>
+            <a:off x="4291584" y="5394960"/>
+            <a:ext cx="3605784" cy="320040"/>
           </a:xfrm>
           <a:prstGeom prst="rect">
             <a:avLst/>
@@ -3435,6 +3470,76 @@
                 </a:solidFill>
                 <a:latin typeface="Arial"/>
               </a:rPr>
+              <a:t>Sparringspartner</a:t>
+            </a:r>
+          </a:p>
+        </p:txBody>
+      </p:sp>
+      <p:sp>
+        <p:nvSpPr>
+          <p:cNvPr id="12" name="TextBox 11"/>
+          <p:cNvSpPr txBox="1"/>
+          <p:nvPr/>
+        </p:nvSpPr>
+        <p:spPr>
+          <a:xfrm>
+            <a:off x="7897368" y="5193792"/>
+            <a:ext cx="3605784" cy="201168"/>
+          </a:xfrm>
+          <a:prstGeom prst="rect">
+            <a:avLst/>
+          </a:prstGeom>
+          <a:noFill/>
+        </p:spPr>
+        <p:txBody>
+          <a:bodyPr wrap="none">
+            <a:spAutoFit/>
+          </a:bodyPr>
+          <a:lstStyle/>
+          <a:p>
+            <a:pPr algn="l"/>
+            <a:r>
+              <a:rPr sz="700">
+                <a:solidFill>
+                  <a:srgbClr val="A0B4D2"/>
+                </a:solidFill>
+                <a:latin typeface="JetBrains Mono"/>
+              </a:rPr>
+              <a:t>VERSION</a:t>
+            </a:r>
+          </a:p>
+        </p:txBody>
+      </p:sp>
+      <p:sp>
+        <p:nvSpPr>
+          <p:cNvPr id="13" name="TextBox 12"/>
+          <p:cNvSpPr txBox="1"/>
+          <p:nvPr/>
+        </p:nvSpPr>
+        <p:spPr>
+          <a:xfrm>
+            <a:off x="7897368" y="5394960"/>
+            <a:ext cx="3605784" cy="320040"/>
+          </a:xfrm>
+          <a:prstGeom prst="rect">
+            <a:avLst/>
+          </a:prstGeom>
+          <a:noFill/>
+        </p:spPr>
+        <p:txBody>
+          <a:bodyPr wrap="square">
+            <a:spAutoFit/>
+          </a:bodyPr>
+          <a:lstStyle/>
+          <a:p>
+            <a:pPr algn="l"/>
+            <a:r>
+              <a:rPr sz="1100" b="0" i="0">
+                <a:solidFill>
+                  <a:srgbClr val="FFFFFF"/>
+                </a:solidFill>
+                <a:latin typeface="Arial"/>
+              </a:rPr>
               <a:t>v0.4</a:t>
             </a:r>
           </a:p>
@@ -3442,7 +3547,7 @@
       </p:sp>
       <p:sp>
         <p:nvSpPr>
-          <p:cNvPr id="11" name="Rectangle 10"/>
+          <p:cNvPr id="14" name="Rectangle 13"/>
           <p:cNvSpPr/>
           <p:nvPr/>
         </p:nvSpPr>
@@ -3485,7 +3590,7 @@
       </p:sp>
       <p:sp>
         <p:nvSpPr>
-          <p:cNvPr id="12" name="TextBox 11"/>
+          <p:cNvPr id="15" name="TextBox 14"/>
           <p:cNvSpPr txBox="1"/>
           <p:nvPr/>
         </p:nvSpPr>
@@ -3520,7 +3625,7 @@
       </p:sp>
       <p:sp>
         <p:nvSpPr>
-          <p:cNvPr id="13" name="TextBox 12"/>
+          <p:cNvPr id="16" name="TextBox 15"/>
           <p:cNvSpPr txBox="1"/>
           <p:nvPr/>
         </p:nvSpPr>
